--- a/deck/Career-Navigator.pptx
+++ b/deck/Career-Navigator.pptx
@@ -3861,7 +3861,7 @@
                 <a:ea typeface="Arial" pitchFamily="34" charset="-122"/>
                 <a:cs typeface="Arial" pitchFamily="34" charset="-120"/>
               </a:rPr>
-              <a:t>5–15 тысяч рублей за сессию, разово, не сопровождает три года.</a:t>
+              <a:t>$50–150 за сессию, разово, не сопровождает три года.</a:t>
             </a:r>
             <a:endParaRPr lang="en-US" sz="1400" dirty="0"/>
           </a:p>
@@ -8825,7 +8825,7 @@
                 <a:ea typeface="Arial" pitchFamily="34" charset="-122"/>
                 <a:cs typeface="Arial" pitchFamily="34" charset="-120"/>
               </a:rPr>
-              <a:t>590 ₽ / мес</a:t>
+              <a:t>$6 / мес  ·  $49 / год</a:t>
             </a:r>
             <a:endParaRPr lang="en-US" sz="1500" dirty="0"/>
           </a:p>
@@ -8867,7 +8867,7 @@
                 <a:ea typeface="Arial" pitchFamily="34" charset="-122"/>
                 <a:cs typeface="Arial" pitchFamily="34" charset="-120"/>
               </a:rPr>
-              <a:t>Спокойствие: у ребёнка есть план, и он им занимается. Дешевле одной сессии консультанта.</a:t>
+              <a:t>Спокойствие: у ребёнка есть план, и он им занимается. Дешевле одной сессии консультанта ($50–150).</a:t>
             </a:r>
             <a:endParaRPr lang="en-US" sz="1250" dirty="0"/>
           </a:p>
@@ -8997,7 +8997,7 @@
                 <a:ea typeface="Arial" pitchFamily="34" charset="-122"/>
                 <a:cs typeface="Arial" pitchFamily="34" charset="-120"/>
               </a:rPr>
-              <a:t>25 000 ₽ / год за класс</a:t>
+              <a:t>$250 / год за класс</a:t>
             </a:r>
             <a:endParaRPr lang="en-US" sz="1500" dirty="0"/>
           </a:p>
@@ -9039,7 +9039,7 @@
                 <a:ea typeface="Arial" pitchFamily="34" charset="-122"/>
                 <a:cs typeface="Arial" pitchFamily="34" charset="-120"/>
               </a:rPr>
-              <a:t>Карты всех девятиклассников, кабинет куратора, отчёт «куда смотрят наши ученики».</a:t>
+              <a:t>Около $8 на ученика. Карты всех девятиклассников, кабинет куратора, отчёт «куда смотрят наши ученики».</a:t>
             </a:r>
             <a:endParaRPr lang="en-US" sz="1250" dirty="0"/>
           </a:p>

--- a/deck/Career-Navigator.pptx
+++ b/deck/Career-Navigator.pptx
@@ -15,9 +15,10 @@
     <p:sldId id="263" r:id="rId9"/>
     <p:sldId id="264" r:id="rId10"/>
     <p:sldId id="265" r:id="rId11"/>
+    <p:sldId id="266" r:id="rId12"/>
   </p:sldIdLst>
   <p:notesMasterIdLst>
-    <p:notesMasterId r:id="rId12"/>
+    <p:notesMasterId r:id="rId13"/>
   </p:notesMasterIdLst>
   <p:sldSz cx="12192000" cy="6858000"/>
   <p:notesSz cx="6858000" cy="12192000"/>
@@ -599,7 +600,7 @@
           <a:p>
             <a:r>
               <a:rPr lang="en-US" dirty="0"/>
-              <a:t>Финал: возвращаемся к формулировке кейса. И приглашаем жюри открыть ссылку и собрать карту на себя.</a:t>
+              <a:t>Ключевой вопрос кейса — за что готовы платить. Ответ: за сопровождение, а не за тест. И начинаем со школ, потому что привлекать подростка поштучно дорого.</a:t>
             </a:r>
             <a:endParaRPr lang="en-US" dirty="0"/>
           </a:p>
@@ -623,6 +624,94 @@
             <a:fld id="{F7021451-1387-4CA6-816F-3879F97B5CBC}" type="slidenum">
               <a:rPr lang="en-US"/>
               <a:t>10</a:t>
+            </a:fld>
+            <a:endParaRPr lang="en-US"/>
+          </a:p>
+        </p:txBody>
+      </p:sp>
+    </p:spTree>
+    <p:extLst>
+      <p:ext uri="{BB962C8B-B14F-4D97-AF65-F5344CB8AC3E}">
+        <p14:creationId xmlns:p14="http://schemas.microsoft.com/office/powerpoint/2010/main" val="1024086991"/>
+      </p:ext>
+    </p:extLst>
+  </p:cSld>
+  <p:clrMapOvr>
+    <a:masterClrMapping/>
+  </p:clrMapOvr>
+</p:notes>
+</file>
+
+<file path=ppt/notesSlides/notesSlide11.xml><?xml version="1.0" encoding="utf-8"?>
+<p:notes xmlns:a="http://schemas.openxmlformats.org/drawingml/2006/main" xmlns:r="http://schemas.openxmlformats.org/officeDocument/2006/relationships" xmlns:p="http://schemas.openxmlformats.org/presentationml/2006/main">
+  <p:cSld>
+    <p:spTree>
+      <p:nvGrpSpPr>
+        <p:cNvPr id="1" name=""/>
+        <p:cNvGrpSpPr/>
+        <p:nvPr/>
+      </p:nvGrpSpPr>
+      <p:grpSpPr>
+        <a:xfrm>
+          <a:off x="0" y="0"/>
+          <a:ext cx="0" cy="0"/>
+          <a:chOff x="0" y="0"/>
+          <a:chExt cx="0" cy="0"/>
+        </a:xfrm>
+      </p:grpSpPr>
+      <p:sp>
+        <p:nvSpPr>
+          <p:cNvPr id="2" name="Slide Image Placeholder 1"/>
+          <p:cNvSpPr>
+            <a:spLocks noGrp="1" noRot="1" noChangeAspect="1"/>
+          </p:cNvSpPr>
+          <p:nvPr>
+            <p:ph type="sldImg"/>
+          </p:nvPr>
+        </p:nvSpPr>
+        <p:spPr/>
+      </p:sp>
+      <p:sp>
+        <p:nvSpPr>
+          <p:cNvPr id="3" name="Notes Placeholder 2"/>
+          <p:cNvSpPr>
+            <a:spLocks noGrp="1"/>
+          </p:cNvSpPr>
+          <p:nvPr>
+            <p:ph type="body" idx="1"/>
+          </p:nvPr>
+        </p:nvSpPr>
+        <p:spPr/>
+        <p:txBody>
+          <a:bodyPr/>
+          <a:lstStyle/>
+          <a:p>
+            <a:r>
+              <a:rPr lang="en-US" dirty="0"/>
+              <a:t>Финал: возвращаемся к формулировке кейса. И приглашаем жюри открыть ссылку и собрать карту на себя.</a:t>
+            </a:r>
+            <a:endParaRPr lang="en-US" dirty="0"/>
+          </a:p>
+        </p:txBody>
+      </p:sp>
+      <p:sp>
+        <p:nvSpPr>
+          <p:cNvPr id="4" name="Slide Number Placeholder 3"/>
+          <p:cNvSpPr>
+            <a:spLocks noGrp="1"/>
+          </p:cNvSpPr>
+          <p:nvPr>
+            <p:ph type="sldNum" sz="quarter" idx="10"/>
+          </p:nvPr>
+        </p:nvSpPr>
+        <p:spPr/>
+        <p:txBody>
+          <a:bodyPr/>
+          <a:lstStyle/>
+          <a:p>
+            <a:fld id="{F7021451-1387-4CA6-816F-3879F97B5CBC}" type="slidenum">
+              <a:rPr lang="en-US"/>
+              <a:t>11</a:t>
             </a:fld>
             <a:endParaRPr lang="en-US"/>
           </a:p>
@@ -1303,7 +1392,7 @@
           <a:p>
             <a:r>
               <a:rPr lang="en-US" dirty="0"/>
-              <a:t>Ключевой вопрос кейса — за что готовы платить. Ответ: за сопровождение, а не за тест. И начинаем со школ, потому что привлекать подростка поштучно дорого.</a:t>
+              <a:t>Рынок — три страны, потому что продукт языконезависим и проблема одинаковая. Главное: 2,7 миллиона девятиклассников каждый год, и спрос со стороны школ уже создан государством — в России профориентация обязательна с 2023 года, требование есть, а инструмента нет. Второе главное: семья девятиклассника уже тратит около 250 долларов в месяц на подготовку, наши 6 долларов — это два процента. TAM, SAM и SOM — наш собственный расчёт от числа учеников, а не чужая оценка рынка, и мы честно это подписываем.</a:t>
             </a:r>
             <a:endParaRPr lang="en-US" dirty="0"/>
           </a:p>
@@ -2127,6 +2216,858 @@
 <file path=ppt/slides/slide10.xml><?xml version="1.0" encoding="utf-8"?>
 <p:sld xmlns:a="http://schemas.openxmlformats.org/drawingml/2006/main" xmlns:r="http://schemas.openxmlformats.org/officeDocument/2006/relationships" xmlns:p="http://schemas.openxmlformats.org/presentationml/2006/main">
   <p:cSld name="Slide 10">
+    <p:spTree>
+      <p:nvGrpSpPr>
+        <p:cNvPr id="1" name=""/>
+        <p:cNvGrpSpPr/>
+        <p:nvPr/>
+      </p:nvGrpSpPr>
+      <p:grpSpPr>
+        <a:xfrm>
+          <a:off x="0" y="0"/>
+          <a:ext cx="0" cy="0"/>
+          <a:chOff x="0" y="0"/>
+          <a:chExt cx="0" cy="0"/>
+        </a:xfrm>
+      </p:grpSpPr>
+      <p:sp>
+        <p:nvSpPr>
+          <p:cNvPr id="2" name="Text 0"/>
+          <p:cNvSpPr txBox="1"/>
+          <p:nvPr/>
+        </p:nvSpPr>
+        <p:spPr>
+          <a:xfrm>
+            <a:off x="685800" y="457200"/>
+            <a:ext cx="10881360" cy="731520"/>
+          </a:xfrm>
+          <a:prstGeom prst="rect">
+            <a:avLst/>
+          </a:prstGeom>
+          <a:noFill/>
+          <a:ln/>
+        </p:spPr>
+        <p:txBody>
+          <a:bodyPr wrap="square" lIns="0" tIns="0" rIns="0" bIns="0" rtlCol="0" anchor="t"/>
+          <a:lstStyle/>
+          <a:p>
+            <a:pPr indent="0" marL="0">
+              <a:buNone/>
+            </a:pPr>
+            <a:r>
+              <a:rPr lang="en-US" sz="3100" b="1" dirty="0">
+                <a:solidFill>
+                  <a:srgbClr val="16242A"/>
+                </a:solidFill>
+                <a:latin typeface="Cambria" pitchFamily="34" charset="0"/>
+                <a:ea typeface="Cambria" pitchFamily="34" charset="-122"/>
+                <a:cs typeface="Cambria" pitchFamily="34" charset="-120"/>
+              </a:rPr>
+              <a:t>За разовый тест не платят. За сопровождение — платят.</a:t>
+            </a:r>
+            <a:endParaRPr lang="en-US" sz="3100" dirty="0"/>
+          </a:p>
+        </p:txBody>
+      </p:sp>
+      <p:sp>
+        <p:nvSpPr>
+          <p:cNvPr id="3" name="Text 1"/>
+          <p:cNvSpPr txBox="1"/>
+          <p:nvPr/>
+        </p:nvSpPr>
+        <p:spPr>
+          <a:xfrm>
+            <a:off x="685800" y="1207008"/>
+            <a:ext cx="10058400" cy="365760"/>
+          </a:xfrm>
+          <a:prstGeom prst="rect">
+            <a:avLst/>
+          </a:prstGeom>
+          <a:noFill/>
+          <a:ln/>
+        </p:spPr>
+        <p:txBody>
+          <a:bodyPr wrap="square" lIns="0" tIns="0" rIns="0" bIns="0" rtlCol="0" anchor="ctr"/>
+          <a:lstStyle/>
+          <a:p>
+            <a:pPr indent="0" marL="0">
+              <a:buNone/>
+            </a:pPr>
+            <a:r>
+              <a:rPr lang="en-US" sz="1500" dirty="0">
+                <a:solidFill>
+                  <a:srgbClr val="5A7078"/>
+                </a:solidFill>
+                <a:latin typeface="Arial" pitchFamily="34" charset="0"/>
+                <a:ea typeface="Arial" pitchFamily="34" charset="-122"/>
+                <a:cs typeface="Arial" pitchFamily="34" charset="-120"/>
+              </a:rPr>
+              <a:t>Ценность растёт три года: чем дольше ученик пользуется картой, тем она точнее. Пользуется ученик — платит взрослый.</a:t>
+            </a:r>
+            <a:endParaRPr lang="en-US" sz="1500" dirty="0"/>
+          </a:p>
+        </p:txBody>
+      </p:sp>
+      <p:sp>
+        <p:nvSpPr>
+          <p:cNvPr id="4" name="Shape 2"/>
+          <p:cNvSpPr/>
+          <p:nvPr/>
+        </p:nvSpPr>
+        <p:spPr>
+          <a:xfrm>
+            <a:off x="685800" y="1874520"/>
+            <a:ext cx="3383280" cy="2148840"/>
+          </a:xfrm>
+          <a:prstGeom prst="roundRect">
+            <a:avLst>
+              <a:gd name="adj" fmla="val 3404"/>
+            </a:avLst>
+          </a:prstGeom>
+          <a:solidFill>
+            <a:srgbClr val="F0F5F6"/>
+          </a:solidFill>
+          <a:ln w="12700">
+            <a:solidFill>
+              <a:srgbClr val="F0F5F6"/>
+            </a:solidFill>
+            <a:prstDash val="solid"/>
+          </a:ln>
+        </p:spPr>
+      </p:sp>
+      <p:sp>
+        <p:nvSpPr>
+          <p:cNvPr id="5" name="Shape 3"/>
+          <p:cNvSpPr/>
+          <p:nvPr/>
+        </p:nvSpPr>
+        <p:spPr>
+          <a:xfrm>
+            <a:off x="932688" y="2075688"/>
+            <a:ext cx="237744" cy="237744"/>
+          </a:xfrm>
+          <a:prstGeom prst="ellipse">
+            <a:avLst/>
+          </a:prstGeom>
+          <a:solidFill>
+            <a:srgbClr val="FFFFFF"/>
+          </a:solidFill>
+          <a:ln w="25400">
+            <a:solidFill>
+              <a:srgbClr val="2E9E5B"/>
+            </a:solidFill>
+            <a:prstDash val="solid"/>
+          </a:ln>
+        </p:spPr>
+      </p:sp>
+      <p:sp>
+        <p:nvSpPr>
+          <p:cNvPr id="6" name="Text 4"/>
+          <p:cNvSpPr txBox="1"/>
+          <p:nvPr/>
+        </p:nvSpPr>
+        <p:spPr>
+          <a:xfrm>
+            <a:off x="1325880" y="2029968"/>
+            <a:ext cx="2560320" cy="320040"/>
+          </a:xfrm>
+          <a:prstGeom prst="rect">
+            <a:avLst/>
+          </a:prstGeom>
+          <a:noFill/>
+          <a:ln/>
+        </p:spPr>
+        <p:txBody>
+          <a:bodyPr wrap="square" lIns="0" tIns="0" rIns="0" bIns="0" rtlCol="0" anchor="ctr"/>
+          <a:lstStyle/>
+          <a:p>
+            <a:pPr indent="0" marL="0">
+              <a:buNone/>
+            </a:pPr>
+            <a:r>
+              <a:rPr lang="en-US" sz="1700" b="1" dirty="0">
+                <a:solidFill>
+                  <a:srgbClr val="16242A"/>
+                </a:solidFill>
+                <a:latin typeface="Cambria" pitchFamily="34" charset="0"/>
+                <a:ea typeface="Cambria" pitchFamily="34" charset="-122"/>
+                <a:cs typeface="Cambria" pitchFamily="34" charset="-120"/>
+              </a:rPr>
+              <a:t>Родитель</a:t>
+            </a:r>
+            <a:endParaRPr lang="en-US" sz="1700" dirty="0"/>
+          </a:p>
+        </p:txBody>
+      </p:sp>
+      <p:sp>
+        <p:nvSpPr>
+          <p:cNvPr id="7" name="Text 5"/>
+          <p:cNvSpPr txBox="1"/>
+          <p:nvPr/>
+        </p:nvSpPr>
+        <p:spPr>
+          <a:xfrm>
+            <a:off x="1005840" y="2450592"/>
+            <a:ext cx="2743200" cy="320040"/>
+          </a:xfrm>
+          <a:prstGeom prst="rect">
+            <a:avLst/>
+          </a:prstGeom>
+          <a:noFill/>
+          <a:ln/>
+        </p:spPr>
+        <p:txBody>
+          <a:bodyPr wrap="square" lIns="0" tIns="0" rIns="0" bIns="0" rtlCol="0" anchor="ctr"/>
+          <a:lstStyle/>
+          <a:p>
+            <a:pPr indent="0" marL="0">
+              <a:buNone/>
+            </a:pPr>
+            <a:r>
+              <a:rPr lang="en-US" sz="1500" b="1" dirty="0">
+                <a:solidFill>
+                  <a:srgbClr val="2E9E5B"/>
+                </a:solidFill>
+                <a:latin typeface="Arial" pitchFamily="34" charset="0"/>
+                <a:ea typeface="Arial" pitchFamily="34" charset="-122"/>
+                <a:cs typeface="Arial" pitchFamily="34" charset="-120"/>
+              </a:rPr>
+              <a:t>$6 / мес  ·  $49 / год</a:t>
+            </a:r>
+            <a:endParaRPr lang="en-US" sz="1500" dirty="0"/>
+          </a:p>
+        </p:txBody>
+      </p:sp>
+      <p:sp>
+        <p:nvSpPr>
+          <p:cNvPr id="8" name="Text 6"/>
+          <p:cNvSpPr txBox="1"/>
+          <p:nvPr/>
+        </p:nvSpPr>
+        <p:spPr>
+          <a:xfrm>
+            <a:off x="1005840" y="2834640"/>
+            <a:ext cx="2743200" cy="1005840"/>
+          </a:xfrm>
+          <a:prstGeom prst="rect">
+            <a:avLst/>
+          </a:prstGeom>
+          <a:noFill/>
+          <a:ln/>
+        </p:spPr>
+        <p:txBody>
+          <a:bodyPr wrap="square" lIns="0" tIns="0" rIns="0" bIns="0" rtlCol="0" anchor="ctr"/>
+          <a:lstStyle/>
+          <a:p>
+            <a:pPr indent="0" marL="0">
+              <a:lnSpc>
+                <a:spcPct val="120000"/>
+              </a:lnSpc>
+              <a:buNone/>
+            </a:pPr>
+            <a:r>
+              <a:rPr lang="en-US" sz="1250" dirty="0">
+                <a:solidFill>
+                  <a:srgbClr val="5A7078"/>
+                </a:solidFill>
+                <a:latin typeface="Arial" pitchFamily="34" charset="0"/>
+                <a:ea typeface="Arial" pitchFamily="34" charset="-122"/>
+                <a:cs typeface="Arial" pitchFamily="34" charset="-120"/>
+              </a:rPr>
+              <a:t>Спокойствие: у ребёнка есть план, и он им занимается. Дешевле одной сессии консультанта ($50–150).</a:t>
+            </a:r>
+            <a:endParaRPr lang="en-US" sz="1250" dirty="0"/>
+          </a:p>
+        </p:txBody>
+      </p:sp>
+      <p:sp>
+        <p:nvSpPr>
+          <p:cNvPr id="9" name="Shape 7"/>
+          <p:cNvSpPr/>
+          <p:nvPr/>
+        </p:nvSpPr>
+        <p:spPr>
+          <a:xfrm>
+            <a:off x="4480560" y="1874520"/>
+            <a:ext cx="3383280" cy="2148840"/>
+          </a:xfrm>
+          <a:prstGeom prst="roundRect">
+            <a:avLst>
+              <a:gd name="adj" fmla="val 3404"/>
+            </a:avLst>
+          </a:prstGeom>
+          <a:solidFill>
+            <a:srgbClr val="F0F5F6"/>
+          </a:solidFill>
+          <a:ln w="12700">
+            <a:solidFill>
+              <a:srgbClr val="F0F5F6"/>
+            </a:solidFill>
+            <a:prstDash val="solid"/>
+          </a:ln>
+        </p:spPr>
+      </p:sp>
+      <p:sp>
+        <p:nvSpPr>
+          <p:cNvPr id="10" name="Shape 8"/>
+          <p:cNvSpPr/>
+          <p:nvPr/>
+        </p:nvSpPr>
+        <p:spPr>
+          <a:xfrm>
+            <a:off x="4727448" y="2075688"/>
+            <a:ext cx="237744" cy="237744"/>
+          </a:xfrm>
+          <a:prstGeom prst="ellipse">
+            <a:avLst/>
+          </a:prstGeom>
+          <a:solidFill>
+            <a:srgbClr val="FFFFFF"/>
+          </a:solidFill>
+          <a:ln w="25400">
+            <a:solidFill>
+              <a:srgbClr val="2B6BE4"/>
+            </a:solidFill>
+            <a:prstDash val="solid"/>
+          </a:ln>
+        </p:spPr>
+      </p:sp>
+      <p:sp>
+        <p:nvSpPr>
+          <p:cNvPr id="11" name="Text 9"/>
+          <p:cNvSpPr txBox="1"/>
+          <p:nvPr/>
+        </p:nvSpPr>
+        <p:spPr>
+          <a:xfrm>
+            <a:off x="5120640" y="2029968"/>
+            <a:ext cx="2560320" cy="320040"/>
+          </a:xfrm>
+          <a:prstGeom prst="rect">
+            <a:avLst/>
+          </a:prstGeom>
+          <a:noFill/>
+          <a:ln/>
+        </p:spPr>
+        <p:txBody>
+          <a:bodyPr wrap="square" lIns="0" tIns="0" rIns="0" bIns="0" rtlCol="0" anchor="ctr"/>
+          <a:lstStyle/>
+          <a:p>
+            <a:pPr indent="0" marL="0">
+              <a:buNone/>
+            </a:pPr>
+            <a:r>
+              <a:rPr lang="en-US" sz="1700" b="1" dirty="0">
+                <a:solidFill>
+                  <a:srgbClr val="16242A"/>
+                </a:solidFill>
+                <a:latin typeface="Cambria" pitchFamily="34" charset="0"/>
+                <a:ea typeface="Cambria" pitchFamily="34" charset="-122"/>
+                <a:cs typeface="Cambria" pitchFamily="34" charset="-120"/>
+              </a:rPr>
+              <a:t>Школа</a:t>
+            </a:r>
+            <a:endParaRPr lang="en-US" sz="1700" dirty="0"/>
+          </a:p>
+        </p:txBody>
+      </p:sp>
+      <p:sp>
+        <p:nvSpPr>
+          <p:cNvPr id="12" name="Text 10"/>
+          <p:cNvSpPr txBox="1"/>
+          <p:nvPr/>
+        </p:nvSpPr>
+        <p:spPr>
+          <a:xfrm>
+            <a:off x="4800600" y="2450592"/>
+            <a:ext cx="2743200" cy="320040"/>
+          </a:xfrm>
+          <a:prstGeom prst="rect">
+            <a:avLst/>
+          </a:prstGeom>
+          <a:noFill/>
+          <a:ln/>
+        </p:spPr>
+        <p:txBody>
+          <a:bodyPr wrap="square" lIns="0" tIns="0" rIns="0" bIns="0" rtlCol="0" anchor="ctr"/>
+          <a:lstStyle/>
+          <a:p>
+            <a:pPr indent="0" marL="0">
+              <a:buNone/>
+            </a:pPr>
+            <a:r>
+              <a:rPr lang="en-US" sz="1500" b="1" dirty="0">
+                <a:solidFill>
+                  <a:srgbClr val="2B6BE4"/>
+                </a:solidFill>
+                <a:latin typeface="Arial" pitchFamily="34" charset="0"/>
+                <a:ea typeface="Arial" pitchFamily="34" charset="-122"/>
+                <a:cs typeface="Arial" pitchFamily="34" charset="-120"/>
+              </a:rPr>
+              <a:t>$250 / год за класс</a:t>
+            </a:r>
+            <a:endParaRPr lang="en-US" sz="1500" dirty="0"/>
+          </a:p>
+        </p:txBody>
+      </p:sp>
+      <p:sp>
+        <p:nvSpPr>
+          <p:cNvPr id="13" name="Text 11"/>
+          <p:cNvSpPr txBox="1"/>
+          <p:nvPr/>
+        </p:nvSpPr>
+        <p:spPr>
+          <a:xfrm>
+            <a:off x="4800600" y="2834640"/>
+            <a:ext cx="2743200" cy="1005840"/>
+          </a:xfrm>
+          <a:prstGeom prst="rect">
+            <a:avLst/>
+          </a:prstGeom>
+          <a:noFill/>
+          <a:ln/>
+        </p:spPr>
+        <p:txBody>
+          <a:bodyPr wrap="square" lIns="0" tIns="0" rIns="0" bIns="0" rtlCol="0" anchor="ctr"/>
+          <a:lstStyle/>
+          <a:p>
+            <a:pPr indent="0" marL="0">
+              <a:lnSpc>
+                <a:spcPct val="120000"/>
+              </a:lnSpc>
+              <a:buNone/>
+            </a:pPr>
+            <a:r>
+              <a:rPr lang="en-US" sz="1250" dirty="0">
+                <a:solidFill>
+                  <a:srgbClr val="5A7078"/>
+                </a:solidFill>
+                <a:latin typeface="Arial" pitchFamily="34" charset="0"/>
+                <a:ea typeface="Arial" pitchFamily="34" charset="-122"/>
+                <a:cs typeface="Arial" pitchFamily="34" charset="-120"/>
+              </a:rPr>
+              <a:t>Около $8 на ученика. Карты всех девятиклассников, кабинет куратора, отчёт «куда смотрят наши ученики».</a:t>
+            </a:r>
+            <a:endParaRPr lang="en-US" sz="1250" dirty="0"/>
+          </a:p>
+        </p:txBody>
+      </p:sp>
+      <p:sp>
+        <p:nvSpPr>
+          <p:cNvPr id="14" name="Shape 12"/>
+          <p:cNvSpPr/>
+          <p:nvPr/>
+        </p:nvSpPr>
+        <p:spPr>
+          <a:xfrm>
+            <a:off x="8275320" y="1874520"/>
+            <a:ext cx="3383280" cy="2148840"/>
+          </a:xfrm>
+          <a:prstGeom prst="roundRect">
+            <a:avLst>
+              <a:gd name="adj" fmla="val 3404"/>
+            </a:avLst>
+          </a:prstGeom>
+          <a:solidFill>
+            <a:srgbClr val="F0F5F6"/>
+          </a:solidFill>
+          <a:ln w="12700">
+            <a:solidFill>
+              <a:srgbClr val="F0F5F6"/>
+            </a:solidFill>
+            <a:prstDash val="solid"/>
+          </a:ln>
+        </p:spPr>
+      </p:sp>
+      <p:sp>
+        <p:nvSpPr>
+          <p:cNvPr id="15" name="Shape 13"/>
+          <p:cNvSpPr/>
+          <p:nvPr/>
+        </p:nvSpPr>
+        <p:spPr>
+          <a:xfrm>
+            <a:off x="8522208" y="2075688"/>
+            <a:ext cx="237744" cy="237744"/>
+          </a:xfrm>
+          <a:prstGeom prst="ellipse">
+            <a:avLst/>
+          </a:prstGeom>
+          <a:solidFill>
+            <a:srgbClr val="FFFFFF"/>
+          </a:solidFill>
+          <a:ln w="25400">
+            <a:solidFill>
+              <a:srgbClr val="E08A2E"/>
+            </a:solidFill>
+            <a:prstDash val="solid"/>
+          </a:ln>
+        </p:spPr>
+      </p:sp>
+      <p:sp>
+        <p:nvSpPr>
+          <p:cNvPr id="16" name="Text 14"/>
+          <p:cNvSpPr txBox="1"/>
+          <p:nvPr/>
+        </p:nvSpPr>
+        <p:spPr>
+          <a:xfrm>
+            <a:off x="8915400" y="2029968"/>
+            <a:ext cx="2560320" cy="320040"/>
+          </a:xfrm>
+          <a:prstGeom prst="rect">
+            <a:avLst/>
+          </a:prstGeom>
+          <a:noFill/>
+          <a:ln/>
+        </p:spPr>
+        <p:txBody>
+          <a:bodyPr wrap="square" lIns="0" tIns="0" rIns="0" bIns="0" rtlCol="0" anchor="ctr"/>
+          <a:lstStyle/>
+          <a:p>
+            <a:pPr indent="0" marL="0">
+              <a:buNone/>
+            </a:pPr>
+            <a:r>
+              <a:rPr lang="en-US" sz="1700" b="1" dirty="0">
+                <a:solidFill>
+                  <a:srgbClr val="16242A"/>
+                </a:solidFill>
+                <a:latin typeface="Cambria" pitchFamily="34" charset="0"/>
+                <a:ea typeface="Cambria" pitchFamily="34" charset="-122"/>
+                <a:cs typeface="Cambria" pitchFamily="34" charset="-120"/>
+              </a:rPr>
+              <a:t>Курсы и менторы</a:t>
+            </a:r>
+            <a:endParaRPr lang="en-US" sz="1700" dirty="0"/>
+          </a:p>
+        </p:txBody>
+      </p:sp>
+      <p:sp>
+        <p:nvSpPr>
+          <p:cNvPr id="17" name="Text 15"/>
+          <p:cNvSpPr txBox="1"/>
+          <p:nvPr/>
+        </p:nvSpPr>
+        <p:spPr>
+          <a:xfrm>
+            <a:off x="8595360" y="2450592"/>
+            <a:ext cx="2743200" cy="320040"/>
+          </a:xfrm>
+          <a:prstGeom prst="rect">
+            <a:avLst/>
+          </a:prstGeom>
+          <a:noFill/>
+          <a:ln/>
+        </p:spPr>
+        <p:txBody>
+          <a:bodyPr wrap="square" lIns="0" tIns="0" rIns="0" bIns="0" rtlCol="0" anchor="ctr"/>
+          <a:lstStyle/>
+          <a:p>
+            <a:pPr indent="0" marL="0">
+              <a:buNone/>
+            </a:pPr>
+            <a:r>
+              <a:rPr lang="en-US" sz="1500" b="1" dirty="0">
+                <a:solidFill>
+                  <a:srgbClr val="E08A2E"/>
+                </a:solidFill>
+                <a:latin typeface="Arial" pitchFamily="34" charset="0"/>
+                <a:ea typeface="Arial" pitchFamily="34" charset="-122"/>
+                <a:cs typeface="Arial" pitchFamily="34" charset="-120"/>
+              </a:rPr>
+              <a:t>10–20 % с продажи</a:t>
+            </a:r>
+            <a:endParaRPr lang="en-US" sz="1500" dirty="0"/>
+          </a:p>
+        </p:txBody>
+      </p:sp>
+      <p:sp>
+        <p:nvSpPr>
+          <p:cNvPr id="18" name="Text 16"/>
+          <p:cNvSpPr txBox="1"/>
+          <p:nvPr/>
+        </p:nvSpPr>
+        <p:spPr>
+          <a:xfrm>
+            <a:off x="8595360" y="2834640"/>
+            <a:ext cx="2743200" cy="1005840"/>
+          </a:xfrm>
+          <a:prstGeom prst="rect">
+            <a:avLst/>
+          </a:prstGeom>
+          <a:noFill/>
+          <a:ln/>
+        </p:spPr>
+        <p:txBody>
+          <a:bodyPr wrap="square" lIns="0" tIns="0" rIns="0" bIns="0" rtlCol="0" anchor="ctr"/>
+          <a:lstStyle/>
+          <a:p>
+            <a:pPr indent="0" marL="0">
+              <a:lnSpc>
+                <a:spcPct val="120000"/>
+              </a:lnSpc>
+              <a:buNone/>
+            </a:pPr>
+            <a:r>
+              <a:rPr lang="en-US" sz="1250" dirty="0">
+                <a:solidFill>
+                  <a:srgbClr val="5A7078"/>
+                </a:solidFill>
+                <a:latin typeface="Arial" pitchFamily="34" charset="0"/>
+                <a:ea typeface="Arial" pitchFamily="34" charset="-122"/>
+                <a:cs typeface="Arial" pitchFamily="34" charset="-120"/>
+              </a:rPr>
+              <a:t>Место на карте: курс как станция на маршруте — ровно в момент поиска шага.</a:t>
+            </a:r>
+            <a:endParaRPr lang="en-US" sz="1250" dirty="0"/>
+          </a:p>
+        </p:txBody>
+      </p:sp>
+      <p:sp>
+        <p:nvSpPr>
+          <p:cNvPr id="19" name="Shape 17"/>
+          <p:cNvSpPr/>
+          <p:nvPr/>
+        </p:nvSpPr>
+        <p:spPr>
+          <a:xfrm>
+            <a:off x="685800" y="4206240"/>
+            <a:ext cx="5257800" cy="1005840"/>
+          </a:xfrm>
+          <a:prstGeom prst="roundRect">
+            <a:avLst>
+              <a:gd name="adj" fmla="val 7273"/>
+            </a:avLst>
+          </a:prstGeom>
+          <a:solidFill>
+            <a:srgbClr val="F0F5F6"/>
+          </a:solidFill>
+          <a:ln w="12700">
+            <a:solidFill>
+              <a:srgbClr val="F0F5F6"/>
+            </a:solidFill>
+            <a:prstDash val="solid"/>
+          </a:ln>
+        </p:spPr>
+      </p:sp>
+      <p:sp>
+        <p:nvSpPr>
+          <p:cNvPr id="20" name="Text 18"/>
+          <p:cNvSpPr txBox="1"/>
+          <p:nvPr/>
+        </p:nvSpPr>
+        <p:spPr>
+          <a:xfrm>
+            <a:off x="1005840" y="4370832"/>
+            <a:ext cx="4663440" cy="731520"/>
+          </a:xfrm>
+          <a:prstGeom prst="rect">
+            <a:avLst/>
+          </a:prstGeom>
+          <a:noFill/>
+          <a:ln/>
+        </p:spPr>
+        <p:txBody>
+          <a:bodyPr wrap="square" lIns="0" tIns="0" rIns="0" bIns="0" rtlCol="0" anchor="ctr"/>
+          <a:lstStyle/>
+          <a:p>
+            <a:pPr indent="0" marL="0">
+              <a:lnSpc>
+                <a:spcPct val="120000"/>
+              </a:lnSpc>
+              <a:buNone/>
+            </a:pPr>
+            <a:r>
+              <a:rPr lang="en-US" sz="1400" b="1" dirty="0">
+                <a:solidFill>
+                  <a:srgbClr val="0B5D6E"/>
+                </a:solidFill>
+                <a:latin typeface="Arial" pitchFamily="34" charset="0"/>
+                <a:ea typeface="Arial" pitchFamily="34" charset="-122"/>
+                <a:cs typeface="Arial" pitchFamily="34" charset="-120"/>
+              </a:rPr>
+              <a:t>Бесплатно
+</a:t>
+            </a:r>
+            <a:pPr indent="0" marL="0">
+              <a:lnSpc>
+                <a:spcPct val="120000"/>
+              </a:lnSpc>
+              <a:buNone/>
+            </a:pPr>
+            <a:r>
+              <a:rPr lang="en-US" sz="1300" dirty="0">
+                <a:solidFill>
+                  <a:srgbClr val="16242A"/>
+                </a:solidFill>
+                <a:latin typeface="Arial" pitchFamily="34" charset="0"/>
+                <a:ea typeface="Arial" pitchFamily="34" charset="-122"/>
+                <a:cs typeface="Arial" pitchFamily="34" charset="-120"/>
+              </a:rPr>
+              <a:t>разговор, карта с 3–5 линиями, «почему» и один шаг</a:t>
+            </a:r>
+            <a:endParaRPr lang="en-US" sz="1400" dirty="0"/>
+          </a:p>
+        </p:txBody>
+      </p:sp>
+      <p:sp>
+        <p:nvSpPr>
+          <p:cNvPr id="21" name="Shape 19"/>
+          <p:cNvSpPr/>
+          <p:nvPr/>
+        </p:nvSpPr>
+        <p:spPr>
+          <a:xfrm>
+            <a:off x="6263640" y="4206240"/>
+            <a:ext cx="5257800" cy="1005840"/>
+          </a:xfrm>
+          <a:prstGeom prst="roundRect">
+            <a:avLst>
+              <a:gd name="adj" fmla="val 7273"/>
+            </a:avLst>
+          </a:prstGeom>
+          <a:solidFill>
+            <a:srgbClr val="0B5D6E"/>
+          </a:solidFill>
+          <a:ln w="12700">
+            <a:solidFill>
+              <a:srgbClr val="0B5D6E"/>
+            </a:solidFill>
+            <a:prstDash val="solid"/>
+          </a:ln>
+        </p:spPr>
+      </p:sp>
+      <p:sp>
+        <p:nvSpPr>
+          <p:cNvPr id="22" name="Text 20"/>
+          <p:cNvSpPr txBox="1"/>
+          <p:nvPr/>
+        </p:nvSpPr>
+        <p:spPr>
+          <a:xfrm>
+            <a:off x="6583680" y="4370832"/>
+            <a:ext cx="4663440" cy="731520"/>
+          </a:xfrm>
+          <a:prstGeom prst="rect">
+            <a:avLst/>
+          </a:prstGeom>
+          <a:noFill/>
+          <a:ln/>
+        </p:spPr>
+        <p:txBody>
+          <a:bodyPr wrap="square" lIns="0" tIns="0" rIns="0" bIns="0" rtlCol="0" anchor="ctr"/>
+          <a:lstStyle/>
+          <a:p>
+            <a:pPr indent="0" marL="0">
+              <a:lnSpc>
+                <a:spcPct val="120000"/>
+              </a:lnSpc>
+              <a:buNone/>
+            </a:pPr>
+            <a:r>
+              <a:rPr lang="en-US" sz="1400" b="1" dirty="0">
+                <a:solidFill>
+                  <a:srgbClr val="FFFFFF"/>
+                </a:solidFill>
+                <a:latin typeface="Arial" pitchFamily="34" charset="0"/>
+                <a:ea typeface="Arial" pitchFamily="34" charset="-122"/>
+                <a:cs typeface="Arial" pitchFamily="34" charset="-120"/>
+              </a:rPr>
+              <a:t>По подписке
+</a:t>
+            </a:r>
+            <a:pPr indent="0" marL="0">
+              <a:lnSpc>
+                <a:spcPct val="120000"/>
+              </a:lnSpc>
+              <a:buNone/>
+            </a:pPr>
+            <a:r>
+              <a:rPr lang="en-US" sz="1300" dirty="0">
+                <a:solidFill>
+                  <a:srgbClr val="FFFFFF"/>
+                </a:solidFill>
+                <a:latin typeface="Arial" pitchFamily="34" charset="0"/>
+                <a:ea typeface="Arial" pitchFamily="34" charset="-122"/>
+                <a:cs typeface="Arial" pitchFamily="34" charset="-120"/>
+              </a:rPr>
+              <a:t>пересборка карты, шаг каждую четверть, skills tracking, AI-ментор, кабинет родителя</a:t>
+            </a:r>
+            <a:endParaRPr lang="en-US" sz="1400" dirty="0"/>
+          </a:p>
+        </p:txBody>
+      </p:sp>
+      <p:sp>
+        <p:nvSpPr>
+          <p:cNvPr id="23" name="Text 21"/>
+          <p:cNvSpPr txBox="1"/>
+          <p:nvPr/>
+        </p:nvSpPr>
+        <p:spPr>
+          <a:xfrm>
+            <a:off x="685800" y="5440680"/>
+            <a:ext cx="10835640" cy="640080"/>
+          </a:xfrm>
+          <a:prstGeom prst="rect">
+            <a:avLst/>
+          </a:prstGeom>
+          <a:noFill/>
+          <a:ln/>
+        </p:spPr>
+        <p:txBody>
+          <a:bodyPr wrap="square" lIns="0" tIns="0" rIns="0" bIns="0" rtlCol="0" anchor="ctr"/>
+          <a:lstStyle/>
+          <a:p>
+            <a:pPr indent="0" marL="0">
+              <a:lnSpc>
+                <a:spcPct val="120000"/>
+              </a:lnSpc>
+              <a:buNone/>
+            </a:pPr>
+            <a:r>
+              <a:rPr lang="en-US" sz="1400" b="1" dirty="0">
+                <a:solidFill>
+                  <a:srgbClr val="16242A"/>
+                </a:solidFill>
+                <a:latin typeface="Arial" pitchFamily="34" charset="0"/>
+                <a:ea typeface="Arial" pitchFamily="34" charset="-122"/>
+                <a:cs typeface="Arial" pitchFamily="34" charset="-120"/>
+              </a:rPr>
+              <a:t>Выход на рынок — через школы: </a:t>
+            </a:r>
+            <a:pPr indent="0" marL="0">
+              <a:lnSpc>
+                <a:spcPct val="120000"/>
+              </a:lnSpc>
+              <a:buNone/>
+            </a:pPr>
+            <a:r>
+              <a:rPr lang="en-US" sz="1400" dirty="0">
+                <a:solidFill>
+                  <a:srgbClr val="5A7078"/>
+                </a:solidFill>
+                <a:latin typeface="Arial" pitchFamily="34" charset="0"/>
+                <a:ea typeface="Arial" pitchFamily="34" charset="-122"/>
+                <a:cs typeface="Arial" pitchFamily="34" charset="-120"/>
+              </a:rPr>
+              <a:t>один договор даёт класс активных учеников, а их родители — естественная база для подписки. Цены — гипотезы: проверяем интервью с родителями и пилотом в школе.</a:t>
+            </a:r>
+            <a:endParaRPr lang="en-US" sz="1400" dirty="0"/>
+          </a:p>
+        </p:txBody>
+      </p:sp>
+    </p:spTree>
+  </p:cSld>
+  <p:clrMapOvr>
+    <a:masterClrMapping/>
+  </p:clrMapOvr>
+</p:sld>
+</file>
+
+<file path=ppt/slides/slide11.xml><?xml version="1.0" encoding="utf-8"?>
+<p:sld xmlns:a="http://schemas.openxmlformats.org/drawingml/2006/main" xmlns:r="http://schemas.openxmlformats.org/officeDocument/2006/relationships" xmlns:p="http://schemas.openxmlformats.org/presentationml/2006/main">
+  <p:cSld name="Slide 11">
     <p:bg>
       <p:bgPr>
         <a:solidFill>
@@ -8656,7 +9597,7 @@
                 <a:ea typeface="Cambria" pitchFamily="34" charset="-122"/>
                 <a:cs typeface="Cambria" pitchFamily="34" charset="-120"/>
               </a:rPr>
-              <a:t>За разовый тест не платят. За сопровождение — платят.</a:t>
+              <a:t>Рынок: 2,7 млн девятиклассников в год в трёх странах</a:t>
             </a:r>
             <a:endParaRPr lang="en-US" sz="3100" dirty="0"/>
           </a:p>
@@ -8695,7 +9636,7 @@
                 <a:ea typeface="Arial" pitchFamily="34" charset="-122"/>
                 <a:cs typeface="Arial" pitchFamily="34" charset="-120"/>
               </a:rPr>
-              <a:t>Ценность растёт три года: чем дольше ученик пользуется картой, тем она точнее. Пользуется ученик — платит взрослый.</a:t>
+              <a:t>Россия, Казахстан, Узбекистан. Все цифры — из открытых источников, ссылки внизу слайда</a:t>
             </a:r>
             <a:endParaRPr lang="en-US" sz="1500" dirty="0"/>
           </a:p>
@@ -8703,18 +9644,174 @@
       </p:sp>
       <p:sp>
         <p:nvSpPr>
-          <p:cNvPr id="4" name="Shape 2"/>
+          <p:cNvPr id="4" name="Text 2"/>
+          <p:cNvSpPr txBox="1"/>
+          <p:nvPr/>
+        </p:nvSpPr>
+        <p:spPr>
+          <a:xfrm>
+            <a:off x="960120" y="1737360"/>
+            <a:ext cx="2194560" cy="274320"/>
+          </a:xfrm>
+          <a:prstGeom prst="rect">
+            <a:avLst/>
+          </a:prstGeom>
+          <a:noFill/>
+          <a:ln/>
+        </p:spPr>
+        <p:txBody>
+          <a:bodyPr wrap="square" lIns="0" tIns="0" rIns="0" bIns="0" rtlCol="0" anchor="ctr"/>
+          <a:lstStyle/>
+          <a:p>
+            <a:pPr indent="0" marL="0">
+              <a:buNone/>
+            </a:pPr>
+            <a:r>
+              <a:rPr lang="en-US" sz="1150" b="1" dirty="0">
+                <a:solidFill>
+                  <a:srgbClr val="5A7078"/>
+                </a:solidFill>
+                <a:latin typeface="Arial" pitchFamily="34" charset="0"/>
+                <a:ea typeface="Arial" pitchFamily="34" charset="-122"/>
+                <a:cs typeface="Arial" pitchFamily="34" charset="-120"/>
+              </a:rPr>
+              <a:t>Страна</a:t>
+            </a:r>
+            <a:endParaRPr lang="en-US" sz="1150" dirty="0"/>
+          </a:p>
+        </p:txBody>
+      </p:sp>
+      <p:sp>
+        <p:nvSpPr>
+          <p:cNvPr id="5" name="Text 3"/>
+          <p:cNvSpPr txBox="1"/>
+          <p:nvPr/>
+        </p:nvSpPr>
+        <p:spPr>
+          <a:xfrm>
+            <a:off x="3246120" y="1737360"/>
+            <a:ext cx="2103120" cy="274320"/>
+          </a:xfrm>
+          <a:prstGeom prst="rect">
+            <a:avLst/>
+          </a:prstGeom>
+          <a:noFill/>
+          <a:ln/>
+        </p:spPr>
+        <p:txBody>
+          <a:bodyPr wrap="square" lIns="0" tIns="0" rIns="0" bIns="0" rtlCol="0" anchor="ctr"/>
+          <a:lstStyle/>
+          <a:p>
+            <a:pPr indent="0" marL="0">
+              <a:buNone/>
+            </a:pPr>
+            <a:r>
+              <a:rPr lang="en-US" sz="1150" b="1" dirty="0">
+                <a:solidFill>
+                  <a:srgbClr val="5A7078"/>
+                </a:solidFill>
+                <a:latin typeface="Arial" pitchFamily="34" charset="0"/>
+                <a:ea typeface="Arial" pitchFamily="34" charset="-122"/>
+                <a:cs typeface="Arial" pitchFamily="34" charset="-120"/>
+              </a:rPr>
+              <a:t>9 класс в год</a:t>
+            </a:r>
+            <a:endParaRPr lang="en-US" sz="1150" dirty="0"/>
+          </a:p>
+        </p:txBody>
+      </p:sp>
+      <p:sp>
+        <p:nvSpPr>
+          <p:cNvPr id="6" name="Text 4"/>
+          <p:cNvSpPr txBox="1"/>
+          <p:nvPr/>
+        </p:nvSpPr>
+        <p:spPr>
+          <a:xfrm>
+            <a:off x="5440680" y="1737360"/>
+            <a:ext cx="1737360" cy="274320"/>
+          </a:xfrm>
+          <a:prstGeom prst="rect">
+            <a:avLst/>
+          </a:prstGeom>
+          <a:noFill/>
+          <a:ln/>
+        </p:spPr>
+        <p:txBody>
+          <a:bodyPr wrap="square" lIns="0" tIns="0" rIns="0" bIns="0" rtlCol="0" anchor="ctr"/>
+          <a:lstStyle/>
+          <a:p>
+            <a:pPr indent="0" marL="0">
+              <a:buNone/>
+            </a:pPr>
+            <a:r>
+              <a:rPr lang="en-US" sz="1150" b="1" dirty="0">
+                <a:solidFill>
+                  <a:srgbClr val="5A7078"/>
+                </a:solidFill>
+                <a:latin typeface="Arial" pitchFamily="34" charset="0"/>
+                <a:ea typeface="Arial" pitchFamily="34" charset="-122"/>
+                <a:cs typeface="Arial" pitchFamily="34" charset="-120"/>
+              </a:rPr>
+              <a:t>Школ</a:t>
+            </a:r>
+            <a:endParaRPr lang="en-US" sz="1150" dirty="0"/>
+          </a:p>
+        </p:txBody>
+      </p:sp>
+      <p:sp>
+        <p:nvSpPr>
+          <p:cNvPr id="7" name="Text 5"/>
+          <p:cNvSpPr txBox="1"/>
+          <p:nvPr/>
+        </p:nvSpPr>
+        <p:spPr>
+          <a:xfrm>
+            <a:off x="7269480" y="1737360"/>
+            <a:ext cx="4023360" cy="274320"/>
+          </a:xfrm>
+          <a:prstGeom prst="rect">
+            <a:avLst/>
+          </a:prstGeom>
+          <a:noFill/>
+          <a:ln/>
+        </p:spPr>
+        <p:txBody>
+          <a:bodyPr wrap="square" lIns="0" tIns="0" rIns="0" bIns="0" rtlCol="0" anchor="ctr"/>
+          <a:lstStyle/>
+          <a:p>
+            <a:pPr indent="0" marL="0">
+              <a:buNone/>
+            </a:pPr>
+            <a:r>
+              <a:rPr lang="en-US" sz="1150" b="1" dirty="0">
+                <a:solidFill>
+                  <a:srgbClr val="5A7078"/>
+                </a:solidFill>
+                <a:latin typeface="Arial" pitchFamily="34" charset="0"/>
+                <a:ea typeface="Arial" pitchFamily="34" charset="-122"/>
+                <a:cs typeface="Arial" pitchFamily="34" charset="-120"/>
+              </a:rPr>
+              <a:t>Рынок EdTech</a:t>
+            </a:r>
+            <a:endParaRPr lang="en-US" sz="1150" dirty="0"/>
+          </a:p>
+        </p:txBody>
+      </p:sp>
+      <p:sp>
+        <p:nvSpPr>
+          <p:cNvPr id="8" name="Shape 6"/>
           <p:cNvSpPr/>
           <p:nvPr/>
         </p:nvSpPr>
         <p:spPr>
           <a:xfrm>
-            <a:off x="685800" y="1874520"/>
-            <a:ext cx="3383280" cy="2148840"/>
+            <a:off x="685800" y="2011680"/>
+            <a:ext cx="10835640" cy="402336"/>
           </a:xfrm>
           <a:prstGeom prst="roundRect">
             <a:avLst>
-              <a:gd name="adj" fmla="val 3404"/>
+              <a:gd name="adj" fmla="val 18182"/>
             </a:avLst>
           </a:prstGeom>
           <a:solidFill>
@@ -8730,163 +9827,330 @@
       </p:sp>
       <p:sp>
         <p:nvSpPr>
-          <p:cNvPr id="5" name="Shape 3"/>
+          <p:cNvPr id="9" name="Text 7"/>
+          <p:cNvSpPr txBox="1"/>
+          <p:nvPr/>
+        </p:nvSpPr>
+        <p:spPr>
+          <a:xfrm>
+            <a:off x="960120" y="2084832"/>
+            <a:ext cx="2194560" cy="274320"/>
+          </a:xfrm>
+          <a:prstGeom prst="rect">
+            <a:avLst/>
+          </a:prstGeom>
+          <a:noFill/>
+          <a:ln/>
+        </p:spPr>
+        <p:txBody>
+          <a:bodyPr wrap="square" lIns="0" tIns="0" rIns="0" bIns="0" rtlCol="0" anchor="ctr"/>
+          <a:lstStyle/>
+          <a:p>
+            <a:pPr indent="0" marL="0">
+              <a:buNone/>
+            </a:pPr>
+            <a:r>
+              <a:rPr lang="en-US" sz="1250" b="1" dirty="0">
+                <a:solidFill>
+                  <a:srgbClr val="16242A"/>
+                </a:solidFill>
+                <a:latin typeface="Arial" pitchFamily="34" charset="0"/>
+                <a:ea typeface="Arial" pitchFamily="34" charset="-122"/>
+                <a:cs typeface="Arial" pitchFamily="34" charset="-120"/>
+              </a:rPr>
+              <a:t>Россия</a:t>
+            </a:r>
+            <a:endParaRPr lang="en-US" sz="1250" dirty="0"/>
+          </a:p>
+        </p:txBody>
+      </p:sp>
+      <p:sp>
+        <p:nvSpPr>
+          <p:cNvPr id="10" name="Text 8"/>
+          <p:cNvSpPr txBox="1"/>
+          <p:nvPr/>
+        </p:nvSpPr>
+        <p:spPr>
+          <a:xfrm>
+            <a:off x="3246120" y="2084832"/>
+            <a:ext cx="2103120" cy="274320"/>
+          </a:xfrm>
+          <a:prstGeom prst="rect">
+            <a:avLst/>
+          </a:prstGeom>
+          <a:noFill/>
+          <a:ln/>
+        </p:spPr>
+        <p:txBody>
+          <a:bodyPr wrap="square" lIns="0" tIns="0" rIns="0" bIns="0" rtlCol="0" anchor="ctr"/>
+          <a:lstStyle/>
+          <a:p>
+            <a:pPr indent="0" marL="0">
+              <a:buNone/>
+            </a:pPr>
+            <a:r>
+              <a:rPr lang="en-US" sz="1250" dirty="0">
+                <a:solidFill>
+                  <a:srgbClr val="16242A"/>
+                </a:solidFill>
+                <a:latin typeface="Arial" pitchFamily="34" charset="0"/>
+                <a:ea typeface="Arial" pitchFamily="34" charset="-122"/>
+                <a:cs typeface="Arial" pitchFamily="34" charset="-120"/>
+              </a:rPr>
+              <a:t>1,71 млн</a:t>
+            </a:r>
+            <a:endParaRPr lang="en-US" sz="1250" dirty="0"/>
+          </a:p>
+        </p:txBody>
+      </p:sp>
+      <p:sp>
+        <p:nvSpPr>
+          <p:cNvPr id="11" name="Text 9"/>
+          <p:cNvSpPr txBox="1"/>
+          <p:nvPr/>
+        </p:nvSpPr>
+        <p:spPr>
+          <a:xfrm>
+            <a:off x="5440680" y="2084832"/>
+            <a:ext cx="1737360" cy="274320"/>
+          </a:xfrm>
+          <a:prstGeom prst="rect">
+            <a:avLst/>
+          </a:prstGeom>
+          <a:noFill/>
+          <a:ln/>
+        </p:spPr>
+        <p:txBody>
+          <a:bodyPr wrap="square" lIns="0" tIns="0" rIns="0" bIns="0" rtlCol="0" anchor="ctr"/>
+          <a:lstStyle/>
+          <a:p>
+            <a:pPr indent="0" marL="0">
+              <a:buNone/>
+            </a:pPr>
+            <a:r>
+              <a:rPr lang="en-US" sz="1250" dirty="0">
+                <a:solidFill>
+                  <a:srgbClr val="16242A"/>
+                </a:solidFill>
+                <a:latin typeface="Arial" pitchFamily="34" charset="0"/>
+                <a:ea typeface="Arial" pitchFamily="34" charset="-122"/>
+                <a:cs typeface="Arial" pitchFamily="34" charset="-120"/>
+              </a:rPr>
+              <a:t>~40 000</a:t>
+            </a:r>
+            <a:endParaRPr lang="en-US" sz="1250" dirty="0"/>
+          </a:p>
+        </p:txBody>
+      </p:sp>
+      <p:sp>
+        <p:nvSpPr>
+          <p:cNvPr id="12" name="Text 10"/>
+          <p:cNvSpPr txBox="1"/>
+          <p:nvPr/>
+        </p:nvSpPr>
+        <p:spPr>
+          <a:xfrm>
+            <a:off x="7269480" y="2084832"/>
+            <a:ext cx="4023360" cy="274320"/>
+          </a:xfrm>
+          <a:prstGeom prst="rect">
+            <a:avLst/>
+          </a:prstGeom>
+          <a:noFill/>
+          <a:ln/>
+        </p:spPr>
+        <p:txBody>
+          <a:bodyPr wrap="square" lIns="0" tIns="0" rIns="0" bIns="0" rtlCol="0" anchor="ctr"/>
+          <a:lstStyle/>
+          <a:p>
+            <a:pPr indent="0" marL="0">
+              <a:buNone/>
+            </a:pPr>
+            <a:r>
+              <a:rPr lang="en-US" sz="1250" dirty="0">
+                <a:solidFill>
+                  <a:srgbClr val="16242A"/>
+                </a:solidFill>
+                <a:latin typeface="Arial" pitchFamily="34" charset="0"/>
+                <a:ea typeface="Arial" pitchFamily="34" charset="-122"/>
+                <a:cs typeface="Arial" pitchFamily="34" charset="-120"/>
+              </a:rPr>
+              <a:t>154 млрд ₽ в 2025-м, +12 % за год</a:t>
+            </a:r>
+            <a:endParaRPr lang="en-US" sz="1250" dirty="0"/>
+          </a:p>
+        </p:txBody>
+      </p:sp>
+      <p:sp>
+        <p:nvSpPr>
+          <p:cNvPr id="13" name="Text 11"/>
+          <p:cNvSpPr txBox="1"/>
+          <p:nvPr/>
+        </p:nvSpPr>
+        <p:spPr>
+          <a:xfrm>
+            <a:off x="960120" y="2505456"/>
+            <a:ext cx="2194560" cy="274320"/>
+          </a:xfrm>
+          <a:prstGeom prst="rect">
+            <a:avLst/>
+          </a:prstGeom>
+          <a:noFill/>
+          <a:ln/>
+        </p:spPr>
+        <p:txBody>
+          <a:bodyPr wrap="square" lIns="0" tIns="0" rIns="0" bIns="0" rtlCol="0" anchor="ctr"/>
+          <a:lstStyle/>
+          <a:p>
+            <a:pPr indent="0" marL="0">
+              <a:buNone/>
+            </a:pPr>
+            <a:r>
+              <a:rPr lang="en-US" sz="1250" b="1" dirty="0">
+                <a:solidFill>
+                  <a:srgbClr val="16242A"/>
+                </a:solidFill>
+                <a:latin typeface="Arial" pitchFamily="34" charset="0"/>
+                <a:ea typeface="Arial" pitchFamily="34" charset="-122"/>
+                <a:cs typeface="Arial" pitchFamily="34" charset="-120"/>
+              </a:rPr>
+              <a:t>Казахстан</a:t>
+            </a:r>
+            <a:endParaRPr lang="en-US" sz="1250" dirty="0"/>
+          </a:p>
+        </p:txBody>
+      </p:sp>
+      <p:sp>
+        <p:nvSpPr>
+          <p:cNvPr id="14" name="Text 12"/>
+          <p:cNvSpPr txBox="1"/>
+          <p:nvPr/>
+        </p:nvSpPr>
+        <p:spPr>
+          <a:xfrm>
+            <a:off x="3246120" y="2505456"/>
+            <a:ext cx="2103120" cy="274320"/>
+          </a:xfrm>
+          <a:prstGeom prst="rect">
+            <a:avLst/>
+          </a:prstGeom>
+          <a:noFill/>
+          <a:ln/>
+        </p:spPr>
+        <p:txBody>
+          <a:bodyPr wrap="square" lIns="0" tIns="0" rIns="0" bIns="0" rtlCol="0" anchor="ctr"/>
+          <a:lstStyle/>
+          <a:p>
+            <a:pPr indent="0" marL="0">
+              <a:buNone/>
+            </a:pPr>
+            <a:r>
+              <a:rPr lang="en-US" sz="1250" dirty="0">
+                <a:solidFill>
+                  <a:srgbClr val="16242A"/>
+                </a:solidFill>
+                <a:latin typeface="Arial" pitchFamily="34" charset="0"/>
+                <a:ea typeface="Arial" pitchFamily="34" charset="-122"/>
+                <a:cs typeface="Arial" pitchFamily="34" charset="-120"/>
+              </a:rPr>
+              <a:t>360 тыс.</a:t>
+            </a:r>
+            <a:endParaRPr lang="en-US" sz="1250" dirty="0"/>
+          </a:p>
+        </p:txBody>
+      </p:sp>
+      <p:sp>
+        <p:nvSpPr>
+          <p:cNvPr id="15" name="Text 13"/>
+          <p:cNvSpPr txBox="1"/>
+          <p:nvPr/>
+        </p:nvSpPr>
+        <p:spPr>
+          <a:xfrm>
+            <a:off x="5440680" y="2505456"/>
+            <a:ext cx="1737360" cy="274320"/>
+          </a:xfrm>
+          <a:prstGeom prst="rect">
+            <a:avLst/>
+          </a:prstGeom>
+          <a:noFill/>
+          <a:ln/>
+        </p:spPr>
+        <p:txBody>
+          <a:bodyPr wrap="square" lIns="0" tIns="0" rIns="0" bIns="0" rtlCol="0" anchor="ctr"/>
+          <a:lstStyle/>
+          <a:p>
+            <a:pPr indent="0" marL="0">
+              <a:buNone/>
+            </a:pPr>
+            <a:r>
+              <a:rPr lang="en-US" sz="1250" dirty="0">
+                <a:solidFill>
+                  <a:srgbClr val="16242A"/>
+                </a:solidFill>
+                <a:latin typeface="Arial" pitchFamily="34" charset="0"/>
+                <a:ea typeface="Arial" pitchFamily="34" charset="-122"/>
+                <a:cs typeface="Arial" pitchFamily="34" charset="-120"/>
+              </a:rPr>
+              <a:t>8 048</a:t>
+            </a:r>
+            <a:endParaRPr lang="en-US" sz="1250" dirty="0"/>
+          </a:p>
+        </p:txBody>
+      </p:sp>
+      <p:sp>
+        <p:nvSpPr>
+          <p:cNvPr id="16" name="Text 14"/>
+          <p:cNvSpPr txBox="1"/>
+          <p:nvPr/>
+        </p:nvSpPr>
+        <p:spPr>
+          <a:xfrm>
+            <a:off x="7269480" y="2505456"/>
+            <a:ext cx="4023360" cy="274320"/>
+          </a:xfrm>
+          <a:prstGeom prst="rect">
+            <a:avLst/>
+          </a:prstGeom>
+          <a:noFill/>
+          <a:ln/>
+        </p:spPr>
+        <p:txBody>
+          <a:bodyPr wrap="square" lIns="0" tIns="0" rIns="0" bIns="0" rtlCol="0" anchor="ctr"/>
+          <a:lstStyle/>
+          <a:p>
+            <a:pPr indent="0" marL="0">
+              <a:buNone/>
+            </a:pPr>
+            <a:r>
+              <a:rPr lang="en-US" sz="1250" dirty="0">
+                <a:solidFill>
+                  <a:srgbClr val="16242A"/>
+                </a:solidFill>
+                <a:latin typeface="Arial" pitchFamily="34" charset="0"/>
+                <a:ea typeface="Arial" pitchFamily="34" charset="-122"/>
+                <a:cs typeface="Arial" pitchFamily="34" charset="-120"/>
+              </a:rPr>
+              <a:t>45 млрд ₸ в 2025-м, +20 % в 2024-м</a:t>
+            </a:r>
+            <a:endParaRPr lang="en-US" sz="1250" dirty="0"/>
+          </a:p>
+        </p:txBody>
+      </p:sp>
+      <p:sp>
+        <p:nvSpPr>
+          <p:cNvPr id="17" name="Shape 15"/>
           <p:cNvSpPr/>
           <p:nvPr/>
         </p:nvSpPr>
         <p:spPr>
           <a:xfrm>
-            <a:off x="932688" y="2075688"/>
-            <a:ext cx="237744" cy="237744"/>
-          </a:xfrm>
-          <a:prstGeom prst="ellipse">
-            <a:avLst/>
-          </a:prstGeom>
-          <a:solidFill>
-            <a:srgbClr val="FFFFFF"/>
-          </a:solidFill>
-          <a:ln w="25400">
-            <a:solidFill>
-              <a:srgbClr val="2E9E5B"/>
-            </a:solidFill>
-            <a:prstDash val="solid"/>
-          </a:ln>
-        </p:spPr>
-      </p:sp>
-      <p:sp>
-        <p:nvSpPr>
-          <p:cNvPr id="6" name="Text 4"/>
-          <p:cNvSpPr txBox="1"/>
-          <p:nvPr/>
-        </p:nvSpPr>
-        <p:spPr>
-          <a:xfrm>
-            <a:off x="1325880" y="2029968"/>
-            <a:ext cx="2560320" cy="320040"/>
-          </a:xfrm>
-          <a:prstGeom prst="rect">
-            <a:avLst/>
-          </a:prstGeom>
-          <a:noFill/>
-          <a:ln/>
-        </p:spPr>
-        <p:txBody>
-          <a:bodyPr wrap="square" lIns="0" tIns="0" rIns="0" bIns="0" rtlCol="0" anchor="ctr"/>
-          <a:lstStyle/>
-          <a:p>
-            <a:pPr indent="0" marL="0">
-              <a:buNone/>
-            </a:pPr>
-            <a:r>
-              <a:rPr lang="en-US" sz="1700" b="1" dirty="0">
-                <a:solidFill>
-                  <a:srgbClr val="16242A"/>
-                </a:solidFill>
-                <a:latin typeface="Cambria" pitchFamily="34" charset="0"/>
-                <a:ea typeface="Cambria" pitchFamily="34" charset="-122"/>
-                <a:cs typeface="Cambria" pitchFamily="34" charset="-120"/>
-              </a:rPr>
-              <a:t>Родитель</a:t>
-            </a:r>
-            <a:endParaRPr lang="en-US" sz="1700" dirty="0"/>
-          </a:p>
-        </p:txBody>
-      </p:sp>
-      <p:sp>
-        <p:nvSpPr>
-          <p:cNvPr id="7" name="Text 5"/>
-          <p:cNvSpPr txBox="1"/>
-          <p:nvPr/>
-        </p:nvSpPr>
-        <p:spPr>
-          <a:xfrm>
-            <a:off x="1005840" y="2450592"/>
-            <a:ext cx="2743200" cy="320040"/>
-          </a:xfrm>
-          <a:prstGeom prst="rect">
-            <a:avLst/>
-          </a:prstGeom>
-          <a:noFill/>
-          <a:ln/>
-        </p:spPr>
-        <p:txBody>
-          <a:bodyPr wrap="square" lIns="0" tIns="0" rIns="0" bIns="0" rtlCol="0" anchor="ctr"/>
-          <a:lstStyle/>
-          <a:p>
-            <a:pPr indent="0" marL="0">
-              <a:buNone/>
-            </a:pPr>
-            <a:r>
-              <a:rPr lang="en-US" sz="1500" b="1" dirty="0">
-                <a:solidFill>
-                  <a:srgbClr val="2E9E5B"/>
-                </a:solidFill>
-                <a:latin typeface="Arial" pitchFamily="34" charset="0"/>
-                <a:ea typeface="Arial" pitchFamily="34" charset="-122"/>
-                <a:cs typeface="Arial" pitchFamily="34" charset="-120"/>
-              </a:rPr>
-              <a:t>$6 / мес  ·  $49 / год</a:t>
-            </a:r>
-            <a:endParaRPr lang="en-US" sz="1500" dirty="0"/>
-          </a:p>
-        </p:txBody>
-      </p:sp>
-      <p:sp>
-        <p:nvSpPr>
-          <p:cNvPr id="8" name="Text 6"/>
-          <p:cNvSpPr txBox="1"/>
-          <p:nvPr/>
-        </p:nvSpPr>
-        <p:spPr>
-          <a:xfrm>
-            <a:off x="1005840" y="2834640"/>
-            <a:ext cx="2743200" cy="1005840"/>
-          </a:xfrm>
-          <a:prstGeom prst="rect">
-            <a:avLst/>
-          </a:prstGeom>
-          <a:noFill/>
-          <a:ln/>
-        </p:spPr>
-        <p:txBody>
-          <a:bodyPr wrap="square" lIns="0" tIns="0" rIns="0" bIns="0" rtlCol="0" anchor="ctr"/>
-          <a:lstStyle/>
-          <a:p>
-            <a:pPr indent="0" marL="0">
-              <a:lnSpc>
-                <a:spcPct val="120000"/>
-              </a:lnSpc>
-              <a:buNone/>
-            </a:pPr>
-            <a:r>
-              <a:rPr lang="en-US" sz="1250" dirty="0">
-                <a:solidFill>
-                  <a:srgbClr val="5A7078"/>
-                </a:solidFill>
-                <a:latin typeface="Arial" pitchFamily="34" charset="0"/>
-                <a:ea typeface="Arial" pitchFamily="34" charset="-122"/>
-                <a:cs typeface="Arial" pitchFamily="34" charset="-120"/>
-              </a:rPr>
-              <a:t>Спокойствие: у ребёнка есть план, и он им занимается. Дешевле одной сессии консультанта ($50–150).</a:t>
-            </a:r>
-            <a:endParaRPr lang="en-US" sz="1250" dirty="0"/>
-          </a:p>
-        </p:txBody>
-      </p:sp>
-      <p:sp>
-        <p:nvSpPr>
-          <p:cNvPr id="9" name="Shape 7"/>
-          <p:cNvSpPr/>
-          <p:nvPr/>
-        </p:nvSpPr>
-        <p:spPr>
-          <a:xfrm>
-            <a:off x="4480560" y="1874520"/>
-            <a:ext cx="3383280" cy="2148840"/>
+            <a:off x="685800" y="2852928"/>
+            <a:ext cx="10835640" cy="402336"/>
           </a:xfrm>
           <a:prstGeom prst="roundRect">
             <a:avLst>
-              <a:gd name="adj" fmla="val 3404"/>
+              <a:gd name="adj" fmla="val 18182"/>
             </a:avLst>
           </a:prstGeom>
           <a:solidFill>
@@ -8902,422 +10166,330 @@
       </p:sp>
       <p:sp>
         <p:nvSpPr>
-          <p:cNvPr id="10" name="Shape 8"/>
+          <p:cNvPr id="18" name="Text 16"/>
+          <p:cNvSpPr txBox="1"/>
+          <p:nvPr/>
+        </p:nvSpPr>
+        <p:spPr>
+          <a:xfrm>
+            <a:off x="960120" y="2926080"/>
+            <a:ext cx="2194560" cy="274320"/>
+          </a:xfrm>
+          <a:prstGeom prst="rect">
+            <a:avLst/>
+          </a:prstGeom>
+          <a:noFill/>
+          <a:ln/>
+        </p:spPr>
+        <p:txBody>
+          <a:bodyPr wrap="square" lIns="0" tIns="0" rIns="0" bIns="0" rtlCol="0" anchor="ctr"/>
+          <a:lstStyle/>
+          <a:p>
+            <a:pPr indent="0" marL="0">
+              <a:buNone/>
+            </a:pPr>
+            <a:r>
+              <a:rPr lang="en-US" sz="1250" b="1" dirty="0">
+                <a:solidFill>
+                  <a:srgbClr val="16242A"/>
+                </a:solidFill>
+                <a:latin typeface="Arial" pitchFamily="34" charset="0"/>
+                <a:ea typeface="Arial" pitchFamily="34" charset="-122"/>
+                <a:cs typeface="Arial" pitchFamily="34" charset="-120"/>
+              </a:rPr>
+              <a:t>Узбекистан</a:t>
+            </a:r>
+            <a:endParaRPr lang="en-US" sz="1250" dirty="0"/>
+          </a:p>
+        </p:txBody>
+      </p:sp>
+      <p:sp>
+        <p:nvSpPr>
+          <p:cNvPr id="19" name="Text 17"/>
+          <p:cNvSpPr txBox="1"/>
+          <p:nvPr/>
+        </p:nvSpPr>
+        <p:spPr>
+          <a:xfrm>
+            <a:off x="3246120" y="2926080"/>
+            <a:ext cx="2103120" cy="274320"/>
+          </a:xfrm>
+          <a:prstGeom prst="rect">
+            <a:avLst/>
+          </a:prstGeom>
+          <a:noFill/>
+          <a:ln/>
+        </p:spPr>
+        <p:txBody>
+          <a:bodyPr wrap="square" lIns="0" tIns="0" rIns="0" bIns="0" rtlCol="0" anchor="ctr"/>
+          <a:lstStyle/>
+          <a:p>
+            <a:pPr indent="0" marL="0">
+              <a:buNone/>
+            </a:pPr>
+            <a:r>
+              <a:rPr lang="en-US" sz="1250" dirty="0">
+                <a:solidFill>
+                  <a:srgbClr val="16242A"/>
+                </a:solidFill>
+                <a:latin typeface="Arial" pitchFamily="34" charset="0"/>
+                <a:ea typeface="Arial" pitchFamily="34" charset="-122"/>
+                <a:cs typeface="Arial" pitchFamily="34" charset="-120"/>
+              </a:rPr>
+              <a:t>622 тыс.</a:t>
+            </a:r>
+            <a:endParaRPr lang="en-US" sz="1250" dirty="0"/>
+          </a:p>
+        </p:txBody>
+      </p:sp>
+      <p:sp>
+        <p:nvSpPr>
+          <p:cNvPr id="20" name="Text 18"/>
+          <p:cNvSpPr txBox="1"/>
+          <p:nvPr/>
+        </p:nvSpPr>
+        <p:spPr>
+          <a:xfrm>
+            <a:off x="5440680" y="2926080"/>
+            <a:ext cx="1737360" cy="274320"/>
+          </a:xfrm>
+          <a:prstGeom prst="rect">
+            <a:avLst/>
+          </a:prstGeom>
+          <a:noFill/>
+          <a:ln/>
+        </p:spPr>
+        <p:txBody>
+          <a:bodyPr wrap="square" lIns="0" tIns="0" rIns="0" bIns="0" rtlCol="0" anchor="ctr"/>
+          <a:lstStyle/>
+          <a:p>
+            <a:pPr indent="0" marL="0">
+              <a:buNone/>
+            </a:pPr>
+            <a:r>
+              <a:rPr lang="en-US" sz="1250" dirty="0">
+                <a:solidFill>
+                  <a:srgbClr val="16242A"/>
+                </a:solidFill>
+                <a:latin typeface="Arial" pitchFamily="34" charset="0"/>
+                <a:ea typeface="Arial" pitchFamily="34" charset="-122"/>
+                <a:cs typeface="Arial" pitchFamily="34" charset="-120"/>
+              </a:rPr>
+              <a:t>11 118</a:t>
+            </a:r>
+            <a:endParaRPr lang="en-US" sz="1250" dirty="0"/>
+          </a:p>
+        </p:txBody>
+      </p:sp>
+      <p:sp>
+        <p:nvSpPr>
+          <p:cNvPr id="21" name="Text 19"/>
+          <p:cNvSpPr txBox="1"/>
+          <p:nvPr/>
+        </p:nvSpPr>
+        <p:spPr>
+          <a:xfrm>
+            <a:off x="7269480" y="2926080"/>
+            <a:ext cx="4023360" cy="274320"/>
+          </a:xfrm>
+          <a:prstGeom prst="rect">
+            <a:avLst/>
+          </a:prstGeom>
+          <a:noFill/>
+          <a:ln/>
+        </p:spPr>
+        <p:txBody>
+          <a:bodyPr wrap="square" lIns="0" tIns="0" rIns="0" bIns="0" rtlCol="0" anchor="ctr"/>
+          <a:lstStyle/>
+          <a:p>
+            <a:pPr indent="0" marL="0">
+              <a:buNone/>
+            </a:pPr>
+            <a:r>
+              <a:rPr lang="en-US" sz="1250" dirty="0">
+                <a:solidFill>
+                  <a:srgbClr val="16242A"/>
+                </a:solidFill>
+                <a:latin typeface="Arial" pitchFamily="34" charset="0"/>
+                <a:ea typeface="Arial" pitchFamily="34" charset="-122"/>
+                <a:cs typeface="Arial" pitchFamily="34" charset="-120"/>
+              </a:rPr>
+              <a:t>126 млрд сумов, +94 % за год</a:t>
+            </a:r>
+            <a:endParaRPr lang="en-US" sz="1250" dirty="0"/>
+          </a:p>
+        </p:txBody>
+      </p:sp>
+      <p:sp>
+        <p:nvSpPr>
+          <p:cNvPr id="22" name="Text 20"/>
+          <p:cNvSpPr txBox="1"/>
+          <p:nvPr/>
+        </p:nvSpPr>
+        <p:spPr>
+          <a:xfrm>
+            <a:off x="960120" y="3346704"/>
+            <a:ext cx="2194560" cy="274320"/>
+          </a:xfrm>
+          <a:prstGeom prst="rect">
+            <a:avLst/>
+          </a:prstGeom>
+          <a:noFill/>
+          <a:ln/>
+        </p:spPr>
+        <p:txBody>
+          <a:bodyPr wrap="square" lIns="0" tIns="0" rIns="0" bIns="0" rtlCol="0" anchor="ctr"/>
+          <a:lstStyle/>
+          <a:p>
+            <a:pPr indent="0" marL="0">
+              <a:buNone/>
+            </a:pPr>
+            <a:r>
+              <a:rPr lang="en-US" sz="1250" b="1" dirty="0">
+                <a:solidFill>
+                  <a:srgbClr val="0B5D6E"/>
+                </a:solidFill>
+                <a:latin typeface="Arial" pitchFamily="34" charset="0"/>
+                <a:ea typeface="Arial" pitchFamily="34" charset="-122"/>
+                <a:cs typeface="Arial" pitchFamily="34" charset="-120"/>
+              </a:rPr>
+              <a:t>Вместе</a:t>
+            </a:r>
+            <a:endParaRPr lang="en-US" sz="1250" dirty="0"/>
+          </a:p>
+        </p:txBody>
+      </p:sp>
+      <p:sp>
+        <p:nvSpPr>
+          <p:cNvPr id="23" name="Text 21"/>
+          <p:cNvSpPr txBox="1"/>
+          <p:nvPr/>
+        </p:nvSpPr>
+        <p:spPr>
+          <a:xfrm>
+            <a:off x="3246120" y="3346704"/>
+            <a:ext cx="2103120" cy="274320"/>
+          </a:xfrm>
+          <a:prstGeom prst="rect">
+            <a:avLst/>
+          </a:prstGeom>
+          <a:noFill/>
+          <a:ln/>
+        </p:spPr>
+        <p:txBody>
+          <a:bodyPr wrap="square" lIns="0" tIns="0" rIns="0" bIns="0" rtlCol="0" anchor="ctr"/>
+          <a:lstStyle/>
+          <a:p>
+            <a:pPr indent="0" marL="0">
+              <a:buNone/>
+            </a:pPr>
+            <a:r>
+              <a:rPr lang="en-US" sz="1250" b="1" dirty="0">
+                <a:solidFill>
+                  <a:srgbClr val="0B5D6E"/>
+                </a:solidFill>
+                <a:latin typeface="Arial" pitchFamily="34" charset="0"/>
+                <a:ea typeface="Arial" pitchFamily="34" charset="-122"/>
+                <a:cs typeface="Arial" pitchFamily="34" charset="-120"/>
+              </a:rPr>
+              <a:t>2,69 млн</a:t>
+            </a:r>
+            <a:endParaRPr lang="en-US" sz="1250" dirty="0"/>
+          </a:p>
+        </p:txBody>
+      </p:sp>
+      <p:sp>
+        <p:nvSpPr>
+          <p:cNvPr id="24" name="Text 22"/>
+          <p:cNvSpPr txBox="1"/>
+          <p:nvPr/>
+        </p:nvSpPr>
+        <p:spPr>
+          <a:xfrm>
+            <a:off x="5440680" y="3346704"/>
+            <a:ext cx="1737360" cy="274320"/>
+          </a:xfrm>
+          <a:prstGeom prst="rect">
+            <a:avLst/>
+          </a:prstGeom>
+          <a:noFill/>
+          <a:ln/>
+        </p:spPr>
+        <p:txBody>
+          <a:bodyPr wrap="square" lIns="0" tIns="0" rIns="0" bIns="0" rtlCol="0" anchor="ctr"/>
+          <a:lstStyle/>
+          <a:p>
+            <a:pPr indent="0" marL="0">
+              <a:buNone/>
+            </a:pPr>
+            <a:r>
+              <a:rPr lang="en-US" sz="1250" b="1" dirty="0">
+                <a:solidFill>
+                  <a:srgbClr val="0B5D6E"/>
+                </a:solidFill>
+                <a:latin typeface="Arial" pitchFamily="34" charset="0"/>
+                <a:ea typeface="Arial" pitchFamily="34" charset="-122"/>
+                <a:cs typeface="Arial" pitchFamily="34" charset="-120"/>
+              </a:rPr>
+              <a:t>59 000+</a:t>
+            </a:r>
+            <a:endParaRPr lang="en-US" sz="1250" dirty="0"/>
+          </a:p>
+        </p:txBody>
+      </p:sp>
+      <p:sp>
+        <p:nvSpPr>
+          <p:cNvPr id="25" name="Text 23"/>
+          <p:cNvSpPr txBox="1"/>
+          <p:nvPr/>
+        </p:nvSpPr>
+        <p:spPr>
+          <a:xfrm>
+            <a:off x="7269480" y="3346704"/>
+            <a:ext cx="4023360" cy="274320"/>
+          </a:xfrm>
+          <a:prstGeom prst="rect">
+            <a:avLst/>
+          </a:prstGeom>
+          <a:noFill/>
+          <a:ln/>
+        </p:spPr>
+        <p:txBody>
+          <a:bodyPr wrap="square" lIns="0" tIns="0" rIns="0" bIns="0" rtlCol="0" anchor="ctr"/>
+          <a:lstStyle/>
+          <a:p>
+            <a:pPr indent="0" marL="0">
+              <a:buNone/>
+            </a:pPr>
+            <a:r>
+              <a:rPr lang="en-US" sz="1250" b="1" dirty="0">
+                <a:solidFill>
+                  <a:srgbClr val="0B5D6E"/>
+                </a:solidFill>
+                <a:latin typeface="Arial" pitchFamily="34" charset="0"/>
+                <a:ea typeface="Arial" pitchFamily="34" charset="-122"/>
+                <a:cs typeface="Arial" pitchFamily="34" charset="-120"/>
+              </a:rPr>
+              <a:t>29 млн школьников в трёх странах</a:t>
+            </a:r>
+            <a:endParaRPr lang="en-US" sz="1250" dirty="0"/>
+          </a:p>
+        </p:txBody>
+      </p:sp>
+      <p:sp>
+        <p:nvSpPr>
+          <p:cNvPr id="26" name="Shape 24"/>
           <p:cNvSpPr/>
           <p:nvPr/>
         </p:nvSpPr>
         <p:spPr>
           <a:xfrm>
-            <a:off x="4727448" y="2075688"/>
-            <a:ext cx="237744" cy="237744"/>
-          </a:xfrm>
-          <a:prstGeom prst="ellipse">
-            <a:avLst/>
-          </a:prstGeom>
-          <a:solidFill>
-            <a:srgbClr val="FFFFFF"/>
-          </a:solidFill>
-          <a:ln w="25400">
-            <a:solidFill>
-              <a:srgbClr val="2B6BE4"/>
-            </a:solidFill>
-            <a:prstDash val="solid"/>
-          </a:ln>
-        </p:spPr>
-      </p:sp>
-      <p:sp>
-        <p:nvSpPr>
-          <p:cNvPr id="11" name="Text 9"/>
-          <p:cNvSpPr txBox="1"/>
-          <p:nvPr/>
-        </p:nvSpPr>
-        <p:spPr>
-          <a:xfrm>
-            <a:off x="5120640" y="2029968"/>
-            <a:ext cx="2560320" cy="320040"/>
-          </a:xfrm>
-          <a:prstGeom prst="rect">
-            <a:avLst/>
-          </a:prstGeom>
-          <a:noFill/>
-          <a:ln/>
-        </p:spPr>
-        <p:txBody>
-          <a:bodyPr wrap="square" lIns="0" tIns="0" rIns="0" bIns="0" rtlCol="0" anchor="ctr"/>
-          <a:lstStyle/>
-          <a:p>
-            <a:pPr indent="0" marL="0">
-              <a:buNone/>
-            </a:pPr>
-            <a:r>
-              <a:rPr lang="en-US" sz="1700" b="1" dirty="0">
-                <a:solidFill>
-                  <a:srgbClr val="16242A"/>
-                </a:solidFill>
-                <a:latin typeface="Cambria" pitchFamily="34" charset="0"/>
-                <a:ea typeface="Cambria" pitchFamily="34" charset="-122"/>
-                <a:cs typeface="Cambria" pitchFamily="34" charset="-120"/>
-              </a:rPr>
-              <a:t>Школа</a:t>
-            </a:r>
-            <a:endParaRPr lang="en-US" sz="1700" dirty="0"/>
-          </a:p>
-        </p:txBody>
-      </p:sp>
-      <p:sp>
-        <p:nvSpPr>
-          <p:cNvPr id="12" name="Text 10"/>
-          <p:cNvSpPr txBox="1"/>
-          <p:nvPr/>
-        </p:nvSpPr>
-        <p:spPr>
-          <a:xfrm>
-            <a:off x="4800600" y="2450592"/>
-            <a:ext cx="2743200" cy="320040"/>
-          </a:xfrm>
-          <a:prstGeom prst="rect">
-            <a:avLst/>
-          </a:prstGeom>
-          <a:noFill/>
-          <a:ln/>
-        </p:spPr>
-        <p:txBody>
-          <a:bodyPr wrap="square" lIns="0" tIns="0" rIns="0" bIns="0" rtlCol="0" anchor="ctr"/>
-          <a:lstStyle/>
-          <a:p>
-            <a:pPr indent="0" marL="0">
-              <a:buNone/>
-            </a:pPr>
-            <a:r>
-              <a:rPr lang="en-US" sz="1500" b="1" dirty="0">
-                <a:solidFill>
-                  <a:srgbClr val="2B6BE4"/>
-                </a:solidFill>
-                <a:latin typeface="Arial" pitchFamily="34" charset="0"/>
-                <a:ea typeface="Arial" pitchFamily="34" charset="-122"/>
-                <a:cs typeface="Arial" pitchFamily="34" charset="-120"/>
-              </a:rPr>
-              <a:t>$250 / год за класс</a:t>
-            </a:r>
-            <a:endParaRPr lang="en-US" sz="1500" dirty="0"/>
-          </a:p>
-        </p:txBody>
-      </p:sp>
-      <p:sp>
-        <p:nvSpPr>
-          <p:cNvPr id="13" name="Text 11"/>
-          <p:cNvSpPr txBox="1"/>
-          <p:nvPr/>
-        </p:nvSpPr>
-        <p:spPr>
-          <a:xfrm>
-            <a:off x="4800600" y="2834640"/>
-            <a:ext cx="2743200" cy="1005840"/>
-          </a:xfrm>
-          <a:prstGeom prst="rect">
-            <a:avLst/>
-          </a:prstGeom>
-          <a:noFill/>
-          <a:ln/>
-        </p:spPr>
-        <p:txBody>
-          <a:bodyPr wrap="square" lIns="0" tIns="0" rIns="0" bIns="0" rtlCol="0" anchor="ctr"/>
-          <a:lstStyle/>
-          <a:p>
-            <a:pPr indent="0" marL="0">
-              <a:lnSpc>
-                <a:spcPct val="120000"/>
-              </a:lnSpc>
-              <a:buNone/>
-            </a:pPr>
-            <a:r>
-              <a:rPr lang="en-US" sz="1250" dirty="0">
-                <a:solidFill>
-                  <a:srgbClr val="5A7078"/>
-                </a:solidFill>
-                <a:latin typeface="Arial" pitchFamily="34" charset="0"/>
-                <a:ea typeface="Arial" pitchFamily="34" charset="-122"/>
-                <a:cs typeface="Arial" pitchFamily="34" charset="-120"/>
-              </a:rPr>
-              <a:t>Около $8 на ученика. Карты всех девятиклассников, кабинет куратора, отчёт «куда смотрят наши ученики».</a:t>
-            </a:r>
-            <a:endParaRPr lang="en-US" sz="1250" dirty="0"/>
-          </a:p>
-        </p:txBody>
-      </p:sp>
-      <p:sp>
-        <p:nvSpPr>
-          <p:cNvPr id="14" name="Shape 12"/>
-          <p:cNvSpPr/>
-          <p:nvPr/>
-        </p:nvSpPr>
-        <p:spPr>
-          <a:xfrm>
-            <a:off x="8275320" y="1874520"/>
-            <a:ext cx="3383280" cy="2148840"/>
+            <a:off x="685800" y="3840480"/>
+            <a:ext cx="10835640" cy="457200"/>
           </a:xfrm>
           <a:prstGeom prst="roundRect">
             <a:avLst>
-              <a:gd name="adj" fmla="val 3404"/>
-            </a:avLst>
-          </a:prstGeom>
-          <a:solidFill>
-            <a:srgbClr val="F0F5F6"/>
-          </a:solidFill>
-          <a:ln w="12700">
-            <a:solidFill>
-              <a:srgbClr val="F0F5F6"/>
-            </a:solidFill>
-            <a:prstDash val="solid"/>
-          </a:ln>
-        </p:spPr>
-      </p:sp>
-      <p:sp>
-        <p:nvSpPr>
-          <p:cNvPr id="15" name="Shape 13"/>
-          <p:cNvSpPr/>
-          <p:nvPr/>
-        </p:nvSpPr>
-        <p:spPr>
-          <a:xfrm>
-            <a:off x="8522208" y="2075688"/>
-            <a:ext cx="237744" cy="237744"/>
-          </a:xfrm>
-          <a:prstGeom prst="ellipse">
-            <a:avLst/>
-          </a:prstGeom>
-          <a:solidFill>
-            <a:srgbClr val="FFFFFF"/>
-          </a:solidFill>
-          <a:ln w="25400">
-            <a:solidFill>
-              <a:srgbClr val="E08A2E"/>
-            </a:solidFill>
-            <a:prstDash val="solid"/>
-          </a:ln>
-        </p:spPr>
-      </p:sp>
-      <p:sp>
-        <p:nvSpPr>
-          <p:cNvPr id="16" name="Text 14"/>
-          <p:cNvSpPr txBox="1"/>
-          <p:nvPr/>
-        </p:nvSpPr>
-        <p:spPr>
-          <a:xfrm>
-            <a:off x="8915400" y="2029968"/>
-            <a:ext cx="2560320" cy="320040"/>
-          </a:xfrm>
-          <a:prstGeom prst="rect">
-            <a:avLst/>
-          </a:prstGeom>
-          <a:noFill/>
-          <a:ln/>
-        </p:spPr>
-        <p:txBody>
-          <a:bodyPr wrap="square" lIns="0" tIns="0" rIns="0" bIns="0" rtlCol="0" anchor="ctr"/>
-          <a:lstStyle/>
-          <a:p>
-            <a:pPr indent="0" marL="0">
-              <a:buNone/>
-            </a:pPr>
-            <a:r>
-              <a:rPr lang="en-US" sz="1700" b="1" dirty="0">
-                <a:solidFill>
-                  <a:srgbClr val="16242A"/>
-                </a:solidFill>
-                <a:latin typeface="Cambria" pitchFamily="34" charset="0"/>
-                <a:ea typeface="Cambria" pitchFamily="34" charset="-122"/>
-                <a:cs typeface="Cambria" pitchFamily="34" charset="-120"/>
-              </a:rPr>
-              <a:t>Курсы и менторы</a:t>
-            </a:r>
-            <a:endParaRPr lang="en-US" sz="1700" dirty="0"/>
-          </a:p>
-        </p:txBody>
-      </p:sp>
-      <p:sp>
-        <p:nvSpPr>
-          <p:cNvPr id="17" name="Text 15"/>
-          <p:cNvSpPr txBox="1"/>
-          <p:nvPr/>
-        </p:nvSpPr>
-        <p:spPr>
-          <a:xfrm>
-            <a:off x="8595360" y="2450592"/>
-            <a:ext cx="2743200" cy="320040"/>
-          </a:xfrm>
-          <a:prstGeom prst="rect">
-            <a:avLst/>
-          </a:prstGeom>
-          <a:noFill/>
-          <a:ln/>
-        </p:spPr>
-        <p:txBody>
-          <a:bodyPr wrap="square" lIns="0" tIns="0" rIns="0" bIns="0" rtlCol="0" anchor="ctr"/>
-          <a:lstStyle/>
-          <a:p>
-            <a:pPr indent="0" marL="0">
-              <a:buNone/>
-            </a:pPr>
-            <a:r>
-              <a:rPr lang="en-US" sz="1500" b="1" dirty="0">
-                <a:solidFill>
-                  <a:srgbClr val="E08A2E"/>
-                </a:solidFill>
-                <a:latin typeface="Arial" pitchFamily="34" charset="0"/>
-                <a:ea typeface="Arial" pitchFamily="34" charset="-122"/>
-                <a:cs typeface="Arial" pitchFamily="34" charset="-120"/>
-              </a:rPr>
-              <a:t>10–20 % с продажи</a:t>
-            </a:r>
-            <a:endParaRPr lang="en-US" sz="1500" dirty="0"/>
-          </a:p>
-        </p:txBody>
-      </p:sp>
-      <p:sp>
-        <p:nvSpPr>
-          <p:cNvPr id="18" name="Text 16"/>
-          <p:cNvSpPr txBox="1"/>
-          <p:nvPr/>
-        </p:nvSpPr>
-        <p:spPr>
-          <a:xfrm>
-            <a:off x="8595360" y="2834640"/>
-            <a:ext cx="2743200" cy="1005840"/>
-          </a:xfrm>
-          <a:prstGeom prst="rect">
-            <a:avLst/>
-          </a:prstGeom>
-          <a:noFill/>
-          <a:ln/>
-        </p:spPr>
-        <p:txBody>
-          <a:bodyPr wrap="square" lIns="0" tIns="0" rIns="0" bIns="0" rtlCol="0" anchor="ctr"/>
-          <a:lstStyle/>
-          <a:p>
-            <a:pPr indent="0" marL="0">
-              <a:lnSpc>
-                <a:spcPct val="120000"/>
-              </a:lnSpc>
-              <a:buNone/>
-            </a:pPr>
-            <a:r>
-              <a:rPr lang="en-US" sz="1250" dirty="0">
-                <a:solidFill>
-                  <a:srgbClr val="5A7078"/>
-                </a:solidFill>
-                <a:latin typeface="Arial" pitchFamily="34" charset="0"/>
-                <a:ea typeface="Arial" pitchFamily="34" charset="-122"/>
-                <a:cs typeface="Arial" pitchFamily="34" charset="-120"/>
-              </a:rPr>
-              <a:t>Место на карте: курс как станция на маршруте — ровно в момент поиска шага.</a:t>
-            </a:r>
-            <a:endParaRPr lang="en-US" sz="1250" dirty="0"/>
-          </a:p>
-        </p:txBody>
-      </p:sp>
-      <p:sp>
-        <p:nvSpPr>
-          <p:cNvPr id="19" name="Shape 17"/>
-          <p:cNvSpPr/>
-          <p:nvPr/>
-        </p:nvSpPr>
-        <p:spPr>
-          <a:xfrm>
-            <a:off x="685800" y="4206240"/>
-            <a:ext cx="5257800" cy="1005840"/>
-          </a:xfrm>
-          <a:prstGeom prst="roundRect">
-            <a:avLst>
-              <a:gd name="adj" fmla="val 7273"/>
-            </a:avLst>
-          </a:prstGeom>
-          <a:solidFill>
-            <a:srgbClr val="F0F5F6"/>
-          </a:solidFill>
-          <a:ln w="12700">
-            <a:solidFill>
-              <a:srgbClr val="F0F5F6"/>
-            </a:solidFill>
-            <a:prstDash val="solid"/>
-          </a:ln>
-        </p:spPr>
-      </p:sp>
-      <p:sp>
-        <p:nvSpPr>
-          <p:cNvPr id="20" name="Text 18"/>
-          <p:cNvSpPr txBox="1"/>
-          <p:nvPr/>
-        </p:nvSpPr>
-        <p:spPr>
-          <a:xfrm>
-            <a:off x="1005840" y="4370832"/>
-            <a:ext cx="4663440" cy="731520"/>
-          </a:xfrm>
-          <a:prstGeom prst="rect">
-            <a:avLst/>
-          </a:prstGeom>
-          <a:noFill/>
-          <a:ln/>
-        </p:spPr>
-        <p:txBody>
-          <a:bodyPr wrap="square" lIns="0" tIns="0" rIns="0" bIns="0" rtlCol="0" anchor="ctr"/>
-          <a:lstStyle/>
-          <a:p>
-            <a:pPr indent="0" marL="0">
-              <a:lnSpc>
-                <a:spcPct val="120000"/>
-              </a:lnSpc>
-              <a:buNone/>
-            </a:pPr>
-            <a:r>
-              <a:rPr lang="en-US" sz="1400" b="1" dirty="0">
-                <a:solidFill>
-                  <a:srgbClr val="0B5D6E"/>
-                </a:solidFill>
-                <a:latin typeface="Arial" pitchFamily="34" charset="0"/>
-                <a:ea typeface="Arial" pitchFamily="34" charset="-122"/>
-                <a:cs typeface="Arial" pitchFamily="34" charset="-120"/>
-              </a:rPr>
-              <a:t>Бесплатно
-</a:t>
-            </a:r>
-            <a:pPr indent="0" marL="0">
-              <a:lnSpc>
-                <a:spcPct val="120000"/>
-              </a:lnSpc>
-              <a:buNone/>
-            </a:pPr>
-            <a:r>
-              <a:rPr lang="en-US" sz="1300" dirty="0">
-                <a:solidFill>
-                  <a:srgbClr val="16242A"/>
-                </a:solidFill>
-                <a:latin typeface="Arial" pitchFamily="34" charset="0"/>
-                <a:ea typeface="Arial" pitchFamily="34" charset="-122"/>
-                <a:cs typeface="Arial" pitchFamily="34" charset="-120"/>
-              </a:rPr>
-              <a:t>разговор, карта с 3–5 линиями, «почему» и один шаг</a:t>
-            </a:r>
-            <a:endParaRPr lang="en-US" sz="1400" dirty="0"/>
-          </a:p>
-        </p:txBody>
-      </p:sp>
-      <p:sp>
-        <p:nvSpPr>
-          <p:cNvPr id="21" name="Shape 19"/>
-          <p:cNvSpPr/>
-          <p:nvPr/>
-        </p:nvSpPr>
-        <p:spPr>
-          <a:xfrm>
-            <a:off x="6263640" y="4206240"/>
-            <a:ext cx="5257800" cy="1005840"/>
-          </a:xfrm>
-          <a:prstGeom prst="roundRect">
-            <a:avLst>
-              <a:gd name="adj" fmla="val 7273"/>
+              <a:gd name="adj" fmla="val 16000"/>
             </a:avLst>
           </a:prstGeom>
           <a:solidFill>
@@ -9333,14 +10505,117 @@
       </p:sp>
       <p:sp>
         <p:nvSpPr>
-          <p:cNvPr id="22" name="Text 20"/>
-          <p:cNvSpPr txBox="1"/>
-          <p:nvPr/>
-        </p:nvSpPr>
-        <p:spPr>
-          <a:xfrm>
-            <a:off x="6583680" y="4370832"/>
-            <a:ext cx="4663440" cy="731520"/>
+          <p:cNvPr id="27" name="Text 25"/>
+          <p:cNvSpPr txBox="1"/>
+          <p:nvPr/>
+        </p:nvSpPr>
+        <p:spPr>
+          <a:xfrm>
+            <a:off x="1005840" y="3931920"/>
+            <a:ext cx="10195560" cy="292608"/>
+          </a:xfrm>
+          <a:prstGeom prst="rect">
+            <a:avLst/>
+          </a:prstGeom>
+          <a:noFill/>
+          <a:ln/>
+        </p:spPr>
+        <p:txBody>
+          <a:bodyPr wrap="square" lIns="0" tIns="0" rIns="0" bIns="0" rtlCol="0" anchor="ctr"/>
+          <a:lstStyle/>
+          <a:p>
+            <a:pPr indent="0" marL="0">
+              <a:buNone/>
+            </a:pPr>
+            <a:r>
+              <a:rPr lang="en-US" sz="1300" b="1" dirty="0">
+                <a:solidFill>
+                  <a:srgbClr val="FFFFFF"/>
+                </a:solidFill>
+                <a:latin typeface="Arial" pitchFamily="34" charset="0"/>
+                <a:ea typeface="Arial" pitchFamily="34" charset="-122"/>
+                <a:cs typeface="Arial" pitchFamily="34" charset="-120"/>
+              </a:rPr>
+              <a:t>В России профориентация обязательна в школах с 1 сентября 2023 года — курс «Россия — мои горизонты», 8,4 млн школьников. Требование есть, инструмента нет.</a:t>
+            </a:r>
+            <a:endParaRPr lang="en-US" sz="1300" dirty="0"/>
+          </a:p>
+        </p:txBody>
+      </p:sp>
+      <p:sp>
+        <p:nvSpPr>
+          <p:cNvPr id="28" name="Text 26"/>
+          <p:cNvSpPr txBox="1"/>
+          <p:nvPr/>
+        </p:nvSpPr>
+        <p:spPr>
+          <a:xfrm>
+            <a:off x="685800" y="4480560"/>
+            <a:ext cx="5394960" cy="292608"/>
+          </a:xfrm>
+          <a:prstGeom prst="rect">
+            <a:avLst/>
+          </a:prstGeom>
+          <a:noFill/>
+          <a:ln/>
+        </p:spPr>
+        <p:txBody>
+          <a:bodyPr wrap="square" lIns="0" tIns="0" rIns="0" bIns="0" rtlCol="0" anchor="ctr"/>
+          <a:lstStyle/>
+          <a:p>
+            <a:pPr indent="0" marL="0">
+              <a:buNone/>
+            </a:pPr>
+            <a:r>
+              <a:rPr lang="en-US" sz="1700" b="1" dirty="0">
+                <a:solidFill>
+                  <a:srgbClr val="16242A"/>
+                </a:solidFill>
+                <a:latin typeface="Cambria" pitchFamily="34" charset="0"/>
+                <a:ea typeface="Cambria" pitchFamily="34" charset="-122"/>
+                <a:cs typeface="Cambria" pitchFamily="34" charset="-120"/>
+              </a:rPr>
+              <a:t>Семья уже платит</a:t>
+            </a:r>
+            <a:endParaRPr lang="en-US" sz="1700" dirty="0"/>
+          </a:p>
+        </p:txBody>
+      </p:sp>
+      <p:sp>
+        <p:nvSpPr>
+          <p:cNvPr id="29" name="Shape 27"/>
+          <p:cNvSpPr/>
+          <p:nvPr/>
+        </p:nvSpPr>
+        <p:spPr>
+          <a:xfrm>
+            <a:off x="749808" y="4901184"/>
+            <a:ext cx="146304" cy="146304"/>
+          </a:xfrm>
+          <a:prstGeom prst="ellipse">
+            <a:avLst/>
+          </a:prstGeom>
+          <a:solidFill>
+            <a:srgbClr val="2E9E5B"/>
+          </a:solidFill>
+          <a:ln w="12700">
+            <a:solidFill>
+              <a:srgbClr val="2E9E5B"/>
+            </a:solidFill>
+            <a:prstDash val="solid"/>
+          </a:ln>
+        </p:spPr>
+      </p:sp>
+      <p:sp>
+        <p:nvSpPr>
+          <p:cNvPr id="30" name="Text 28"/>
+          <p:cNvSpPr txBox="1"/>
+          <p:nvPr/>
+        </p:nvSpPr>
+        <p:spPr>
+          <a:xfrm>
+            <a:off x="1097280" y="4846320"/>
+            <a:ext cx="4937760" cy="502920"/>
           </a:xfrm>
           <a:prstGeom prst="rect">
             <a:avLst/>
@@ -9354,53 +10629,77 @@
           <a:p>
             <a:pPr indent="0" marL="0">
               <a:lnSpc>
-                <a:spcPct val="120000"/>
+                <a:spcPct val="115000"/>
               </a:lnSpc>
               <a:buNone/>
             </a:pPr>
             <a:r>
-              <a:rPr lang="en-US" sz="1400" b="1" dirty="0">
-                <a:solidFill>
-                  <a:srgbClr val="FFFFFF"/>
-                </a:solidFill>
-                <a:latin typeface="Arial" pitchFamily="34" charset="0"/>
-                <a:ea typeface="Arial" pitchFamily="34" charset="-122"/>
-                <a:cs typeface="Arial" pitchFamily="34" charset="-120"/>
-              </a:rPr>
-              <a:t>По подписке
-</a:t>
+              <a:rPr lang="en-US" sz="1250" b="1" dirty="0">
+                <a:solidFill>
+                  <a:srgbClr val="16242A"/>
+                </a:solidFill>
+                <a:latin typeface="Arial" pitchFamily="34" charset="0"/>
+                <a:ea typeface="Arial" pitchFamily="34" charset="-122"/>
+                <a:cs typeface="Arial" pitchFamily="34" charset="-120"/>
+              </a:rPr>
+              <a:t>5 100 ₽ в неделю  </a:t>
             </a:r>
             <a:pPr indent="0" marL="0">
               <a:lnSpc>
-                <a:spcPct val="120000"/>
+                <a:spcPct val="115000"/>
               </a:lnSpc>
               <a:buNone/>
             </a:pPr>
             <a:r>
-              <a:rPr lang="en-US" sz="1300" dirty="0">
-                <a:solidFill>
-                  <a:srgbClr val="FFFFFF"/>
-                </a:solidFill>
-                <a:latin typeface="Arial" pitchFamily="34" charset="0"/>
-                <a:ea typeface="Arial" pitchFamily="34" charset="-122"/>
-                <a:cs typeface="Arial" pitchFamily="34" charset="-120"/>
-              </a:rPr>
-              <a:t>пересборка карты, шаг каждую четверть, skills tracking, AI-ментор, кабинет родителя</a:t>
-            </a:r>
-            <a:endParaRPr lang="en-US" sz="1400" dirty="0"/>
-          </a:p>
-        </p:txBody>
-      </p:sp>
-      <p:sp>
-        <p:nvSpPr>
-          <p:cNvPr id="23" name="Text 21"/>
-          <p:cNvSpPr txBox="1"/>
-          <p:nvPr/>
-        </p:nvSpPr>
-        <p:spPr>
-          <a:xfrm>
-            <a:off x="685800" y="5440680"/>
-            <a:ext cx="10835640" cy="640080"/>
+              <a:rPr lang="en-US" sz="1150" dirty="0">
+                <a:solidFill>
+                  <a:srgbClr val="5A7078"/>
+                </a:solidFill>
+                <a:latin typeface="Arial" pitchFamily="34" charset="0"/>
+                <a:ea typeface="Arial" pitchFamily="34" charset="-122"/>
+                <a:cs typeface="Arial" pitchFamily="34" charset="-120"/>
+              </a:rPr>
+              <a:t>тратят родители девятиклассника в России на дополнительные занятия — около $250 в месяц (Superjob, 2026)</a:t>
+            </a:r>
+            <a:endParaRPr lang="en-US" sz="1250" dirty="0"/>
+          </a:p>
+        </p:txBody>
+      </p:sp>
+      <p:sp>
+        <p:nvSpPr>
+          <p:cNvPr id="31" name="Shape 29"/>
+          <p:cNvSpPr/>
+          <p:nvPr/>
+        </p:nvSpPr>
+        <p:spPr>
+          <a:xfrm>
+            <a:off x="749808" y="5468112"/>
+            <a:ext cx="146304" cy="146304"/>
+          </a:xfrm>
+          <a:prstGeom prst="ellipse">
+            <a:avLst/>
+          </a:prstGeom>
+          <a:solidFill>
+            <a:srgbClr val="2E9E5B"/>
+          </a:solidFill>
+          <a:ln w="12700">
+            <a:solidFill>
+              <a:srgbClr val="2E9E5B"/>
+            </a:solidFill>
+            <a:prstDash val="solid"/>
+          </a:ln>
+        </p:spPr>
+      </p:sp>
+      <p:sp>
+        <p:nvSpPr>
+          <p:cNvPr id="32" name="Text 30"/>
+          <p:cNvSpPr txBox="1"/>
+          <p:nvPr/>
+        </p:nvSpPr>
+        <p:spPr>
+          <a:xfrm>
+            <a:off x="1097280" y="5413248"/>
+            <a:ext cx="4937760" cy="502920"/>
           </a:xfrm>
           <a:prstGeom prst="rect">
             <a:avLst/>
@@ -9414,12 +10713,12 @@
           <a:p>
             <a:pPr indent="0" marL="0">
               <a:lnSpc>
-                <a:spcPct val="120000"/>
+                <a:spcPct val="115000"/>
               </a:lnSpc>
               <a:buNone/>
             </a:pPr>
             <a:r>
-              <a:rPr lang="en-US" sz="1400" b="1" dirty="0">
+              <a:rPr lang="en-US" sz="1250" b="1" dirty="0">
                 <a:solidFill>
                   <a:srgbClr val="16242A"/>
                 </a:solidFill>
@@ -9427,16 +10726,16 @@
                 <a:ea typeface="Arial" pitchFamily="34" charset="-122"/>
                 <a:cs typeface="Arial" pitchFamily="34" charset="-120"/>
               </a:rPr>
-              <a:t>Выход на рынок — через школы: </a:t>
+              <a:t>Наши $6 в месяц  </a:t>
             </a:r>
             <a:pPr indent="0" marL="0">
               <a:lnSpc>
-                <a:spcPct val="120000"/>
+                <a:spcPct val="115000"/>
               </a:lnSpc>
               <a:buNone/>
             </a:pPr>
             <a:r>
-              <a:rPr lang="en-US" sz="1400" dirty="0">
+              <a:rPr lang="en-US" sz="1150" dirty="0">
                 <a:solidFill>
                   <a:srgbClr val="5A7078"/>
                 </a:solidFill>
@@ -9444,9 +10743,324 @@
                 <a:ea typeface="Arial" pitchFamily="34" charset="-122"/>
                 <a:cs typeface="Arial" pitchFamily="34" charset="-120"/>
               </a:rPr>
-              <a:t>один договор даёт класс активных учеников, а их родители — естественная база для подписки. Цены — гипотезы: проверяем интервью с родителями и пилотом в школе.</a:t>
-            </a:r>
-            <a:endParaRPr lang="en-US" sz="1400" dirty="0"/>
+              <a:t>это примерно 2 % от того, что семья платит и так. Каждая вторая семья платит репетиторам — против 27 % в 2020-м</a:t>
+            </a:r>
+            <a:endParaRPr lang="en-US" sz="1250" dirty="0"/>
+          </a:p>
+        </p:txBody>
+      </p:sp>
+      <p:sp>
+        <p:nvSpPr>
+          <p:cNvPr id="33" name="Text 31"/>
+          <p:cNvSpPr txBox="1"/>
+          <p:nvPr/>
+        </p:nvSpPr>
+        <p:spPr>
+          <a:xfrm>
+            <a:off x="6492240" y="4480560"/>
+            <a:ext cx="5029200" cy="292608"/>
+          </a:xfrm>
+          <a:prstGeom prst="rect">
+            <a:avLst/>
+          </a:prstGeom>
+          <a:noFill/>
+          <a:ln/>
+        </p:spPr>
+        <p:txBody>
+          <a:bodyPr wrap="square" lIns="0" tIns="0" rIns="0" bIns="0" rtlCol="0" anchor="ctr"/>
+          <a:lstStyle/>
+          <a:p>
+            <a:pPr indent="0" marL="0">
+              <a:buNone/>
+            </a:pPr>
+            <a:r>
+              <a:rPr lang="en-US" sz="1700" b="1" dirty="0">
+                <a:solidFill>
+                  <a:srgbClr val="16242A"/>
+                </a:solidFill>
+                <a:latin typeface="Cambria" pitchFamily="34" charset="0"/>
+                <a:ea typeface="Cambria" pitchFamily="34" charset="-122"/>
+                <a:cs typeface="Cambria" pitchFamily="34" charset="-120"/>
+              </a:rPr>
+              <a:t>Объём рынка — наш расчёт</a:t>
+            </a:r>
+            <a:endParaRPr lang="en-US" sz="1700" dirty="0"/>
+          </a:p>
+        </p:txBody>
+      </p:sp>
+      <p:sp>
+        <p:nvSpPr>
+          <p:cNvPr id="34" name="Shape 32"/>
+          <p:cNvSpPr/>
+          <p:nvPr/>
+        </p:nvSpPr>
+        <p:spPr>
+          <a:xfrm>
+            <a:off x="6556248" y="4882896"/>
+            <a:ext cx="146304" cy="146304"/>
+          </a:xfrm>
+          <a:prstGeom prst="ellipse">
+            <a:avLst/>
+          </a:prstGeom>
+          <a:solidFill>
+            <a:srgbClr val="2B6BE4"/>
+          </a:solidFill>
+          <a:ln w="12700">
+            <a:solidFill>
+              <a:srgbClr val="2B6BE4"/>
+            </a:solidFill>
+            <a:prstDash val="solid"/>
+          </a:ln>
+        </p:spPr>
+      </p:sp>
+      <p:sp>
+        <p:nvSpPr>
+          <p:cNvPr id="35" name="Text 33"/>
+          <p:cNvSpPr txBox="1"/>
+          <p:nvPr/>
+        </p:nvSpPr>
+        <p:spPr>
+          <a:xfrm>
+            <a:off x="6903720" y="4846320"/>
+            <a:ext cx="4617720" cy="365760"/>
+          </a:xfrm>
+          <a:prstGeom prst="rect">
+            <a:avLst/>
+          </a:prstGeom>
+          <a:noFill/>
+          <a:ln/>
+        </p:spPr>
+        <p:txBody>
+          <a:bodyPr wrap="square" lIns="0" tIns="0" rIns="0" bIns="0" rtlCol="0" anchor="ctr"/>
+          <a:lstStyle/>
+          <a:p>
+            <a:pPr indent="0" marL="0">
+              <a:buNone/>
+            </a:pPr>
+            <a:r>
+              <a:rPr lang="en-US" sz="1250" b="1" dirty="0">
+                <a:solidFill>
+                  <a:srgbClr val="16242A"/>
+                </a:solidFill>
+                <a:latin typeface="Arial" pitchFamily="34" charset="0"/>
+                <a:ea typeface="Arial" pitchFamily="34" charset="-122"/>
+                <a:cs typeface="Arial" pitchFamily="34" charset="-120"/>
+              </a:rPr>
+              <a:t>TAM  $395 млн  </a:t>
+            </a:r>
+            <a:pPr indent="0" marL="0">
+              <a:buNone/>
+            </a:pPr>
+            <a:r>
+              <a:rPr lang="en-US" sz="1150" dirty="0">
+                <a:solidFill>
+                  <a:srgbClr val="5A7078"/>
+                </a:solidFill>
+                <a:latin typeface="Arial" pitchFamily="34" charset="0"/>
+                <a:ea typeface="Arial" pitchFamily="34" charset="-122"/>
+                <a:cs typeface="Arial" pitchFamily="34" charset="-120"/>
+              </a:rPr>
+              <a:t>8,1 млн учеников 9–11 классов трёх стран × $49 в год</a:t>
+            </a:r>
+            <a:endParaRPr lang="en-US" sz="1250" dirty="0"/>
+          </a:p>
+        </p:txBody>
+      </p:sp>
+      <p:sp>
+        <p:nvSpPr>
+          <p:cNvPr id="36" name="Shape 34"/>
+          <p:cNvSpPr/>
+          <p:nvPr/>
+        </p:nvSpPr>
+        <p:spPr>
+          <a:xfrm>
+            <a:off x="6556248" y="5285232"/>
+            <a:ext cx="146304" cy="146304"/>
+          </a:xfrm>
+          <a:prstGeom prst="ellipse">
+            <a:avLst/>
+          </a:prstGeom>
+          <a:solidFill>
+            <a:srgbClr val="2B6BE4"/>
+          </a:solidFill>
+          <a:ln w="12700">
+            <a:solidFill>
+              <a:srgbClr val="2B6BE4"/>
+            </a:solidFill>
+            <a:prstDash val="solid"/>
+          </a:ln>
+        </p:spPr>
+      </p:sp>
+      <p:sp>
+        <p:nvSpPr>
+          <p:cNvPr id="37" name="Text 35"/>
+          <p:cNvSpPr txBox="1"/>
+          <p:nvPr/>
+        </p:nvSpPr>
+        <p:spPr>
+          <a:xfrm>
+            <a:off x="6903720" y="5248656"/>
+            <a:ext cx="4617720" cy="365760"/>
+          </a:xfrm>
+          <a:prstGeom prst="rect">
+            <a:avLst/>
+          </a:prstGeom>
+          <a:noFill/>
+          <a:ln/>
+        </p:spPr>
+        <p:txBody>
+          <a:bodyPr wrap="square" lIns="0" tIns="0" rIns="0" bIns="0" rtlCol="0" anchor="ctr"/>
+          <a:lstStyle/>
+          <a:p>
+            <a:pPr indent="0" marL="0">
+              <a:buNone/>
+            </a:pPr>
+            <a:r>
+              <a:rPr lang="en-US" sz="1250" b="1" dirty="0">
+                <a:solidFill>
+                  <a:srgbClr val="16242A"/>
+                </a:solidFill>
+                <a:latin typeface="Arial" pitchFamily="34" charset="0"/>
+                <a:ea typeface="Arial" pitchFamily="34" charset="-122"/>
+                <a:cs typeface="Arial" pitchFamily="34" charset="-120"/>
+              </a:rPr>
+              <a:t>SAM  $160 млн  </a:t>
+            </a:r>
+            <a:pPr indent="0" marL="0">
+              <a:buNone/>
+            </a:pPr>
+            <a:r>
+              <a:rPr lang="en-US" sz="1150" dirty="0">
+                <a:solidFill>
+                  <a:srgbClr val="5A7078"/>
+                </a:solidFill>
+                <a:latin typeface="Arial" pitchFamily="34" charset="0"/>
+                <a:ea typeface="Arial" pitchFamily="34" charset="-122"/>
+                <a:cs typeface="Arial" pitchFamily="34" charset="-120"/>
+              </a:rPr>
+              <a:t>40 % семей — те, кто уже платит за дополнительное образование</a:t>
+            </a:r>
+            <a:endParaRPr lang="en-US" sz="1250" dirty="0"/>
+          </a:p>
+        </p:txBody>
+      </p:sp>
+      <p:sp>
+        <p:nvSpPr>
+          <p:cNvPr id="38" name="Shape 36"/>
+          <p:cNvSpPr/>
+          <p:nvPr/>
+        </p:nvSpPr>
+        <p:spPr>
+          <a:xfrm>
+            <a:off x="6556248" y="5687568"/>
+            <a:ext cx="146304" cy="146304"/>
+          </a:xfrm>
+          <a:prstGeom prst="ellipse">
+            <a:avLst/>
+          </a:prstGeom>
+          <a:solidFill>
+            <a:srgbClr val="2B6BE4"/>
+          </a:solidFill>
+          <a:ln w="12700">
+            <a:solidFill>
+              <a:srgbClr val="2B6BE4"/>
+            </a:solidFill>
+            <a:prstDash val="solid"/>
+          </a:ln>
+        </p:spPr>
+      </p:sp>
+      <p:sp>
+        <p:nvSpPr>
+          <p:cNvPr id="39" name="Text 37"/>
+          <p:cNvSpPr txBox="1"/>
+          <p:nvPr/>
+        </p:nvSpPr>
+        <p:spPr>
+          <a:xfrm>
+            <a:off x="6903720" y="5650992"/>
+            <a:ext cx="4617720" cy="365760"/>
+          </a:xfrm>
+          <a:prstGeom prst="rect">
+            <a:avLst/>
+          </a:prstGeom>
+          <a:noFill/>
+          <a:ln/>
+        </p:spPr>
+        <p:txBody>
+          <a:bodyPr wrap="square" lIns="0" tIns="0" rIns="0" bIns="0" rtlCol="0" anchor="ctr"/>
+          <a:lstStyle/>
+          <a:p>
+            <a:pPr indent="0" marL="0">
+              <a:buNone/>
+            </a:pPr>
+            <a:r>
+              <a:rPr lang="en-US" sz="1250" b="1" dirty="0">
+                <a:solidFill>
+                  <a:srgbClr val="16242A"/>
+                </a:solidFill>
+                <a:latin typeface="Arial" pitchFamily="34" charset="0"/>
+                <a:ea typeface="Arial" pitchFamily="34" charset="-122"/>
+                <a:cs typeface="Arial" pitchFamily="34" charset="-120"/>
+              </a:rPr>
+              <a:t>SOM  $1,6 млн  </a:t>
+            </a:r>
+            <a:pPr indent="0" marL="0">
+              <a:buNone/>
+            </a:pPr>
+            <a:r>
+              <a:rPr lang="en-US" sz="1150" dirty="0">
+                <a:solidFill>
+                  <a:srgbClr val="5A7078"/>
+                </a:solidFill>
+                <a:latin typeface="Arial" pitchFamily="34" charset="0"/>
+                <a:ea typeface="Arial" pitchFamily="34" charset="-122"/>
+                <a:cs typeface="Arial" pitchFamily="34" charset="-120"/>
+              </a:rPr>
+              <a:t>1 % SAM к третьему году плюс школьные лицензии</a:t>
+            </a:r>
+            <a:endParaRPr lang="en-US" sz="1250" dirty="0"/>
+          </a:p>
+        </p:txBody>
+      </p:sp>
+      <p:sp>
+        <p:nvSpPr>
+          <p:cNvPr id="40" name="Text 38"/>
+          <p:cNvSpPr txBox="1"/>
+          <p:nvPr/>
+        </p:nvSpPr>
+        <p:spPr>
+          <a:xfrm>
+            <a:off x="685800" y="6144768"/>
+            <a:ext cx="10835640" cy="457200"/>
+          </a:xfrm>
+          <a:prstGeom prst="rect">
+            <a:avLst/>
+          </a:prstGeom>
+          <a:noFill/>
+          <a:ln/>
+        </p:spPr>
+        <p:txBody>
+          <a:bodyPr wrap="square" lIns="0" tIns="0" rIns="0" bIns="0" rtlCol="0" anchor="ctr"/>
+          <a:lstStyle/>
+          <a:p>
+            <a:pPr indent="0" marL="0">
+              <a:lnSpc>
+                <a:spcPct val="110000"/>
+              </a:lnSpc>
+              <a:buNone/>
+            </a:pPr>
+            <a:r>
+              <a:rPr lang="en-US" sz="950" dirty="0">
+                <a:solidFill>
+                  <a:srgbClr val="5A7078"/>
+                </a:solidFill>
+                <a:latin typeface="Arial" pitchFamily="34" charset="0"/>
+                <a:ea typeface="Arial" pitchFamily="34" charset="-122"/>
+                <a:cs typeface="Arial" pitchFamily="34" charset="-120"/>
+              </a:rPr>
+              <a:t>Источники: Рособрнадзор и «Интерфакс» (ОГЭ-2026), Минпросвещения РФ и РК, Госкомстат Узбекистана (2025/26), «Россия — мои горизонты», Smart Ranking, EdTech-обзоры по РК и УЗ, Superjob (опрос 3000 родителей, 2026), курс ЦБ РФ 86,9 ₽/$ на 04.09.2026. $49 — российская цена, для Казахстана и Узбекистана её нужно адаптировать, поэтому TAM — верхняя граница.</a:t>
+            </a:r>
+            <a:endParaRPr lang="en-US" sz="950" dirty="0"/>
           </a:p>
         </p:txBody>
       </p:sp>

--- a/deck/Career-Navigator.pptx
+++ b/deck/Career-Navigator.pptx
@@ -9714,7 +9714,7 @@
                 <a:ea typeface="Arial" pitchFamily="34" charset="-122"/>
                 <a:cs typeface="Arial" pitchFamily="34" charset="-120"/>
               </a:rPr>
-              <a:t>9 класс в год</a:t>
+              <a:t>9 класс, 2025/26</a:t>
             </a:r>
             <a:endParaRPr lang="en-US" sz="1150" dirty="0"/>
           </a:p>
@@ -9792,7 +9792,7 @@
                 <a:ea typeface="Arial" pitchFamily="34" charset="-122"/>
                 <a:cs typeface="Arial" pitchFamily="34" charset="-120"/>
               </a:rPr>
-              <a:t>Рынок EdTech</a:t>
+              <a:t>Рынок образования, последние данные</a:t>
             </a:r>
             <a:endParaRPr lang="en-US" sz="1150" dirty="0"/>
           </a:p>
@@ -9975,7 +9975,7 @@
                 <a:ea typeface="Arial" pitchFamily="34" charset="-122"/>
                 <a:cs typeface="Arial" pitchFamily="34" charset="-120"/>
               </a:rPr>
-              <a:t>154 млрд ₽ в 2025-м, +12 % за год</a:t>
+              <a:t>EdTech — 154 млрд ₽ за 2025, +12 % за год</a:t>
             </a:r>
             <a:endParaRPr lang="en-US" sz="1250" dirty="0"/>
           </a:p>
@@ -10131,7 +10131,7 @@
                 <a:ea typeface="Arial" pitchFamily="34" charset="-122"/>
                 <a:cs typeface="Arial" pitchFamily="34" charset="-120"/>
               </a:rPr>
-              <a:t>45 млрд ₸ в 2025-м, +20 % в 2024-м</a:t>
+              <a:t>EdTech — 45 млрд ₸ за 2025 (МЦРИАП)</a:t>
             </a:r>
             <a:endParaRPr lang="en-US" sz="1250" dirty="0"/>
           </a:p>
@@ -10314,7 +10314,7 @@
                 <a:ea typeface="Arial" pitchFamily="34" charset="-122"/>
                 <a:cs typeface="Arial" pitchFamily="34" charset="-120"/>
               </a:rPr>
-              <a:t>126 млрд сумов, +94 % за год</a:t>
+              <a:t>Образование — 23,8 трлн сумов за I п/г 2026, +22,7 %</a:t>
             </a:r>
             <a:endParaRPr lang="en-US" sz="1250" dirty="0"/>
           </a:p>
@@ -10536,7 +10536,7 @@
                 <a:ea typeface="Arial" pitchFamily="34" charset="-122"/>
                 <a:cs typeface="Arial" pitchFamily="34" charset="-120"/>
               </a:rPr>
-              <a:t>В России профориентация обязательна в школах с 1 сентября 2023 года — курс «Россия — мои горизонты», 8,4 млн школьников. Требование есть, инструмента нет.</a:t>
+              <a:t>В России профориентация обязательна во всех школах с 1 сентября 2023 года: курс «Россия — мои горизонты», еженедельно в 6–11 классах. Требование есть, инструмента нет.</a:t>
             </a:r>
             <a:endParaRPr lang="en-US" sz="1300" dirty="0"/>
           </a:p>
@@ -11058,7 +11058,7 @@
                 <a:ea typeface="Arial" pitchFamily="34" charset="-122"/>
                 <a:cs typeface="Arial" pitchFamily="34" charset="-120"/>
               </a:rPr>
-              <a:t>Источники: Рособрнадзор и «Интерфакс» (ОГЭ-2026), Минпросвещения РФ и РК, Госкомстат Узбекистана (2025/26), «Россия — мои горизонты», Smart Ranking, EdTech-обзоры по РК и УЗ, Superjob (опрос 3000 родителей, 2026), курс ЦБ РФ 86,9 ₽/$ на 04.09.2026. $49 — российская цена, для Казахстана и Узбекистана её нужно адаптировать, поэтому TAM — верхняя граница.</a:t>
+              <a:t>Данные по школам и ученикам — 2025/26 учебный год. Рыночные показатели — последние опубликованные, год указан у каждой цифры. Источники: Рособрнадзор и «Интерфакс» (ОГЭ-2026), Минпросвещения РФ и РК, Госкомстат Узбекистана, Smart Ranking (EdTech-2025), МЦРИАП, Superjob (опрос 3000 родителей, 2026), курс ЦБ РФ 86,9 ₽/$ на 04.09.2026. $49 — российская цена, для Казахстана и Узбекистана её нужно адаптировать, поэтому TAM — верхняя граница.</a:t>
             </a:r>
             <a:endParaRPr lang="en-US" sz="950" dirty="0"/>
           </a:p>

--- a/deck/Career-Navigator.pptx
+++ b/deck/Career-Navigator.pptx
@@ -600,7 +600,7 @@
           <a:p>
             <a:r>
               <a:rPr lang="en-US" dirty="0"/>
-              <a:t>Ключевой вопрос кейса — за что готовы платить. Ответ: за сопровождение, а не за тест. И начинаем со школ, потому что привлекать подростка поштучно дорого.</a:t>
+              <a:t>Здесь переходим к живой демонстрации. План: заполнить за Даню — карта от AI — открыть линию — сделать шаг — показать, как карта изменилась.</a:t>
             </a:r>
             <a:endParaRPr lang="en-US" dirty="0"/>
           </a:p>
@@ -1216,7 +1216,7 @@
           <a:p>
             <a:r>
               <a:rPr lang="en-US" dirty="0"/>
-              <a:t>Здесь переходим к живой демонстрации. План: заполнить за Даню — карта от AI — открыть линию — сделать шаг — показать, как карта изменилась.</a:t>
+              <a:t>Отвечаем на главный вопрос жюри: где здесь AI, а не обёртка вокруг чата. Ответ — в разделении: модель связывает и объясняет, факты берёт код из справочника, и есть fallback.</a:t>
             </a:r>
             <a:endParaRPr lang="en-US" dirty="0"/>
           </a:p>
@@ -1304,7 +1304,7 @@
           <a:p>
             <a:r>
               <a:rPr lang="en-US" dirty="0"/>
-              <a:t>Отвечаем на главный вопрос жюри: где здесь AI, а не обёртка вокруг чата. Ответ — в разделении: модель связывает и объясняет, факты берёт код из справочника, и есть fallback.</a:t>
+              <a:t>Рынок — три страны, потому что продукт языконезависим и проблема одинаковая. Главное: 2,7 миллиона девятиклассников каждый год, и спрос со стороны школ уже создан государством — в России профориентация обязательна с 2023 года, требование есть, а инструмента нет. Второе главное: семья девятиклассника уже тратит около 250 долларов в месяц на подготовку, наши 6 долларов — это два процента. TAM, SAM и SOM — наш собственный расчёт от числа учеников, а не чужая оценка рынка, и мы честно это подписываем.</a:t>
             </a:r>
             <a:endParaRPr lang="en-US" dirty="0"/>
           </a:p>
@@ -1392,7 +1392,7 @@
           <a:p>
             <a:r>
               <a:rPr lang="en-US" dirty="0"/>
-              <a:t>Рынок — три страны, потому что продукт языконезависим и проблема одинаковая. Главное: 2,7 миллиона девятиклассников каждый год, и спрос со стороны школ уже создан государством — в России профориентация обязательна с 2023 года, требование есть, а инструмента нет. Второе главное: семья девятиклассника уже тратит около 250 долларов в месяц на подготовку, наши 6 долларов — это два процента. TAM, SAM и SOM — наш собственный расчёт от числа учеников, а не чужая оценка рынка, и мы честно это подписываем.</a:t>
+              <a:t>Ключевой вопрос кейса — за что готовы платить. Ответ: за сопровождение, а не за тест. И начинаем со школ, потому что привлекать подростка поштучно дорого.</a:t>
             </a:r>
             <a:endParaRPr lang="en-US" dirty="0"/>
           </a:p>
@@ -2216,6 +2216,13 @@
 <file path=ppt/slides/slide10.xml><?xml version="1.0" encoding="utf-8"?>
 <p:sld xmlns:a="http://schemas.openxmlformats.org/drawingml/2006/main" xmlns:r="http://schemas.openxmlformats.org/officeDocument/2006/relationships" xmlns:p="http://schemas.openxmlformats.org/presentationml/2006/main">
   <p:cSld name="Slide 10">
+    <p:bg>
+      <p:bgPr>
+        <a:solidFill>
+          <a:srgbClr val="0E2A33"/>
+        </a:solidFill>
+      </p:bgPr>
+    </p:bg>
     <p:spTree>
       <p:nvGrpSpPr>
         <p:cNvPr id="1" name=""/>
@@ -2255,17 +2262,17 @@
               <a:buNone/>
             </a:pPr>
             <a:r>
-              <a:rPr lang="en-US" sz="3100" b="1" dirty="0">
-                <a:solidFill>
-                  <a:srgbClr val="16242A"/>
+              <a:rPr lang="en-US" sz="3400" b="1" dirty="0">
+                <a:solidFill>
+                  <a:srgbClr val="FFFFFF"/>
                 </a:solidFill>
                 <a:latin typeface="Cambria" pitchFamily="34" charset="0"/>
                 <a:ea typeface="Cambria" pitchFamily="34" charset="-122"/>
                 <a:cs typeface="Cambria" pitchFamily="34" charset="-120"/>
               </a:rPr>
-              <a:t>За разовый тест не платят. За сопровождение — платят.</a:t>
-            </a:r>
-            <a:endParaRPr lang="en-US" sz="3100" dirty="0"/>
+              <a:t>Прототип работает — это не мокап</a:t>
+            </a:r>
+            <a:endParaRPr lang="en-US" sz="3400" dirty="0"/>
           </a:p>
         </p:txBody>
       </p:sp>
@@ -2296,13 +2303,13 @@
             <a:r>
               <a:rPr lang="en-US" sz="1500" dirty="0">
                 <a:solidFill>
-                  <a:srgbClr val="5A7078"/>
-                </a:solidFill>
-                <a:latin typeface="Arial" pitchFamily="34" charset="0"/>
-                <a:ea typeface="Arial" pitchFamily="34" charset="-122"/>
-                <a:cs typeface="Arial" pitchFamily="34" charset="-120"/>
-              </a:rPr>
-              <a:t>Ценность растёт три года: чем дольше ученик пользуется картой, тем она точнее. Пользуется ученик — платит взрослый.</a:t>
+                  <a:srgbClr val="A9C9D2"/>
+                </a:solidFill>
+                <a:latin typeface="Arial" pitchFamily="34" charset="0"/>
+                <a:ea typeface="Arial" pitchFamily="34" charset="-122"/>
+                <a:cs typeface="Arial" pitchFamily="34" charset="-120"/>
+              </a:rPr>
+              <a:t>Открывается по ссылке с любого ноутбука, без установки</a:t>
             </a:r>
             <a:endParaRPr lang="en-US" sz="1500" dirty="0"/>
           </a:p>
@@ -2316,20 +2323,20 @@
         </p:nvSpPr>
         <p:spPr>
           <a:xfrm>
-            <a:off x="685800" y="1874520"/>
-            <a:ext cx="3383280" cy="2148840"/>
+            <a:off x="685800" y="1920240"/>
+            <a:ext cx="3383280" cy="1691640"/>
           </a:xfrm>
           <a:prstGeom prst="roundRect">
             <a:avLst>
-              <a:gd name="adj" fmla="val 3404"/>
+              <a:gd name="adj" fmla="val 4324"/>
             </a:avLst>
           </a:prstGeom>
           <a:solidFill>
-            <a:srgbClr val="F0F5F6"/>
+            <a:srgbClr val="17414D"/>
           </a:solidFill>
           <a:ln w="12700">
             <a:solidFill>
-              <a:srgbClr val="F0F5F6"/>
+              <a:srgbClr val="17414D"/>
             </a:solidFill>
             <a:prstDash val="solid"/>
           </a:ln>
@@ -2337,13 +2344,454 @@
       </p:sp>
       <p:sp>
         <p:nvSpPr>
-          <p:cNvPr id="5" name="Shape 3"/>
+          <p:cNvPr id="5" name="Text 3"/>
+          <p:cNvSpPr txBox="1"/>
+          <p:nvPr/>
+        </p:nvSpPr>
+        <p:spPr>
+          <a:xfrm>
+            <a:off x="1005840" y="2103120"/>
+            <a:ext cx="2743200" cy="640080"/>
+          </a:xfrm>
+          <a:prstGeom prst="rect">
+            <a:avLst/>
+          </a:prstGeom>
+          <a:noFill/>
+          <a:ln/>
+        </p:spPr>
+        <p:txBody>
+          <a:bodyPr wrap="square" lIns="0" tIns="0" rIns="0" bIns="0" rtlCol="0" anchor="ctr"/>
+          <a:lstStyle/>
+          <a:p>
+            <a:pPr indent="0" marL="0">
+              <a:buNone/>
+            </a:pPr>
+            <a:r>
+              <a:rPr lang="en-US" sz="4000" b="1" dirty="0">
+                <a:solidFill>
+                  <a:srgbClr val="FFFFFF"/>
+                </a:solidFill>
+                <a:latin typeface="Cambria" pitchFamily="34" charset="0"/>
+                <a:ea typeface="Cambria" pitchFamily="34" charset="-122"/>
+                <a:cs typeface="Cambria" pitchFamily="34" charset="-120"/>
+              </a:rPr>
+              <a:t>8 сек</a:t>
+            </a:r>
+            <a:endParaRPr lang="en-US" sz="4000" dirty="0"/>
+          </a:p>
+        </p:txBody>
+      </p:sp>
+      <p:sp>
+        <p:nvSpPr>
+          <p:cNvPr id="6" name="Text 4"/>
+          <p:cNvSpPr txBox="1"/>
+          <p:nvPr/>
+        </p:nvSpPr>
+        <p:spPr>
+          <a:xfrm>
+            <a:off x="1005840" y="2788920"/>
+            <a:ext cx="2743200" cy="640080"/>
+          </a:xfrm>
+          <a:prstGeom prst="rect">
+            <a:avLst/>
+          </a:prstGeom>
+          <a:noFill/>
+          <a:ln/>
+        </p:spPr>
+        <p:txBody>
+          <a:bodyPr wrap="square" lIns="0" tIns="0" rIns="0" bIns="0" rtlCol="0" anchor="ctr"/>
+          <a:lstStyle/>
+          <a:p>
+            <a:pPr indent="0" marL="0">
+              <a:lnSpc>
+                <a:spcPct val="115000"/>
+              </a:lnSpc>
+              <a:buNone/>
+            </a:pPr>
+            <a:r>
+              <a:rPr lang="en-US" sz="1250" dirty="0">
+                <a:solidFill>
+                  <a:srgbClr val="A9C9D2"/>
+                </a:solidFill>
+                <a:latin typeface="Arial" pitchFamily="34" charset="0"/>
+                <a:ea typeface="Arial" pitchFamily="34" charset="-122"/>
+                <a:cs typeface="Arial" pitchFamily="34" charset="-120"/>
+              </a:rPr>
+              <a:t>карта собирается живым AI</a:t>
+            </a:r>
+            <a:endParaRPr lang="en-US" sz="1250" dirty="0"/>
+          </a:p>
+          <a:p>
+            <a:pPr indent="0" marL="0">
+              <a:lnSpc>
+                <a:spcPct val="115000"/>
+              </a:lnSpc>
+              <a:buNone/>
+            </a:pPr>
+            <a:r>
+              <a:rPr lang="en-US" sz="1250" dirty="0">
+                <a:solidFill>
+                  <a:srgbClr val="A9C9D2"/>
+                </a:solidFill>
+                <a:latin typeface="Arial" pitchFamily="34" charset="0"/>
+                <a:ea typeface="Arial" pitchFamily="34" charset="-122"/>
+                <a:cs typeface="Arial" pitchFamily="34" charset="-120"/>
+              </a:rPr>
+              <a:t>под конкретного ученика</a:t>
+            </a:r>
+            <a:endParaRPr lang="en-US" sz="1250" dirty="0"/>
+          </a:p>
+        </p:txBody>
+      </p:sp>
+      <p:sp>
+        <p:nvSpPr>
+          <p:cNvPr id="7" name="Shape 5"/>
           <p:cNvSpPr/>
           <p:nvPr/>
         </p:nvSpPr>
         <p:spPr>
           <a:xfrm>
-            <a:off x="932688" y="2075688"/>
+            <a:off x="4480560" y="1920240"/>
+            <a:ext cx="3383280" cy="1691640"/>
+          </a:xfrm>
+          <a:prstGeom prst="roundRect">
+            <a:avLst>
+              <a:gd name="adj" fmla="val 4324"/>
+            </a:avLst>
+          </a:prstGeom>
+          <a:solidFill>
+            <a:srgbClr val="17414D"/>
+          </a:solidFill>
+          <a:ln w="12700">
+            <a:solidFill>
+              <a:srgbClr val="17414D"/>
+            </a:solidFill>
+            <a:prstDash val="solid"/>
+          </a:ln>
+        </p:spPr>
+      </p:sp>
+      <p:sp>
+        <p:nvSpPr>
+          <p:cNvPr id="8" name="Text 6"/>
+          <p:cNvSpPr txBox="1"/>
+          <p:nvPr/>
+        </p:nvSpPr>
+        <p:spPr>
+          <a:xfrm>
+            <a:off x="4800600" y="2103120"/>
+            <a:ext cx="2743200" cy="640080"/>
+          </a:xfrm>
+          <a:prstGeom prst="rect">
+            <a:avLst/>
+          </a:prstGeom>
+          <a:noFill/>
+          <a:ln/>
+        </p:spPr>
+        <p:txBody>
+          <a:bodyPr wrap="square" lIns="0" tIns="0" rIns="0" bIns="0" rtlCol="0" anchor="ctr"/>
+          <a:lstStyle/>
+          <a:p>
+            <a:pPr indent="0" marL="0">
+              <a:buNone/>
+            </a:pPr>
+            <a:r>
+              <a:rPr lang="en-US" sz="4000" b="1" dirty="0">
+                <a:solidFill>
+                  <a:srgbClr val="FFFFFF"/>
+                </a:solidFill>
+                <a:latin typeface="Cambria" pitchFamily="34" charset="0"/>
+                <a:ea typeface="Cambria" pitchFamily="34" charset="-122"/>
+                <a:cs typeface="Cambria" pitchFamily="34" charset="-120"/>
+              </a:rPr>
+              <a:t>3–5</a:t>
+            </a:r>
+            <a:endParaRPr lang="en-US" sz="4000" dirty="0"/>
+          </a:p>
+        </p:txBody>
+      </p:sp>
+      <p:sp>
+        <p:nvSpPr>
+          <p:cNvPr id="9" name="Text 7"/>
+          <p:cNvSpPr txBox="1"/>
+          <p:nvPr/>
+        </p:nvSpPr>
+        <p:spPr>
+          <a:xfrm>
+            <a:off x="4800600" y="2788920"/>
+            <a:ext cx="2743200" cy="640080"/>
+          </a:xfrm>
+          <a:prstGeom prst="rect">
+            <a:avLst/>
+          </a:prstGeom>
+          <a:noFill/>
+          <a:ln/>
+        </p:spPr>
+        <p:txBody>
+          <a:bodyPr wrap="square" lIns="0" tIns="0" rIns="0" bIns="0" rtlCol="0" anchor="ctr"/>
+          <a:lstStyle/>
+          <a:p>
+            <a:pPr indent="0" marL="0">
+              <a:lnSpc>
+                <a:spcPct val="115000"/>
+              </a:lnSpc>
+              <a:buNone/>
+            </a:pPr>
+            <a:r>
+              <a:rPr lang="en-US" sz="1250" dirty="0">
+                <a:solidFill>
+                  <a:srgbClr val="A9C9D2"/>
+                </a:solidFill>
+                <a:latin typeface="Arial" pitchFamily="34" charset="0"/>
+                <a:ea typeface="Arial" pitchFamily="34" charset="-122"/>
+                <a:cs typeface="Arial" pitchFamily="34" charset="-120"/>
+              </a:rPr>
+              <a:t>линий, у каждой — объяснение</a:t>
+            </a:r>
+            <a:endParaRPr lang="en-US" sz="1250" dirty="0"/>
+          </a:p>
+          <a:p>
+            <a:pPr indent="0" marL="0">
+              <a:lnSpc>
+                <a:spcPct val="115000"/>
+              </a:lnSpc>
+              <a:buNone/>
+            </a:pPr>
+            <a:r>
+              <a:rPr lang="en-US" sz="1250" dirty="0">
+                <a:solidFill>
+                  <a:srgbClr val="A9C9D2"/>
+                </a:solidFill>
+                <a:latin typeface="Arial" pitchFamily="34" charset="0"/>
+                <a:ea typeface="Arial" pitchFamily="34" charset="-122"/>
+                <a:cs typeface="Arial" pitchFamily="34" charset="-120"/>
+              </a:rPr>
+              <a:t>«почему это про тебя»</a:t>
+            </a:r>
+            <a:endParaRPr lang="en-US" sz="1250" dirty="0"/>
+          </a:p>
+        </p:txBody>
+      </p:sp>
+      <p:sp>
+        <p:nvSpPr>
+          <p:cNvPr id="10" name="Shape 8"/>
+          <p:cNvSpPr/>
+          <p:nvPr/>
+        </p:nvSpPr>
+        <p:spPr>
+          <a:xfrm>
+            <a:off x="8275320" y="1920240"/>
+            <a:ext cx="3383280" cy="1691640"/>
+          </a:xfrm>
+          <a:prstGeom prst="roundRect">
+            <a:avLst>
+              <a:gd name="adj" fmla="val 4324"/>
+            </a:avLst>
+          </a:prstGeom>
+          <a:solidFill>
+            <a:srgbClr val="17414D"/>
+          </a:solidFill>
+          <a:ln w="12700">
+            <a:solidFill>
+              <a:srgbClr val="17414D"/>
+            </a:solidFill>
+            <a:prstDash val="solid"/>
+          </a:ln>
+        </p:spPr>
+      </p:sp>
+      <p:sp>
+        <p:nvSpPr>
+          <p:cNvPr id="11" name="Text 9"/>
+          <p:cNvSpPr txBox="1"/>
+          <p:nvPr/>
+        </p:nvSpPr>
+        <p:spPr>
+          <a:xfrm>
+            <a:off x="8595360" y="2103120"/>
+            <a:ext cx="2743200" cy="640080"/>
+          </a:xfrm>
+          <a:prstGeom prst="rect">
+            <a:avLst/>
+          </a:prstGeom>
+          <a:noFill/>
+          <a:ln/>
+        </p:spPr>
+        <p:txBody>
+          <a:bodyPr wrap="square" lIns="0" tIns="0" rIns="0" bIns="0" rtlCol="0" anchor="ctr"/>
+          <a:lstStyle/>
+          <a:p>
+            <a:pPr indent="0" marL="0">
+              <a:buNone/>
+            </a:pPr>
+            <a:r>
+              <a:rPr lang="en-US" sz="4000" b="1" dirty="0">
+                <a:solidFill>
+                  <a:srgbClr val="FFFFFF"/>
+                </a:solidFill>
+                <a:latin typeface="Cambria" pitchFamily="34" charset="0"/>
+                <a:ea typeface="Cambria" pitchFamily="34" charset="-122"/>
+                <a:cs typeface="Cambria" pitchFamily="34" charset="-120"/>
+              </a:rPr>
+              <a:t>4</a:t>
+            </a:r>
+            <a:endParaRPr lang="en-US" sz="4000" dirty="0"/>
+          </a:p>
+        </p:txBody>
+      </p:sp>
+      <p:sp>
+        <p:nvSpPr>
+          <p:cNvPr id="12" name="Text 10"/>
+          <p:cNvSpPr txBox="1"/>
+          <p:nvPr/>
+        </p:nvSpPr>
+        <p:spPr>
+          <a:xfrm>
+            <a:off x="8595360" y="2788920"/>
+            <a:ext cx="2743200" cy="640080"/>
+          </a:xfrm>
+          <a:prstGeom prst="rect">
+            <a:avLst/>
+          </a:prstGeom>
+          <a:noFill/>
+          <a:ln/>
+        </p:spPr>
+        <p:txBody>
+          <a:bodyPr wrap="square" lIns="0" tIns="0" rIns="0" bIns="0" rtlCol="0" anchor="ctr"/>
+          <a:lstStyle/>
+          <a:p>
+            <a:pPr indent="0" marL="0">
+              <a:lnSpc>
+                <a:spcPct val="115000"/>
+              </a:lnSpc>
+              <a:buNone/>
+            </a:pPr>
+            <a:r>
+              <a:rPr lang="en-US" sz="1250" dirty="0">
+                <a:solidFill>
+                  <a:srgbClr val="A9C9D2"/>
+                </a:solidFill>
+                <a:latin typeface="Arial" pitchFamily="34" charset="0"/>
+                <a:ea typeface="Arial" pitchFamily="34" charset="-122"/>
+                <a:cs typeface="Arial" pitchFamily="34" charset="-120"/>
+              </a:rPr>
+              <a:t>региона поступления: СНГ,</a:t>
+            </a:r>
+            <a:endParaRPr lang="en-US" sz="1250" dirty="0"/>
+          </a:p>
+          <a:p>
+            <a:pPr indent="0" marL="0">
+              <a:lnSpc>
+                <a:spcPct val="115000"/>
+              </a:lnSpc>
+              <a:buNone/>
+            </a:pPr>
+            <a:r>
+              <a:rPr lang="en-US" sz="1250" dirty="0">
+                <a:solidFill>
+                  <a:srgbClr val="A9C9D2"/>
+                </a:solidFill>
+                <a:latin typeface="Arial" pitchFamily="34" charset="0"/>
+                <a:ea typeface="Arial" pitchFamily="34" charset="-122"/>
+                <a:cs typeface="Arial" pitchFamily="34" charset="-120"/>
+              </a:rPr>
+              <a:t>Европа, США, Азия</a:t>
+            </a:r>
+            <a:endParaRPr lang="en-US" sz="1250" dirty="0"/>
+          </a:p>
+        </p:txBody>
+      </p:sp>
+      <p:sp>
+        <p:nvSpPr>
+          <p:cNvPr id="13" name="Shape 11"/>
+          <p:cNvSpPr/>
+          <p:nvPr/>
+        </p:nvSpPr>
+        <p:spPr>
+          <a:xfrm>
+            <a:off x="704088" y="4023360"/>
+            <a:ext cx="237744" cy="237744"/>
+          </a:xfrm>
+          <a:prstGeom prst="ellipse">
+            <a:avLst/>
+          </a:prstGeom>
+          <a:solidFill>
+            <a:srgbClr val="FFFFFF"/>
+          </a:solidFill>
+          <a:ln w="25400">
+            <a:solidFill>
+              <a:srgbClr val="2B6BE4"/>
+            </a:solidFill>
+            <a:prstDash val="solid"/>
+          </a:ln>
+        </p:spPr>
+      </p:sp>
+      <p:sp>
+        <p:nvSpPr>
+          <p:cNvPr id="14" name="Text 12"/>
+          <p:cNvSpPr txBox="1"/>
+          <p:nvPr/>
+        </p:nvSpPr>
+        <p:spPr>
+          <a:xfrm>
+            <a:off x="1097280" y="3977640"/>
+            <a:ext cx="5029200" cy="640080"/>
+          </a:xfrm>
+          <a:prstGeom prst="rect">
+            <a:avLst/>
+          </a:prstGeom>
+          <a:noFill/>
+          <a:ln/>
+        </p:spPr>
+        <p:txBody>
+          <a:bodyPr wrap="square" lIns="0" tIns="0" rIns="0" bIns="0" rtlCol="0" anchor="ctr"/>
+          <a:lstStyle/>
+          <a:p>
+            <a:pPr indent="0" marL="0">
+              <a:lnSpc>
+                <a:spcPct val="115000"/>
+              </a:lnSpc>
+              <a:buNone/>
+            </a:pPr>
+            <a:r>
+              <a:rPr lang="en-US" sz="1300" b="1" dirty="0">
+                <a:solidFill>
+                  <a:srgbClr val="FFFFFF"/>
+                </a:solidFill>
+                <a:latin typeface="Arial" pitchFamily="34" charset="0"/>
+                <a:ea typeface="Arial" pitchFamily="34" charset="-122"/>
+                <a:cs typeface="Arial" pitchFamily="34" charset="-120"/>
+              </a:rPr>
+              <a:t>Разговор вместо теста  </a:t>
+            </a:r>
+            <a:pPr indent="0" marL="0">
+              <a:lnSpc>
+                <a:spcPct val="115000"/>
+              </a:lnSpc>
+              <a:buNone/>
+            </a:pPr>
+            <a:r>
+              <a:rPr lang="en-US" sz="1300" dirty="0">
+                <a:solidFill>
+                  <a:srgbClr val="A9C9D2"/>
+                </a:solidFill>
+                <a:latin typeface="Arial" pitchFamily="34" charset="0"/>
+                <a:ea typeface="Arial" pitchFamily="34" charset="-122"/>
+                <a:cs typeface="Arial" pitchFamily="34" charset="-120"/>
+              </a:rPr>
+              <a:t>пять вопросов, под каждым — зачем спрашиваем</a:t>
+            </a:r>
+            <a:endParaRPr lang="en-US" sz="1300" dirty="0"/>
+          </a:p>
+        </p:txBody>
+      </p:sp>
+      <p:sp>
+        <p:nvSpPr>
+          <p:cNvPr id="15" name="Shape 13"/>
+          <p:cNvSpPr/>
+          <p:nvPr/>
+        </p:nvSpPr>
+        <p:spPr>
+          <a:xfrm>
+            <a:off x="6327648" y="4023360"/>
             <a:ext cx="237744" cy="237744"/>
           </a:xfrm>
           <a:prstGeom prst="ellipse">
@@ -2362,92 +2810,14 @@
       </p:sp>
       <p:sp>
         <p:nvSpPr>
-          <p:cNvPr id="6" name="Text 4"/>
-          <p:cNvSpPr txBox="1"/>
-          <p:nvPr/>
-        </p:nvSpPr>
-        <p:spPr>
-          <a:xfrm>
-            <a:off x="1325880" y="2029968"/>
-            <a:ext cx="2560320" cy="320040"/>
-          </a:xfrm>
-          <a:prstGeom prst="rect">
-            <a:avLst/>
-          </a:prstGeom>
-          <a:noFill/>
-          <a:ln/>
-        </p:spPr>
-        <p:txBody>
-          <a:bodyPr wrap="square" lIns="0" tIns="0" rIns="0" bIns="0" rtlCol="0" anchor="ctr"/>
-          <a:lstStyle/>
-          <a:p>
-            <a:pPr indent="0" marL="0">
-              <a:buNone/>
-            </a:pPr>
-            <a:r>
-              <a:rPr lang="en-US" sz="1700" b="1" dirty="0">
-                <a:solidFill>
-                  <a:srgbClr val="16242A"/>
-                </a:solidFill>
-                <a:latin typeface="Cambria" pitchFamily="34" charset="0"/>
-                <a:ea typeface="Cambria" pitchFamily="34" charset="-122"/>
-                <a:cs typeface="Cambria" pitchFamily="34" charset="-120"/>
-              </a:rPr>
-              <a:t>Родитель</a:t>
-            </a:r>
-            <a:endParaRPr lang="en-US" sz="1700" dirty="0"/>
-          </a:p>
-        </p:txBody>
-      </p:sp>
-      <p:sp>
-        <p:nvSpPr>
-          <p:cNvPr id="7" name="Text 5"/>
-          <p:cNvSpPr txBox="1"/>
-          <p:nvPr/>
-        </p:nvSpPr>
-        <p:spPr>
-          <a:xfrm>
-            <a:off x="1005840" y="2450592"/>
-            <a:ext cx="2743200" cy="320040"/>
-          </a:xfrm>
-          <a:prstGeom prst="rect">
-            <a:avLst/>
-          </a:prstGeom>
-          <a:noFill/>
-          <a:ln/>
-        </p:spPr>
-        <p:txBody>
-          <a:bodyPr wrap="square" lIns="0" tIns="0" rIns="0" bIns="0" rtlCol="0" anchor="ctr"/>
-          <a:lstStyle/>
-          <a:p>
-            <a:pPr indent="0" marL="0">
-              <a:buNone/>
-            </a:pPr>
-            <a:r>
-              <a:rPr lang="en-US" sz="1500" b="1" dirty="0">
-                <a:solidFill>
-                  <a:srgbClr val="2E9E5B"/>
-                </a:solidFill>
-                <a:latin typeface="Arial" pitchFamily="34" charset="0"/>
-                <a:ea typeface="Arial" pitchFamily="34" charset="-122"/>
-                <a:cs typeface="Arial" pitchFamily="34" charset="-120"/>
-              </a:rPr>
-              <a:t>$6 / мес  ·  $49 / год</a:t>
-            </a:r>
-            <a:endParaRPr lang="en-US" sz="1500" dirty="0"/>
-          </a:p>
-        </p:txBody>
-      </p:sp>
-      <p:sp>
-        <p:nvSpPr>
-          <p:cNvPr id="8" name="Text 6"/>
-          <p:cNvSpPr txBox="1"/>
-          <p:nvPr/>
-        </p:nvSpPr>
-        <p:spPr>
-          <a:xfrm>
-            <a:off x="1005840" y="2834640"/>
-            <a:ext cx="2743200" cy="1005840"/>
+          <p:cNvPr id="16" name="Text 14"/>
+          <p:cNvSpPr txBox="1"/>
+          <p:nvPr/>
+        </p:nvSpPr>
+        <p:spPr>
+          <a:xfrm>
+            <a:off x="6720840" y="3977640"/>
+            <a:ext cx="5029200" cy="640080"/>
           </a:xfrm>
           <a:prstGeom prst="rect">
             <a:avLst/>
@@ -2461,233 +2831,51 @@
           <a:p>
             <a:pPr indent="0" marL="0">
               <a:lnSpc>
-                <a:spcPct val="120000"/>
+                <a:spcPct val="115000"/>
               </a:lnSpc>
               <a:buNone/>
             </a:pPr>
             <a:r>
-              <a:rPr lang="en-US" sz="1250" dirty="0">
-                <a:solidFill>
-                  <a:srgbClr val="5A7078"/>
-                </a:solidFill>
-                <a:latin typeface="Arial" pitchFamily="34" charset="0"/>
-                <a:ea typeface="Arial" pitchFamily="34" charset="-122"/>
-                <a:cs typeface="Arial" pitchFamily="34" charset="-120"/>
-              </a:rPr>
-              <a:t>Спокойствие: у ребёнка есть план, и он им занимается. Дешевле одной сессии консультанта ($50–150).</a:t>
-            </a:r>
-            <a:endParaRPr lang="en-US" sz="1250" dirty="0"/>
-          </a:p>
-        </p:txBody>
-      </p:sp>
-      <p:sp>
-        <p:nvSpPr>
-          <p:cNvPr id="9" name="Shape 7"/>
+              <a:rPr lang="en-US" sz="1300" b="1" dirty="0">
+                <a:solidFill>
+                  <a:srgbClr val="FFFFFF"/>
+                </a:solidFill>
+                <a:latin typeface="Arial" pitchFamily="34" charset="0"/>
+                <a:ea typeface="Arial" pitchFamily="34" charset="-122"/>
+                <a:cs typeface="Arial" pitchFamily="34" charset="-120"/>
+              </a:rPr>
+              <a:t>Карта  </a:t>
+            </a:r>
+            <a:pPr indent="0" marL="0">
+              <a:lnSpc>
+                <a:spcPct val="115000"/>
+              </a:lnSpc>
+              <a:buNone/>
+            </a:pPr>
+            <a:r>
+              <a:rPr lang="en-US" sz="1300" dirty="0">
+                <a:solidFill>
+                  <a:srgbClr val="A9C9D2"/>
+                </a:solidFill>
+                <a:latin typeface="Arial" pitchFamily="34" charset="0"/>
+                <a:ea typeface="Arial" pitchFamily="34" charset="-122"/>
+                <a:cs typeface="Arial" pitchFamily="34" charset="-120"/>
+              </a:rPr>
+              <a:t>клик по станции: что это и на каких линиях нужно</a:t>
+            </a:r>
+            <a:endParaRPr lang="en-US" sz="1300" dirty="0"/>
+          </a:p>
+        </p:txBody>
+      </p:sp>
+      <p:sp>
+        <p:nvSpPr>
+          <p:cNvPr id="17" name="Shape 15"/>
           <p:cNvSpPr/>
           <p:nvPr/>
         </p:nvSpPr>
         <p:spPr>
           <a:xfrm>
-            <a:off x="4480560" y="1874520"/>
-            <a:ext cx="3383280" cy="2148840"/>
-          </a:xfrm>
-          <a:prstGeom prst="roundRect">
-            <a:avLst>
-              <a:gd name="adj" fmla="val 3404"/>
-            </a:avLst>
-          </a:prstGeom>
-          <a:solidFill>
-            <a:srgbClr val="F0F5F6"/>
-          </a:solidFill>
-          <a:ln w="12700">
-            <a:solidFill>
-              <a:srgbClr val="F0F5F6"/>
-            </a:solidFill>
-            <a:prstDash val="solid"/>
-          </a:ln>
-        </p:spPr>
-      </p:sp>
-      <p:sp>
-        <p:nvSpPr>
-          <p:cNvPr id="10" name="Shape 8"/>
-          <p:cNvSpPr/>
-          <p:nvPr/>
-        </p:nvSpPr>
-        <p:spPr>
-          <a:xfrm>
-            <a:off x="4727448" y="2075688"/>
-            <a:ext cx="237744" cy="237744"/>
-          </a:xfrm>
-          <a:prstGeom prst="ellipse">
-            <a:avLst/>
-          </a:prstGeom>
-          <a:solidFill>
-            <a:srgbClr val="FFFFFF"/>
-          </a:solidFill>
-          <a:ln w="25400">
-            <a:solidFill>
-              <a:srgbClr val="2B6BE4"/>
-            </a:solidFill>
-            <a:prstDash val="solid"/>
-          </a:ln>
-        </p:spPr>
-      </p:sp>
-      <p:sp>
-        <p:nvSpPr>
-          <p:cNvPr id="11" name="Text 9"/>
-          <p:cNvSpPr txBox="1"/>
-          <p:nvPr/>
-        </p:nvSpPr>
-        <p:spPr>
-          <a:xfrm>
-            <a:off x="5120640" y="2029968"/>
-            <a:ext cx="2560320" cy="320040"/>
-          </a:xfrm>
-          <a:prstGeom prst="rect">
-            <a:avLst/>
-          </a:prstGeom>
-          <a:noFill/>
-          <a:ln/>
-        </p:spPr>
-        <p:txBody>
-          <a:bodyPr wrap="square" lIns="0" tIns="0" rIns="0" bIns="0" rtlCol="0" anchor="ctr"/>
-          <a:lstStyle/>
-          <a:p>
-            <a:pPr indent="0" marL="0">
-              <a:buNone/>
-            </a:pPr>
-            <a:r>
-              <a:rPr lang="en-US" sz="1700" b="1" dirty="0">
-                <a:solidFill>
-                  <a:srgbClr val="16242A"/>
-                </a:solidFill>
-                <a:latin typeface="Cambria" pitchFamily="34" charset="0"/>
-                <a:ea typeface="Cambria" pitchFamily="34" charset="-122"/>
-                <a:cs typeface="Cambria" pitchFamily="34" charset="-120"/>
-              </a:rPr>
-              <a:t>Школа</a:t>
-            </a:r>
-            <a:endParaRPr lang="en-US" sz="1700" dirty="0"/>
-          </a:p>
-        </p:txBody>
-      </p:sp>
-      <p:sp>
-        <p:nvSpPr>
-          <p:cNvPr id="12" name="Text 10"/>
-          <p:cNvSpPr txBox="1"/>
-          <p:nvPr/>
-        </p:nvSpPr>
-        <p:spPr>
-          <a:xfrm>
-            <a:off x="4800600" y="2450592"/>
-            <a:ext cx="2743200" cy="320040"/>
-          </a:xfrm>
-          <a:prstGeom prst="rect">
-            <a:avLst/>
-          </a:prstGeom>
-          <a:noFill/>
-          <a:ln/>
-        </p:spPr>
-        <p:txBody>
-          <a:bodyPr wrap="square" lIns="0" tIns="0" rIns="0" bIns="0" rtlCol="0" anchor="ctr"/>
-          <a:lstStyle/>
-          <a:p>
-            <a:pPr indent="0" marL="0">
-              <a:buNone/>
-            </a:pPr>
-            <a:r>
-              <a:rPr lang="en-US" sz="1500" b="1" dirty="0">
-                <a:solidFill>
-                  <a:srgbClr val="2B6BE4"/>
-                </a:solidFill>
-                <a:latin typeface="Arial" pitchFamily="34" charset="0"/>
-                <a:ea typeface="Arial" pitchFamily="34" charset="-122"/>
-                <a:cs typeface="Arial" pitchFamily="34" charset="-120"/>
-              </a:rPr>
-              <a:t>$250 / год за класс</a:t>
-            </a:r>
-            <a:endParaRPr lang="en-US" sz="1500" dirty="0"/>
-          </a:p>
-        </p:txBody>
-      </p:sp>
-      <p:sp>
-        <p:nvSpPr>
-          <p:cNvPr id="13" name="Text 11"/>
-          <p:cNvSpPr txBox="1"/>
-          <p:nvPr/>
-        </p:nvSpPr>
-        <p:spPr>
-          <a:xfrm>
-            <a:off x="4800600" y="2834640"/>
-            <a:ext cx="2743200" cy="1005840"/>
-          </a:xfrm>
-          <a:prstGeom prst="rect">
-            <a:avLst/>
-          </a:prstGeom>
-          <a:noFill/>
-          <a:ln/>
-        </p:spPr>
-        <p:txBody>
-          <a:bodyPr wrap="square" lIns="0" tIns="0" rIns="0" bIns="0" rtlCol="0" anchor="ctr"/>
-          <a:lstStyle/>
-          <a:p>
-            <a:pPr indent="0" marL="0">
-              <a:lnSpc>
-                <a:spcPct val="120000"/>
-              </a:lnSpc>
-              <a:buNone/>
-            </a:pPr>
-            <a:r>
-              <a:rPr lang="en-US" sz="1250" dirty="0">
-                <a:solidFill>
-                  <a:srgbClr val="5A7078"/>
-                </a:solidFill>
-                <a:latin typeface="Arial" pitchFamily="34" charset="0"/>
-                <a:ea typeface="Arial" pitchFamily="34" charset="-122"/>
-                <a:cs typeface="Arial" pitchFamily="34" charset="-120"/>
-              </a:rPr>
-              <a:t>Около $8 на ученика. Карты всех девятиклассников, кабинет куратора, отчёт «куда смотрят наши ученики».</a:t>
-            </a:r>
-            <a:endParaRPr lang="en-US" sz="1250" dirty="0"/>
-          </a:p>
-        </p:txBody>
-      </p:sp>
-      <p:sp>
-        <p:nvSpPr>
-          <p:cNvPr id="14" name="Shape 12"/>
-          <p:cNvSpPr/>
-          <p:nvPr/>
-        </p:nvSpPr>
-        <p:spPr>
-          <a:xfrm>
-            <a:off x="8275320" y="1874520"/>
-            <a:ext cx="3383280" cy="2148840"/>
-          </a:xfrm>
-          <a:prstGeom prst="roundRect">
-            <a:avLst>
-              <a:gd name="adj" fmla="val 3404"/>
-            </a:avLst>
-          </a:prstGeom>
-          <a:solidFill>
-            <a:srgbClr val="F0F5F6"/>
-          </a:solidFill>
-          <a:ln w="12700">
-            <a:solidFill>
-              <a:srgbClr val="F0F5F6"/>
-            </a:solidFill>
-            <a:prstDash val="solid"/>
-          </a:ln>
-        </p:spPr>
-      </p:sp>
-      <p:sp>
-        <p:nvSpPr>
-          <p:cNvPr id="15" name="Shape 13"/>
-          <p:cNvSpPr/>
-          <p:nvPr/>
-        </p:nvSpPr>
-        <p:spPr>
-          <a:xfrm>
-            <a:off x="8522208" y="2075688"/>
+            <a:off x="704088" y="4773168"/>
             <a:ext cx="237744" cy="237744"/>
           </a:xfrm>
           <a:prstGeom prst="ellipse">
@@ -2706,92 +2894,14 @@
       </p:sp>
       <p:sp>
         <p:nvSpPr>
-          <p:cNvPr id="16" name="Text 14"/>
-          <p:cNvSpPr txBox="1"/>
-          <p:nvPr/>
-        </p:nvSpPr>
-        <p:spPr>
-          <a:xfrm>
-            <a:off x="8915400" y="2029968"/>
-            <a:ext cx="2560320" cy="320040"/>
-          </a:xfrm>
-          <a:prstGeom prst="rect">
-            <a:avLst/>
-          </a:prstGeom>
-          <a:noFill/>
-          <a:ln/>
-        </p:spPr>
-        <p:txBody>
-          <a:bodyPr wrap="square" lIns="0" tIns="0" rIns="0" bIns="0" rtlCol="0" anchor="ctr"/>
-          <a:lstStyle/>
-          <a:p>
-            <a:pPr indent="0" marL="0">
-              <a:buNone/>
-            </a:pPr>
-            <a:r>
-              <a:rPr lang="en-US" sz="1700" b="1" dirty="0">
-                <a:solidFill>
-                  <a:srgbClr val="16242A"/>
-                </a:solidFill>
-                <a:latin typeface="Cambria" pitchFamily="34" charset="0"/>
-                <a:ea typeface="Cambria" pitchFamily="34" charset="-122"/>
-                <a:cs typeface="Cambria" pitchFamily="34" charset="-120"/>
-              </a:rPr>
-              <a:t>Курсы и менторы</a:t>
-            </a:r>
-            <a:endParaRPr lang="en-US" sz="1700" dirty="0"/>
-          </a:p>
-        </p:txBody>
-      </p:sp>
-      <p:sp>
-        <p:nvSpPr>
-          <p:cNvPr id="17" name="Text 15"/>
-          <p:cNvSpPr txBox="1"/>
-          <p:nvPr/>
-        </p:nvSpPr>
-        <p:spPr>
-          <a:xfrm>
-            <a:off x="8595360" y="2450592"/>
-            <a:ext cx="2743200" cy="320040"/>
-          </a:xfrm>
-          <a:prstGeom prst="rect">
-            <a:avLst/>
-          </a:prstGeom>
-          <a:noFill/>
-          <a:ln/>
-        </p:spPr>
-        <p:txBody>
-          <a:bodyPr wrap="square" lIns="0" tIns="0" rIns="0" bIns="0" rtlCol="0" anchor="ctr"/>
-          <a:lstStyle/>
-          <a:p>
-            <a:pPr indent="0" marL="0">
-              <a:buNone/>
-            </a:pPr>
-            <a:r>
-              <a:rPr lang="en-US" sz="1500" b="1" dirty="0">
-                <a:solidFill>
-                  <a:srgbClr val="E08A2E"/>
-                </a:solidFill>
-                <a:latin typeface="Arial" pitchFamily="34" charset="0"/>
-                <a:ea typeface="Arial" pitchFamily="34" charset="-122"/>
-                <a:cs typeface="Arial" pitchFamily="34" charset="-120"/>
-              </a:rPr>
-              <a:t>10–20 % с продажи</a:t>
-            </a:r>
-            <a:endParaRPr lang="en-US" sz="1500" dirty="0"/>
-          </a:p>
-        </p:txBody>
-      </p:sp>
-      <p:sp>
-        <p:nvSpPr>
           <p:cNvPr id="18" name="Text 16"/>
           <p:cNvSpPr txBox="1"/>
           <p:nvPr/>
         </p:nvSpPr>
         <p:spPr>
           <a:xfrm>
-            <a:off x="8595360" y="2834640"/>
-            <a:ext cx="2743200" cy="1005840"/>
+            <a:off x="1097280" y="4727448"/>
+            <a:ext cx="5029200" cy="640080"/>
           </a:xfrm>
           <a:prstGeom prst="rect">
             <a:avLst/>
@@ -2805,22 +2915,39 @@
           <a:p>
             <a:pPr indent="0" marL="0">
               <a:lnSpc>
-                <a:spcPct val="120000"/>
+                <a:spcPct val="115000"/>
               </a:lnSpc>
               <a:buNone/>
             </a:pPr>
             <a:r>
-              <a:rPr lang="en-US" sz="1250" dirty="0">
-                <a:solidFill>
-                  <a:srgbClr val="5A7078"/>
-                </a:solidFill>
-                <a:latin typeface="Arial" pitchFamily="34" charset="0"/>
-                <a:ea typeface="Arial" pitchFamily="34" charset="-122"/>
-                <a:cs typeface="Arial" pitchFamily="34" charset="-120"/>
-              </a:rPr>
-              <a:t>Место на карте: курс как станция на маршруте — ровно в момент поиска шага.</a:t>
-            </a:r>
-            <a:endParaRPr lang="en-US" sz="1250" dirty="0"/>
+              <a:rPr lang="en-US" sz="1300" b="1" dirty="0">
+                <a:solidFill>
+                  <a:srgbClr val="FFFFFF"/>
+                </a:solidFill>
+                <a:latin typeface="Arial" pitchFamily="34" charset="0"/>
+                <a:ea typeface="Arial" pitchFamily="34" charset="-122"/>
+                <a:cs typeface="Arial" pitchFamily="34" charset="-120"/>
+              </a:rPr>
+              <a:t>Мои шаги  </a:t>
+            </a:r>
+            <a:pPr indent="0" marL="0">
+              <a:lnSpc>
+                <a:spcPct val="115000"/>
+              </a:lnSpc>
+              <a:buNone/>
+            </a:pPr>
+            <a:r>
+              <a:rPr lang="en-US" sz="1300" dirty="0">
+                <a:solidFill>
+                  <a:srgbClr val="A9C9D2"/>
+                </a:solidFill>
+                <a:latin typeface="Arial" pitchFamily="34" charset="0"/>
+                <a:ea typeface="Arial" pitchFamily="34" charset="-122"/>
+                <a:cs typeface="Arial" pitchFamily="34" charset="-120"/>
+              </a:rPr>
+              <a:t>«Я сделал шаг» → карта перестраивается на глазах</a:t>
+            </a:r>
+            <a:endParaRPr lang="en-US" sz="1300" dirty="0"/>
           </a:p>
         </p:txBody>
       </p:sp>
@@ -2832,20 +2959,18 @@
         </p:nvSpPr>
         <p:spPr>
           <a:xfrm>
-            <a:off x="685800" y="4206240"/>
-            <a:ext cx="5257800" cy="1005840"/>
-          </a:xfrm>
-          <a:prstGeom prst="roundRect">
-            <a:avLst>
-              <a:gd name="adj" fmla="val 7273"/>
-            </a:avLst>
+            <a:off x="6327648" y="4773168"/>
+            <a:ext cx="237744" cy="237744"/>
+          </a:xfrm>
+          <a:prstGeom prst="ellipse">
+            <a:avLst/>
           </a:prstGeom>
           <a:solidFill>
-            <a:srgbClr val="F0F5F6"/>
+            <a:srgbClr val="FFFFFF"/>
           </a:solidFill>
-          <a:ln w="12700">
+          <a:ln w="25400">
             <a:solidFill>
-              <a:srgbClr val="F0F5F6"/>
+              <a:srgbClr val="D6428F"/>
             </a:solidFill>
             <a:prstDash val="solid"/>
           </a:ln>
@@ -2859,8 +2984,8 @@
         </p:nvSpPr>
         <p:spPr>
           <a:xfrm>
-            <a:off x="1005840" y="4370832"/>
-            <a:ext cx="4663440" cy="731520"/>
+            <a:off x="6720840" y="4727448"/>
+            <a:ext cx="5029200" cy="640080"/>
           </a:xfrm>
           <a:prstGeom prst="rect">
             <a:avLst/>
@@ -2874,186 +2999,78 @@
           <a:p>
             <a:pPr indent="0" marL="0">
               <a:lnSpc>
-                <a:spcPct val="120000"/>
+                <a:spcPct val="115000"/>
               </a:lnSpc>
               <a:buNone/>
             </a:pPr>
             <a:r>
-              <a:rPr lang="en-US" sz="1400" b="1" dirty="0">
-                <a:solidFill>
-                  <a:srgbClr val="0B5D6E"/>
-                </a:solidFill>
-                <a:latin typeface="Arial" pitchFamily="34" charset="0"/>
-                <a:ea typeface="Arial" pitchFamily="34" charset="-122"/>
-                <a:cs typeface="Arial" pitchFamily="34" charset="-120"/>
-              </a:rPr>
-              <a:t>Бесплатно
-</a:t>
+              <a:rPr lang="en-US" sz="1300" b="1" dirty="0">
+                <a:solidFill>
+                  <a:srgbClr val="FFFFFF"/>
+                </a:solidFill>
+                <a:latin typeface="Arial" pitchFamily="34" charset="0"/>
+                <a:ea typeface="Arial" pitchFamily="34" charset="-122"/>
+                <a:cs typeface="Arial" pitchFamily="34" charset="-120"/>
+              </a:rPr>
+              <a:t>Профиль  </a:t>
             </a:r>
             <a:pPr indent="0" marL="0">
               <a:lnSpc>
-                <a:spcPct val="120000"/>
+                <a:spcPct val="115000"/>
               </a:lnSpc>
               <a:buNone/>
             </a:pPr>
             <a:r>
               <a:rPr lang="en-US" sz="1300" dirty="0">
                 <a:solidFill>
-                  <a:srgbClr val="16242A"/>
-                </a:solidFill>
-                <a:latin typeface="Arial" pitchFamily="34" charset="0"/>
-                <a:ea typeface="Arial" pitchFamily="34" charset="-122"/>
-                <a:cs typeface="Arial" pitchFamily="34" charset="-120"/>
-              </a:rPr>
-              <a:t>разговор, карта с 3–5 линиями, «почему» и один шаг</a:t>
-            </a:r>
-            <a:endParaRPr lang="en-US" sz="1400" dirty="0"/>
-          </a:p>
-        </p:txBody>
-      </p:sp>
-      <p:sp>
-        <p:nvSpPr>
-          <p:cNvPr id="21" name="Shape 19"/>
-          <p:cNvSpPr/>
-          <p:nvPr/>
-        </p:nvSpPr>
-        <p:spPr>
-          <a:xfrm>
-            <a:off x="6263640" y="4206240"/>
-            <a:ext cx="5257800" cy="1005840"/>
-          </a:xfrm>
-          <a:prstGeom prst="roundRect">
-            <a:avLst>
-              <a:gd name="adj" fmla="val 7273"/>
-            </a:avLst>
-          </a:prstGeom>
-          <a:solidFill>
-            <a:srgbClr val="0B5D6E"/>
-          </a:solidFill>
-          <a:ln w="12700">
-            <a:solidFill>
-              <a:srgbClr val="0B5D6E"/>
-            </a:solidFill>
-            <a:prstDash val="solid"/>
-          </a:ln>
-        </p:spPr>
-      </p:sp>
-      <p:sp>
-        <p:nvSpPr>
-          <p:cNvPr id="22" name="Text 20"/>
-          <p:cNvSpPr txBox="1"/>
-          <p:nvPr/>
-        </p:nvSpPr>
-        <p:spPr>
-          <a:xfrm>
-            <a:off x="6583680" y="4370832"/>
-            <a:ext cx="4663440" cy="731520"/>
-          </a:xfrm>
-          <a:prstGeom prst="rect">
-            <a:avLst/>
-          </a:prstGeom>
-          <a:noFill/>
-          <a:ln/>
-        </p:spPr>
-        <p:txBody>
-          <a:bodyPr wrap="square" lIns="0" tIns="0" rIns="0" bIns="0" rtlCol="0" anchor="ctr"/>
-          <a:lstStyle/>
-          <a:p>
-            <a:pPr indent="0" marL="0">
-              <a:lnSpc>
-                <a:spcPct val="120000"/>
-              </a:lnSpc>
-              <a:buNone/>
-            </a:pPr>
-            <a:r>
-              <a:rPr lang="en-US" sz="1400" b="1" dirty="0">
-                <a:solidFill>
-                  <a:srgbClr val="FFFFFF"/>
-                </a:solidFill>
-                <a:latin typeface="Arial" pitchFamily="34" charset="0"/>
-                <a:ea typeface="Arial" pitchFamily="34" charset="-122"/>
-                <a:cs typeface="Arial" pitchFamily="34" charset="-120"/>
-              </a:rPr>
-              <a:t>По подписке
-</a:t>
-            </a:r>
-            <a:pPr indent="0" marL="0">
-              <a:lnSpc>
-                <a:spcPct val="120000"/>
-              </a:lnSpc>
-              <a:buNone/>
-            </a:pPr>
-            <a:r>
-              <a:rPr lang="en-US" sz="1300" dirty="0">
-                <a:solidFill>
-                  <a:srgbClr val="FFFFFF"/>
-                </a:solidFill>
-                <a:latin typeface="Arial" pitchFamily="34" charset="0"/>
-                <a:ea typeface="Arial" pitchFamily="34" charset="-122"/>
-                <a:cs typeface="Arial" pitchFamily="34" charset="-120"/>
-              </a:rPr>
-              <a:t>пересборка карты, шаг каждую четверть, skills tracking, AI-ментор, кабинет родителя</a:t>
-            </a:r>
-            <a:endParaRPr lang="en-US" sz="1400" dirty="0"/>
-          </a:p>
-        </p:txBody>
-      </p:sp>
-      <p:sp>
-        <p:nvSpPr>
-          <p:cNvPr id="23" name="Text 21"/>
-          <p:cNvSpPr txBox="1"/>
-          <p:nvPr/>
-        </p:nvSpPr>
-        <p:spPr>
-          <a:xfrm>
-            <a:off x="685800" y="5440680"/>
-            <a:ext cx="10835640" cy="640080"/>
-          </a:xfrm>
-          <a:prstGeom prst="rect">
-            <a:avLst/>
-          </a:prstGeom>
-          <a:noFill/>
-          <a:ln/>
-        </p:spPr>
-        <p:txBody>
-          <a:bodyPr wrap="square" lIns="0" tIns="0" rIns="0" bIns="0" rtlCol="0" anchor="ctr"/>
-          <a:lstStyle/>
-          <a:p>
-            <a:pPr indent="0" marL="0">
-              <a:lnSpc>
-                <a:spcPct val="120000"/>
-              </a:lnSpc>
-              <a:buNone/>
-            </a:pPr>
-            <a:r>
-              <a:rPr lang="en-US" sz="1400" b="1" dirty="0">
-                <a:solidFill>
-                  <a:srgbClr val="16242A"/>
-                </a:solidFill>
-                <a:latin typeface="Arial" pitchFamily="34" charset="0"/>
-                <a:ea typeface="Arial" pitchFamily="34" charset="-122"/>
-                <a:cs typeface="Arial" pitchFamily="34" charset="-120"/>
-              </a:rPr>
-              <a:t>Выход на рынок — через школы: </a:t>
-            </a:r>
-            <a:pPr indent="0" marL="0">
-              <a:lnSpc>
-                <a:spcPct val="120000"/>
-              </a:lnSpc>
-              <a:buNone/>
-            </a:pPr>
-            <a:r>
-              <a:rPr lang="en-US" sz="1400" dirty="0">
-                <a:solidFill>
-                  <a:srgbClr val="5A7078"/>
-                </a:solidFill>
-                <a:latin typeface="Arial" pitchFamily="34" charset="0"/>
-                <a:ea typeface="Arial" pitchFamily="34" charset="-122"/>
-                <a:cs typeface="Arial" pitchFamily="34" charset="-120"/>
-              </a:rPr>
-              <a:t>один договор даёт класс активных учеников, а их родители — естественная база для подписки. Цены — гипотезы: проверяем интервью с родителями и пилотом в школе.</a:t>
-            </a:r>
-            <a:endParaRPr lang="en-US" sz="1400" dirty="0"/>
+                  <a:srgbClr val="A9C9D2"/>
+                </a:solidFill>
+                <a:latin typeface="Arial" pitchFamily="34" charset="0"/>
+                <a:ea typeface="Arial" pitchFamily="34" charset="-122"/>
+                <a:cs typeface="Arial" pitchFamily="34" charset="-120"/>
+              </a:rPr>
+              <a:t>оценки и новые интересы пересобирают маршруты</a:t>
+            </a:r>
+            <a:endParaRPr lang="en-US" sz="1300" dirty="0"/>
+          </a:p>
+        </p:txBody>
+      </p:sp>
+      <p:sp>
+        <p:nvSpPr>
+          <p:cNvPr id="21" name="Text 19"/>
+          <p:cNvSpPr txBox="1"/>
+          <p:nvPr/>
+        </p:nvSpPr>
+        <p:spPr>
+          <a:xfrm>
+            <a:off x="685800" y="5760720"/>
+            <a:ext cx="10835640" cy="411480"/>
+          </a:xfrm>
+          <a:prstGeom prst="rect">
+            <a:avLst/>
+          </a:prstGeom>
+          <a:noFill/>
+          <a:ln/>
+        </p:spPr>
+        <p:txBody>
+          <a:bodyPr wrap="square" lIns="0" tIns="0" rIns="0" bIns="0" rtlCol="0" anchor="ctr"/>
+          <a:lstStyle/>
+          <a:p>
+            <a:pPr indent="0" marL="0">
+              <a:buNone/>
+            </a:pPr>
+            <a:r>
+              <a:rPr lang="en-US" sz="2000" b="1" dirty="0">
+                <a:solidFill>
+                  <a:srgbClr val="E08A2E"/>
+                </a:solidFill>
+                <a:latin typeface="Arial" pitchFamily="34" charset="0"/>
+                <a:ea typeface="Arial" pitchFamily="34" charset="-122"/>
+                <a:cs typeface="Arial" pitchFamily="34" charset="-120"/>
+              </a:rPr>
+              <a:t>career-navigator.markingmark33.workers.dev</a:t>
+            </a:r>
+            <a:endParaRPr lang="en-US" sz="2000" dirty="0"/>
           </a:p>
         </p:txBody>
       </p:sp>
@@ -7797,13 +7814,6 @@
 <file path=ppt/slides/slide7.xml><?xml version="1.0" encoding="utf-8"?>
 <p:sld xmlns:a="http://schemas.openxmlformats.org/drawingml/2006/main" xmlns:r="http://schemas.openxmlformats.org/officeDocument/2006/relationships" xmlns:p="http://schemas.openxmlformats.org/presentationml/2006/main">
   <p:cSld name="Slide 7">
-    <p:bg>
-      <p:bgPr>
-        <a:solidFill>
-          <a:srgbClr val="0E2A33"/>
-        </a:solidFill>
-      </p:bgPr>
-    </p:bg>
     <p:spTree>
       <p:nvGrpSpPr>
         <p:cNvPr id="1" name=""/>
@@ -7845,13 +7855,13 @@
             <a:r>
               <a:rPr lang="en-US" sz="3400" b="1" dirty="0">
                 <a:solidFill>
-                  <a:srgbClr val="FFFFFF"/>
+                  <a:srgbClr val="16242A"/>
                 </a:solidFill>
                 <a:latin typeface="Cambria" pitchFamily="34" charset="0"/>
                 <a:ea typeface="Cambria" pitchFamily="34" charset="-122"/>
                 <a:cs typeface="Cambria" pitchFamily="34" charset="-120"/>
               </a:rPr>
-              <a:t>Прототип работает — это не мокап</a:t>
+              <a:t>Где здесь AI — и где его сознательно нет</a:t>
             </a:r>
             <a:endParaRPr lang="en-US" sz="3400" dirty="0"/>
           </a:p>
@@ -7884,13 +7894,13 @@
             <a:r>
               <a:rPr lang="en-US" sz="1500" dirty="0">
                 <a:solidFill>
-                  <a:srgbClr val="A9C9D2"/>
-                </a:solidFill>
-                <a:latin typeface="Arial" pitchFamily="34" charset="0"/>
-                <a:ea typeface="Arial" pitchFamily="34" charset="-122"/>
-                <a:cs typeface="Arial" pitchFamily="34" charset="-120"/>
-              </a:rPr>
-              <a:t>Открывается по ссылке с любого ноутбука, без установки</a:t>
+                  <a:srgbClr val="5A7078"/>
+                </a:solidFill>
+                <a:latin typeface="Arial" pitchFamily="34" charset="0"/>
+                <a:ea typeface="Arial" pitchFamily="34" charset="-122"/>
+                <a:cs typeface="Arial" pitchFamily="34" charset="-120"/>
+              </a:rPr>
+              <a:t>AI связывает и объясняет. Факты берутся из справочника, а не из головы модели.</a:t>
             </a:r>
             <a:endParaRPr lang="en-US" sz="1500" dirty="0"/>
           </a:p>
@@ -7898,26 +7908,63 @@
       </p:sp>
       <p:sp>
         <p:nvSpPr>
-          <p:cNvPr id="4" name="Shape 2"/>
+          <p:cNvPr id="4" name="Text 2"/>
+          <p:cNvSpPr txBox="1"/>
+          <p:nvPr/>
+        </p:nvSpPr>
+        <p:spPr>
+          <a:xfrm>
+            <a:off x="685800" y="1691640"/>
+            <a:ext cx="5394960" cy="320040"/>
+          </a:xfrm>
+          <a:prstGeom prst="rect">
+            <a:avLst/>
+          </a:prstGeom>
+          <a:noFill/>
+          <a:ln/>
+        </p:spPr>
+        <p:txBody>
+          <a:bodyPr wrap="square" lIns="0" tIns="0" rIns="0" bIns="0" rtlCol="0" anchor="ctr"/>
+          <a:lstStyle/>
+          <a:p>
+            <a:pPr indent="0" marL="0">
+              <a:buNone/>
+            </a:pPr>
+            <a:r>
+              <a:rPr lang="en-US" sz="1800" b="1" dirty="0">
+                <a:solidFill>
+                  <a:srgbClr val="0B5D6E"/>
+                </a:solidFill>
+                <a:latin typeface="Cambria" pitchFamily="34" charset="0"/>
+                <a:ea typeface="Cambria" pitchFamily="34" charset="-122"/>
+                <a:cs typeface="Cambria" pitchFamily="34" charset="-120"/>
+              </a:rPr>
+              <a:t>AI делает</a:t>
+            </a:r>
+            <a:endParaRPr lang="en-US" sz="1800" dirty="0"/>
+          </a:p>
+        </p:txBody>
+      </p:sp>
+      <p:sp>
+        <p:nvSpPr>
+          <p:cNvPr id="5" name="Shape 3"/>
           <p:cNvSpPr/>
           <p:nvPr/>
         </p:nvSpPr>
         <p:spPr>
           <a:xfrm>
-            <a:off x="685800" y="1920240"/>
-            <a:ext cx="3383280" cy="1691640"/>
-          </a:xfrm>
-          <a:prstGeom prst="roundRect">
-            <a:avLst>
-              <a:gd name="adj" fmla="val 4324"/>
-            </a:avLst>
+            <a:off x="749808" y="2221992"/>
+            <a:ext cx="146304" cy="146304"/>
+          </a:xfrm>
+          <a:prstGeom prst="ellipse">
+            <a:avLst/>
           </a:prstGeom>
           <a:solidFill>
-            <a:srgbClr val="17414D"/>
+            <a:srgbClr val="0B5D6E"/>
           </a:solidFill>
           <a:ln w="12700">
             <a:solidFill>
-              <a:srgbClr val="17414D"/>
+              <a:srgbClr val="0B5D6E"/>
             </a:solidFill>
             <a:prstDash val="solid"/>
           </a:ln>
@@ -7925,53 +7972,393 @@
       </p:sp>
       <p:sp>
         <p:nvSpPr>
-          <p:cNvPr id="5" name="Text 3"/>
-          <p:cNvSpPr txBox="1"/>
-          <p:nvPr/>
-        </p:nvSpPr>
-        <p:spPr>
-          <a:xfrm>
-            <a:off x="1005840" y="2103120"/>
-            <a:ext cx="2743200" cy="640080"/>
-          </a:xfrm>
-          <a:prstGeom prst="rect">
-            <a:avLst/>
-          </a:prstGeom>
-          <a:noFill/>
-          <a:ln/>
-        </p:spPr>
-        <p:txBody>
-          <a:bodyPr wrap="square" lIns="0" tIns="0" rIns="0" bIns="0" rtlCol="0" anchor="ctr"/>
-          <a:lstStyle/>
-          <a:p>
-            <a:pPr indent="0" marL="0">
-              <a:buNone/>
-            </a:pPr>
-            <a:r>
-              <a:rPr lang="en-US" sz="4000" b="1" dirty="0">
-                <a:solidFill>
-                  <a:srgbClr val="FFFFFF"/>
+          <p:cNvPr id="6" name="Text 4"/>
+          <p:cNvSpPr txBox="1"/>
+          <p:nvPr/>
+        </p:nvSpPr>
+        <p:spPr>
+          <a:xfrm>
+            <a:off x="1097280" y="2148840"/>
+            <a:ext cx="4937760" cy="640080"/>
+          </a:xfrm>
+          <a:prstGeom prst="rect">
+            <a:avLst/>
+          </a:prstGeom>
+          <a:noFill/>
+          <a:ln/>
+        </p:spPr>
+        <p:txBody>
+          <a:bodyPr wrap="square" lIns="0" tIns="0" rIns="0" bIns="0" rtlCol="0" anchor="ctr"/>
+          <a:lstStyle/>
+          <a:p>
+            <a:pPr indent="0" marL="0">
+              <a:lnSpc>
+                <a:spcPct val="115000"/>
+              </a:lnSpc>
+              <a:buNone/>
+            </a:pPr>
+            <a:r>
+              <a:rPr lang="en-US" sz="1350" b="1" dirty="0">
+                <a:solidFill>
+                  <a:srgbClr val="16242A"/>
+                </a:solidFill>
+                <a:latin typeface="Arial" pitchFamily="34" charset="0"/>
+                <a:ea typeface="Arial" pitchFamily="34" charset="-122"/>
+                <a:cs typeface="Arial" pitchFamily="34" charset="-120"/>
+              </a:rPr>
+              <a:t>Признаки из свободных ответов
+</a:t>
+            </a:r>
+            <a:pPr indent="0" marL="0">
+              <a:lnSpc>
+                <a:spcPct val="115000"/>
+              </a:lnSpc>
+              <a:buNone/>
+            </a:pPr>
+            <a:r>
+              <a:rPr lang="en-US" sz="1250" dirty="0">
+                <a:solidFill>
+                  <a:srgbClr val="5A7078"/>
+                </a:solidFill>
+                <a:latin typeface="Arial" pitchFamily="34" charset="0"/>
+                <a:ea typeface="Arial" pitchFamily="34" charset="-122"/>
+                <a:cs typeface="Arial" pitchFamily="34" charset="-120"/>
+              </a:rPr>
+              <a:t>«шахматы + биология = ищет закономерности в сложных системах»</a:t>
+            </a:r>
+            <a:endParaRPr lang="en-US" sz="1350" dirty="0"/>
+          </a:p>
+        </p:txBody>
+      </p:sp>
+      <p:sp>
+        <p:nvSpPr>
+          <p:cNvPr id="7" name="Shape 5"/>
+          <p:cNvSpPr/>
+          <p:nvPr/>
+        </p:nvSpPr>
+        <p:spPr>
+          <a:xfrm>
+            <a:off x="749808" y="2935224"/>
+            <a:ext cx="146304" cy="146304"/>
+          </a:xfrm>
+          <a:prstGeom prst="ellipse">
+            <a:avLst/>
+          </a:prstGeom>
+          <a:solidFill>
+            <a:srgbClr val="0B5D6E"/>
+          </a:solidFill>
+          <a:ln w="12700">
+            <a:solidFill>
+              <a:srgbClr val="0B5D6E"/>
+            </a:solidFill>
+            <a:prstDash val="solid"/>
+          </a:ln>
+        </p:spPr>
+      </p:sp>
+      <p:sp>
+        <p:nvSpPr>
+          <p:cNvPr id="8" name="Text 6"/>
+          <p:cNvSpPr txBox="1"/>
+          <p:nvPr/>
+        </p:nvSpPr>
+        <p:spPr>
+          <a:xfrm>
+            <a:off x="1097280" y="2862072"/>
+            <a:ext cx="4937760" cy="640080"/>
+          </a:xfrm>
+          <a:prstGeom prst="rect">
+            <a:avLst/>
+          </a:prstGeom>
+          <a:noFill/>
+          <a:ln/>
+        </p:spPr>
+        <p:txBody>
+          <a:bodyPr wrap="square" lIns="0" tIns="0" rIns="0" bIns="0" rtlCol="0" anchor="ctr"/>
+          <a:lstStyle/>
+          <a:p>
+            <a:pPr indent="0" marL="0">
+              <a:lnSpc>
+                <a:spcPct val="115000"/>
+              </a:lnSpc>
+              <a:buNone/>
+            </a:pPr>
+            <a:r>
+              <a:rPr lang="en-US" sz="1350" b="1" dirty="0">
+                <a:solidFill>
+                  <a:srgbClr val="16242A"/>
+                </a:solidFill>
+                <a:latin typeface="Arial" pitchFamily="34" charset="0"/>
+                <a:ea typeface="Arial" pitchFamily="34" charset="-122"/>
+                <a:cs typeface="Arial" pitchFamily="34" charset="-120"/>
+              </a:rPr>
+              <a:t>Пересечения, а не главный интерес
+</a:t>
+            </a:r>
+            <a:pPr indent="0" marL="0">
+              <a:lnSpc>
+                <a:spcPct val="115000"/>
+              </a:lnSpc>
+              <a:buNone/>
+            </a:pPr>
+            <a:r>
+              <a:rPr lang="en-US" sz="1250" dirty="0">
+                <a:solidFill>
+                  <a:srgbClr val="5A7078"/>
+                </a:solidFill>
+                <a:latin typeface="Arial" pitchFamily="34" charset="0"/>
+                <a:ea typeface="Arial" pitchFamily="34" charset="-122"/>
+                <a:cs typeface="Arial" pitchFamily="34" charset="-120"/>
+              </a:rPr>
+              <a:t>перебирает комбинации и сверяет со справочником профессий</a:t>
+            </a:r>
+            <a:endParaRPr lang="en-US" sz="1350" dirty="0"/>
+          </a:p>
+        </p:txBody>
+      </p:sp>
+      <p:sp>
+        <p:nvSpPr>
+          <p:cNvPr id="9" name="Shape 7"/>
+          <p:cNvSpPr/>
+          <p:nvPr/>
+        </p:nvSpPr>
+        <p:spPr>
+          <a:xfrm>
+            <a:off x="749808" y="3648456"/>
+            <a:ext cx="146304" cy="146304"/>
+          </a:xfrm>
+          <a:prstGeom prst="ellipse">
+            <a:avLst/>
+          </a:prstGeom>
+          <a:solidFill>
+            <a:srgbClr val="0B5D6E"/>
+          </a:solidFill>
+          <a:ln w="12700">
+            <a:solidFill>
+              <a:srgbClr val="0B5D6E"/>
+            </a:solidFill>
+            <a:prstDash val="solid"/>
+          </a:ln>
+        </p:spPr>
+      </p:sp>
+      <p:sp>
+        <p:nvSpPr>
+          <p:cNvPr id="10" name="Text 8"/>
+          <p:cNvSpPr txBox="1"/>
+          <p:nvPr/>
+        </p:nvSpPr>
+        <p:spPr>
+          <a:xfrm>
+            <a:off x="1097280" y="3575304"/>
+            <a:ext cx="4937760" cy="640080"/>
+          </a:xfrm>
+          <a:prstGeom prst="rect">
+            <a:avLst/>
+          </a:prstGeom>
+          <a:noFill/>
+          <a:ln/>
+        </p:spPr>
+        <p:txBody>
+          <a:bodyPr wrap="square" lIns="0" tIns="0" rIns="0" bIns="0" rtlCol="0" anchor="ctr"/>
+          <a:lstStyle/>
+          <a:p>
+            <a:pPr indent="0" marL="0">
+              <a:lnSpc>
+                <a:spcPct val="115000"/>
+              </a:lnSpc>
+              <a:buNone/>
+            </a:pPr>
+            <a:r>
+              <a:rPr lang="en-US" sz="1350" b="1" dirty="0">
+                <a:solidFill>
+                  <a:srgbClr val="16242A"/>
+                </a:solidFill>
+                <a:latin typeface="Arial" pitchFamily="34" charset="0"/>
+                <a:ea typeface="Arial" pitchFamily="34" charset="-122"/>
+                <a:cs typeface="Arial" pitchFamily="34" charset="-120"/>
+              </a:rPr>
+              <a:t>«Почему» на языке 15-летнего
+</a:t>
+            </a:r>
+            <a:pPr indent="0" marL="0">
+              <a:lnSpc>
+                <a:spcPct val="115000"/>
+              </a:lnSpc>
+              <a:buNone/>
+            </a:pPr>
+            <a:r>
+              <a:rPr lang="en-US" sz="1250" dirty="0">
+                <a:solidFill>
+                  <a:srgbClr val="5A7078"/>
+                </a:solidFill>
+                <a:latin typeface="Arial" pitchFamily="34" charset="0"/>
+                <a:ea typeface="Arial" pitchFamily="34" charset="-122"/>
+                <a:cs typeface="Arial" pitchFamily="34" charset="-120"/>
+              </a:rPr>
+              <a:t>без канцелярита, со ссылкой на его же ответы</a:t>
+            </a:r>
+            <a:endParaRPr lang="en-US" sz="1350" dirty="0"/>
+          </a:p>
+        </p:txBody>
+      </p:sp>
+      <p:sp>
+        <p:nvSpPr>
+          <p:cNvPr id="11" name="Shape 9"/>
+          <p:cNvSpPr/>
+          <p:nvPr/>
+        </p:nvSpPr>
+        <p:spPr>
+          <a:xfrm>
+            <a:off x="749808" y="4361688"/>
+            <a:ext cx="146304" cy="146304"/>
+          </a:xfrm>
+          <a:prstGeom prst="ellipse">
+            <a:avLst/>
+          </a:prstGeom>
+          <a:solidFill>
+            <a:srgbClr val="0B5D6E"/>
+          </a:solidFill>
+          <a:ln w="12700">
+            <a:solidFill>
+              <a:srgbClr val="0B5D6E"/>
+            </a:solidFill>
+            <a:prstDash val="solid"/>
+          </a:ln>
+        </p:spPr>
+      </p:sp>
+      <p:sp>
+        <p:nvSpPr>
+          <p:cNvPr id="12" name="Text 10"/>
+          <p:cNvSpPr txBox="1"/>
+          <p:nvPr/>
+        </p:nvSpPr>
+        <p:spPr>
+          <a:xfrm>
+            <a:off x="1097280" y="4288536"/>
+            <a:ext cx="4937760" cy="640080"/>
+          </a:xfrm>
+          <a:prstGeom prst="rect">
+            <a:avLst/>
+          </a:prstGeom>
+          <a:noFill/>
+          <a:ln/>
+        </p:spPr>
+        <p:txBody>
+          <a:bodyPr wrap="square" lIns="0" tIns="0" rIns="0" bIns="0" rtlCol="0" anchor="ctr"/>
+          <a:lstStyle/>
+          <a:p>
+            <a:pPr indent="0" marL="0">
+              <a:lnSpc>
+                <a:spcPct val="115000"/>
+              </a:lnSpc>
+              <a:buNone/>
+            </a:pPr>
+            <a:r>
+              <a:rPr lang="en-US" sz="1350" b="1" dirty="0">
+                <a:solidFill>
+                  <a:srgbClr val="16242A"/>
+                </a:solidFill>
+                <a:latin typeface="Arial" pitchFamily="34" charset="0"/>
+                <a:ea typeface="Arial" pitchFamily="34" charset="-122"/>
+                <a:cs typeface="Arial" pitchFamily="34" charset="-120"/>
+              </a:rPr>
+              <a:t>Пересборка после каждого события
+</a:t>
+            </a:r>
+            <a:pPr indent="0" marL="0">
+              <a:lnSpc>
+                <a:spcPct val="115000"/>
+              </a:lnSpc>
+              <a:buNone/>
+            </a:pPr>
+            <a:r>
+              <a:rPr lang="en-US" sz="1250" dirty="0">
+                <a:solidFill>
+                  <a:srgbClr val="5A7078"/>
+                </a:solidFill>
+                <a:latin typeface="Arial" pitchFamily="34" charset="0"/>
+                <a:ea typeface="Arial" pitchFamily="34" charset="-122"/>
+                <a:cs typeface="Arial" pitchFamily="34" charset="-120"/>
+              </a:rPr>
+              <a:t>шаг сделан, пришли оценки, появился новый интерес</a:t>
+            </a:r>
+            <a:endParaRPr lang="en-US" sz="1350" dirty="0"/>
+          </a:p>
+        </p:txBody>
+      </p:sp>
+      <p:sp>
+        <p:nvSpPr>
+          <p:cNvPr id="13" name="Text 11"/>
+          <p:cNvSpPr txBox="1"/>
+          <p:nvPr/>
+        </p:nvSpPr>
+        <p:spPr>
+          <a:xfrm>
+            <a:off x="6492240" y="1691640"/>
+            <a:ext cx="5029200" cy="320040"/>
+          </a:xfrm>
+          <a:prstGeom prst="rect">
+            <a:avLst/>
+          </a:prstGeom>
+          <a:noFill/>
+          <a:ln/>
+        </p:spPr>
+        <p:txBody>
+          <a:bodyPr wrap="square" lIns="0" tIns="0" rIns="0" bIns="0" rtlCol="0" anchor="ctr"/>
+          <a:lstStyle/>
+          <a:p>
+            <a:pPr indent="0" marL="0">
+              <a:buNone/>
+            </a:pPr>
+            <a:r>
+              <a:rPr lang="en-US" sz="1800" b="1" dirty="0">
+                <a:solidFill>
+                  <a:srgbClr val="16242A"/>
                 </a:solidFill>
                 <a:latin typeface="Cambria" pitchFamily="34" charset="0"/>
                 <a:ea typeface="Cambria" pitchFamily="34" charset="-122"/>
                 <a:cs typeface="Cambria" pitchFamily="34" charset="-120"/>
               </a:rPr>
-              <a:t>8 сек</a:t>
-            </a:r>
-            <a:endParaRPr lang="en-US" sz="4000" dirty="0"/>
-          </a:p>
-        </p:txBody>
-      </p:sp>
-      <p:sp>
-        <p:nvSpPr>
-          <p:cNvPr id="6" name="Text 4"/>
-          <p:cNvSpPr txBox="1"/>
-          <p:nvPr/>
-        </p:nvSpPr>
-        <p:spPr>
-          <a:xfrm>
-            <a:off x="1005840" y="2788920"/>
-            <a:ext cx="2743200" cy="640080"/>
+              <a:t>Код делает</a:t>
+            </a:r>
+            <a:endParaRPr lang="en-US" sz="1800" dirty="0"/>
+          </a:p>
+        </p:txBody>
+      </p:sp>
+      <p:sp>
+        <p:nvSpPr>
+          <p:cNvPr id="14" name="Shape 12"/>
+          <p:cNvSpPr/>
+          <p:nvPr/>
+        </p:nvSpPr>
+        <p:spPr>
+          <a:xfrm>
+            <a:off x="6556248" y="2221992"/>
+            <a:ext cx="146304" cy="146304"/>
+          </a:xfrm>
+          <a:prstGeom prst="ellipse">
+            <a:avLst/>
+          </a:prstGeom>
+          <a:solidFill>
+            <a:srgbClr val="5A7078"/>
+          </a:solidFill>
+          <a:ln w="12700">
+            <a:solidFill>
+              <a:srgbClr val="5A7078"/>
+            </a:solidFill>
+            <a:prstDash val="solid"/>
+          </a:ln>
+        </p:spPr>
+      </p:sp>
+      <p:sp>
+        <p:nvSpPr>
+          <p:cNvPr id="15" name="Text 13"/>
+          <p:cNvSpPr txBox="1"/>
+          <p:nvPr/>
+        </p:nvSpPr>
+        <p:spPr>
+          <a:xfrm>
+            <a:off x="6903720" y="2148840"/>
+            <a:ext cx="4617720" cy="640080"/>
           </a:xfrm>
           <a:prstGeom prst="rect">
             <a:avLst/>
@@ -7990,19 +8377,17 @@
               <a:buNone/>
             </a:pPr>
             <a:r>
-              <a:rPr lang="en-US" sz="1250" dirty="0">
-                <a:solidFill>
-                  <a:srgbClr val="A9C9D2"/>
-                </a:solidFill>
-                <a:latin typeface="Arial" pitchFamily="34" charset="0"/>
-                <a:ea typeface="Arial" pitchFamily="34" charset="-122"/>
-                <a:cs typeface="Arial" pitchFamily="34" charset="-120"/>
-              </a:rPr>
-              <a:t>карта собирается живым AI</a:t>
-            </a:r>
-            <a:endParaRPr lang="en-US" sz="1250" dirty="0"/>
-          </a:p>
-          <a:p>
+              <a:rPr lang="en-US" sz="1350" b="1" dirty="0">
+                <a:solidFill>
+                  <a:srgbClr val="16242A"/>
+                </a:solidFill>
+                <a:latin typeface="Arial" pitchFamily="34" charset="0"/>
+                <a:ea typeface="Arial" pitchFamily="34" charset="-122"/>
+                <a:cs typeface="Arial" pitchFamily="34" charset="-120"/>
+              </a:rPr>
+              <a:t>Факты
+</a:t>
+            </a:r>
             <a:pPr indent="0" marL="0">
               <a:lnSpc>
                 <a:spcPct val="115000"/>
@@ -8012,40 +8397,38 @@
             <a:r>
               <a:rPr lang="en-US" sz="1250" dirty="0">
                 <a:solidFill>
-                  <a:srgbClr val="A9C9D2"/>
-                </a:solidFill>
-                <a:latin typeface="Arial" pitchFamily="34" charset="0"/>
-                <a:ea typeface="Arial" pitchFamily="34" charset="-122"/>
-                <a:cs typeface="Arial" pitchFamily="34" charset="-120"/>
-              </a:rPr>
-              <a:t>под конкретного ученика</a:t>
-            </a:r>
-            <a:endParaRPr lang="en-US" sz="1250" dirty="0"/>
-          </a:p>
-        </p:txBody>
-      </p:sp>
-      <p:sp>
-        <p:nvSpPr>
-          <p:cNvPr id="7" name="Shape 5"/>
+                  <a:srgbClr val="5A7078"/>
+                </a:solidFill>
+                <a:latin typeface="Arial" pitchFamily="34" charset="0"/>
+                <a:ea typeface="Arial" pitchFamily="34" charset="-122"/>
+                <a:cs typeface="Arial" pitchFamily="34" charset="-120"/>
+              </a:rPr>
+              <a:t>специальности и вузы — из справочника на 22 профессии</a:t>
+            </a:r>
+            <a:endParaRPr lang="en-US" sz="1350" dirty="0"/>
+          </a:p>
+        </p:txBody>
+      </p:sp>
+      <p:sp>
+        <p:nvSpPr>
+          <p:cNvPr id="16" name="Shape 14"/>
           <p:cNvSpPr/>
           <p:nvPr/>
         </p:nvSpPr>
         <p:spPr>
           <a:xfrm>
-            <a:off x="4480560" y="1920240"/>
-            <a:ext cx="3383280" cy="1691640"/>
-          </a:xfrm>
-          <a:prstGeom prst="roundRect">
-            <a:avLst>
-              <a:gd name="adj" fmla="val 4324"/>
-            </a:avLst>
+            <a:off x="6556248" y="2935224"/>
+            <a:ext cx="146304" cy="146304"/>
+          </a:xfrm>
+          <a:prstGeom prst="ellipse">
+            <a:avLst/>
           </a:prstGeom>
           <a:solidFill>
-            <a:srgbClr val="17414D"/>
+            <a:srgbClr val="5A7078"/>
           </a:solidFill>
           <a:ln w="12700">
             <a:solidFill>
-              <a:srgbClr val="17414D"/>
+              <a:srgbClr val="5A7078"/>
             </a:solidFill>
             <a:prstDash val="solid"/>
           </a:ln>
@@ -8053,30 +8436,202 @@
       </p:sp>
       <p:sp>
         <p:nvSpPr>
-          <p:cNvPr id="8" name="Text 6"/>
-          <p:cNvSpPr txBox="1"/>
-          <p:nvPr/>
-        </p:nvSpPr>
-        <p:spPr>
-          <a:xfrm>
-            <a:off x="4800600" y="2103120"/>
-            <a:ext cx="2743200" cy="640080"/>
-          </a:xfrm>
-          <a:prstGeom prst="rect">
-            <a:avLst/>
-          </a:prstGeom>
-          <a:noFill/>
-          <a:ln/>
-        </p:spPr>
-        <p:txBody>
-          <a:bodyPr wrap="square" lIns="0" tIns="0" rIns="0" bIns="0" rtlCol="0" anchor="ctr"/>
-          <a:lstStyle/>
-          <a:p>
-            <a:pPr indent="0" marL="0">
-              <a:buNone/>
-            </a:pPr>
-            <a:r>
-              <a:rPr lang="en-US" sz="4000" b="1" dirty="0">
+          <p:cNvPr id="17" name="Text 15"/>
+          <p:cNvSpPr txBox="1"/>
+          <p:nvPr/>
+        </p:nvSpPr>
+        <p:spPr>
+          <a:xfrm>
+            <a:off x="6903720" y="2862072"/>
+            <a:ext cx="4617720" cy="640080"/>
+          </a:xfrm>
+          <a:prstGeom prst="rect">
+            <a:avLst/>
+          </a:prstGeom>
+          <a:noFill/>
+          <a:ln/>
+        </p:spPr>
+        <p:txBody>
+          <a:bodyPr wrap="square" lIns="0" tIns="0" rIns="0" bIns="0" rtlCol="0" anchor="ctr"/>
+          <a:lstStyle/>
+          <a:p>
+            <a:pPr indent="0" marL="0">
+              <a:lnSpc>
+                <a:spcPct val="115000"/>
+              </a:lnSpc>
+              <a:buNone/>
+            </a:pPr>
+            <a:r>
+              <a:rPr lang="en-US" sz="1350" b="1" dirty="0">
+                <a:solidFill>
+                  <a:srgbClr val="16242A"/>
+                </a:solidFill>
+                <a:latin typeface="Arial" pitchFamily="34" charset="0"/>
+                <a:ea typeface="Arial" pitchFamily="34" charset="-122"/>
+                <a:cs typeface="Arial" pitchFamily="34" charset="-120"/>
+              </a:rPr>
+              <a:t>Геометрия карты
+</a:t>
+            </a:r>
+            <a:pPr indent="0" marL="0">
+              <a:lnSpc>
+                <a:spcPct val="115000"/>
+              </a:lnSpc>
+              <a:buNone/>
+            </a:pPr>
+            <a:r>
+              <a:rPr lang="en-US" sz="1250" dirty="0">
+                <a:solidFill>
+                  <a:srgbClr val="5A7078"/>
+                </a:solidFill>
+                <a:latin typeface="Arial" pitchFamily="34" charset="0"/>
+                <a:ea typeface="Arial" pitchFamily="34" charset="-122"/>
+                <a:cs typeface="Arial" pitchFamily="34" charset="-120"/>
+              </a:rPr>
+              <a:t>раскладка линий, статусы станций, пересадки</a:t>
+            </a:r>
+            <a:endParaRPr lang="en-US" sz="1350" dirty="0"/>
+          </a:p>
+        </p:txBody>
+      </p:sp>
+      <p:sp>
+        <p:nvSpPr>
+          <p:cNvPr id="18" name="Shape 16"/>
+          <p:cNvSpPr/>
+          <p:nvPr/>
+        </p:nvSpPr>
+        <p:spPr>
+          <a:xfrm>
+            <a:off x="6556248" y="3648456"/>
+            <a:ext cx="146304" cy="146304"/>
+          </a:xfrm>
+          <a:prstGeom prst="ellipse">
+            <a:avLst/>
+          </a:prstGeom>
+          <a:solidFill>
+            <a:srgbClr val="5A7078"/>
+          </a:solidFill>
+          <a:ln w="12700">
+            <a:solidFill>
+              <a:srgbClr val="5A7078"/>
+            </a:solidFill>
+            <a:prstDash val="solid"/>
+          </a:ln>
+        </p:spPr>
+      </p:sp>
+      <p:sp>
+        <p:nvSpPr>
+          <p:cNvPr id="19" name="Text 17"/>
+          <p:cNvSpPr txBox="1"/>
+          <p:nvPr/>
+        </p:nvSpPr>
+        <p:spPr>
+          <a:xfrm>
+            <a:off x="6903720" y="3575304"/>
+            <a:ext cx="4617720" cy="640080"/>
+          </a:xfrm>
+          <a:prstGeom prst="rect">
+            <a:avLst/>
+          </a:prstGeom>
+          <a:noFill/>
+          <a:ln/>
+        </p:spPr>
+        <p:txBody>
+          <a:bodyPr wrap="square" lIns="0" tIns="0" rIns="0" bIns="0" rtlCol="0" anchor="ctr"/>
+          <a:lstStyle/>
+          <a:p>
+            <a:pPr indent="0" marL="0">
+              <a:lnSpc>
+                <a:spcPct val="115000"/>
+              </a:lnSpc>
+              <a:buNone/>
+            </a:pPr>
+            <a:r>
+              <a:rPr lang="en-US" sz="1350" b="1" dirty="0">
+                <a:solidFill>
+                  <a:srgbClr val="16242A"/>
+                </a:solidFill>
+                <a:latin typeface="Arial" pitchFamily="34" charset="0"/>
+                <a:ea typeface="Arial" pitchFamily="34" charset="-122"/>
+                <a:cs typeface="Arial" pitchFamily="34" charset="-120"/>
+              </a:rPr>
+              <a:t>Fallback
+</a:t>
+            </a:r>
+            <a:pPr indent="0" marL="0">
+              <a:lnSpc>
+                <a:spcPct val="115000"/>
+              </a:lnSpc>
+              <a:buNone/>
+            </a:pPr>
+            <a:r>
+              <a:rPr lang="en-US" sz="1250" dirty="0">
+                <a:solidFill>
+                  <a:srgbClr val="5A7078"/>
+                </a:solidFill>
+                <a:latin typeface="Arial" pitchFamily="34" charset="0"/>
+                <a:ea typeface="Arial" pitchFamily="34" charset="-122"/>
+                <a:cs typeface="Arial" pitchFamily="34" charset="-120"/>
+              </a:rPr>
+              <a:t>модель молчит 40 секунд → карта из локальных данных</a:t>
+            </a:r>
+            <a:endParaRPr lang="en-US" sz="1350" dirty="0"/>
+          </a:p>
+        </p:txBody>
+      </p:sp>
+      <p:sp>
+        <p:nvSpPr>
+          <p:cNvPr id="20" name="Shape 18"/>
+          <p:cNvSpPr/>
+          <p:nvPr/>
+        </p:nvSpPr>
+        <p:spPr>
+          <a:xfrm>
+            <a:off x="685800" y="4892040"/>
+            <a:ext cx="10835640" cy="1325880"/>
+          </a:xfrm>
+          <a:prstGeom prst="roundRect">
+            <a:avLst>
+              <a:gd name="adj" fmla="val 5517"/>
+            </a:avLst>
+          </a:prstGeom>
+          <a:solidFill>
+            <a:srgbClr val="0B5D6E"/>
+          </a:solidFill>
+          <a:ln w="12700">
+            <a:solidFill>
+              <a:srgbClr val="0B5D6E"/>
+            </a:solidFill>
+            <a:prstDash val="solid"/>
+          </a:ln>
+        </p:spPr>
+      </p:sp>
+      <p:sp>
+        <p:nvSpPr>
+          <p:cNvPr id="21" name="Text 19"/>
+          <p:cNvSpPr txBox="1"/>
+          <p:nvPr/>
+        </p:nvSpPr>
+        <p:spPr>
+          <a:xfrm>
+            <a:off x="1051560" y="5074920"/>
+            <a:ext cx="10104120" cy="320040"/>
+          </a:xfrm>
+          <a:prstGeom prst="rect">
+            <a:avLst/>
+          </a:prstGeom>
+          <a:noFill/>
+          <a:ln/>
+        </p:spPr>
+        <p:txBody>
+          <a:bodyPr wrap="square" lIns="0" tIns="0" rIns="0" bIns="0" rtlCol="0" anchor="ctr"/>
+          <a:lstStyle/>
+          <a:p>
+            <a:pPr indent="0" marL="0">
+              <a:buNone/>
+            </a:pPr>
+            <a:r>
+              <a:rPr lang="en-US" sz="1700" b="1" dirty="0">
                 <a:solidFill>
                   <a:srgbClr val="FFFFFF"/>
                 </a:solidFill>
@@ -8084,22 +8639,22 @@
                 <a:ea typeface="Cambria" pitchFamily="34" charset="-122"/>
                 <a:cs typeface="Cambria" pitchFamily="34" charset="-120"/>
               </a:rPr>
-              <a:t>3–5</a:t>
-            </a:r>
-            <a:endParaRPr lang="en-US" sz="4000" dirty="0"/>
-          </a:p>
-        </p:txBody>
-      </p:sp>
-      <p:sp>
-        <p:nvSpPr>
-          <p:cNvPr id="9" name="Text 7"/>
-          <p:cNvSpPr txBox="1"/>
-          <p:nvPr/>
-        </p:nvSpPr>
-        <p:spPr>
-          <a:xfrm>
-            <a:off x="4800600" y="2788920"/>
-            <a:ext cx="2743200" cy="640080"/>
+              <a:t>Ограничители</a:t>
+            </a:r>
+            <a:endParaRPr lang="en-US" sz="1700" dirty="0"/>
+          </a:p>
+        </p:txBody>
+      </p:sp>
+      <p:sp>
+        <p:nvSpPr>
+          <p:cNvPr id="22" name="Text 20"/>
+          <p:cNvSpPr txBox="1"/>
+          <p:nvPr/>
+        </p:nvSpPr>
+        <p:spPr>
+          <a:xfrm>
+            <a:off x="1051560" y="5440680"/>
+            <a:ext cx="10104120" cy="640080"/>
           </a:xfrm>
           <a:prstGeom prst="rect">
             <a:avLst/>
@@ -8113,545 +8668,22 @@
           <a:p>
             <a:pPr indent="0" marL="0">
               <a:lnSpc>
-                <a:spcPct val="115000"/>
+                <a:spcPct val="120000"/>
               </a:lnSpc>
               <a:buNone/>
             </a:pPr>
             <a:r>
-              <a:rPr lang="en-US" sz="1250" dirty="0">
-                <a:solidFill>
-                  <a:srgbClr val="A9C9D2"/>
-                </a:solidFill>
-                <a:latin typeface="Arial" pitchFamily="34" charset="0"/>
-                <a:ea typeface="Arial" pitchFamily="34" charset="-122"/>
-                <a:cs typeface="Arial" pitchFamily="34" charset="-120"/>
-              </a:rPr>
-              <a:t>линий, у каждой — объяснение</a:t>
-            </a:r>
-            <a:endParaRPr lang="en-US" sz="1250" dirty="0"/>
-          </a:p>
-          <a:p>
-            <a:pPr indent="0" marL="0">
-              <a:lnSpc>
-                <a:spcPct val="115000"/>
-              </a:lnSpc>
-              <a:buNone/>
-            </a:pPr>
-            <a:r>
-              <a:rPr lang="en-US" sz="1250" dirty="0">
-                <a:solidFill>
-                  <a:srgbClr val="A9C9D2"/>
-                </a:solidFill>
-                <a:latin typeface="Arial" pitchFamily="34" charset="0"/>
-                <a:ea typeface="Arial" pitchFamily="34" charset="-122"/>
-                <a:cs typeface="Arial" pitchFamily="34" charset="-120"/>
-              </a:rPr>
-              <a:t>«почему это про тебя»</a:t>
-            </a:r>
-            <a:endParaRPr lang="en-US" sz="1250" dirty="0"/>
-          </a:p>
-        </p:txBody>
-      </p:sp>
-      <p:sp>
-        <p:nvSpPr>
-          <p:cNvPr id="10" name="Shape 8"/>
-          <p:cNvSpPr/>
-          <p:nvPr/>
-        </p:nvSpPr>
-        <p:spPr>
-          <a:xfrm>
-            <a:off x="8275320" y="1920240"/>
-            <a:ext cx="3383280" cy="1691640"/>
-          </a:xfrm>
-          <a:prstGeom prst="roundRect">
-            <a:avLst>
-              <a:gd name="adj" fmla="val 4324"/>
-            </a:avLst>
-          </a:prstGeom>
-          <a:solidFill>
-            <a:srgbClr val="17414D"/>
-          </a:solidFill>
-          <a:ln w="12700">
-            <a:solidFill>
-              <a:srgbClr val="17414D"/>
-            </a:solidFill>
-            <a:prstDash val="solid"/>
-          </a:ln>
-        </p:spPr>
-      </p:sp>
-      <p:sp>
-        <p:nvSpPr>
-          <p:cNvPr id="11" name="Text 9"/>
-          <p:cNvSpPr txBox="1"/>
-          <p:nvPr/>
-        </p:nvSpPr>
-        <p:spPr>
-          <a:xfrm>
-            <a:off x="8595360" y="2103120"/>
-            <a:ext cx="2743200" cy="640080"/>
-          </a:xfrm>
-          <a:prstGeom prst="rect">
-            <a:avLst/>
-          </a:prstGeom>
-          <a:noFill/>
-          <a:ln/>
-        </p:spPr>
-        <p:txBody>
-          <a:bodyPr wrap="square" lIns="0" tIns="0" rIns="0" bIns="0" rtlCol="0" anchor="ctr"/>
-          <a:lstStyle/>
-          <a:p>
-            <a:pPr indent="0" marL="0">
-              <a:buNone/>
-            </a:pPr>
-            <a:r>
-              <a:rPr lang="en-US" sz="4000" b="1" dirty="0">
+              <a:rPr lang="en-US" sz="1400" dirty="0">
                 <a:solidFill>
                   <a:srgbClr val="FFFFFF"/>
                 </a:solidFill>
-                <a:latin typeface="Cambria" pitchFamily="34" charset="0"/>
-                <a:ea typeface="Cambria" pitchFamily="34" charset="-122"/>
-                <a:cs typeface="Cambria" pitchFamily="34" charset="-120"/>
-              </a:rPr>
-              <a:t>4</a:t>
-            </a:r>
-            <a:endParaRPr lang="en-US" sz="4000" dirty="0"/>
-          </a:p>
-        </p:txBody>
-      </p:sp>
-      <p:sp>
-        <p:nvSpPr>
-          <p:cNvPr id="12" name="Text 10"/>
-          <p:cNvSpPr txBox="1"/>
-          <p:nvPr/>
-        </p:nvSpPr>
-        <p:spPr>
-          <a:xfrm>
-            <a:off x="8595360" y="2788920"/>
-            <a:ext cx="2743200" cy="640080"/>
-          </a:xfrm>
-          <a:prstGeom prst="rect">
-            <a:avLst/>
-          </a:prstGeom>
-          <a:noFill/>
-          <a:ln/>
-        </p:spPr>
-        <p:txBody>
-          <a:bodyPr wrap="square" lIns="0" tIns="0" rIns="0" bIns="0" rtlCol="0" anchor="ctr"/>
-          <a:lstStyle/>
-          <a:p>
-            <a:pPr indent="0" marL="0">
-              <a:lnSpc>
-                <a:spcPct val="115000"/>
-              </a:lnSpc>
-              <a:buNone/>
-            </a:pPr>
-            <a:r>
-              <a:rPr lang="en-US" sz="1250" dirty="0">
-                <a:solidFill>
-                  <a:srgbClr val="A9C9D2"/>
-                </a:solidFill>
-                <a:latin typeface="Arial" pitchFamily="34" charset="0"/>
-                <a:ea typeface="Arial" pitchFamily="34" charset="-122"/>
-                <a:cs typeface="Arial" pitchFamily="34" charset="-120"/>
-              </a:rPr>
-              <a:t>региона поступления: СНГ,</a:t>
-            </a:r>
-            <a:endParaRPr lang="en-US" sz="1250" dirty="0"/>
-          </a:p>
-          <a:p>
-            <a:pPr indent="0" marL="0">
-              <a:lnSpc>
-                <a:spcPct val="115000"/>
-              </a:lnSpc>
-              <a:buNone/>
-            </a:pPr>
-            <a:r>
-              <a:rPr lang="en-US" sz="1250" dirty="0">
-                <a:solidFill>
-                  <a:srgbClr val="A9C9D2"/>
-                </a:solidFill>
-                <a:latin typeface="Arial" pitchFamily="34" charset="0"/>
-                <a:ea typeface="Arial" pitchFamily="34" charset="-122"/>
-                <a:cs typeface="Arial" pitchFamily="34" charset="-120"/>
-              </a:rPr>
-              <a:t>Европа, США, Азия</a:t>
-            </a:r>
-            <a:endParaRPr lang="en-US" sz="1250" dirty="0"/>
-          </a:p>
-        </p:txBody>
-      </p:sp>
-      <p:sp>
-        <p:nvSpPr>
-          <p:cNvPr id="13" name="Shape 11"/>
-          <p:cNvSpPr/>
-          <p:nvPr/>
-        </p:nvSpPr>
-        <p:spPr>
-          <a:xfrm>
-            <a:off x="704088" y="4023360"/>
-            <a:ext cx="237744" cy="237744"/>
-          </a:xfrm>
-          <a:prstGeom prst="ellipse">
-            <a:avLst/>
-          </a:prstGeom>
-          <a:solidFill>
-            <a:srgbClr val="FFFFFF"/>
-          </a:solidFill>
-          <a:ln w="25400">
-            <a:solidFill>
-              <a:srgbClr val="2B6BE4"/>
-            </a:solidFill>
-            <a:prstDash val="solid"/>
-          </a:ln>
-        </p:spPr>
-      </p:sp>
-      <p:sp>
-        <p:nvSpPr>
-          <p:cNvPr id="14" name="Text 12"/>
-          <p:cNvSpPr txBox="1"/>
-          <p:nvPr/>
-        </p:nvSpPr>
-        <p:spPr>
-          <a:xfrm>
-            <a:off x="1097280" y="3977640"/>
-            <a:ext cx="5029200" cy="640080"/>
-          </a:xfrm>
-          <a:prstGeom prst="rect">
-            <a:avLst/>
-          </a:prstGeom>
-          <a:noFill/>
-          <a:ln/>
-        </p:spPr>
-        <p:txBody>
-          <a:bodyPr wrap="square" lIns="0" tIns="0" rIns="0" bIns="0" rtlCol="0" anchor="ctr"/>
-          <a:lstStyle/>
-          <a:p>
-            <a:pPr indent="0" marL="0">
-              <a:lnSpc>
-                <a:spcPct val="115000"/>
-              </a:lnSpc>
-              <a:buNone/>
-            </a:pPr>
-            <a:r>
-              <a:rPr lang="en-US" sz="1300" b="1" dirty="0">
-                <a:solidFill>
-                  <a:srgbClr val="FFFFFF"/>
-                </a:solidFill>
-                <a:latin typeface="Arial" pitchFamily="34" charset="0"/>
-                <a:ea typeface="Arial" pitchFamily="34" charset="-122"/>
-                <a:cs typeface="Arial" pitchFamily="34" charset="-120"/>
-              </a:rPr>
-              <a:t>Разговор вместо теста  </a:t>
-            </a:r>
-            <a:pPr indent="0" marL="0">
-              <a:lnSpc>
-                <a:spcPct val="115000"/>
-              </a:lnSpc>
-              <a:buNone/>
-            </a:pPr>
-            <a:r>
-              <a:rPr lang="en-US" sz="1300" dirty="0">
-                <a:solidFill>
-                  <a:srgbClr val="A9C9D2"/>
-                </a:solidFill>
-                <a:latin typeface="Arial" pitchFamily="34" charset="0"/>
-                <a:ea typeface="Arial" pitchFamily="34" charset="-122"/>
-                <a:cs typeface="Arial" pitchFamily="34" charset="-120"/>
-              </a:rPr>
-              <a:t>пять вопросов, под каждым — зачем спрашиваем</a:t>
-            </a:r>
-            <a:endParaRPr lang="en-US" sz="1300" dirty="0"/>
-          </a:p>
-        </p:txBody>
-      </p:sp>
-      <p:sp>
-        <p:nvSpPr>
-          <p:cNvPr id="15" name="Shape 13"/>
-          <p:cNvSpPr/>
-          <p:nvPr/>
-        </p:nvSpPr>
-        <p:spPr>
-          <a:xfrm>
-            <a:off x="6327648" y="4023360"/>
-            <a:ext cx="237744" cy="237744"/>
-          </a:xfrm>
-          <a:prstGeom prst="ellipse">
-            <a:avLst/>
-          </a:prstGeom>
-          <a:solidFill>
-            <a:srgbClr val="FFFFFF"/>
-          </a:solidFill>
-          <a:ln w="25400">
-            <a:solidFill>
-              <a:srgbClr val="2E9E5B"/>
-            </a:solidFill>
-            <a:prstDash val="solid"/>
-          </a:ln>
-        </p:spPr>
-      </p:sp>
-      <p:sp>
-        <p:nvSpPr>
-          <p:cNvPr id="16" name="Text 14"/>
-          <p:cNvSpPr txBox="1"/>
-          <p:nvPr/>
-        </p:nvSpPr>
-        <p:spPr>
-          <a:xfrm>
-            <a:off x="6720840" y="3977640"/>
-            <a:ext cx="5029200" cy="640080"/>
-          </a:xfrm>
-          <a:prstGeom prst="rect">
-            <a:avLst/>
-          </a:prstGeom>
-          <a:noFill/>
-          <a:ln/>
-        </p:spPr>
-        <p:txBody>
-          <a:bodyPr wrap="square" lIns="0" tIns="0" rIns="0" bIns="0" rtlCol="0" anchor="ctr"/>
-          <a:lstStyle/>
-          <a:p>
-            <a:pPr indent="0" marL="0">
-              <a:lnSpc>
-                <a:spcPct val="115000"/>
-              </a:lnSpc>
-              <a:buNone/>
-            </a:pPr>
-            <a:r>
-              <a:rPr lang="en-US" sz="1300" b="1" dirty="0">
-                <a:solidFill>
-                  <a:srgbClr val="FFFFFF"/>
-                </a:solidFill>
-                <a:latin typeface="Arial" pitchFamily="34" charset="0"/>
-                <a:ea typeface="Arial" pitchFamily="34" charset="-122"/>
-                <a:cs typeface="Arial" pitchFamily="34" charset="-120"/>
-              </a:rPr>
-              <a:t>Карта  </a:t>
-            </a:r>
-            <a:pPr indent="0" marL="0">
-              <a:lnSpc>
-                <a:spcPct val="115000"/>
-              </a:lnSpc>
-              <a:buNone/>
-            </a:pPr>
-            <a:r>
-              <a:rPr lang="en-US" sz="1300" dirty="0">
-                <a:solidFill>
-                  <a:srgbClr val="A9C9D2"/>
-                </a:solidFill>
-                <a:latin typeface="Arial" pitchFamily="34" charset="0"/>
-                <a:ea typeface="Arial" pitchFamily="34" charset="-122"/>
-                <a:cs typeface="Arial" pitchFamily="34" charset="-120"/>
-              </a:rPr>
-              <a:t>клик по станции: что это и на каких линиях нужно</a:t>
-            </a:r>
-            <a:endParaRPr lang="en-US" sz="1300" dirty="0"/>
-          </a:p>
-        </p:txBody>
-      </p:sp>
-      <p:sp>
-        <p:nvSpPr>
-          <p:cNvPr id="17" name="Shape 15"/>
-          <p:cNvSpPr/>
-          <p:nvPr/>
-        </p:nvSpPr>
-        <p:spPr>
-          <a:xfrm>
-            <a:off x="704088" y="4773168"/>
-            <a:ext cx="237744" cy="237744"/>
-          </a:xfrm>
-          <a:prstGeom prst="ellipse">
-            <a:avLst/>
-          </a:prstGeom>
-          <a:solidFill>
-            <a:srgbClr val="FFFFFF"/>
-          </a:solidFill>
-          <a:ln w="25400">
-            <a:solidFill>
-              <a:srgbClr val="E08A2E"/>
-            </a:solidFill>
-            <a:prstDash val="solid"/>
-          </a:ln>
-        </p:spPr>
-      </p:sp>
-      <p:sp>
-        <p:nvSpPr>
-          <p:cNvPr id="18" name="Text 16"/>
-          <p:cNvSpPr txBox="1"/>
-          <p:nvPr/>
-        </p:nvSpPr>
-        <p:spPr>
-          <a:xfrm>
-            <a:off x="1097280" y="4727448"/>
-            <a:ext cx="5029200" cy="640080"/>
-          </a:xfrm>
-          <a:prstGeom prst="rect">
-            <a:avLst/>
-          </a:prstGeom>
-          <a:noFill/>
-          <a:ln/>
-        </p:spPr>
-        <p:txBody>
-          <a:bodyPr wrap="square" lIns="0" tIns="0" rIns="0" bIns="0" rtlCol="0" anchor="ctr"/>
-          <a:lstStyle/>
-          <a:p>
-            <a:pPr indent="0" marL="0">
-              <a:lnSpc>
-                <a:spcPct val="115000"/>
-              </a:lnSpc>
-              <a:buNone/>
-            </a:pPr>
-            <a:r>
-              <a:rPr lang="en-US" sz="1300" b="1" dirty="0">
-                <a:solidFill>
-                  <a:srgbClr val="FFFFFF"/>
-                </a:solidFill>
-                <a:latin typeface="Arial" pitchFamily="34" charset="0"/>
-                <a:ea typeface="Arial" pitchFamily="34" charset="-122"/>
-                <a:cs typeface="Arial" pitchFamily="34" charset="-120"/>
-              </a:rPr>
-              <a:t>Мои шаги  </a:t>
-            </a:r>
-            <a:pPr indent="0" marL="0">
-              <a:lnSpc>
-                <a:spcPct val="115000"/>
-              </a:lnSpc>
-              <a:buNone/>
-            </a:pPr>
-            <a:r>
-              <a:rPr lang="en-US" sz="1300" dirty="0">
-                <a:solidFill>
-                  <a:srgbClr val="A9C9D2"/>
-                </a:solidFill>
-                <a:latin typeface="Arial" pitchFamily="34" charset="0"/>
-                <a:ea typeface="Arial" pitchFamily="34" charset="-122"/>
-                <a:cs typeface="Arial" pitchFamily="34" charset="-120"/>
-              </a:rPr>
-              <a:t>«Я сделал шаг» → карта перестраивается на глазах</a:t>
-            </a:r>
-            <a:endParaRPr lang="en-US" sz="1300" dirty="0"/>
-          </a:p>
-        </p:txBody>
-      </p:sp>
-      <p:sp>
-        <p:nvSpPr>
-          <p:cNvPr id="19" name="Shape 17"/>
-          <p:cNvSpPr/>
-          <p:nvPr/>
-        </p:nvSpPr>
-        <p:spPr>
-          <a:xfrm>
-            <a:off x="6327648" y="4773168"/>
-            <a:ext cx="237744" cy="237744"/>
-          </a:xfrm>
-          <a:prstGeom prst="ellipse">
-            <a:avLst/>
-          </a:prstGeom>
-          <a:solidFill>
-            <a:srgbClr val="FFFFFF"/>
-          </a:solidFill>
-          <a:ln w="25400">
-            <a:solidFill>
-              <a:srgbClr val="D6428F"/>
-            </a:solidFill>
-            <a:prstDash val="solid"/>
-          </a:ln>
-        </p:spPr>
-      </p:sp>
-      <p:sp>
-        <p:nvSpPr>
-          <p:cNvPr id="20" name="Text 18"/>
-          <p:cNvSpPr txBox="1"/>
-          <p:nvPr/>
-        </p:nvSpPr>
-        <p:spPr>
-          <a:xfrm>
-            <a:off x="6720840" y="4727448"/>
-            <a:ext cx="5029200" cy="640080"/>
-          </a:xfrm>
-          <a:prstGeom prst="rect">
-            <a:avLst/>
-          </a:prstGeom>
-          <a:noFill/>
-          <a:ln/>
-        </p:spPr>
-        <p:txBody>
-          <a:bodyPr wrap="square" lIns="0" tIns="0" rIns="0" bIns="0" rtlCol="0" anchor="ctr"/>
-          <a:lstStyle/>
-          <a:p>
-            <a:pPr indent="0" marL="0">
-              <a:lnSpc>
-                <a:spcPct val="115000"/>
-              </a:lnSpc>
-              <a:buNone/>
-            </a:pPr>
-            <a:r>
-              <a:rPr lang="en-US" sz="1300" b="1" dirty="0">
-                <a:solidFill>
-                  <a:srgbClr val="FFFFFF"/>
-                </a:solidFill>
-                <a:latin typeface="Arial" pitchFamily="34" charset="0"/>
-                <a:ea typeface="Arial" pitchFamily="34" charset="-122"/>
-                <a:cs typeface="Arial" pitchFamily="34" charset="-120"/>
-              </a:rPr>
-              <a:t>Профиль  </a:t>
-            </a:r>
-            <a:pPr indent="0" marL="0">
-              <a:lnSpc>
-                <a:spcPct val="115000"/>
-              </a:lnSpc>
-              <a:buNone/>
-            </a:pPr>
-            <a:r>
-              <a:rPr lang="en-US" sz="1300" dirty="0">
-                <a:solidFill>
-                  <a:srgbClr val="A9C9D2"/>
-                </a:solidFill>
-                <a:latin typeface="Arial" pitchFamily="34" charset="0"/>
-                <a:ea typeface="Arial" pitchFamily="34" charset="-122"/>
-                <a:cs typeface="Arial" pitchFamily="34" charset="-120"/>
-              </a:rPr>
-              <a:t>оценки и новые интересы пересобирают маршруты</a:t>
-            </a:r>
-            <a:endParaRPr lang="en-US" sz="1300" dirty="0"/>
-          </a:p>
-        </p:txBody>
-      </p:sp>
-      <p:sp>
-        <p:nvSpPr>
-          <p:cNvPr id="21" name="Text 19"/>
-          <p:cNvSpPr txBox="1"/>
-          <p:nvPr/>
-        </p:nvSpPr>
-        <p:spPr>
-          <a:xfrm>
-            <a:off x="685800" y="5760720"/>
-            <a:ext cx="10835640" cy="411480"/>
-          </a:xfrm>
-          <a:prstGeom prst="rect">
-            <a:avLst/>
-          </a:prstGeom>
-          <a:noFill/>
-          <a:ln/>
-        </p:spPr>
-        <p:txBody>
-          <a:bodyPr wrap="square" lIns="0" tIns="0" rIns="0" bIns="0" rtlCol="0" anchor="ctr"/>
-          <a:lstStyle/>
-          <a:p>
-            <a:pPr indent="0" marL="0">
-              <a:buNone/>
-            </a:pPr>
-            <a:r>
-              <a:rPr lang="en-US" sz="2000" b="1" dirty="0">
-                <a:solidFill>
-                  <a:srgbClr val="E08A2E"/>
-                </a:solidFill>
-                <a:latin typeface="Arial" pitchFamily="34" charset="0"/>
-                <a:ea typeface="Arial" pitchFamily="34" charset="-122"/>
-                <a:cs typeface="Arial" pitchFamily="34" charset="-120"/>
-              </a:rPr>
-              <a:t>career-navigator.markingmark33.workers.dev</a:t>
-            </a:r>
-            <a:endParaRPr lang="en-US" sz="2000" dirty="0"/>
+                <a:latin typeface="Arial" pitchFamily="34" charset="0"/>
+                <a:ea typeface="Arial" pitchFamily="34" charset="-122"/>
+                <a:cs typeface="Arial" pitchFamily="34" charset="-120"/>
+              </a:rPr>
+              <a:t>Карта никогда не сужается до одной линии. Ни одной рекомендации без «почему». Каждое событие заканчивается шагом, а не вердиктом. Решение всегда за учеником — AI снижает неопределённость, а не выбирает за него.</a:t>
+            </a:r>
+            <a:endParaRPr lang="en-US" sz="1400" dirty="0"/>
           </a:p>
         </p:txBody>
       </p:sp>
@@ -8705,7 +8737,7 @@
               <a:buNone/>
             </a:pPr>
             <a:r>
-              <a:rPr lang="en-US" sz="3400" b="1" dirty="0">
+              <a:rPr lang="en-US" sz="3100" b="1" dirty="0">
                 <a:solidFill>
                   <a:srgbClr val="16242A"/>
                 </a:solidFill>
@@ -8713,9 +8745,9 @@
                 <a:ea typeface="Cambria" pitchFamily="34" charset="-122"/>
                 <a:cs typeface="Cambria" pitchFamily="34" charset="-120"/>
               </a:rPr>
-              <a:t>Где здесь AI — и где его сознательно нет</a:t>
-            </a:r>
-            <a:endParaRPr lang="en-US" sz="3400" dirty="0"/>
+              <a:t>Рынок: 2,7 млн девятиклассников в год в трёх странах</a:t>
+            </a:r>
+            <a:endParaRPr lang="en-US" sz="3100" dirty="0"/>
           </a:p>
         </p:txBody>
       </p:sp>
@@ -8752,7 +8784,7 @@
                 <a:ea typeface="Arial" pitchFamily="34" charset="-122"/>
                 <a:cs typeface="Arial" pitchFamily="34" charset="-120"/>
               </a:rPr>
-              <a:t>AI связывает и объясняет. Факты берутся из справочника, а не из головы модели.</a:t>
+              <a:t>Россия, Казахстан, Узбекистан. Все цифры — из открытых источников, ссылки внизу слайда</a:t>
             </a:r>
             <a:endParaRPr lang="en-US" sz="1500" dirty="0"/>
           </a:p>
@@ -8766,50 +8798,847 @@
         </p:nvSpPr>
         <p:spPr>
           <a:xfrm>
-            <a:off x="685800" y="1691640"/>
-            <a:ext cx="5394960" cy="320040"/>
-          </a:xfrm>
-          <a:prstGeom prst="rect">
-            <a:avLst/>
-          </a:prstGeom>
-          <a:noFill/>
-          <a:ln/>
-        </p:spPr>
-        <p:txBody>
-          <a:bodyPr wrap="square" lIns="0" tIns="0" rIns="0" bIns="0" rtlCol="0" anchor="ctr"/>
-          <a:lstStyle/>
-          <a:p>
-            <a:pPr indent="0" marL="0">
-              <a:buNone/>
-            </a:pPr>
-            <a:r>
-              <a:rPr lang="en-US" sz="1800" b="1" dirty="0">
+            <a:off x="960120" y="1737360"/>
+            <a:ext cx="2194560" cy="274320"/>
+          </a:xfrm>
+          <a:prstGeom prst="rect">
+            <a:avLst/>
+          </a:prstGeom>
+          <a:noFill/>
+          <a:ln/>
+        </p:spPr>
+        <p:txBody>
+          <a:bodyPr wrap="square" lIns="0" tIns="0" rIns="0" bIns="0" rtlCol="0" anchor="ctr"/>
+          <a:lstStyle/>
+          <a:p>
+            <a:pPr indent="0" marL="0">
+              <a:buNone/>
+            </a:pPr>
+            <a:r>
+              <a:rPr lang="en-US" sz="1150" b="1" dirty="0">
+                <a:solidFill>
+                  <a:srgbClr val="5A7078"/>
+                </a:solidFill>
+                <a:latin typeface="Arial" pitchFamily="34" charset="0"/>
+                <a:ea typeface="Arial" pitchFamily="34" charset="-122"/>
+                <a:cs typeface="Arial" pitchFamily="34" charset="-120"/>
+              </a:rPr>
+              <a:t>Страна</a:t>
+            </a:r>
+            <a:endParaRPr lang="en-US" sz="1150" dirty="0"/>
+          </a:p>
+        </p:txBody>
+      </p:sp>
+      <p:sp>
+        <p:nvSpPr>
+          <p:cNvPr id="5" name="Text 3"/>
+          <p:cNvSpPr txBox="1"/>
+          <p:nvPr/>
+        </p:nvSpPr>
+        <p:spPr>
+          <a:xfrm>
+            <a:off x="3246120" y="1737360"/>
+            <a:ext cx="2103120" cy="274320"/>
+          </a:xfrm>
+          <a:prstGeom prst="rect">
+            <a:avLst/>
+          </a:prstGeom>
+          <a:noFill/>
+          <a:ln/>
+        </p:spPr>
+        <p:txBody>
+          <a:bodyPr wrap="square" lIns="0" tIns="0" rIns="0" bIns="0" rtlCol="0" anchor="ctr"/>
+          <a:lstStyle/>
+          <a:p>
+            <a:pPr indent="0" marL="0">
+              <a:buNone/>
+            </a:pPr>
+            <a:r>
+              <a:rPr lang="en-US" sz="1150" b="1" dirty="0">
+                <a:solidFill>
+                  <a:srgbClr val="5A7078"/>
+                </a:solidFill>
+                <a:latin typeface="Arial" pitchFamily="34" charset="0"/>
+                <a:ea typeface="Arial" pitchFamily="34" charset="-122"/>
+                <a:cs typeface="Arial" pitchFamily="34" charset="-120"/>
+              </a:rPr>
+              <a:t>9 класс, 2025/26</a:t>
+            </a:r>
+            <a:endParaRPr lang="en-US" sz="1150" dirty="0"/>
+          </a:p>
+        </p:txBody>
+      </p:sp>
+      <p:sp>
+        <p:nvSpPr>
+          <p:cNvPr id="6" name="Text 4"/>
+          <p:cNvSpPr txBox="1"/>
+          <p:nvPr/>
+        </p:nvSpPr>
+        <p:spPr>
+          <a:xfrm>
+            <a:off x="5440680" y="1737360"/>
+            <a:ext cx="1737360" cy="274320"/>
+          </a:xfrm>
+          <a:prstGeom prst="rect">
+            <a:avLst/>
+          </a:prstGeom>
+          <a:noFill/>
+          <a:ln/>
+        </p:spPr>
+        <p:txBody>
+          <a:bodyPr wrap="square" lIns="0" tIns="0" rIns="0" bIns="0" rtlCol="0" anchor="ctr"/>
+          <a:lstStyle/>
+          <a:p>
+            <a:pPr indent="0" marL="0">
+              <a:buNone/>
+            </a:pPr>
+            <a:r>
+              <a:rPr lang="en-US" sz="1150" b="1" dirty="0">
+                <a:solidFill>
+                  <a:srgbClr val="5A7078"/>
+                </a:solidFill>
+                <a:latin typeface="Arial" pitchFamily="34" charset="0"/>
+                <a:ea typeface="Arial" pitchFamily="34" charset="-122"/>
+                <a:cs typeface="Arial" pitchFamily="34" charset="-120"/>
+              </a:rPr>
+              <a:t>Школ</a:t>
+            </a:r>
+            <a:endParaRPr lang="en-US" sz="1150" dirty="0"/>
+          </a:p>
+        </p:txBody>
+      </p:sp>
+      <p:sp>
+        <p:nvSpPr>
+          <p:cNvPr id="7" name="Text 5"/>
+          <p:cNvSpPr txBox="1"/>
+          <p:nvPr/>
+        </p:nvSpPr>
+        <p:spPr>
+          <a:xfrm>
+            <a:off x="7269480" y="1737360"/>
+            <a:ext cx="4023360" cy="274320"/>
+          </a:xfrm>
+          <a:prstGeom prst="rect">
+            <a:avLst/>
+          </a:prstGeom>
+          <a:noFill/>
+          <a:ln/>
+        </p:spPr>
+        <p:txBody>
+          <a:bodyPr wrap="square" lIns="0" tIns="0" rIns="0" bIns="0" rtlCol="0" anchor="ctr"/>
+          <a:lstStyle/>
+          <a:p>
+            <a:pPr indent="0" marL="0">
+              <a:buNone/>
+            </a:pPr>
+            <a:r>
+              <a:rPr lang="en-US" sz="1150" b="1" dirty="0">
+                <a:solidFill>
+                  <a:srgbClr val="5A7078"/>
+                </a:solidFill>
+                <a:latin typeface="Arial" pitchFamily="34" charset="0"/>
+                <a:ea typeface="Arial" pitchFamily="34" charset="-122"/>
+                <a:cs typeface="Arial" pitchFamily="34" charset="-120"/>
+              </a:rPr>
+              <a:t>Рынок образования, последние данные</a:t>
+            </a:r>
+            <a:endParaRPr lang="en-US" sz="1150" dirty="0"/>
+          </a:p>
+        </p:txBody>
+      </p:sp>
+      <p:sp>
+        <p:nvSpPr>
+          <p:cNvPr id="8" name="Shape 6"/>
+          <p:cNvSpPr/>
+          <p:nvPr/>
+        </p:nvSpPr>
+        <p:spPr>
+          <a:xfrm>
+            <a:off x="685800" y="2011680"/>
+            <a:ext cx="10835640" cy="402336"/>
+          </a:xfrm>
+          <a:prstGeom prst="roundRect">
+            <a:avLst>
+              <a:gd name="adj" fmla="val 18182"/>
+            </a:avLst>
+          </a:prstGeom>
+          <a:solidFill>
+            <a:srgbClr val="F0F5F6"/>
+          </a:solidFill>
+          <a:ln w="12700">
+            <a:solidFill>
+              <a:srgbClr val="F0F5F6"/>
+            </a:solidFill>
+            <a:prstDash val="solid"/>
+          </a:ln>
+        </p:spPr>
+      </p:sp>
+      <p:sp>
+        <p:nvSpPr>
+          <p:cNvPr id="9" name="Text 7"/>
+          <p:cNvSpPr txBox="1"/>
+          <p:nvPr/>
+        </p:nvSpPr>
+        <p:spPr>
+          <a:xfrm>
+            <a:off x="960120" y="2084832"/>
+            <a:ext cx="2194560" cy="274320"/>
+          </a:xfrm>
+          <a:prstGeom prst="rect">
+            <a:avLst/>
+          </a:prstGeom>
+          <a:noFill/>
+          <a:ln/>
+        </p:spPr>
+        <p:txBody>
+          <a:bodyPr wrap="square" lIns="0" tIns="0" rIns="0" bIns="0" rtlCol="0" anchor="ctr"/>
+          <a:lstStyle/>
+          <a:p>
+            <a:pPr indent="0" marL="0">
+              <a:buNone/>
+            </a:pPr>
+            <a:r>
+              <a:rPr lang="en-US" sz="1250" b="1" dirty="0">
+                <a:solidFill>
+                  <a:srgbClr val="16242A"/>
+                </a:solidFill>
+                <a:latin typeface="Arial" pitchFamily="34" charset="0"/>
+                <a:ea typeface="Arial" pitchFamily="34" charset="-122"/>
+                <a:cs typeface="Arial" pitchFamily="34" charset="-120"/>
+              </a:rPr>
+              <a:t>Россия</a:t>
+            </a:r>
+            <a:endParaRPr lang="en-US" sz="1250" dirty="0"/>
+          </a:p>
+        </p:txBody>
+      </p:sp>
+      <p:sp>
+        <p:nvSpPr>
+          <p:cNvPr id="10" name="Text 8"/>
+          <p:cNvSpPr txBox="1"/>
+          <p:nvPr/>
+        </p:nvSpPr>
+        <p:spPr>
+          <a:xfrm>
+            <a:off x="3246120" y="2084832"/>
+            <a:ext cx="2103120" cy="274320"/>
+          </a:xfrm>
+          <a:prstGeom prst="rect">
+            <a:avLst/>
+          </a:prstGeom>
+          <a:noFill/>
+          <a:ln/>
+        </p:spPr>
+        <p:txBody>
+          <a:bodyPr wrap="square" lIns="0" tIns="0" rIns="0" bIns="0" rtlCol="0" anchor="ctr"/>
+          <a:lstStyle/>
+          <a:p>
+            <a:pPr indent="0" marL="0">
+              <a:buNone/>
+            </a:pPr>
+            <a:r>
+              <a:rPr lang="en-US" sz="1250" dirty="0">
+                <a:solidFill>
+                  <a:srgbClr val="16242A"/>
+                </a:solidFill>
+                <a:latin typeface="Arial" pitchFamily="34" charset="0"/>
+                <a:ea typeface="Arial" pitchFamily="34" charset="-122"/>
+                <a:cs typeface="Arial" pitchFamily="34" charset="-120"/>
+              </a:rPr>
+              <a:t>1,71 млн</a:t>
+            </a:r>
+            <a:endParaRPr lang="en-US" sz="1250" dirty="0"/>
+          </a:p>
+        </p:txBody>
+      </p:sp>
+      <p:sp>
+        <p:nvSpPr>
+          <p:cNvPr id="11" name="Text 9"/>
+          <p:cNvSpPr txBox="1"/>
+          <p:nvPr/>
+        </p:nvSpPr>
+        <p:spPr>
+          <a:xfrm>
+            <a:off x="5440680" y="2084832"/>
+            <a:ext cx="1737360" cy="274320"/>
+          </a:xfrm>
+          <a:prstGeom prst="rect">
+            <a:avLst/>
+          </a:prstGeom>
+          <a:noFill/>
+          <a:ln/>
+        </p:spPr>
+        <p:txBody>
+          <a:bodyPr wrap="square" lIns="0" tIns="0" rIns="0" bIns="0" rtlCol="0" anchor="ctr"/>
+          <a:lstStyle/>
+          <a:p>
+            <a:pPr indent="0" marL="0">
+              <a:buNone/>
+            </a:pPr>
+            <a:r>
+              <a:rPr lang="en-US" sz="1250" dirty="0">
+                <a:solidFill>
+                  <a:srgbClr val="16242A"/>
+                </a:solidFill>
+                <a:latin typeface="Arial" pitchFamily="34" charset="0"/>
+                <a:ea typeface="Arial" pitchFamily="34" charset="-122"/>
+                <a:cs typeface="Arial" pitchFamily="34" charset="-120"/>
+              </a:rPr>
+              <a:t>~40 000</a:t>
+            </a:r>
+            <a:endParaRPr lang="en-US" sz="1250" dirty="0"/>
+          </a:p>
+        </p:txBody>
+      </p:sp>
+      <p:sp>
+        <p:nvSpPr>
+          <p:cNvPr id="12" name="Text 10"/>
+          <p:cNvSpPr txBox="1"/>
+          <p:nvPr/>
+        </p:nvSpPr>
+        <p:spPr>
+          <a:xfrm>
+            <a:off x="7269480" y="2084832"/>
+            <a:ext cx="4023360" cy="274320"/>
+          </a:xfrm>
+          <a:prstGeom prst="rect">
+            <a:avLst/>
+          </a:prstGeom>
+          <a:noFill/>
+          <a:ln/>
+        </p:spPr>
+        <p:txBody>
+          <a:bodyPr wrap="square" lIns="0" tIns="0" rIns="0" bIns="0" rtlCol="0" anchor="ctr"/>
+          <a:lstStyle/>
+          <a:p>
+            <a:pPr indent="0" marL="0">
+              <a:buNone/>
+            </a:pPr>
+            <a:r>
+              <a:rPr lang="en-US" sz="1250" dirty="0">
+                <a:solidFill>
+                  <a:srgbClr val="16242A"/>
+                </a:solidFill>
+                <a:latin typeface="Arial" pitchFamily="34" charset="0"/>
+                <a:ea typeface="Arial" pitchFamily="34" charset="-122"/>
+                <a:cs typeface="Arial" pitchFamily="34" charset="-120"/>
+              </a:rPr>
+              <a:t>EdTech — 154 млрд ₽ за 2025, +12 % за год</a:t>
+            </a:r>
+            <a:endParaRPr lang="en-US" sz="1250" dirty="0"/>
+          </a:p>
+        </p:txBody>
+      </p:sp>
+      <p:sp>
+        <p:nvSpPr>
+          <p:cNvPr id="13" name="Text 11"/>
+          <p:cNvSpPr txBox="1"/>
+          <p:nvPr/>
+        </p:nvSpPr>
+        <p:spPr>
+          <a:xfrm>
+            <a:off x="960120" y="2505456"/>
+            <a:ext cx="2194560" cy="274320"/>
+          </a:xfrm>
+          <a:prstGeom prst="rect">
+            <a:avLst/>
+          </a:prstGeom>
+          <a:noFill/>
+          <a:ln/>
+        </p:spPr>
+        <p:txBody>
+          <a:bodyPr wrap="square" lIns="0" tIns="0" rIns="0" bIns="0" rtlCol="0" anchor="ctr"/>
+          <a:lstStyle/>
+          <a:p>
+            <a:pPr indent="0" marL="0">
+              <a:buNone/>
+            </a:pPr>
+            <a:r>
+              <a:rPr lang="en-US" sz="1250" b="1" dirty="0">
+                <a:solidFill>
+                  <a:srgbClr val="16242A"/>
+                </a:solidFill>
+                <a:latin typeface="Arial" pitchFamily="34" charset="0"/>
+                <a:ea typeface="Arial" pitchFamily="34" charset="-122"/>
+                <a:cs typeface="Arial" pitchFamily="34" charset="-120"/>
+              </a:rPr>
+              <a:t>Казахстан</a:t>
+            </a:r>
+            <a:endParaRPr lang="en-US" sz="1250" dirty="0"/>
+          </a:p>
+        </p:txBody>
+      </p:sp>
+      <p:sp>
+        <p:nvSpPr>
+          <p:cNvPr id="14" name="Text 12"/>
+          <p:cNvSpPr txBox="1"/>
+          <p:nvPr/>
+        </p:nvSpPr>
+        <p:spPr>
+          <a:xfrm>
+            <a:off x="3246120" y="2505456"/>
+            <a:ext cx="2103120" cy="274320"/>
+          </a:xfrm>
+          <a:prstGeom prst="rect">
+            <a:avLst/>
+          </a:prstGeom>
+          <a:noFill/>
+          <a:ln/>
+        </p:spPr>
+        <p:txBody>
+          <a:bodyPr wrap="square" lIns="0" tIns="0" rIns="0" bIns="0" rtlCol="0" anchor="ctr"/>
+          <a:lstStyle/>
+          <a:p>
+            <a:pPr indent="0" marL="0">
+              <a:buNone/>
+            </a:pPr>
+            <a:r>
+              <a:rPr lang="en-US" sz="1250" dirty="0">
+                <a:solidFill>
+                  <a:srgbClr val="16242A"/>
+                </a:solidFill>
+                <a:latin typeface="Arial" pitchFamily="34" charset="0"/>
+                <a:ea typeface="Arial" pitchFamily="34" charset="-122"/>
+                <a:cs typeface="Arial" pitchFamily="34" charset="-120"/>
+              </a:rPr>
+              <a:t>360 тыс.</a:t>
+            </a:r>
+            <a:endParaRPr lang="en-US" sz="1250" dirty="0"/>
+          </a:p>
+        </p:txBody>
+      </p:sp>
+      <p:sp>
+        <p:nvSpPr>
+          <p:cNvPr id="15" name="Text 13"/>
+          <p:cNvSpPr txBox="1"/>
+          <p:nvPr/>
+        </p:nvSpPr>
+        <p:spPr>
+          <a:xfrm>
+            <a:off x="5440680" y="2505456"/>
+            <a:ext cx="1737360" cy="274320"/>
+          </a:xfrm>
+          <a:prstGeom prst="rect">
+            <a:avLst/>
+          </a:prstGeom>
+          <a:noFill/>
+          <a:ln/>
+        </p:spPr>
+        <p:txBody>
+          <a:bodyPr wrap="square" lIns="0" tIns="0" rIns="0" bIns="0" rtlCol="0" anchor="ctr"/>
+          <a:lstStyle/>
+          <a:p>
+            <a:pPr indent="0" marL="0">
+              <a:buNone/>
+            </a:pPr>
+            <a:r>
+              <a:rPr lang="en-US" sz="1250" dirty="0">
+                <a:solidFill>
+                  <a:srgbClr val="16242A"/>
+                </a:solidFill>
+                <a:latin typeface="Arial" pitchFamily="34" charset="0"/>
+                <a:ea typeface="Arial" pitchFamily="34" charset="-122"/>
+                <a:cs typeface="Arial" pitchFamily="34" charset="-120"/>
+              </a:rPr>
+              <a:t>8 048</a:t>
+            </a:r>
+            <a:endParaRPr lang="en-US" sz="1250" dirty="0"/>
+          </a:p>
+        </p:txBody>
+      </p:sp>
+      <p:sp>
+        <p:nvSpPr>
+          <p:cNvPr id="16" name="Text 14"/>
+          <p:cNvSpPr txBox="1"/>
+          <p:nvPr/>
+        </p:nvSpPr>
+        <p:spPr>
+          <a:xfrm>
+            <a:off x="7269480" y="2505456"/>
+            <a:ext cx="4023360" cy="274320"/>
+          </a:xfrm>
+          <a:prstGeom prst="rect">
+            <a:avLst/>
+          </a:prstGeom>
+          <a:noFill/>
+          <a:ln/>
+        </p:spPr>
+        <p:txBody>
+          <a:bodyPr wrap="square" lIns="0" tIns="0" rIns="0" bIns="0" rtlCol="0" anchor="ctr"/>
+          <a:lstStyle/>
+          <a:p>
+            <a:pPr indent="0" marL="0">
+              <a:buNone/>
+            </a:pPr>
+            <a:r>
+              <a:rPr lang="en-US" sz="1250" dirty="0">
+                <a:solidFill>
+                  <a:srgbClr val="16242A"/>
+                </a:solidFill>
+                <a:latin typeface="Arial" pitchFamily="34" charset="0"/>
+                <a:ea typeface="Arial" pitchFamily="34" charset="-122"/>
+                <a:cs typeface="Arial" pitchFamily="34" charset="-120"/>
+              </a:rPr>
+              <a:t>EdTech — 45 млрд ₸ за 2025 (МЦРИАП)</a:t>
+            </a:r>
+            <a:endParaRPr lang="en-US" sz="1250" dirty="0"/>
+          </a:p>
+        </p:txBody>
+      </p:sp>
+      <p:sp>
+        <p:nvSpPr>
+          <p:cNvPr id="17" name="Shape 15"/>
+          <p:cNvSpPr/>
+          <p:nvPr/>
+        </p:nvSpPr>
+        <p:spPr>
+          <a:xfrm>
+            <a:off x="685800" y="2852928"/>
+            <a:ext cx="10835640" cy="402336"/>
+          </a:xfrm>
+          <a:prstGeom prst="roundRect">
+            <a:avLst>
+              <a:gd name="adj" fmla="val 18182"/>
+            </a:avLst>
+          </a:prstGeom>
+          <a:solidFill>
+            <a:srgbClr val="F0F5F6"/>
+          </a:solidFill>
+          <a:ln w="12700">
+            <a:solidFill>
+              <a:srgbClr val="F0F5F6"/>
+            </a:solidFill>
+            <a:prstDash val="solid"/>
+          </a:ln>
+        </p:spPr>
+      </p:sp>
+      <p:sp>
+        <p:nvSpPr>
+          <p:cNvPr id="18" name="Text 16"/>
+          <p:cNvSpPr txBox="1"/>
+          <p:nvPr/>
+        </p:nvSpPr>
+        <p:spPr>
+          <a:xfrm>
+            <a:off x="960120" y="2926080"/>
+            <a:ext cx="2194560" cy="274320"/>
+          </a:xfrm>
+          <a:prstGeom prst="rect">
+            <a:avLst/>
+          </a:prstGeom>
+          <a:noFill/>
+          <a:ln/>
+        </p:spPr>
+        <p:txBody>
+          <a:bodyPr wrap="square" lIns="0" tIns="0" rIns="0" bIns="0" rtlCol="0" anchor="ctr"/>
+          <a:lstStyle/>
+          <a:p>
+            <a:pPr indent="0" marL="0">
+              <a:buNone/>
+            </a:pPr>
+            <a:r>
+              <a:rPr lang="en-US" sz="1250" b="1" dirty="0">
+                <a:solidFill>
+                  <a:srgbClr val="16242A"/>
+                </a:solidFill>
+                <a:latin typeface="Arial" pitchFamily="34" charset="0"/>
+                <a:ea typeface="Arial" pitchFamily="34" charset="-122"/>
+                <a:cs typeface="Arial" pitchFamily="34" charset="-120"/>
+              </a:rPr>
+              <a:t>Узбекистан</a:t>
+            </a:r>
+            <a:endParaRPr lang="en-US" sz="1250" dirty="0"/>
+          </a:p>
+        </p:txBody>
+      </p:sp>
+      <p:sp>
+        <p:nvSpPr>
+          <p:cNvPr id="19" name="Text 17"/>
+          <p:cNvSpPr txBox="1"/>
+          <p:nvPr/>
+        </p:nvSpPr>
+        <p:spPr>
+          <a:xfrm>
+            <a:off x="3246120" y="2926080"/>
+            <a:ext cx="2103120" cy="274320"/>
+          </a:xfrm>
+          <a:prstGeom prst="rect">
+            <a:avLst/>
+          </a:prstGeom>
+          <a:noFill/>
+          <a:ln/>
+        </p:spPr>
+        <p:txBody>
+          <a:bodyPr wrap="square" lIns="0" tIns="0" rIns="0" bIns="0" rtlCol="0" anchor="ctr"/>
+          <a:lstStyle/>
+          <a:p>
+            <a:pPr indent="0" marL="0">
+              <a:buNone/>
+            </a:pPr>
+            <a:r>
+              <a:rPr lang="en-US" sz="1250" dirty="0">
+                <a:solidFill>
+                  <a:srgbClr val="16242A"/>
+                </a:solidFill>
+                <a:latin typeface="Arial" pitchFamily="34" charset="0"/>
+                <a:ea typeface="Arial" pitchFamily="34" charset="-122"/>
+                <a:cs typeface="Arial" pitchFamily="34" charset="-120"/>
+              </a:rPr>
+              <a:t>622 тыс.</a:t>
+            </a:r>
+            <a:endParaRPr lang="en-US" sz="1250" dirty="0"/>
+          </a:p>
+        </p:txBody>
+      </p:sp>
+      <p:sp>
+        <p:nvSpPr>
+          <p:cNvPr id="20" name="Text 18"/>
+          <p:cNvSpPr txBox="1"/>
+          <p:nvPr/>
+        </p:nvSpPr>
+        <p:spPr>
+          <a:xfrm>
+            <a:off x="5440680" y="2926080"/>
+            <a:ext cx="1737360" cy="274320"/>
+          </a:xfrm>
+          <a:prstGeom prst="rect">
+            <a:avLst/>
+          </a:prstGeom>
+          <a:noFill/>
+          <a:ln/>
+        </p:spPr>
+        <p:txBody>
+          <a:bodyPr wrap="square" lIns="0" tIns="0" rIns="0" bIns="0" rtlCol="0" anchor="ctr"/>
+          <a:lstStyle/>
+          <a:p>
+            <a:pPr indent="0" marL="0">
+              <a:buNone/>
+            </a:pPr>
+            <a:r>
+              <a:rPr lang="en-US" sz="1250" dirty="0">
+                <a:solidFill>
+                  <a:srgbClr val="16242A"/>
+                </a:solidFill>
+                <a:latin typeface="Arial" pitchFamily="34" charset="0"/>
+                <a:ea typeface="Arial" pitchFamily="34" charset="-122"/>
+                <a:cs typeface="Arial" pitchFamily="34" charset="-120"/>
+              </a:rPr>
+              <a:t>11 118</a:t>
+            </a:r>
+            <a:endParaRPr lang="en-US" sz="1250" dirty="0"/>
+          </a:p>
+        </p:txBody>
+      </p:sp>
+      <p:sp>
+        <p:nvSpPr>
+          <p:cNvPr id="21" name="Text 19"/>
+          <p:cNvSpPr txBox="1"/>
+          <p:nvPr/>
+        </p:nvSpPr>
+        <p:spPr>
+          <a:xfrm>
+            <a:off x="7269480" y="2926080"/>
+            <a:ext cx="4023360" cy="274320"/>
+          </a:xfrm>
+          <a:prstGeom prst="rect">
+            <a:avLst/>
+          </a:prstGeom>
+          <a:noFill/>
+          <a:ln/>
+        </p:spPr>
+        <p:txBody>
+          <a:bodyPr wrap="square" lIns="0" tIns="0" rIns="0" bIns="0" rtlCol="0" anchor="ctr"/>
+          <a:lstStyle/>
+          <a:p>
+            <a:pPr indent="0" marL="0">
+              <a:buNone/>
+            </a:pPr>
+            <a:r>
+              <a:rPr lang="en-US" sz="1250" dirty="0">
+                <a:solidFill>
+                  <a:srgbClr val="16242A"/>
+                </a:solidFill>
+                <a:latin typeface="Arial" pitchFamily="34" charset="0"/>
+                <a:ea typeface="Arial" pitchFamily="34" charset="-122"/>
+                <a:cs typeface="Arial" pitchFamily="34" charset="-120"/>
+              </a:rPr>
+              <a:t>Образование — 23,8 трлн сумов за I п/г 2026, +22,7 %</a:t>
+            </a:r>
+            <a:endParaRPr lang="en-US" sz="1250" dirty="0"/>
+          </a:p>
+        </p:txBody>
+      </p:sp>
+      <p:sp>
+        <p:nvSpPr>
+          <p:cNvPr id="22" name="Text 20"/>
+          <p:cNvSpPr txBox="1"/>
+          <p:nvPr/>
+        </p:nvSpPr>
+        <p:spPr>
+          <a:xfrm>
+            <a:off x="960120" y="3346704"/>
+            <a:ext cx="2194560" cy="274320"/>
+          </a:xfrm>
+          <a:prstGeom prst="rect">
+            <a:avLst/>
+          </a:prstGeom>
+          <a:noFill/>
+          <a:ln/>
+        </p:spPr>
+        <p:txBody>
+          <a:bodyPr wrap="square" lIns="0" tIns="0" rIns="0" bIns="0" rtlCol="0" anchor="ctr"/>
+          <a:lstStyle/>
+          <a:p>
+            <a:pPr indent="0" marL="0">
+              <a:buNone/>
+            </a:pPr>
+            <a:r>
+              <a:rPr lang="en-US" sz="1250" b="1" dirty="0">
                 <a:solidFill>
                   <a:srgbClr val="0B5D6E"/>
                 </a:solidFill>
-                <a:latin typeface="Cambria" pitchFamily="34" charset="0"/>
-                <a:ea typeface="Cambria" pitchFamily="34" charset="-122"/>
-                <a:cs typeface="Cambria" pitchFamily="34" charset="-120"/>
-              </a:rPr>
-              <a:t>AI делает</a:t>
-            </a:r>
-            <a:endParaRPr lang="en-US" sz="1800" dirty="0"/>
-          </a:p>
-        </p:txBody>
-      </p:sp>
-      <p:sp>
-        <p:nvSpPr>
-          <p:cNvPr id="5" name="Shape 3"/>
+                <a:latin typeface="Arial" pitchFamily="34" charset="0"/>
+                <a:ea typeface="Arial" pitchFamily="34" charset="-122"/>
+                <a:cs typeface="Arial" pitchFamily="34" charset="-120"/>
+              </a:rPr>
+              <a:t>Вместе</a:t>
+            </a:r>
+            <a:endParaRPr lang="en-US" sz="1250" dirty="0"/>
+          </a:p>
+        </p:txBody>
+      </p:sp>
+      <p:sp>
+        <p:nvSpPr>
+          <p:cNvPr id="23" name="Text 21"/>
+          <p:cNvSpPr txBox="1"/>
+          <p:nvPr/>
+        </p:nvSpPr>
+        <p:spPr>
+          <a:xfrm>
+            <a:off x="3246120" y="3346704"/>
+            <a:ext cx="2103120" cy="274320"/>
+          </a:xfrm>
+          <a:prstGeom prst="rect">
+            <a:avLst/>
+          </a:prstGeom>
+          <a:noFill/>
+          <a:ln/>
+        </p:spPr>
+        <p:txBody>
+          <a:bodyPr wrap="square" lIns="0" tIns="0" rIns="0" bIns="0" rtlCol="0" anchor="ctr"/>
+          <a:lstStyle/>
+          <a:p>
+            <a:pPr indent="0" marL="0">
+              <a:buNone/>
+            </a:pPr>
+            <a:r>
+              <a:rPr lang="en-US" sz="1250" b="1" dirty="0">
+                <a:solidFill>
+                  <a:srgbClr val="0B5D6E"/>
+                </a:solidFill>
+                <a:latin typeface="Arial" pitchFamily="34" charset="0"/>
+                <a:ea typeface="Arial" pitchFamily="34" charset="-122"/>
+                <a:cs typeface="Arial" pitchFamily="34" charset="-120"/>
+              </a:rPr>
+              <a:t>2,69 млн</a:t>
+            </a:r>
+            <a:endParaRPr lang="en-US" sz="1250" dirty="0"/>
+          </a:p>
+        </p:txBody>
+      </p:sp>
+      <p:sp>
+        <p:nvSpPr>
+          <p:cNvPr id="24" name="Text 22"/>
+          <p:cNvSpPr txBox="1"/>
+          <p:nvPr/>
+        </p:nvSpPr>
+        <p:spPr>
+          <a:xfrm>
+            <a:off x="5440680" y="3346704"/>
+            <a:ext cx="1737360" cy="274320"/>
+          </a:xfrm>
+          <a:prstGeom prst="rect">
+            <a:avLst/>
+          </a:prstGeom>
+          <a:noFill/>
+          <a:ln/>
+        </p:spPr>
+        <p:txBody>
+          <a:bodyPr wrap="square" lIns="0" tIns="0" rIns="0" bIns="0" rtlCol="0" anchor="ctr"/>
+          <a:lstStyle/>
+          <a:p>
+            <a:pPr indent="0" marL="0">
+              <a:buNone/>
+            </a:pPr>
+            <a:r>
+              <a:rPr lang="en-US" sz="1250" b="1" dirty="0">
+                <a:solidFill>
+                  <a:srgbClr val="0B5D6E"/>
+                </a:solidFill>
+                <a:latin typeface="Arial" pitchFamily="34" charset="0"/>
+                <a:ea typeface="Arial" pitchFamily="34" charset="-122"/>
+                <a:cs typeface="Arial" pitchFamily="34" charset="-120"/>
+              </a:rPr>
+              <a:t>59 000+</a:t>
+            </a:r>
+            <a:endParaRPr lang="en-US" sz="1250" dirty="0"/>
+          </a:p>
+        </p:txBody>
+      </p:sp>
+      <p:sp>
+        <p:nvSpPr>
+          <p:cNvPr id="25" name="Text 23"/>
+          <p:cNvSpPr txBox="1"/>
+          <p:nvPr/>
+        </p:nvSpPr>
+        <p:spPr>
+          <a:xfrm>
+            <a:off x="7269480" y="3346704"/>
+            <a:ext cx="4023360" cy="274320"/>
+          </a:xfrm>
+          <a:prstGeom prst="rect">
+            <a:avLst/>
+          </a:prstGeom>
+          <a:noFill/>
+          <a:ln/>
+        </p:spPr>
+        <p:txBody>
+          <a:bodyPr wrap="square" lIns="0" tIns="0" rIns="0" bIns="0" rtlCol="0" anchor="ctr"/>
+          <a:lstStyle/>
+          <a:p>
+            <a:pPr indent="0" marL="0">
+              <a:buNone/>
+            </a:pPr>
+            <a:r>
+              <a:rPr lang="en-US" sz="1250" b="1" dirty="0">
+                <a:solidFill>
+                  <a:srgbClr val="0B5D6E"/>
+                </a:solidFill>
+                <a:latin typeface="Arial" pitchFamily="34" charset="0"/>
+                <a:ea typeface="Arial" pitchFamily="34" charset="-122"/>
+                <a:cs typeface="Arial" pitchFamily="34" charset="-120"/>
+              </a:rPr>
+              <a:t>29 млн школьников в трёх странах</a:t>
+            </a:r>
+            <a:endParaRPr lang="en-US" sz="1250" dirty="0"/>
+          </a:p>
+        </p:txBody>
+      </p:sp>
+      <p:sp>
+        <p:nvSpPr>
+          <p:cNvPr id="26" name="Shape 24"/>
           <p:cNvSpPr/>
           <p:nvPr/>
         </p:nvSpPr>
         <p:spPr>
           <a:xfrm>
-            <a:off x="749808" y="2221992"/>
-            <a:ext cx="146304" cy="146304"/>
-          </a:xfrm>
-          <a:prstGeom prst="ellipse">
-            <a:avLst/>
+            <a:off x="685800" y="3840480"/>
+            <a:ext cx="10835640" cy="457200"/>
+          </a:xfrm>
+          <a:prstGeom prst="roundRect">
+            <a:avLst>
+              <a:gd name="adj" fmla="val 16000"/>
+            </a:avLst>
           </a:prstGeom>
           <a:solidFill>
             <a:srgbClr val="0B5D6E"/>
@@ -8824,14 +9653,117 @@
       </p:sp>
       <p:sp>
         <p:nvSpPr>
-          <p:cNvPr id="6" name="Text 4"/>
-          <p:cNvSpPr txBox="1"/>
-          <p:nvPr/>
-        </p:nvSpPr>
-        <p:spPr>
-          <a:xfrm>
-            <a:off x="1097280" y="2148840"/>
-            <a:ext cx="4937760" cy="640080"/>
+          <p:cNvPr id="27" name="Text 25"/>
+          <p:cNvSpPr txBox="1"/>
+          <p:nvPr/>
+        </p:nvSpPr>
+        <p:spPr>
+          <a:xfrm>
+            <a:off x="1005840" y="3931920"/>
+            <a:ext cx="10195560" cy="292608"/>
+          </a:xfrm>
+          <a:prstGeom prst="rect">
+            <a:avLst/>
+          </a:prstGeom>
+          <a:noFill/>
+          <a:ln/>
+        </p:spPr>
+        <p:txBody>
+          <a:bodyPr wrap="square" lIns="0" tIns="0" rIns="0" bIns="0" rtlCol="0" anchor="ctr"/>
+          <a:lstStyle/>
+          <a:p>
+            <a:pPr indent="0" marL="0">
+              <a:buNone/>
+            </a:pPr>
+            <a:r>
+              <a:rPr lang="en-US" sz="1300" b="1" dirty="0">
+                <a:solidFill>
+                  <a:srgbClr val="FFFFFF"/>
+                </a:solidFill>
+                <a:latin typeface="Arial" pitchFamily="34" charset="0"/>
+                <a:ea typeface="Arial" pitchFamily="34" charset="-122"/>
+                <a:cs typeface="Arial" pitchFamily="34" charset="-120"/>
+              </a:rPr>
+              <a:t>В России профориентация обязательна во всех школах с 1 сентября 2023 года: курс «Россия — мои горизонты», еженедельно в 6–11 классах. Требование есть, инструмента нет.</a:t>
+            </a:r>
+            <a:endParaRPr lang="en-US" sz="1300" dirty="0"/>
+          </a:p>
+        </p:txBody>
+      </p:sp>
+      <p:sp>
+        <p:nvSpPr>
+          <p:cNvPr id="28" name="Text 26"/>
+          <p:cNvSpPr txBox="1"/>
+          <p:nvPr/>
+        </p:nvSpPr>
+        <p:spPr>
+          <a:xfrm>
+            <a:off x="685800" y="4480560"/>
+            <a:ext cx="5394960" cy="292608"/>
+          </a:xfrm>
+          <a:prstGeom prst="rect">
+            <a:avLst/>
+          </a:prstGeom>
+          <a:noFill/>
+          <a:ln/>
+        </p:spPr>
+        <p:txBody>
+          <a:bodyPr wrap="square" lIns="0" tIns="0" rIns="0" bIns="0" rtlCol="0" anchor="ctr"/>
+          <a:lstStyle/>
+          <a:p>
+            <a:pPr indent="0" marL="0">
+              <a:buNone/>
+            </a:pPr>
+            <a:r>
+              <a:rPr lang="en-US" sz="1700" b="1" dirty="0">
+                <a:solidFill>
+                  <a:srgbClr val="16242A"/>
+                </a:solidFill>
+                <a:latin typeface="Cambria" pitchFamily="34" charset="0"/>
+                <a:ea typeface="Cambria" pitchFamily="34" charset="-122"/>
+                <a:cs typeface="Cambria" pitchFamily="34" charset="-120"/>
+              </a:rPr>
+              <a:t>Семья уже платит</a:t>
+            </a:r>
+            <a:endParaRPr lang="en-US" sz="1700" dirty="0"/>
+          </a:p>
+        </p:txBody>
+      </p:sp>
+      <p:sp>
+        <p:nvSpPr>
+          <p:cNvPr id="29" name="Shape 27"/>
+          <p:cNvSpPr/>
+          <p:nvPr/>
+        </p:nvSpPr>
+        <p:spPr>
+          <a:xfrm>
+            <a:off x="749808" y="4901184"/>
+            <a:ext cx="146304" cy="146304"/>
+          </a:xfrm>
+          <a:prstGeom prst="ellipse">
+            <a:avLst/>
+          </a:prstGeom>
+          <a:solidFill>
+            <a:srgbClr val="2E9E5B"/>
+          </a:solidFill>
+          <a:ln w="12700">
+            <a:solidFill>
+              <a:srgbClr val="2E9E5B"/>
+            </a:solidFill>
+            <a:prstDash val="solid"/>
+          </a:ln>
+        </p:spPr>
+      </p:sp>
+      <p:sp>
+        <p:nvSpPr>
+          <p:cNvPr id="30" name="Text 28"/>
+          <p:cNvSpPr txBox="1"/>
+          <p:nvPr/>
+        </p:nvSpPr>
+        <p:spPr>
+          <a:xfrm>
+            <a:off x="1097280" y="4846320"/>
+            <a:ext cx="4937760" cy="502920"/>
           </a:xfrm>
           <a:prstGeom prst="rect">
             <a:avLst/>
@@ -8850,7 +9782,7 @@
               <a:buNone/>
             </a:pPr>
             <a:r>
-              <a:rPr lang="en-US" sz="1350" b="1" dirty="0">
+              <a:rPr lang="en-US" sz="1250" b="1" dirty="0">
                 <a:solidFill>
                   <a:srgbClr val="16242A"/>
                 </a:solidFill>
@@ -8858,8 +9790,7 @@
                 <a:ea typeface="Arial" pitchFamily="34" charset="-122"/>
                 <a:cs typeface="Arial" pitchFamily="34" charset="-120"/>
               </a:rPr>
-              <a:t>Признаки из свободных ответов
-</a:t>
+              <a:t>5 100 ₽ в неделю  </a:t>
             </a:r>
             <a:pPr indent="0" marL="0">
               <a:lnSpc>
@@ -8868,7 +9799,7 @@
               <a:buNone/>
             </a:pPr>
             <a:r>
-              <a:rPr lang="en-US" sz="1250" dirty="0">
+              <a:rPr lang="en-US" sz="1150" dirty="0">
                 <a:solidFill>
                   <a:srgbClr val="5A7078"/>
                 </a:solidFill>
@@ -8876,32 +9807,32 @@
                 <a:ea typeface="Arial" pitchFamily="34" charset="-122"/>
                 <a:cs typeface="Arial" pitchFamily="34" charset="-120"/>
               </a:rPr>
-              <a:t>«шахматы + биология = ищет закономерности в сложных системах»</a:t>
-            </a:r>
-            <a:endParaRPr lang="en-US" sz="1350" dirty="0"/>
-          </a:p>
-        </p:txBody>
-      </p:sp>
-      <p:sp>
-        <p:nvSpPr>
-          <p:cNvPr id="7" name="Shape 5"/>
+              <a:t>тратят родители девятиклассника в России на дополнительные занятия — около $250 в месяц (Superjob, 2026)</a:t>
+            </a:r>
+            <a:endParaRPr lang="en-US" sz="1250" dirty="0"/>
+          </a:p>
+        </p:txBody>
+      </p:sp>
+      <p:sp>
+        <p:nvSpPr>
+          <p:cNvPr id="31" name="Shape 29"/>
           <p:cNvSpPr/>
           <p:nvPr/>
         </p:nvSpPr>
         <p:spPr>
           <a:xfrm>
-            <a:off x="749808" y="2935224"/>
+            <a:off x="749808" y="5468112"/>
             <a:ext cx="146304" cy="146304"/>
           </a:xfrm>
           <a:prstGeom prst="ellipse">
             <a:avLst/>
           </a:prstGeom>
           <a:solidFill>
-            <a:srgbClr val="0B5D6E"/>
+            <a:srgbClr val="2E9E5B"/>
           </a:solidFill>
           <a:ln w="12700">
             <a:solidFill>
-              <a:srgbClr val="0B5D6E"/>
+              <a:srgbClr val="2E9E5B"/>
             </a:solidFill>
             <a:prstDash val="solid"/>
           </a:ln>
@@ -8909,14 +9840,14 @@
       </p:sp>
       <p:sp>
         <p:nvSpPr>
-          <p:cNvPr id="8" name="Text 6"/>
-          <p:cNvSpPr txBox="1"/>
-          <p:nvPr/>
-        </p:nvSpPr>
-        <p:spPr>
-          <a:xfrm>
-            <a:off x="1097280" y="2862072"/>
-            <a:ext cx="4937760" cy="640080"/>
+          <p:cNvPr id="32" name="Text 30"/>
+          <p:cNvSpPr txBox="1"/>
+          <p:nvPr/>
+        </p:nvSpPr>
+        <p:spPr>
+          <a:xfrm>
+            <a:off x="1097280" y="5413248"/>
+            <a:ext cx="4937760" cy="502920"/>
           </a:xfrm>
           <a:prstGeom prst="rect">
             <a:avLst/>
@@ -8935,7 +9866,7 @@
               <a:buNone/>
             </a:pPr>
             <a:r>
-              <a:rPr lang="en-US" sz="1350" b="1" dirty="0">
+              <a:rPr lang="en-US" sz="1250" b="1" dirty="0">
                 <a:solidFill>
                   <a:srgbClr val="16242A"/>
                 </a:solidFill>
@@ -8943,8 +9874,7 @@
                 <a:ea typeface="Arial" pitchFamily="34" charset="-122"/>
                 <a:cs typeface="Arial" pitchFamily="34" charset="-120"/>
               </a:rPr>
-              <a:t>Пересечения, а не главный интерес
-</a:t>
+              <a:t>Наши $6 в месяц  </a:t>
             </a:r>
             <a:pPr indent="0" marL="0">
               <a:lnSpc>
@@ -8953,7 +9883,7 @@
               <a:buNone/>
             </a:pPr>
             <a:r>
-              <a:rPr lang="en-US" sz="1250" dirty="0">
+              <a:rPr lang="en-US" sz="1150" dirty="0">
                 <a:solidFill>
                   <a:srgbClr val="5A7078"/>
                 </a:solidFill>
@@ -8961,32 +9891,71 @@
                 <a:ea typeface="Arial" pitchFamily="34" charset="-122"/>
                 <a:cs typeface="Arial" pitchFamily="34" charset="-120"/>
               </a:rPr>
-              <a:t>перебирает комбинации и сверяет со справочником профессий</a:t>
-            </a:r>
-            <a:endParaRPr lang="en-US" sz="1350" dirty="0"/>
-          </a:p>
-        </p:txBody>
-      </p:sp>
-      <p:sp>
-        <p:nvSpPr>
-          <p:cNvPr id="9" name="Shape 7"/>
+              <a:t>это примерно 2 % от того, что семья платит и так. Каждая вторая семья платит репетиторам — против 27 % в 2020-м</a:t>
+            </a:r>
+            <a:endParaRPr lang="en-US" sz="1250" dirty="0"/>
+          </a:p>
+        </p:txBody>
+      </p:sp>
+      <p:sp>
+        <p:nvSpPr>
+          <p:cNvPr id="33" name="Text 31"/>
+          <p:cNvSpPr txBox="1"/>
+          <p:nvPr/>
+        </p:nvSpPr>
+        <p:spPr>
+          <a:xfrm>
+            <a:off x="6492240" y="4480560"/>
+            <a:ext cx="5029200" cy="292608"/>
+          </a:xfrm>
+          <a:prstGeom prst="rect">
+            <a:avLst/>
+          </a:prstGeom>
+          <a:noFill/>
+          <a:ln/>
+        </p:spPr>
+        <p:txBody>
+          <a:bodyPr wrap="square" lIns="0" tIns="0" rIns="0" bIns="0" rtlCol="0" anchor="ctr"/>
+          <a:lstStyle/>
+          <a:p>
+            <a:pPr indent="0" marL="0">
+              <a:buNone/>
+            </a:pPr>
+            <a:r>
+              <a:rPr lang="en-US" sz="1700" b="1" dirty="0">
+                <a:solidFill>
+                  <a:srgbClr val="16242A"/>
+                </a:solidFill>
+                <a:latin typeface="Cambria" pitchFamily="34" charset="0"/>
+                <a:ea typeface="Cambria" pitchFamily="34" charset="-122"/>
+                <a:cs typeface="Cambria" pitchFamily="34" charset="-120"/>
+              </a:rPr>
+              <a:t>Объём рынка — наш расчёт</a:t>
+            </a:r>
+            <a:endParaRPr lang="en-US" sz="1700" dirty="0"/>
+          </a:p>
+        </p:txBody>
+      </p:sp>
+      <p:sp>
+        <p:nvSpPr>
+          <p:cNvPr id="34" name="Shape 32"/>
           <p:cNvSpPr/>
           <p:nvPr/>
         </p:nvSpPr>
         <p:spPr>
           <a:xfrm>
-            <a:off x="749808" y="3648456"/>
+            <a:off x="6556248" y="4882896"/>
             <a:ext cx="146304" cy="146304"/>
           </a:xfrm>
           <a:prstGeom prst="ellipse">
             <a:avLst/>
           </a:prstGeom>
           <a:solidFill>
-            <a:srgbClr val="0B5D6E"/>
+            <a:srgbClr val="2B6BE4"/>
           </a:solidFill>
           <a:ln w="12700">
             <a:solidFill>
-              <a:srgbClr val="0B5D6E"/>
+              <a:srgbClr val="2B6BE4"/>
             </a:solidFill>
             <a:prstDash val="solid"/>
           </a:ln>
@@ -8994,33 +9963,30 @@
       </p:sp>
       <p:sp>
         <p:nvSpPr>
-          <p:cNvPr id="10" name="Text 8"/>
-          <p:cNvSpPr txBox="1"/>
-          <p:nvPr/>
-        </p:nvSpPr>
-        <p:spPr>
-          <a:xfrm>
-            <a:off x="1097280" y="3575304"/>
-            <a:ext cx="4937760" cy="640080"/>
-          </a:xfrm>
-          <a:prstGeom prst="rect">
-            <a:avLst/>
-          </a:prstGeom>
-          <a:noFill/>
-          <a:ln/>
-        </p:spPr>
-        <p:txBody>
-          <a:bodyPr wrap="square" lIns="0" tIns="0" rIns="0" bIns="0" rtlCol="0" anchor="ctr"/>
-          <a:lstStyle/>
-          <a:p>
-            <a:pPr indent="0" marL="0">
-              <a:lnSpc>
-                <a:spcPct val="115000"/>
-              </a:lnSpc>
-              <a:buNone/>
-            </a:pPr>
-            <a:r>
-              <a:rPr lang="en-US" sz="1350" b="1" dirty="0">
+          <p:cNvPr id="35" name="Text 33"/>
+          <p:cNvSpPr txBox="1"/>
+          <p:nvPr/>
+        </p:nvSpPr>
+        <p:spPr>
+          <a:xfrm>
+            <a:off x="6903720" y="4846320"/>
+            <a:ext cx="4617720" cy="365760"/>
+          </a:xfrm>
+          <a:prstGeom prst="rect">
+            <a:avLst/>
+          </a:prstGeom>
+          <a:noFill/>
+          <a:ln/>
+        </p:spPr>
+        <p:txBody>
+          <a:bodyPr wrap="square" lIns="0" tIns="0" rIns="0" bIns="0" rtlCol="0" anchor="ctr"/>
+          <a:lstStyle/>
+          <a:p>
+            <a:pPr indent="0" marL="0">
+              <a:buNone/>
+            </a:pPr>
+            <a:r>
+              <a:rPr lang="en-US" sz="1250" b="1" dirty="0">
                 <a:solidFill>
                   <a:srgbClr val="16242A"/>
                 </a:solidFill>
@@ -9028,17 +9994,13 @@
                 <a:ea typeface="Arial" pitchFamily="34" charset="-122"/>
                 <a:cs typeface="Arial" pitchFamily="34" charset="-120"/>
               </a:rPr>
-              <a:t>«Почему» на языке 15-летнего
-</a:t>
-            </a:r>
-            <a:pPr indent="0" marL="0">
-              <a:lnSpc>
-                <a:spcPct val="115000"/>
-              </a:lnSpc>
-              <a:buNone/>
-            </a:pPr>
-            <a:r>
-              <a:rPr lang="en-US" sz="1250" dirty="0">
+              <a:t>TAM  $395 млн  </a:t>
+            </a:r>
+            <a:pPr indent="0" marL="0">
+              <a:buNone/>
+            </a:pPr>
+            <a:r>
+              <a:rPr lang="en-US" sz="1150" dirty="0">
                 <a:solidFill>
                   <a:srgbClr val="5A7078"/>
                 </a:solidFill>
@@ -9046,32 +10008,32 @@
                 <a:ea typeface="Arial" pitchFamily="34" charset="-122"/>
                 <a:cs typeface="Arial" pitchFamily="34" charset="-120"/>
               </a:rPr>
-              <a:t>без канцелярита, со ссылкой на его же ответы</a:t>
-            </a:r>
-            <a:endParaRPr lang="en-US" sz="1350" dirty="0"/>
-          </a:p>
-        </p:txBody>
-      </p:sp>
-      <p:sp>
-        <p:nvSpPr>
-          <p:cNvPr id="11" name="Shape 9"/>
+              <a:t>8,1 млн учеников 9–11 классов трёх стран × $49 в год</a:t>
+            </a:r>
+            <a:endParaRPr lang="en-US" sz="1250" dirty="0"/>
+          </a:p>
+        </p:txBody>
+      </p:sp>
+      <p:sp>
+        <p:nvSpPr>
+          <p:cNvPr id="36" name="Shape 34"/>
           <p:cNvSpPr/>
           <p:nvPr/>
         </p:nvSpPr>
         <p:spPr>
           <a:xfrm>
-            <a:off x="749808" y="4361688"/>
+            <a:off x="6556248" y="5285232"/>
             <a:ext cx="146304" cy="146304"/>
           </a:xfrm>
           <a:prstGeom prst="ellipse">
             <a:avLst/>
           </a:prstGeom>
           <a:solidFill>
-            <a:srgbClr val="0B5D6E"/>
+            <a:srgbClr val="2B6BE4"/>
           </a:solidFill>
           <a:ln w="12700">
             <a:solidFill>
-              <a:srgbClr val="0B5D6E"/>
+              <a:srgbClr val="2B6BE4"/>
             </a:solidFill>
             <a:prstDash val="solid"/>
           </a:ln>
@@ -9079,33 +10041,30 @@
       </p:sp>
       <p:sp>
         <p:nvSpPr>
-          <p:cNvPr id="12" name="Text 10"/>
-          <p:cNvSpPr txBox="1"/>
-          <p:nvPr/>
-        </p:nvSpPr>
-        <p:spPr>
-          <a:xfrm>
-            <a:off x="1097280" y="4288536"/>
-            <a:ext cx="4937760" cy="640080"/>
-          </a:xfrm>
-          <a:prstGeom prst="rect">
-            <a:avLst/>
-          </a:prstGeom>
-          <a:noFill/>
-          <a:ln/>
-        </p:spPr>
-        <p:txBody>
-          <a:bodyPr wrap="square" lIns="0" tIns="0" rIns="0" bIns="0" rtlCol="0" anchor="ctr"/>
-          <a:lstStyle/>
-          <a:p>
-            <a:pPr indent="0" marL="0">
-              <a:lnSpc>
-                <a:spcPct val="115000"/>
-              </a:lnSpc>
-              <a:buNone/>
-            </a:pPr>
-            <a:r>
-              <a:rPr lang="en-US" sz="1350" b="1" dirty="0">
+          <p:cNvPr id="37" name="Text 35"/>
+          <p:cNvSpPr txBox="1"/>
+          <p:nvPr/>
+        </p:nvSpPr>
+        <p:spPr>
+          <a:xfrm>
+            <a:off x="6903720" y="5248656"/>
+            <a:ext cx="4617720" cy="365760"/>
+          </a:xfrm>
+          <a:prstGeom prst="rect">
+            <a:avLst/>
+          </a:prstGeom>
+          <a:noFill/>
+          <a:ln/>
+        </p:spPr>
+        <p:txBody>
+          <a:bodyPr wrap="square" lIns="0" tIns="0" rIns="0" bIns="0" rtlCol="0" anchor="ctr"/>
+          <a:lstStyle/>
+          <a:p>
+            <a:pPr indent="0" marL="0">
+              <a:buNone/>
+            </a:pPr>
+            <a:r>
+              <a:rPr lang="en-US" sz="1250" b="1" dirty="0">
                 <a:solidFill>
                   <a:srgbClr val="16242A"/>
                 </a:solidFill>
@@ -9113,17 +10072,13 @@
                 <a:ea typeface="Arial" pitchFamily="34" charset="-122"/>
                 <a:cs typeface="Arial" pitchFamily="34" charset="-120"/>
               </a:rPr>
-              <a:t>Пересборка после каждого события
-</a:t>
-            </a:r>
-            <a:pPr indent="0" marL="0">
-              <a:lnSpc>
-                <a:spcPct val="115000"/>
-              </a:lnSpc>
-              <a:buNone/>
-            </a:pPr>
-            <a:r>
-              <a:rPr lang="en-US" sz="1250" dirty="0">
+              <a:t>SAM  $160 млн  </a:t>
+            </a:r>
+            <a:pPr indent="0" marL="0">
+              <a:buNone/>
+            </a:pPr>
+            <a:r>
+              <a:rPr lang="en-US" sz="1150" dirty="0">
                 <a:solidFill>
                   <a:srgbClr val="5A7078"/>
                 </a:solidFill>
@@ -9131,71 +10086,32 @@
                 <a:ea typeface="Arial" pitchFamily="34" charset="-122"/>
                 <a:cs typeface="Arial" pitchFamily="34" charset="-120"/>
               </a:rPr>
-              <a:t>шаг сделан, пришли оценки, появился новый интерес</a:t>
-            </a:r>
-            <a:endParaRPr lang="en-US" sz="1350" dirty="0"/>
-          </a:p>
-        </p:txBody>
-      </p:sp>
-      <p:sp>
-        <p:nvSpPr>
-          <p:cNvPr id="13" name="Text 11"/>
-          <p:cNvSpPr txBox="1"/>
-          <p:nvPr/>
-        </p:nvSpPr>
-        <p:spPr>
-          <a:xfrm>
-            <a:off x="6492240" y="1691640"/>
-            <a:ext cx="5029200" cy="320040"/>
-          </a:xfrm>
-          <a:prstGeom prst="rect">
-            <a:avLst/>
-          </a:prstGeom>
-          <a:noFill/>
-          <a:ln/>
-        </p:spPr>
-        <p:txBody>
-          <a:bodyPr wrap="square" lIns="0" tIns="0" rIns="0" bIns="0" rtlCol="0" anchor="ctr"/>
-          <a:lstStyle/>
-          <a:p>
-            <a:pPr indent="0" marL="0">
-              <a:buNone/>
-            </a:pPr>
-            <a:r>
-              <a:rPr lang="en-US" sz="1800" b="1" dirty="0">
-                <a:solidFill>
-                  <a:srgbClr val="16242A"/>
-                </a:solidFill>
-                <a:latin typeface="Cambria" pitchFamily="34" charset="0"/>
-                <a:ea typeface="Cambria" pitchFamily="34" charset="-122"/>
-                <a:cs typeface="Cambria" pitchFamily="34" charset="-120"/>
-              </a:rPr>
-              <a:t>Код делает</a:t>
-            </a:r>
-            <a:endParaRPr lang="en-US" sz="1800" dirty="0"/>
-          </a:p>
-        </p:txBody>
-      </p:sp>
-      <p:sp>
-        <p:nvSpPr>
-          <p:cNvPr id="14" name="Shape 12"/>
+              <a:t>40 % семей — те, кто уже платит за дополнительное образование</a:t>
+            </a:r>
+            <a:endParaRPr lang="en-US" sz="1250" dirty="0"/>
+          </a:p>
+        </p:txBody>
+      </p:sp>
+      <p:sp>
+        <p:nvSpPr>
+          <p:cNvPr id="38" name="Shape 36"/>
           <p:cNvSpPr/>
           <p:nvPr/>
         </p:nvSpPr>
         <p:spPr>
           <a:xfrm>
-            <a:off x="6556248" y="2221992"/>
+            <a:off x="6556248" y="5687568"/>
             <a:ext cx="146304" cy="146304"/>
           </a:xfrm>
           <a:prstGeom prst="ellipse">
             <a:avLst/>
           </a:prstGeom>
           <a:solidFill>
-            <a:srgbClr val="5A7078"/>
+            <a:srgbClr val="2B6BE4"/>
           </a:solidFill>
           <a:ln w="12700">
             <a:solidFill>
-              <a:srgbClr val="5A7078"/>
+              <a:srgbClr val="2B6BE4"/>
             </a:solidFill>
             <a:prstDash val="solid"/>
           </a:ln>
@@ -9203,14 +10119,67 @@
       </p:sp>
       <p:sp>
         <p:nvSpPr>
-          <p:cNvPr id="15" name="Text 13"/>
-          <p:cNvSpPr txBox="1"/>
-          <p:nvPr/>
-        </p:nvSpPr>
-        <p:spPr>
-          <a:xfrm>
-            <a:off x="6903720" y="2148840"/>
-            <a:ext cx="4617720" cy="640080"/>
+          <p:cNvPr id="39" name="Text 37"/>
+          <p:cNvSpPr txBox="1"/>
+          <p:nvPr/>
+        </p:nvSpPr>
+        <p:spPr>
+          <a:xfrm>
+            <a:off x="6903720" y="5650992"/>
+            <a:ext cx="4617720" cy="365760"/>
+          </a:xfrm>
+          <a:prstGeom prst="rect">
+            <a:avLst/>
+          </a:prstGeom>
+          <a:noFill/>
+          <a:ln/>
+        </p:spPr>
+        <p:txBody>
+          <a:bodyPr wrap="square" lIns="0" tIns="0" rIns="0" bIns="0" rtlCol="0" anchor="ctr"/>
+          <a:lstStyle/>
+          <a:p>
+            <a:pPr indent="0" marL="0">
+              <a:buNone/>
+            </a:pPr>
+            <a:r>
+              <a:rPr lang="en-US" sz="1250" b="1" dirty="0">
+                <a:solidFill>
+                  <a:srgbClr val="16242A"/>
+                </a:solidFill>
+                <a:latin typeface="Arial" pitchFamily="34" charset="0"/>
+                <a:ea typeface="Arial" pitchFamily="34" charset="-122"/>
+                <a:cs typeface="Arial" pitchFamily="34" charset="-120"/>
+              </a:rPr>
+              <a:t>SOM  $1,6 млн  </a:t>
+            </a:r>
+            <a:pPr indent="0" marL="0">
+              <a:buNone/>
+            </a:pPr>
+            <a:r>
+              <a:rPr lang="en-US" sz="1150" dirty="0">
+                <a:solidFill>
+                  <a:srgbClr val="5A7078"/>
+                </a:solidFill>
+                <a:latin typeface="Arial" pitchFamily="34" charset="0"/>
+                <a:ea typeface="Arial" pitchFamily="34" charset="-122"/>
+                <a:cs typeface="Arial" pitchFamily="34" charset="-120"/>
+              </a:rPr>
+              <a:t>1 % SAM к третьему году плюс школьные лицензии</a:t>
+            </a:r>
+            <a:endParaRPr lang="en-US" sz="1250" dirty="0"/>
+          </a:p>
+        </p:txBody>
+      </p:sp>
+      <p:sp>
+        <p:nvSpPr>
+          <p:cNvPr id="40" name="Text 38"/>
+          <p:cNvSpPr txBox="1"/>
+          <p:nvPr/>
+        </p:nvSpPr>
+        <p:spPr>
+          <a:xfrm>
+            <a:off x="685800" y="6144768"/>
+            <a:ext cx="10835640" cy="457200"/>
           </a:xfrm>
           <a:prstGeom prst="rect">
             <a:avLst/>
@@ -9224,30 +10193,12 @@
           <a:p>
             <a:pPr indent="0" marL="0">
               <a:lnSpc>
-                <a:spcPct val="115000"/>
+                <a:spcPct val="110000"/>
               </a:lnSpc>
               <a:buNone/>
             </a:pPr>
             <a:r>
-              <a:rPr lang="en-US" sz="1350" b="1" dirty="0">
-                <a:solidFill>
-                  <a:srgbClr val="16242A"/>
-                </a:solidFill>
-                <a:latin typeface="Arial" pitchFamily="34" charset="0"/>
-                <a:ea typeface="Arial" pitchFamily="34" charset="-122"/>
-                <a:cs typeface="Arial" pitchFamily="34" charset="-120"/>
-              </a:rPr>
-              <a:t>Факты
-</a:t>
-            </a:r>
-            <a:pPr indent="0" marL="0">
-              <a:lnSpc>
-                <a:spcPct val="115000"/>
-              </a:lnSpc>
-              <a:buNone/>
-            </a:pPr>
-            <a:r>
-              <a:rPr lang="en-US" sz="1250" dirty="0">
+              <a:rPr lang="en-US" sz="950" dirty="0">
                 <a:solidFill>
                   <a:srgbClr val="5A7078"/>
                 </a:solidFill>
@@ -9255,287 +10206,9 @@
                 <a:ea typeface="Arial" pitchFamily="34" charset="-122"/>
                 <a:cs typeface="Arial" pitchFamily="34" charset="-120"/>
               </a:rPr>
-              <a:t>специальности и вузы — из справочника на 22 профессии</a:t>
-            </a:r>
-            <a:endParaRPr lang="en-US" sz="1350" dirty="0"/>
-          </a:p>
-        </p:txBody>
-      </p:sp>
-      <p:sp>
-        <p:nvSpPr>
-          <p:cNvPr id="16" name="Shape 14"/>
-          <p:cNvSpPr/>
-          <p:nvPr/>
-        </p:nvSpPr>
-        <p:spPr>
-          <a:xfrm>
-            <a:off x="6556248" y="2935224"/>
-            <a:ext cx="146304" cy="146304"/>
-          </a:xfrm>
-          <a:prstGeom prst="ellipse">
-            <a:avLst/>
-          </a:prstGeom>
-          <a:solidFill>
-            <a:srgbClr val="5A7078"/>
-          </a:solidFill>
-          <a:ln w="12700">
-            <a:solidFill>
-              <a:srgbClr val="5A7078"/>
-            </a:solidFill>
-            <a:prstDash val="solid"/>
-          </a:ln>
-        </p:spPr>
-      </p:sp>
-      <p:sp>
-        <p:nvSpPr>
-          <p:cNvPr id="17" name="Text 15"/>
-          <p:cNvSpPr txBox="1"/>
-          <p:nvPr/>
-        </p:nvSpPr>
-        <p:spPr>
-          <a:xfrm>
-            <a:off x="6903720" y="2862072"/>
-            <a:ext cx="4617720" cy="640080"/>
-          </a:xfrm>
-          <a:prstGeom prst="rect">
-            <a:avLst/>
-          </a:prstGeom>
-          <a:noFill/>
-          <a:ln/>
-        </p:spPr>
-        <p:txBody>
-          <a:bodyPr wrap="square" lIns="0" tIns="0" rIns="0" bIns="0" rtlCol="0" anchor="ctr"/>
-          <a:lstStyle/>
-          <a:p>
-            <a:pPr indent="0" marL="0">
-              <a:lnSpc>
-                <a:spcPct val="115000"/>
-              </a:lnSpc>
-              <a:buNone/>
-            </a:pPr>
-            <a:r>
-              <a:rPr lang="en-US" sz="1350" b="1" dirty="0">
-                <a:solidFill>
-                  <a:srgbClr val="16242A"/>
-                </a:solidFill>
-                <a:latin typeface="Arial" pitchFamily="34" charset="0"/>
-                <a:ea typeface="Arial" pitchFamily="34" charset="-122"/>
-                <a:cs typeface="Arial" pitchFamily="34" charset="-120"/>
-              </a:rPr>
-              <a:t>Геометрия карты
-</a:t>
-            </a:r>
-            <a:pPr indent="0" marL="0">
-              <a:lnSpc>
-                <a:spcPct val="115000"/>
-              </a:lnSpc>
-              <a:buNone/>
-            </a:pPr>
-            <a:r>
-              <a:rPr lang="en-US" sz="1250" dirty="0">
-                <a:solidFill>
-                  <a:srgbClr val="5A7078"/>
-                </a:solidFill>
-                <a:latin typeface="Arial" pitchFamily="34" charset="0"/>
-                <a:ea typeface="Arial" pitchFamily="34" charset="-122"/>
-                <a:cs typeface="Arial" pitchFamily="34" charset="-120"/>
-              </a:rPr>
-              <a:t>раскладка линий, статусы станций, пересадки</a:t>
-            </a:r>
-            <a:endParaRPr lang="en-US" sz="1350" dirty="0"/>
-          </a:p>
-        </p:txBody>
-      </p:sp>
-      <p:sp>
-        <p:nvSpPr>
-          <p:cNvPr id="18" name="Shape 16"/>
-          <p:cNvSpPr/>
-          <p:nvPr/>
-        </p:nvSpPr>
-        <p:spPr>
-          <a:xfrm>
-            <a:off x="6556248" y="3648456"/>
-            <a:ext cx="146304" cy="146304"/>
-          </a:xfrm>
-          <a:prstGeom prst="ellipse">
-            <a:avLst/>
-          </a:prstGeom>
-          <a:solidFill>
-            <a:srgbClr val="5A7078"/>
-          </a:solidFill>
-          <a:ln w="12700">
-            <a:solidFill>
-              <a:srgbClr val="5A7078"/>
-            </a:solidFill>
-            <a:prstDash val="solid"/>
-          </a:ln>
-        </p:spPr>
-      </p:sp>
-      <p:sp>
-        <p:nvSpPr>
-          <p:cNvPr id="19" name="Text 17"/>
-          <p:cNvSpPr txBox="1"/>
-          <p:nvPr/>
-        </p:nvSpPr>
-        <p:spPr>
-          <a:xfrm>
-            <a:off x="6903720" y="3575304"/>
-            <a:ext cx="4617720" cy="640080"/>
-          </a:xfrm>
-          <a:prstGeom prst="rect">
-            <a:avLst/>
-          </a:prstGeom>
-          <a:noFill/>
-          <a:ln/>
-        </p:spPr>
-        <p:txBody>
-          <a:bodyPr wrap="square" lIns="0" tIns="0" rIns="0" bIns="0" rtlCol="0" anchor="ctr"/>
-          <a:lstStyle/>
-          <a:p>
-            <a:pPr indent="0" marL="0">
-              <a:lnSpc>
-                <a:spcPct val="115000"/>
-              </a:lnSpc>
-              <a:buNone/>
-            </a:pPr>
-            <a:r>
-              <a:rPr lang="en-US" sz="1350" b="1" dirty="0">
-                <a:solidFill>
-                  <a:srgbClr val="16242A"/>
-                </a:solidFill>
-                <a:latin typeface="Arial" pitchFamily="34" charset="0"/>
-                <a:ea typeface="Arial" pitchFamily="34" charset="-122"/>
-                <a:cs typeface="Arial" pitchFamily="34" charset="-120"/>
-              </a:rPr>
-              <a:t>Fallback
-</a:t>
-            </a:r>
-            <a:pPr indent="0" marL="0">
-              <a:lnSpc>
-                <a:spcPct val="115000"/>
-              </a:lnSpc>
-              <a:buNone/>
-            </a:pPr>
-            <a:r>
-              <a:rPr lang="en-US" sz="1250" dirty="0">
-                <a:solidFill>
-                  <a:srgbClr val="5A7078"/>
-                </a:solidFill>
-                <a:latin typeface="Arial" pitchFamily="34" charset="0"/>
-                <a:ea typeface="Arial" pitchFamily="34" charset="-122"/>
-                <a:cs typeface="Arial" pitchFamily="34" charset="-120"/>
-              </a:rPr>
-              <a:t>модель молчит 40 секунд → карта из локальных данных</a:t>
-            </a:r>
-            <a:endParaRPr lang="en-US" sz="1350" dirty="0"/>
-          </a:p>
-        </p:txBody>
-      </p:sp>
-      <p:sp>
-        <p:nvSpPr>
-          <p:cNvPr id="20" name="Shape 18"/>
-          <p:cNvSpPr/>
-          <p:nvPr/>
-        </p:nvSpPr>
-        <p:spPr>
-          <a:xfrm>
-            <a:off x="685800" y="4892040"/>
-            <a:ext cx="10835640" cy="1325880"/>
-          </a:xfrm>
-          <a:prstGeom prst="roundRect">
-            <a:avLst>
-              <a:gd name="adj" fmla="val 5517"/>
-            </a:avLst>
-          </a:prstGeom>
-          <a:solidFill>
-            <a:srgbClr val="0B5D6E"/>
-          </a:solidFill>
-          <a:ln w="12700">
-            <a:solidFill>
-              <a:srgbClr val="0B5D6E"/>
-            </a:solidFill>
-            <a:prstDash val="solid"/>
-          </a:ln>
-        </p:spPr>
-      </p:sp>
-      <p:sp>
-        <p:nvSpPr>
-          <p:cNvPr id="21" name="Text 19"/>
-          <p:cNvSpPr txBox="1"/>
-          <p:nvPr/>
-        </p:nvSpPr>
-        <p:spPr>
-          <a:xfrm>
-            <a:off x="1051560" y="5074920"/>
-            <a:ext cx="10104120" cy="320040"/>
-          </a:xfrm>
-          <a:prstGeom prst="rect">
-            <a:avLst/>
-          </a:prstGeom>
-          <a:noFill/>
-          <a:ln/>
-        </p:spPr>
-        <p:txBody>
-          <a:bodyPr wrap="square" lIns="0" tIns="0" rIns="0" bIns="0" rtlCol="0" anchor="ctr"/>
-          <a:lstStyle/>
-          <a:p>
-            <a:pPr indent="0" marL="0">
-              <a:buNone/>
-            </a:pPr>
-            <a:r>
-              <a:rPr lang="en-US" sz="1700" b="1" dirty="0">
-                <a:solidFill>
-                  <a:srgbClr val="FFFFFF"/>
-                </a:solidFill>
-                <a:latin typeface="Cambria" pitchFamily="34" charset="0"/>
-                <a:ea typeface="Cambria" pitchFamily="34" charset="-122"/>
-                <a:cs typeface="Cambria" pitchFamily="34" charset="-120"/>
-              </a:rPr>
-              <a:t>Ограничители</a:t>
-            </a:r>
-            <a:endParaRPr lang="en-US" sz="1700" dirty="0"/>
-          </a:p>
-        </p:txBody>
-      </p:sp>
-      <p:sp>
-        <p:nvSpPr>
-          <p:cNvPr id="22" name="Text 20"/>
-          <p:cNvSpPr txBox="1"/>
-          <p:nvPr/>
-        </p:nvSpPr>
-        <p:spPr>
-          <a:xfrm>
-            <a:off x="1051560" y="5440680"/>
-            <a:ext cx="10104120" cy="640080"/>
-          </a:xfrm>
-          <a:prstGeom prst="rect">
-            <a:avLst/>
-          </a:prstGeom>
-          <a:noFill/>
-          <a:ln/>
-        </p:spPr>
-        <p:txBody>
-          <a:bodyPr wrap="square" lIns="0" tIns="0" rIns="0" bIns="0" rtlCol="0" anchor="ctr"/>
-          <a:lstStyle/>
-          <a:p>
-            <a:pPr indent="0" marL="0">
-              <a:lnSpc>
-                <a:spcPct val="120000"/>
-              </a:lnSpc>
-              <a:buNone/>
-            </a:pPr>
-            <a:r>
-              <a:rPr lang="en-US" sz="1400" dirty="0">
-                <a:solidFill>
-                  <a:srgbClr val="FFFFFF"/>
-                </a:solidFill>
-                <a:latin typeface="Arial" pitchFamily="34" charset="0"/>
-                <a:ea typeface="Arial" pitchFamily="34" charset="-122"/>
-                <a:cs typeface="Arial" pitchFamily="34" charset="-120"/>
-              </a:rPr>
-              <a:t>Карта никогда не сужается до одной линии. Ни одной рекомендации без «почему». Каждое событие заканчивается шагом, а не вердиктом. Решение всегда за учеником — AI снижает неопределённость, а не выбирает за него.</a:t>
-            </a:r>
-            <a:endParaRPr lang="en-US" sz="1400" dirty="0"/>
+              <a:t>Данные по школам и ученикам — 2025/26 учебный год. Рыночные показатели — последние опубликованные, год указан у каждой цифры. Источники: Рособрнадзор и «Интерфакс» (ОГЭ-2026), Минпросвещения РФ и РК, Госкомстат Узбекистана, Smart Ranking (EdTech-2025), МЦРИАП, Superjob (опрос 3000 родителей, 2026), курс ЦБ РФ 86,9 ₽/$ на 04.09.2026. $49 — российская цена, для Казахстана и Узбекистана её нужно адаптировать, поэтому TAM — верхняя граница.</a:t>
+            </a:r>
+            <a:endParaRPr lang="en-US" sz="950" dirty="0"/>
           </a:p>
         </p:txBody>
       </p:sp>
@@ -9597,7 +10270,7 @@
                 <a:ea typeface="Cambria" pitchFamily="34" charset="-122"/>
                 <a:cs typeface="Cambria" pitchFamily="34" charset="-120"/>
               </a:rPr>
-              <a:t>Рынок: 2,7 млн девятиклассников в год в трёх странах</a:t>
+              <a:t>За разовый тест не платят. За сопровождение — платят.</a:t>
             </a:r>
             <a:endParaRPr lang="en-US" sz="3100" dirty="0"/>
           </a:p>
@@ -9636,7 +10309,7 @@
                 <a:ea typeface="Arial" pitchFamily="34" charset="-122"/>
                 <a:cs typeface="Arial" pitchFamily="34" charset="-120"/>
               </a:rPr>
-              <a:t>Россия, Казахстан, Узбекистан. Все цифры — из открытых источников, ссылки внизу слайда</a:t>
+              <a:t>Ценность растёт три года: чем дольше ученик пользуется картой, тем она точнее. Пользуется ученик — платит взрослый.</a:t>
             </a:r>
             <a:endParaRPr lang="en-US" sz="1500" dirty="0"/>
           </a:p>
@@ -9644,174 +10317,18 @@
       </p:sp>
       <p:sp>
         <p:nvSpPr>
-          <p:cNvPr id="4" name="Text 2"/>
-          <p:cNvSpPr txBox="1"/>
-          <p:nvPr/>
-        </p:nvSpPr>
-        <p:spPr>
-          <a:xfrm>
-            <a:off x="960120" y="1737360"/>
-            <a:ext cx="2194560" cy="274320"/>
-          </a:xfrm>
-          <a:prstGeom prst="rect">
-            <a:avLst/>
-          </a:prstGeom>
-          <a:noFill/>
-          <a:ln/>
-        </p:spPr>
-        <p:txBody>
-          <a:bodyPr wrap="square" lIns="0" tIns="0" rIns="0" bIns="0" rtlCol="0" anchor="ctr"/>
-          <a:lstStyle/>
-          <a:p>
-            <a:pPr indent="0" marL="0">
-              <a:buNone/>
-            </a:pPr>
-            <a:r>
-              <a:rPr lang="en-US" sz="1150" b="1" dirty="0">
-                <a:solidFill>
-                  <a:srgbClr val="5A7078"/>
-                </a:solidFill>
-                <a:latin typeface="Arial" pitchFamily="34" charset="0"/>
-                <a:ea typeface="Arial" pitchFamily="34" charset="-122"/>
-                <a:cs typeface="Arial" pitchFamily="34" charset="-120"/>
-              </a:rPr>
-              <a:t>Страна</a:t>
-            </a:r>
-            <a:endParaRPr lang="en-US" sz="1150" dirty="0"/>
-          </a:p>
-        </p:txBody>
-      </p:sp>
-      <p:sp>
-        <p:nvSpPr>
-          <p:cNvPr id="5" name="Text 3"/>
-          <p:cNvSpPr txBox="1"/>
-          <p:nvPr/>
-        </p:nvSpPr>
-        <p:spPr>
-          <a:xfrm>
-            <a:off x="3246120" y="1737360"/>
-            <a:ext cx="2103120" cy="274320"/>
-          </a:xfrm>
-          <a:prstGeom prst="rect">
-            <a:avLst/>
-          </a:prstGeom>
-          <a:noFill/>
-          <a:ln/>
-        </p:spPr>
-        <p:txBody>
-          <a:bodyPr wrap="square" lIns="0" tIns="0" rIns="0" bIns="0" rtlCol="0" anchor="ctr"/>
-          <a:lstStyle/>
-          <a:p>
-            <a:pPr indent="0" marL="0">
-              <a:buNone/>
-            </a:pPr>
-            <a:r>
-              <a:rPr lang="en-US" sz="1150" b="1" dirty="0">
-                <a:solidFill>
-                  <a:srgbClr val="5A7078"/>
-                </a:solidFill>
-                <a:latin typeface="Arial" pitchFamily="34" charset="0"/>
-                <a:ea typeface="Arial" pitchFamily="34" charset="-122"/>
-                <a:cs typeface="Arial" pitchFamily="34" charset="-120"/>
-              </a:rPr>
-              <a:t>9 класс, 2025/26</a:t>
-            </a:r>
-            <a:endParaRPr lang="en-US" sz="1150" dirty="0"/>
-          </a:p>
-        </p:txBody>
-      </p:sp>
-      <p:sp>
-        <p:nvSpPr>
-          <p:cNvPr id="6" name="Text 4"/>
-          <p:cNvSpPr txBox="1"/>
-          <p:nvPr/>
-        </p:nvSpPr>
-        <p:spPr>
-          <a:xfrm>
-            <a:off x="5440680" y="1737360"/>
-            <a:ext cx="1737360" cy="274320"/>
-          </a:xfrm>
-          <a:prstGeom prst="rect">
-            <a:avLst/>
-          </a:prstGeom>
-          <a:noFill/>
-          <a:ln/>
-        </p:spPr>
-        <p:txBody>
-          <a:bodyPr wrap="square" lIns="0" tIns="0" rIns="0" bIns="0" rtlCol="0" anchor="ctr"/>
-          <a:lstStyle/>
-          <a:p>
-            <a:pPr indent="0" marL="0">
-              <a:buNone/>
-            </a:pPr>
-            <a:r>
-              <a:rPr lang="en-US" sz="1150" b="1" dirty="0">
-                <a:solidFill>
-                  <a:srgbClr val="5A7078"/>
-                </a:solidFill>
-                <a:latin typeface="Arial" pitchFamily="34" charset="0"/>
-                <a:ea typeface="Arial" pitchFamily="34" charset="-122"/>
-                <a:cs typeface="Arial" pitchFamily="34" charset="-120"/>
-              </a:rPr>
-              <a:t>Школ</a:t>
-            </a:r>
-            <a:endParaRPr lang="en-US" sz="1150" dirty="0"/>
-          </a:p>
-        </p:txBody>
-      </p:sp>
-      <p:sp>
-        <p:nvSpPr>
-          <p:cNvPr id="7" name="Text 5"/>
-          <p:cNvSpPr txBox="1"/>
-          <p:nvPr/>
-        </p:nvSpPr>
-        <p:spPr>
-          <a:xfrm>
-            <a:off x="7269480" y="1737360"/>
-            <a:ext cx="4023360" cy="274320"/>
-          </a:xfrm>
-          <a:prstGeom prst="rect">
-            <a:avLst/>
-          </a:prstGeom>
-          <a:noFill/>
-          <a:ln/>
-        </p:spPr>
-        <p:txBody>
-          <a:bodyPr wrap="square" lIns="0" tIns="0" rIns="0" bIns="0" rtlCol="0" anchor="ctr"/>
-          <a:lstStyle/>
-          <a:p>
-            <a:pPr indent="0" marL="0">
-              <a:buNone/>
-            </a:pPr>
-            <a:r>
-              <a:rPr lang="en-US" sz="1150" b="1" dirty="0">
-                <a:solidFill>
-                  <a:srgbClr val="5A7078"/>
-                </a:solidFill>
-                <a:latin typeface="Arial" pitchFamily="34" charset="0"/>
-                <a:ea typeface="Arial" pitchFamily="34" charset="-122"/>
-                <a:cs typeface="Arial" pitchFamily="34" charset="-120"/>
-              </a:rPr>
-              <a:t>Рынок образования, последние данные</a:t>
-            </a:r>
-            <a:endParaRPr lang="en-US" sz="1150" dirty="0"/>
-          </a:p>
-        </p:txBody>
-      </p:sp>
-      <p:sp>
-        <p:nvSpPr>
-          <p:cNvPr id="8" name="Shape 6"/>
+          <p:cNvPr id="4" name="Shape 2"/>
           <p:cNvSpPr/>
           <p:nvPr/>
         </p:nvSpPr>
         <p:spPr>
           <a:xfrm>
-            <a:off x="685800" y="2011680"/>
-            <a:ext cx="10835640" cy="402336"/>
+            <a:off x="685800" y="1874520"/>
+            <a:ext cx="3383280" cy="2148840"/>
           </a:xfrm>
           <a:prstGeom prst="roundRect">
             <a:avLst>
-              <a:gd name="adj" fmla="val 18182"/>
+              <a:gd name="adj" fmla="val 3404"/>
             </a:avLst>
           </a:prstGeom>
           <a:solidFill>
@@ -9827,38 +10344,144 @@
       </p:sp>
       <p:sp>
         <p:nvSpPr>
-          <p:cNvPr id="9" name="Text 7"/>
-          <p:cNvSpPr txBox="1"/>
-          <p:nvPr/>
-        </p:nvSpPr>
-        <p:spPr>
-          <a:xfrm>
-            <a:off x="960120" y="2084832"/>
-            <a:ext cx="2194560" cy="274320"/>
-          </a:xfrm>
-          <a:prstGeom prst="rect">
-            <a:avLst/>
-          </a:prstGeom>
-          <a:noFill/>
-          <a:ln/>
-        </p:spPr>
-        <p:txBody>
-          <a:bodyPr wrap="square" lIns="0" tIns="0" rIns="0" bIns="0" rtlCol="0" anchor="ctr"/>
-          <a:lstStyle/>
-          <a:p>
-            <a:pPr indent="0" marL="0">
-              <a:buNone/>
-            </a:pPr>
-            <a:r>
-              <a:rPr lang="en-US" sz="1250" b="1" dirty="0">
+          <p:cNvPr id="5" name="Shape 3"/>
+          <p:cNvSpPr/>
+          <p:nvPr/>
+        </p:nvSpPr>
+        <p:spPr>
+          <a:xfrm>
+            <a:off x="932688" y="2075688"/>
+            <a:ext cx="237744" cy="237744"/>
+          </a:xfrm>
+          <a:prstGeom prst="ellipse">
+            <a:avLst/>
+          </a:prstGeom>
+          <a:solidFill>
+            <a:srgbClr val="FFFFFF"/>
+          </a:solidFill>
+          <a:ln w="25400">
+            <a:solidFill>
+              <a:srgbClr val="2E9E5B"/>
+            </a:solidFill>
+            <a:prstDash val="solid"/>
+          </a:ln>
+        </p:spPr>
+      </p:sp>
+      <p:sp>
+        <p:nvSpPr>
+          <p:cNvPr id="6" name="Text 4"/>
+          <p:cNvSpPr txBox="1"/>
+          <p:nvPr/>
+        </p:nvSpPr>
+        <p:spPr>
+          <a:xfrm>
+            <a:off x="1325880" y="2029968"/>
+            <a:ext cx="2560320" cy="320040"/>
+          </a:xfrm>
+          <a:prstGeom prst="rect">
+            <a:avLst/>
+          </a:prstGeom>
+          <a:noFill/>
+          <a:ln/>
+        </p:spPr>
+        <p:txBody>
+          <a:bodyPr wrap="square" lIns="0" tIns="0" rIns="0" bIns="0" rtlCol="0" anchor="ctr"/>
+          <a:lstStyle/>
+          <a:p>
+            <a:pPr indent="0" marL="0">
+              <a:buNone/>
+            </a:pPr>
+            <a:r>
+              <a:rPr lang="en-US" sz="1700" b="1" dirty="0">
                 <a:solidFill>
                   <a:srgbClr val="16242A"/>
                 </a:solidFill>
-                <a:latin typeface="Arial" pitchFamily="34" charset="0"/>
-                <a:ea typeface="Arial" pitchFamily="34" charset="-122"/>
-                <a:cs typeface="Arial" pitchFamily="34" charset="-120"/>
-              </a:rPr>
-              <a:t>Россия</a:t>
+                <a:latin typeface="Cambria" pitchFamily="34" charset="0"/>
+                <a:ea typeface="Cambria" pitchFamily="34" charset="-122"/>
+                <a:cs typeface="Cambria" pitchFamily="34" charset="-120"/>
+              </a:rPr>
+              <a:t>Родитель</a:t>
+            </a:r>
+            <a:endParaRPr lang="en-US" sz="1700" dirty="0"/>
+          </a:p>
+        </p:txBody>
+      </p:sp>
+      <p:sp>
+        <p:nvSpPr>
+          <p:cNvPr id="7" name="Text 5"/>
+          <p:cNvSpPr txBox="1"/>
+          <p:nvPr/>
+        </p:nvSpPr>
+        <p:spPr>
+          <a:xfrm>
+            <a:off x="1005840" y="2450592"/>
+            <a:ext cx="2743200" cy="320040"/>
+          </a:xfrm>
+          <a:prstGeom prst="rect">
+            <a:avLst/>
+          </a:prstGeom>
+          <a:noFill/>
+          <a:ln/>
+        </p:spPr>
+        <p:txBody>
+          <a:bodyPr wrap="square" lIns="0" tIns="0" rIns="0" bIns="0" rtlCol="0" anchor="ctr"/>
+          <a:lstStyle/>
+          <a:p>
+            <a:pPr indent="0" marL="0">
+              <a:buNone/>
+            </a:pPr>
+            <a:r>
+              <a:rPr lang="en-US" sz="1500" b="1" dirty="0">
+                <a:solidFill>
+                  <a:srgbClr val="2E9E5B"/>
+                </a:solidFill>
+                <a:latin typeface="Arial" pitchFamily="34" charset="0"/>
+                <a:ea typeface="Arial" pitchFamily="34" charset="-122"/>
+                <a:cs typeface="Arial" pitchFamily="34" charset="-120"/>
+              </a:rPr>
+              <a:t>$6 / мес  ·  $49 / год</a:t>
+            </a:r>
+            <a:endParaRPr lang="en-US" sz="1500" dirty="0"/>
+          </a:p>
+        </p:txBody>
+      </p:sp>
+      <p:sp>
+        <p:nvSpPr>
+          <p:cNvPr id="8" name="Text 6"/>
+          <p:cNvSpPr txBox="1"/>
+          <p:nvPr/>
+        </p:nvSpPr>
+        <p:spPr>
+          <a:xfrm>
+            <a:off x="1005840" y="2834640"/>
+            <a:ext cx="2743200" cy="1005840"/>
+          </a:xfrm>
+          <a:prstGeom prst="rect">
+            <a:avLst/>
+          </a:prstGeom>
+          <a:noFill/>
+          <a:ln/>
+        </p:spPr>
+        <p:txBody>
+          <a:bodyPr wrap="square" lIns="0" tIns="0" rIns="0" bIns="0" rtlCol="0" anchor="ctr"/>
+          <a:lstStyle/>
+          <a:p>
+            <a:pPr indent="0" marL="0">
+              <a:lnSpc>
+                <a:spcPct val="120000"/>
+              </a:lnSpc>
+              <a:buNone/>
+            </a:pPr>
+            <a:r>
+              <a:rPr lang="en-US" sz="1250" dirty="0">
+                <a:solidFill>
+                  <a:srgbClr val="5A7078"/>
+                </a:solidFill>
+                <a:latin typeface="Arial" pitchFamily="34" charset="0"/>
+                <a:ea typeface="Arial" pitchFamily="34" charset="-122"/>
+                <a:cs typeface="Arial" pitchFamily="34" charset="-120"/>
+              </a:rPr>
+              <a:t>Спокойствие: у ребёнка есть план, и он им занимается. Дешевле одной сессии консультанта ($50–150).</a:t>
             </a:r>
             <a:endParaRPr lang="en-US" sz="1250" dirty="0"/>
           </a:p>
@@ -9866,291 +10489,18 @@
       </p:sp>
       <p:sp>
         <p:nvSpPr>
-          <p:cNvPr id="10" name="Text 8"/>
-          <p:cNvSpPr txBox="1"/>
-          <p:nvPr/>
-        </p:nvSpPr>
-        <p:spPr>
-          <a:xfrm>
-            <a:off x="3246120" y="2084832"/>
-            <a:ext cx="2103120" cy="274320"/>
-          </a:xfrm>
-          <a:prstGeom prst="rect">
-            <a:avLst/>
-          </a:prstGeom>
-          <a:noFill/>
-          <a:ln/>
-        </p:spPr>
-        <p:txBody>
-          <a:bodyPr wrap="square" lIns="0" tIns="0" rIns="0" bIns="0" rtlCol="0" anchor="ctr"/>
-          <a:lstStyle/>
-          <a:p>
-            <a:pPr indent="0" marL="0">
-              <a:buNone/>
-            </a:pPr>
-            <a:r>
-              <a:rPr lang="en-US" sz="1250" dirty="0">
-                <a:solidFill>
-                  <a:srgbClr val="16242A"/>
-                </a:solidFill>
-                <a:latin typeface="Arial" pitchFamily="34" charset="0"/>
-                <a:ea typeface="Arial" pitchFamily="34" charset="-122"/>
-                <a:cs typeface="Arial" pitchFamily="34" charset="-120"/>
-              </a:rPr>
-              <a:t>1,71 млн</a:t>
-            </a:r>
-            <a:endParaRPr lang="en-US" sz="1250" dirty="0"/>
-          </a:p>
-        </p:txBody>
-      </p:sp>
-      <p:sp>
-        <p:nvSpPr>
-          <p:cNvPr id="11" name="Text 9"/>
-          <p:cNvSpPr txBox="1"/>
-          <p:nvPr/>
-        </p:nvSpPr>
-        <p:spPr>
-          <a:xfrm>
-            <a:off x="5440680" y="2084832"/>
-            <a:ext cx="1737360" cy="274320"/>
-          </a:xfrm>
-          <a:prstGeom prst="rect">
-            <a:avLst/>
-          </a:prstGeom>
-          <a:noFill/>
-          <a:ln/>
-        </p:spPr>
-        <p:txBody>
-          <a:bodyPr wrap="square" lIns="0" tIns="0" rIns="0" bIns="0" rtlCol="0" anchor="ctr"/>
-          <a:lstStyle/>
-          <a:p>
-            <a:pPr indent="0" marL="0">
-              <a:buNone/>
-            </a:pPr>
-            <a:r>
-              <a:rPr lang="en-US" sz="1250" dirty="0">
-                <a:solidFill>
-                  <a:srgbClr val="16242A"/>
-                </a:solidFill>
-                <a:latin typeface="Arial" pitchFamily="34" charset="0"/>
-                <a:ea typeface="Arial" pitchFamily="34" charset="-122"/>
-                <a:cs typeface="Arial" pitchFamily="34" charset="-120"/>
-              </a:rPr>
-              <a:t>~40 000</a:t>
-            </a:r>
-            <a:endParaRPr lang="en-US" sz="1250" dirty="0"/>
-          </a:p>
-        </p:txBody>
-      </p:sp>
-      <p:sp>
-        <p:nvSpPr>
-          <p:cNvPr id="12" name="Text 10"/>
-          <p:cNvSpPr txBox="1"/>
-          <p:nvPr/>
-        </p:nvSpPr>
-        <p:spPr>
-          <a:xfrm>
-            <a:off x="7269480" y="2084832"/>
-            <a:ext cx="4023360" cy="274320"/>
-          </a:xfrm>
-          <a:prstGeom prst="rect">
-            <a:avLst/>
-          </a:prstGeom>
-          <a:noFill/>
-          <a:ln/>
-        </p:spPr>
-        <p:txBody>
-          <a:bodyPr wrap="square" lIns="0" tIns="0" rIns="0" bIns="0" rtlCol="0" anchor="ctr"/>
-          <a:lstStyle/>
-          <a:p>
-            <a:pPr indent="0" marL="0">
-              <a:buNone/>
-            </a:pPr>
-            <a:r>
-              <a:rPr lang="en-US" sz="1250" dirty="0">
-                <a:solidFill>
-                  <a:srgbClr val="16242A"/>
-                </a:solidFill>
-                <a:latin typeface="Arial" pitchFamily="34" charset="0"/>
-                <a:ea typeface="Arial" pitchFamily="34" charset="-122"/>
-                <a:cs typeface="Arial" pitchFamily="34" charset="-120"/>
-              </a:rPr>
-              <a:t>EdTech — 154 млрд ₽ за 2025, +12 % за год</a:t>
-            </a:r>
-            <a:endParaRPr lang="en-US" sz="1250" dirty="0"/>
-          </a:p>
-        </p:txBody>
-      </p:sp>
-      <p:sp>
-        <p:nvSpPr>
-          <p:cNvPr id="13" name="Text 11"/>
-          <p:cNvSpPr txBox="1"/>
-          <p:nvPr/>
-        </p:nvSpPr>
-        <p:spPr>
-          <a:xfrm>
-            <a:off x="960120" y="2505456"/>
-            <a:ext cx="2194560" cy="274320"/>
-          </a:xfrm>
-          <a:prstGeom prst="rect">
-            <a:avLst/>
-          </a:prstGeom>
-          <a:noFill/>
-          <a:ln/>
-        </p:spPr>
-        <p:txBody>
-          <a:bodyPr wrap="square" lIns="0" tIns="0" rIns="0" bIns="0" rtlCol="0" anchor="ctr"/>
-          <a:lstStyle/>
-          <a:p>
-            <a:pPr indent="0" marL="0">
-              <a:buNone/>
-            </a:pPr>
-            <a:r>
-              <a:rPr lang="en-US" sz="1250" b="1" dirty="0">
-                <a:solidFill>
-                  <a:srgbClr val="16242A"/>
-                </a:solidFill>
-                <a:latin typeface="Arial" pitchFamily="34" charset="0"/>
-                <a:ea typeface="Arial" pitchFamily="34" charset="-122"/>
-                <a:cs typeface="Arial" pitchFamily="34" charset="-120"/>
-              </a:rPr>
-              <a:t>Казахстан</a:t>
-            </a:r>
-            <a:endParaRPr lang="en-US" sz="1250" dirty="0"/>
-          </a:p>
-        </p:txBody>
-      </p:sp>
-      <p:sp>
-        <p:nvSpPr>
-          <p:cNvPr id="14" name="Text 12"/>
-          <p:cNvSpPr txBox="1"/>
-          <p:nvPr/>
-        </p:nvSpPr>
-        <p:spPr>
-          <a:xfrm>
-            <a:off x="3246120" y="2505456"/>
-            <a:ext cx="2103120" cy="274320"/>
-          </a:xfrm>
-          <a:prstGeom prst="rect">
-            <a:avLst/>
-          </a:prstGeom>
-          <a:noFill/>
-          <a:ln/>
-        </p:spPr>
-        <p:txBody>
-          <a:bodyPr wrap="square" lIns="0" tIns="0" rIns="0" bIns="0" rtlCol="0" anchor="ctr"/>
-          <a:lstStyle/>
-          <a:p>
-            <a:pPr indent="0" marL="0">
-              <a:buNone/>
-            </a:pPr>
-            <a:r>
-              <a:rPr lang="en-US" sz="1250" dirty="0">
-                <a:solidFill>
-                  <a:srgbClr val="16242A"/>
-                </a:solidFill>
-                <a:latin typeface="Arial" pitchFamily="34" charset="0"/>
-                <a:ea typeface="Arial" pitchFamily="34" charset="-122"/>
-                <a:cs typeface="Arial" pitchFamily="34" charset="-120"/>
-              </a:rPr>
-              <a:t>360 тыс.</a:t>
-            </a:r>
-            <a:endParaRPr lang="en-US" sz="1250" dirty="0"/>
-          </a:p>
-        </p:txBody>
-      </p:sp>
-      <p:sp>
-        <p:nvSpPr>
-          <p:cNvPr id="15" name="Text 13"/>
-          <p:cNvSpPr txBox="1"/>
-          <p:nvPr/>
-        </p:nvSpPr>
-        <p:spPr>
-          <a:xfrm>
-            <a:off x="5440680" y="2505456"/>
-            <a:ext cx="1737360" cy="274320"/>
-          </a:xfrm>
-          <a:prstGeom prst="rect">
-            <a:avLst/>
-          </a:prstGeom>
-          <a:noFill/>
-          <a:ln/>
-        </p:spPr>
-        <p:txBody>
-          <a:bodyPr wrap="square" lIns="0" tIns="0" rIns="0" bIns="0" rtlCol="0" anchor="ctr"/>
-          <a:lstStyle/>
-          <a:p>
-            <a:pPr indent="0" marL="0">
-              <a:buNone/>
-            </a:pPr>
-            <a:r>
-              <a:rPr lang="en-US" sz="1250" dirty="0">
-                <a:solidFill>
-                  <a:srgbClr val="16242A"/>
-                </a:solidFill>
-                <a:latin typeface="Arial" pitchFamily="34" charset="0"/>
-                <a:ea typeface="Arial" pitchFamily="34" charset="-122"/>
-                <a:cs typeface="Arial" pitchFamily="34" charset="-120"/>
-              </a:rPr>
-              <a:t>8 048</a:t>
-            </a:r>
-            <a:endParaRPr lang="en-US" sz="1250" dirty="0"/>
-          </a:p>
-        </p:txBody>
-      </p:sp>
-      <p:sp>
-        <p:nvSpPr>
-          <p:cNvPr id="16" name="Text 14"/>
-          <p:cNvSpPr txBox="1"/>
-          <p:nvPr/>
-        </p:nvSpPr>
-        <p:spPr>
-          <a:xfrm>
-            <a:off x="7269480" y="2505456"/>
-            <a:ext cx="4023360" cy="274320"/>
-          </a:xfrm>
-          <a:prstGeom prst="rect">
-            <a:avLst/>
-          </a:prstGeom>
-          <a:noFill/>
-          <a:ln/>
-        </p:spPr>
-        <p:txBody>
-          <a:bodyPr wrap="square" lIns="0" tIns="0" rIns="0" bIns="0" rtlCol="0" anchor="ctr"/>
-          <a:lstStyle/>
-          <a:p>
-            <a:pPr indent="0" marL="0">
-              <a:buNone/>
-            </a:pPr>
-            <a:r>
-              <a:rPr lang="en-US" sz="1250" dirty="0">
-                <a:solidFill>
-                  <a:srgbClr val="16242A"/>
-                </a:solidFill>
-                <a:latin typeface="Arial" pitchFamily="34" charset="0"/>
-                <a:ea typeface="Arial" pitchFamily="34" charset="-122"/>
-                <a:cs typeface="Arial" pitchFamily="34" charset="-120"/>
-              </a:rPr>
-              <a:t>EdTech — 45 млрд ₸ за 2025 (МЦРИАП)</a:t>
-            </a:r>
-            <a:endParaRPr lang="en-US" sz="1250" dirty="0"/>
-          </a:p>
-        </p:txBody>
-      </p:sp>
-      <p:sp>
-        <p:nvSpPr>
-          <p:cNvPr id="17" name="Shape 15"/>
+          <p:cNvPr id="9" name="Shape 7"/>
           <p:cNvSpPr/>
           <p:nvPr/>
         </p:nvSpPr>
         <p:spPr>
           <a:xfrm>
-            <a:off x="685800" y="2852928"/>
-            <a:ext cx="10835640" cy="402336"/>
+            <a:off x="4480560" y="1874520"/>
+            <a:ext cx="3383280" cy="2148840"/>
           </a:xfrm>
           <a:prstGeom prst="roundRect">
             <a:avLst>
-              <a:gd name="adj" fmla="val 18182"/>
+              <a:gd name="adj" fmla="val 3404"/>
             </a:avLst>
           </a:prstGeom>
           <a:solidFill>
@@ -10166,38 +10516,144 @@
       </p:sp>
       <p:sp>
         <p:nvSpPr>
-          <p:cNvPr id="18" name="Text 16"/>
-          <p:cNvSpPr txBox="1"/>
-          <p:nvPr/>
-        </p:nvSpPr>
-        <p:spPr>
-          <a:xfrm>
-            <a:off x="960120" y="2926080"/>
-            <a:ext cx="2194560" cy="274320"/>
-          </a:xfrm>
-          <a:prstGeom prst="rect">
-            <a:avLst/>
-          </a:prstGeom>
-          <a:noFill/>
-          <a:ln/>
-        </p:spPr>
-        <p:txBody>
-          <a:bodyPr wrap="square" lIns="0" tIns="0" rIns="0" bIns="0" rtlCol="0" anchor="ctr"/>
-          <a:lstStyle/>
-          <a:p>
-            <a:pPr indent="0" marL="0">
-              <a:buNone/>
-            </a:pPr>
-            <a:r>
-              <a:rPr lang="en-US" sz="1250" b="1" dirty="0">
+          <p:cNvPr id="10" name="Shape 8"/>
+          <p:cNvSpPr/>
+          <p:nvPr/>
+        </p:nvSpPr>
+        <p:spPr>
+          <a:xfrm>
+            <a:off x="4727448" y="2075688"/>
+            <a:ext cx="237744" cy="237744"/>
+          </a:xfrm>
+          <a:prstGeom prst="ellipse">
+            <a:avLst/>
+          </a:prstGeom>
+          <a:solidFill>
+            <a:srgbClr val="FFFFFF"/>
+          </a:solidFill>
+          <a:ln w="25400">
+            <a:solidFill>
+              <a:srgbClr val="2B6BE4"/>
+            </a:solidFill>
+            <a:prstDash val="solid"/>
+          </a:ln>
+        </p:spPr>
+      </p:sp>
+      <p:sp>
+        <p:nvSpPr>
+          <p:cNvPr id="11" name="Text 9"/>
+          <p:cNvSpPr txBox="1"/>
+          <p:nvPr/>
+        </p:nvSpPr>
+        <p:spPr>
+          <a:xfrm>
+            <a:off x="5120640" y="2029968"/>
+            <a:ext cx="2560320" cy="320040"/>
+          </a:xfrm>
+          <a:prstGeom prst="rect">
+            <a:avLst/>
+          </a:prstGeom>
+          <a:noFill/>
+          <a:ln/>
+        </p:spPr>
+        <p:txBody>
+          <a:bodyPr wrap="square" lIns="0" tIns="0" rIns="0" bIns="0" rtlCol="0" anchor="ctr"/>
+          <a:lstStyle/>
+          <a:p>
+            <a:pPr indent="0" marL="0">
+              <a:buNone/>
+            </a:pPr>
+            <a:r>
+              <a:rPr lang="en-US" sz="1700" b="1" dirty="0">
                 <a:solidFill>
                   <a:srgbClr val="16242A"/>
                 </a:solidFill>
-                <a:latin typeface="Arial" pitchFamily="34" charset="0"/>
-                <a:ea typeface="Arial" pitchFamily="34" charset="-122"/>
-                <a:cs typeface="Arial" pitchFamily="34" charset="-120"/>
-              </a:rPr>
-              <a:t>Узбекистан</a:t>
+                <a:latin typeface="Cambria" pitchFamily="34" charset="0"/>
+                <a:ea typeface="Cambria" pitchFamily="34" charset="-122"/>
+                <a:cs typeface="Cambria" pitchFamily="34" charset="-120"/>
+              </a:rPr>
+              <a:t>Школа</a:t>
+            </a:r>
+            <a:endParaRPr lang="en-US" sz="1700" dirty="0"/>
+          </a:p>
+        </p:txBody>
+      </p:sp>
+      <p:sp>
+        <p:nvSpPr>
+          <p:cNvPr id="12" name="Text 10"/>
+          <p:cNvSpPr txBox="1"/>
+          <p:nvPr/>
+        </p:nvSpPr>
+        <p:spPr>
+          <a:xfrm>
+            <a:off x="4800600" y="2450592"/>
+            <a:ext cx="2743200" cy="320040"/>
+          </a:xfrm>
+          <a:prstGeom prst="rect">
+            <a:avLst/>
+          </a:prstGeom>
+          <a:noFill/>
+          <a:ln/>
+        </p:spPr>
+        <p:txBody>
+          <a:bodyPr wrap="square" lIns="0" tIns="0" rIns="0" bIns="0" rtlCol="0" anchor="ctr"/>
+          <a:lstStyle/>
+          <a:p>
+            <a:pPr indent="0" marL="0">
+              <a:buNone/>
+            </a:pPr>
+            <a:r>
+              <a:rPr lang="en-US" sz="1500" b="1" dirty="0">
+                <a:solidFill>
+                  <a:srgbClr val="2B6BE4"/>
+                </a:solidFill>
+                <a:latin typeface="Arial" pitchFamily="34" charset="0"/>
+                <a:ea typeface="Arial" pitchFamily="34" charset="-122"/>
+                <a:cs typeface="Arial" pitchFamily="34" charset="-120"/>
+              </a:rPr>
+              <a:t>$250 / год за класс</a:t>
+            </a:r>
+            <a:endParaRPr lang="en-US" sz="1500" dirty="0"/>
+          </a:p>
+        </p:txBody>
+      </p:sp>
+      <p:sp>
+        <p:nvSpPr>
+          <p:cNvPr id="13" name="Text 11"/>
+          <p:cNvSpPr txBox="1"/>
+          <p:nvPr/>
+        </p:nvSpPr>
+        <p:spPr>
+          <a:xfrm>
+            <a:off x="4800600" y="2834640"/>
+            <a:ext cx="2743200" cy="1005840"/>
+          </a:xfrm>
+          <a:prstGeom prst="rect">
+            <a:avLst/>
+          </a:prstGeom>
+          <a:noFill/>
+          <a:ln/>
+        </p:spPr>
+        <p:txBody>
+          <a:bodyPr wrap="square" lIns="0" tIns="0" rIns="0" bIns="0" rtlCol="0" anchor="ctr"/>
+          <a:lstStyle/>
+          <a:p>
+            <a:pPr indent="0" marL="0">
+              <a:lnSpc>
+                <a:spcPct val="120000"/>
+              </a:lnSpc>
+              <a:buNone/>
+            </a:pPr>
+            <a:r>
+              <a:rPr lang="en-US" sz="1250" dirty="0">
+                <a:solidFill>
+                  <a:srgbClr val="5A7078"/>
+                </a:solidFill>
+                <a:latin typeface="Arial" pitchFamily="34" charset="0"/>
+                <a:ea typeface="Arial" pitchFamily="34" charset="-122"/>
+                <a:cs typeface="Arial" pitchFamily="34" charset="-120"/>
+              </a:rPr>
+              <a:t>Около $8 на ученика. Карты всех девятиклассников, кабинет куратора, отчёт «куда смотрят наши ученики».</a:t>
             </a:r>
             <a:endParaRPr lang="en-US" sz="1250" dirty="0"/>
           </a:p>
@@ -10205,291 +10661,277 @@
       </p:sp>
       <p:sp>
         <p:nvSpPr>
-          <p:cNvPr id="19" name="Text 17"/>
-          <p:cNvSpPr txBox="1"/>
-          <p:nvPr/>
-        </p:nvSpPr>
-        <p:spPr>
-          <a:xfrm>
-            <a:off x="3246120" y="2926080"/>
-            <a:ext cx="2103120" cy="274320"/>
-          </a:xfrm>
-          <a:prstGeom prst="rect">
-            <a:avLst/>
-          </a:prstGeom>
-          <a:noFill/>
-          <a:ln/>
-        </p:spPr>
-        <p:txBody>
-          <a:bodyPr wrap="square" lIns="0" tIns="0" rIns="0" bIns="0" rtlCol="0" anchor="ctr"/>
-          <a:lstStyle/>
-          <a:p>
-            <a:pPr indent="0" marL="0">
-              <a:buNone/>
-            </a:pPr>
-            <a:r>
-              <a:rPr lang="en-US" sz="1250" dirty="0">
-                <a:solidFill>
-                  <a:srgbClr val="16242A"/>
-                </a:solidFill>
-                <a:latin typeface="Arial" pitchFamily="34" charset="0"/>
-                <a:ea typeface="Arial" pitchFamily="34" charset="-122"/>
-                <a:cs typeface="Arial" pitchFamily="34" charset="-120"/>
-              </a:rPr>
-              <a:t>622 тыс.</a:t>
-            </a:r>
-            <a:endParaRPr lang="en-US" sz="1250" dirty="0"/>
-          </a:p>
-        </p:txBody>
-      </p:sp>
-      <p:sp>
-        <p:nvSpPr>
-          <p:cNvPr id="20" name="Text 18"/>
-          <p:cNvSpPr txBox="1"/>
-          <p:nvPr/>
-        </p:nvSpPr>
-        <p:spPr>
-          <a:xfrm>
-            <a:off x="5440680" y="2926080"/>
-            <a:ext cx="1737360" cy="274320"/>
-          </a:xfrm>
-          <a:prstGeom prst="rect">
-            <a:avLst/>
-          </a:prstGeom>
-          <a:noFill/>
-          <a:ln/>
-        </p:spPr>
-        <p:txBody>
-          <a:bodyPr wrap="square" lIns="0" tIns="0" rIns="0" bIns="0" rtlCol="0" anchor="ctr"/>
-          <a:lstStyle/>
-          <a:p>
-            <a:pPr indent="0" marL="0">
-              <a:buNone/>
-            </a:pPr>
-            <a:r>
-              <a:rPr lang="en-US" sz="1250" dirty="0">
-                <a:solidFill>
-                  <a:srgbClr val="16242A"/>
-                </a:solidFill>
-                <a:latin typeface="Arial" pitchFamily="34" charset="0"/>
-                <a:ea typeface="Arial" pitchFamily="34" charset="-122"/>
-                <a:cs typeface="Arial" pitchFamily="34" charset="-120"/>
-              </a:rPr>
-              <a:t>11 118</a:t>
-            </a:r>
-            <a:endParaRPr lang="en-US" sz="1250" dirty="0"/>
-          </a:p>
-        </p:txBody>
-      </p:sp>
-      <p:sp>
-        <p:nvSpPr>
-          <p:cNvPr id="21" name="Text 19"/>
-          <p:cNvSpPr txBox="1"/>
-          <p:nvPr/>
-        </p:nvSpPr>
-        <p:spPr>
-          <a:xfrm>
-            <a:off x="7269480" y="2926080"/>
-            <a:ext cx="4023360" cy="274320"/>
-          </a:xfrm>
-          <a:prstGeom prst="rect">
-            <a:avLst/>
-          </a:prstGeom>
-          <a:noFill/>
-          <a:ln/>
-        </p:spPr>
-        <p:txBody>
-          <a:bodyPr wrap="square" lIns="0" tIns="0" rIns="0" bIns="0" rtlCol="0" anchor="ctr"/>
-          <a:lstStyle/>
-          <a:p>
-            <a:pPr indent="0" marL="0">
-              <a:buNone/>
-            </a:pPr>
-            <a:r>
-              <a:rPr lang="en-US" sz="1250" dirty="0">
-                <a:solidFill>
-                  <a:srgbClr val="16242A"/>
-                </a:solidFill>
-                <a:latin typeface="Arial" pitchFamily="34" charset="0"/>
-                <a:ea typeface="Arial" pitchFamily="34" charset="-122"/>
-                <a:cs typeface="Arial" pitchFamily="34" charset="-120"/>
-              </a:rPr>
-              <a:t>Образование — 23,8 трлн сумов за I п/г 2026, +22,7 %</a:t>
-            </a:r>
-            <a:endParaRPr lang="en-US" sz="1250" dirty="0"/>
-          </a:p>
-        </p:txBody>
-      </p:sp>
-      <p:sp>
-        <p:nvSpPr>
-          <p:cNvPr id="22" name="Text 20"/>
-          <p:cNvSpPr txBox="1"/>
-          <p:nvPr/>
-        </p:nvSpPr>
-        <p:spPr>
-          <a:xfrm>
-            <a:off x="960120" y="3346704"/>
-            <a:ext cx="2194560" cy="274320"/>
-          </a:xfrm>
-          <a:prstGeom prst="rect">
-            <a:avLst/>
-          </a:prstGeom>
-          <a:noFill/>
-          <a:ln/>
-        </p:spPr>
-        <p:txBody>
-          <a:bodyPr wrap="square" lIns="0" tIns="0" rIns="0" bIns="0" rtlCol="0" anchor="ctr"/>
-          <a:lstStyle/>
-          <a:p>
-            <a:pPr indent="0" marL="0">
-              <a:buNone/>
-            </a:pPr>
-            <a:r>
-              <a:rPr lang="en-US" sz="1250" b="1" dirty="0">
-                <a:solidFill>
-                  <a:srgbClr val="0B5D6E"/>
-                </a:solidFill>
-                <a:latin typeface="Arial" pitchFamily="34" charset="0"/>
-                <a:ea typeface="Arial" pitchFamily="34" charset="-122"/>
-                <a:cs typeface="Arial" pitchFamily="34" charset="-120"/>
-              </a:rPr>
-              <a:t>Вместе</a:t>
-            </a:r>
-            <a:endParaRPr lang="en-US" sz="1250" dirty="0"/>
-          </a:p>
-        </p:txBody>
-      </p:sp>
-      <p:sp>
-        <p:nvSpPr>
-          <p:cNvPr id="23" name="Text 21"/>
-          <p:cNvSpPr txBox="1"/>
-          <p:nvPr/>
-        </p:nvSpPr>
-        <p:spPr>
-          <a:xfrm>
-            <a:off x="3246120" y="3346704"/>
-            <a:ext cx="2103120" cy="274320"/>
-          </a:xfrm>
-          <a:prstGeom prst="rect">
-            <a:avLst/>
-          </a:prstGeom>
-          <a:noFill/>
-          <a:ln/>
-        </p:spPr>
-        <p:txBody>
-          <a:bodyPr wrap="square" lIns="0" tIns="0" rIns="0" bIns="0" rtlCol="0" anchor="ctr"/>
-          <a:lstStyle/>
-          <a:p>
-            <a:pPr indent="0" marL="0">
-              <a:buNone/>
-            </a:pPr>
-            <a:r>
-              <a:rPr lang="en-US" sz="1250" b="1" dirty="0">
-                <a:solidFill>
-                  <a:srgbClr val="0B5D6E"/>
-                </a:solidFill>
-                <a:latin typeface="Arial" pitchFamily="34" charset="0"/>
-                <a:ea typeface="Arial" pitchFamily="34" charset="-122"/>
-                <a:cs typeface="Arial" pitchFamily="34" charset="-120"/>
-              </a:rPr>
-              <a:t>2,69 млн</a:t>
-            </a:r>
-            <a:endParaRPr lang="en-US" sz="1250" dirty="0"/>
-          </a:p>
-        </p:txBody>
-      </p:sp>
-      <p:sp>
-        <p:nvSpPr>
-          <p:cNvPr id="24" name="Text 22"/>
-          <p:cNvSpPr txBox="1"/>
-          <p:nvPr/>
-        </p:nvSpPr>
-        <p:spPr>
-          <a:xfrm>
-            <a:off x="5440680" y="3346704"/>
-            <a:ext cx="1737360" cy="274320"/>
-          </a:xfrm>
-          <a:prstGeom prst="rect">
-            <a:avLst/>
-          </a:prstGeom>
-          <a:noFill/>
-          <a:ln/>
-        </p:spPr>
-        <p:txBody>
-          <a:bodyPr wrap="square" lIns="0" tIns="0" rIns="0" bIns="0" rtlCol="0" anchor="ctr"/>
-          <a:lstStyle/>
-          <a:p>
-            <a:pPr indent="0" marL="0">
-              <a:buNone/>
-            </a:pPr>
-            <a:r>
-              <a:rPr lang="en-US" sz="1250" b="1" dirty="0">
-                <a:solidFill>
-                  <a:srgbClr val="0B5D6E"/>
-                </a:solidFill>
-                <a:latin typeface="Arial" pitchFamily="34" charset="0"/>
-                <a:ea typeface="Arial" pitchFamily="34" charset="-122"/>
-                <a:cs typeface="Arial" pitchFamily="34" charset="-120"/>
-              </a:rPr>
-              <a:t>59 000+</a:t>
-            </a:r>
-            <a:endParaRPr lang="en-US" sz="1250" dirty="0"/>
-          </a:p>
-        </p:txBody>
-      </p:sp>
-      <p:sp>
-        <p:nvSpPr>
-          <p:cNvPr id="25" name="Text 23"/>
-          <p:cNvSpPr txBox="1"/>
-          <p:nvPr/>
-        </p:nvSpPr>
-        <p:spPr>
-          <a:xfrm>
-            <a:off x="7269480" y="3346704"/>
-            <a:ext cx="4023360" cy="274320"/>
-          </a:xfrm>
-          <a:prstGeom prst="rect">
-            <a:avLst/>
-          </a:prstGeom>
-          <a:noFill/>
-          <a:ln/>
-        </p:spPr>
-        <p:txBody>
-          <a:bodyPr wrap="square" lIns="0" tIns="0" rIns="0" bIns="0" rtlCol="0" anchor="ctr"/>
-          <a:lstStyle/>
-          <a:p>
-            <a:pPr indent="0" marL="0">
-              <a:buNone/>
-            </a:pPr>
-            <a:r>
-              <a:rPr lang="en-US" sz="1250" b="1" dirty="0">
-                <a:solidFill>
-                  <a:srgbClr val="0B5D6E"/>
-                </a:solidFill>
-                <a:latin typeface="Arial" pitchFamily="34" charset="0"/>
-                <a:ea typeface="Arial" pitchFamily="34" charset="-122"/>
-                <a:cs typeface="Arial" pitchFamily="34" charset="-120"/>
-              </a:rPr>
-              <a:t>29 млн школьников в трёх странах</a:t>
-            </a:r>
-            <a:endParaRPr lang="en-US" sz="1250" dirty="0"/>
-          </a:p>
-        </p:txBody>
-      </p:sp>
-      <p:sp>
-        <p:nvSpPr>
-          <p:cNvPr id="26" name="Shape 24"/>
+          <p:cNvPr id="14" name="Shape 12"/>
           <p:cNvSpPr/>
           <p:nvPr/>
         </p:nvSpPr>
         <p:spPr>
           <a:xfrm>
-            <a:off x="685800" y="3840480"/>
-            <a:ext cx="10835640" cy="457200"/>
+            <a:off x="8275320" y="1874520"/>
+            <a:ext cx="3383280" cy="2148840"/>
           </a:xfrm>
           <a:prstGeom prst="roundRect">
             <a:avLst>
-              <a:gd name="adj" fmla="val 16000"/>
+              <a:gd name="adj" fmla="val 3404"/>
+            </a:avLst>
+          </a:prstGeom>
+          <a:solidFill>
+            <a:srgbClr val="F0F5F6"/>
+          </a:solidFill>
+          <a:ln w="12700">
+            <a:solidFill>
+              <a:srgbClr val="F0F5F6"/>
+            </a:solidFill>
+            <a:prstDash val="solid"/>
+          </a:ln>
+        </p:spPr>
+      </p:sp>
+      <p:sp>
+        <p:nvSpPr>
+          <p:cNvPr id="15" name="Shape 13"/>
+          <p:cNvSpPr/>
+          <p:nvPr/>
+        </p:nvSpPr>
+        <p:spPr>
+          <a:xfrm>
+            <a:off x="8522208" y="2075688"/>
+            <a:ext cx="237744" cy="237744"/>
+          </a:xfrm>
+          <a:prstGeom prst="ellipse">
+            <a:avLst/>
+          </a:prstGeom>
+          <a:solidFill>
+            <a:srgbClr val="FFFFFF"/>
+          </a:solidFill>
+          <a:ln w="25400">
+            <a:solidFill>
+              <a:srgbClr val="E08A2E"/>
+            </a:solidFill>
+            <a:prstDash val="solid"/>
+          </a:ln>
+        </p:spPr>
+      </p:sp>
+      <p:sp>
+        <p:nvSpPr>
+          <p:cNvPr id="16" name="Text 14"/>
+          <p:cNvSpPr txBox="1"/>
+          <p:nvPr/>
+        </p:nvSpPr>
+        <p:spPr>
+          <a:xfrm>
+            <a:off x="8915400" y="2029968"/>
+            <a:ext cx="2560320" cy="320040"/>
+          </a:xfrm>
+          <a:prstGeom prst="rect">
+            <a:avLst/>
+          </a:prstGeom>
+          <a:noFill/>
+          <a:ln/>
+        </p:spPr>
+        <p:txBody>
+          <a:bodyPr wrap="square" lIns="0" tIns="0" rIns="0" bIns="0" rtlCol="0" anchor="ctr"/>
+          <a:lstStyle/>
+          <a:p>
+            <a:pPr indent="0" marL="0">
+              <a:buNone/>
+            </a:pPr>
+            <a:r>
+              <a:rPr lang="en-US" sz="1700" b="1" dirty="0">
+                <a:solidFill>
+                  <a:srgbClr val="16242A"/>
+                </a:solidFill>
+                <a:latin typeface="Cambria" pitchFamily="34" charset="0"/>
+                <a:ea typeface="Cambria" pitchFamily="34" charset="-122"/>
+                <a:cs typeface="Cambria" pitchFamily="34" charset="-120"/>
+              </a:rPr>
+              <a:t>Курсы и менторы</a:t>
+            </a:r>
+            <a:endParaRPr lang="en-US" sz="1700" dirty="0"/>
+          </a:p>
+        </p:txBody>
+      </p:sp>
+      <p:sp>
+        <p:nvSpPr>
+          <p:cNvPr id="17" name="Text 15"/>
+          <p:cNvSpPr txBox="1"/>
+          <p:nvPr/>
+        </p:nvSpPr>
+        <p:spPr>
+          <a:xfrm>
+            <a:off x="8595360" y="2450592"/>
+            <a:ext cx="2743200" cy="320040"/>
+          </a:xfrm>
+          <a:prstGeom prst="rect">
+            <a:avLst/>
+          </a:prstGeom>
+          <a:noFill/>
+          <a:ln/>
+        </p:spPr>
+        <p:txBody>
+          <a:bodyPr wrap="square" lIns="0" tIns="0" rIns="0" bIns="0" rtlCol="0" anchor="ctr"/>
+          <a:lstStyle/>
+          <a:p>
+            <a:pPr indent="0" marL="0">
+              <a:buNone/>
+            </a:pPr>
+            <a:r>
+              <a:rPr lang="en-US" sz="1500" b="1" dirty="0">
+                <a:solidFill>
+                  <a:srgbClr val="E08A2E"/>
+                </a:solidFill>
+                <a:latin typeface="Arial" pitchFamily="34" charset="0"/>
+                <a:ea typeface="Arial" pitchFamily="34" charset="-122"/>
+                <a:cs typeface="Arial" pitchFamily="34" charset="-120"/>
+              </a:rPr>
+              <a:t>10–20 % с продажи</a:t>
+            </a:r>
+            <a:endParaRPr lang="en-US" sz="1500" dirty="0"/>
+          </a:p>
+        </p:txBody>
+      </p:sp>
+      <p:sp>
+        <p:nvSpPr>
+          <p:cNvPr id="18" name="Text 16"/>
+          <p:cNvSpPr txBox="1"/>
+          <p:nvPr/>
+        </p:nvSpPr>
+        <p:spPr>
+          <a:xfrm>
+            <a:off x="8595360" y="2834640"/>
+            <a:ext cx="2743200" cy="1005840"/>
+          </a:xfrm>
+          <a:prstGeom prst="rect">
+            <a:avLst/>
+          </a:prstGeom>
+          <a:noFill/>
+          <a:ln/>
+        </p:spPr>
+        <p:txBody>
+          <a:bodyPr wrap="square" lIns="0" tIns="0" rIns="0" bIns="0" rtlCol="0" anchor="ctr"/>
+          <a:lstStyle/>
+          <a:p>
+            <a:pPr indent="0" marL="0">
+              <a:lnSpc>
+                <a:spcPct val="120000"/>
+              </a:lnSpc>
+              <a:buNone/>
+            </a:pPr>
+            <a:r>
+              <a:rPr lang="en-US" sz="1250" dirty="0">
+                <a:solidFill>
+                  <a:srgbClr val="5A7078"/>
+                </a:solidFill>
+                <a:latin typeface="Arial" pitchFamily="34" charset="0"/>
+                <a:ea typeface="Arial" pitchFamily="34" charset="-122"/>
+                <a:cs typeface="Arial" pitchFamily="34" charset="-120"/>
+              </a:rPr>
+              <a:t>Место на карте: курс как станция на маршруте — ровно в момент поиска шага.</a:t>
+            </a:r>
+            <a:endParaRPr lang="en-US" sz="1250" dirty="0"/>
+          </a:p>
+        </p:txBody>
+      </p:sp>
+      <p:sp>
+        <p:nvSpPr>
+          <p:cNvPr id="19" name="Shape 17"/>
+          <p:cNvSpPr/>
+          <p:nvPr/>
+        </p:nvSpPr>
+        <p:spPr>
+          <a:xfrm>
+            <a:off x="685800" y="4206240"/>
+            <a:ext cx="5257800" cy="1005840"/>
+          </a:xfrm>
+          <a:prstGeom prst="roundRect">
+            <a:avLst>
+              <a:gd name="adj" fmla="val 7273"/>
+            </a:avLst>
+          </a:prstGeom>
+          <a:solidFill>
+            <a:srgbClr val="F0F5F6"/>
+          </a:solidFill>
+          <a:ln w="12700">
+            <a:solidFill>
+              <a:srgbClr val="F0F5F6"/>
+            </a:solidFill>
+            <a:prstDash val="solid"/>
+          </a:ln>
+        </p:spPr>
+      </p:sp>
+      <p:sp>
+        <p:nvSpPr>
+          <p:cNvPr id="20" name="Text 18"/>
+          <p:cNvSpPr txBox="1"/>
+          <p:nvPr/>
+        </p:nvSpPr>
+        <p:spPr>
+          <a:xfrm>
+            <a:off x="1005840" y="4370832"/>
+            <a:ext cx="4663440" cy="731520"/>
+          </a:xfrm>
+          <a:prstGeom prst="rect">
+            <a:avLst/>
+          </a:prstGeom>
+          <a:noFill/>
+          <a:ln/>
+        </p:spPr>
+        <p:txBody>
+          <a:bodyPr wrap="square" lIns="0" tIns="0" rIns="0" bIns="0" rtlCol="0" anchor="ctr"/>
+          <a:lstStyle/>
+          <a:p>
+            <a:pPr indent="0" marL="0">
+              <a:lnSpc>
+                <a:spcPct val="120000"/>
+              </a:lnSpc>
+              <a:buNone/>
+            </a:pPr>
+            <a:r>
+              <a:rPr lang="en-US" sz="1400" b="1" dirty="0">
+                <a:solidFill>
+                  <a:srgbClr val="0B5D6E"/>
+                </a:solidFill>
+                <a:latin typeface="Arial" pitchFamily="34" charset="0"/>
+                <a:ea typeface="Arial" pitchFamily="34" charset="-122"/>
+                <a:cs typeface="Arial" pitchFamily="34" charset="-120"/>
+              </a:rPr>
+              <a:t>Бесплатно
+</a:t>
+            </a:r>
+            <a:pPr indent="0" marL="0">
+              <a:lnSpc>
+                <a:spcPct val="120000"/>
+              </a:lnSpc>
+              <a:buNone/>
+            </a:pPr>
+            <a:r>
+              <a:rPr lang="en-US" sz="1300" dirty="0">
+                <a:solidFill>
+                  <a:srgbClr val="16242A"/>
+                </a:solidFill>
+                <a:latin typeface="Arial" pitchFamily="34" charset="0"/>
+                <a:ea typeface="Arial" pitchFamily="34" charset="-122"/>
+                <a:cs typeface="Arial" pitchFamily="34" charset="-120"/>
+              </a:rPr>
+              <a:t>разговор, карта с 3–5 линиями, «почему» и один шаг</a:t>
+            </a:r>
+            <a:endParaRPr lang="en-US" sz="1400" dirty="0"/>
+          </a:p>
+        </p:txBody>
+      </p:sp>
+      <p:sp>
+        <p:nvSpPr>
+          <p:cNvPr id="21" name="Shape 19"/>
+          <p:cNvSpPr/>
+          <p:nvPr/>
+        </p:nvSpPr>
+        <p:spPr>
+          <a:xfrm>
+            <a:off x="6263640" y="4206240"/>
+            <a:ext cx="5257800" cy="1005840"/>
+          </a:xfrm>
+          <a:prstGeom prst="roundRect">
+            <a:avLst>
+              <a:gd name="adj" fmla="val 7273"/>
             </a:avLst>
           </a:prstGeom>
           <a:solidFill>
@@ -10505,30 +10947,33 @@
       </p:sp>
       <p:sp>
         <p:nvSpPr>
-          <p:cNvPr id="27" name="Text 25"/>
-          <p:cNvSpPr txBox="1"/>
-          <p:nvPr/>
-        </p:nvSpPr>
-        <p:spPr>
-          <a:xfrm>
-            <a:off x="1005840" y="3931920"/>
-            <a:ext cx="10195560" cy="292608"/>
-          </a:xfrm>
-          <a:prstGeom prst="rect">
-            <a:avLst/>
-          </a:prstGeom>
-          <a:noFill/>
-          <a:ln/>
-        </p:spPr>
-        <p:txBody>
-          <a:bodyPr wrap="square" lIns="0" tIns="0" rIns="0" bIns="0" rtlCol="0" anchor="ctr"/>
-          <a:lstStyle/>
-          <a:p>
-            <a:pPr indent="0" marL="0">
-              <a:buNone/>
-            </a:pPr>
-            <a:r>
-              <a:rPr lang="en-US" sz="1300" b="1" dirty="0">
+          <p:cNvPr id="22" name="Text 20"/>
+          <p:cNvSpPr txBox="1"/>
+          <p:nvPr/>
+        </p:nvSpPr>
+        <p:spPr>
+          <a:xfrm>
+            <a:off x="6583680" y="4370832"/>
+            <a:ext cx="4663440" cy="731520"/>
+          </a:xfrm>
+          <a:prstGeom prst="rect">
+            <a:avLst/>
+          </a:prstGeom>
+          <a:noFill/>
+          <a:ln/>
+        </p:spPr>
+        <p:txBody>
+          <a:bodyPr wrap="square" lIns="0" tIns="0" rIns="0" bIns="0" rtlCol="0" anchor="ctr"/>
+          <a:lstStyle/>
+          <a:p>
+            <a:pPr indent="0" marL="0">
+              <a:lnSpc>
+                <a:spcPct val="120000"/>
+              </a:lnSpc>
+              <a:buNone/>
+            </a:pPr>
+            <a:r>
+              <a:rPr lang="en-US" sz="1400" b="1" dirty="0">
                 <a:solidFill>
                   <a:srgbClr val="FFFFFF"/>
                 </a:solidFill>
@@ -10536,122 +10981,76 @@
                 <a:ea typeface="Arial" pitchFamily="34" charset="-122"/>
                 <a:cs typeface="Arial" pitchFamily="34" charset="-120"/>
               </a:rPr>
-              <a:t>В России профориентация обязательна во всех школах с 1 сентября 2023 года: курс «Россия — мои горизонты», еженедельно в 6–11 классах. Требование есть, инструмента нет.</a:t>
-            </a:r>
-            <a:endParaRPr lang="en-US" sz="1300" dirty="0"/>
-          </a:p>
-        </p:txBody>
-      </p:sp>
-      <p:sp>
-        <p:nvSpPr>
-          <p:cNvPr id="28" name="Text 26"/>
-          <p:cNvSpPr txBox="1"/>
-          <p:nvPr/>
-        </p:nvSpPr>
-        <p:spPr>
-          <a:xfrm>
-            <a:off x="685800" y="4480560"/>
-            <a:ext cx="5394960" cy="292608"/>
-          </a:xfrm>
-          <a:prstGeom prst="rect">
-            <a:avLst/>
-          </a:prstGeom>
-          <a:noFill/>
-          <a:ln/>
-        </p:spPr>
-        <p:txBody>
-          <a:bodyPr wrap="square" lIns="0" tIns="0" rIns="0" bIns="0" rtlCol="0" anchor="ctr"/>
-          <a:lstStyle/>
-          <a:p>
-            <a:pPr indent="0" marL="0">
-              <a:buNone/>
-            </a:pPr>
-            <a:r>
-              <a:rPr lang="en-US" sz="1700" b="1" dirty="0">
+              <a:t>По подписке
+</a:t>
+            </a:r>
+            <a:pPr indent="0" marL="0">
+              <a:lnSpc>
+                <a:spcPct val="120000"/>
+              </a:lnSpc>
+              <a:buNone/>
+            </a:pPr>
+            <a:r>
+              <a:rPr lang="en-US" sz="1300" dirty="0">
+                <a:solidFill>
+                  <a:srgbClr val="FFFFFF"/>
+                </a:solidFill>
+                <a:latin typeface="Arial" pitchFamily="34" charset="0"/>
+                <a:ea typeface="Arial" pitchFamily="34" charset="-122"/>
+                <a:cs typeface="Arial" pitchFamily="34" charset="-120"/>
+              </a:rPr>
+              <a:t>пересборка карты, шаг каждую четверть, skills tracking, AI-ментор, кабинет родителя</a:t>
+            </a:r>
+            <a:endParaRPr lang="en-US" sz="1400" dirty="0"/>
+          </a:p>
+        </p:txBody>
+      </p:sp>
+      <p:sp>
+        <p:nvSpPr>
+          <p:cNvPr id="23" name="Text 21"/>
+          <p:cNvSpPr txBox="1"/>
+          <p:nvPr/>
+        </p:nvSpPr>
+        <p:spPr>
+          <a:xfrm>
+            <a:off x="685800" y="5440680"/>
+            <a:ext cx="10835640" cy="640080"/>
+          </a:xfrm>
+          <a:prstGeom prst="rect">
+            <a:avLst/>
+          </a:prstGeom>
+          <a:noFill/>
+          <a:ln/>
+        </p:spPr>
+        <p:txBody>
+          <a:bodyPr wrap="square" lIns="0" tIns="0" rIns="0" bIns="0" rtlCol="0" anchor="ctr"/>
+          <a:lstStyle/>
+          <a:p>
+            <a:pPr indent="0" marL="0">
+              <a:lnSpc>
+                <a:spcPct val="120000"/>
+              </a:lnSpc>
+              <a:buNone/>
+            </a:pPr>
+            <a:r>
+              <a:rPr lang="en-US" sz="1400" b="1" dirty="0">
                 <a:solidFill>
                   <a:srgbClr val="16242A"/>
                 </a:solidFill>
-                <a:latin typeface="Cambria" pitchFamily="34" charset="0"/>
-                <a:ea typeface="Cambria" pitchFamily="34" charset="-122"/>
-                <a:cs typeface="Cambria" pitchFamily="34" charset="-120"/>
-              </a:rPr>
-              <a:t>Семья уже платит</a:t>
-            </a:r>
-            <a:endParaRPr lang="en-US" sz="1700" dirty="0"/>
-          </a:p>
-        </p:txBody>
-      </p:sp>
-      <p:sp>
-        <p:nvSpPr>
-          <p:cNvPr id="29" name="Shape 27"/>
-          <p:cNvSpPr/>
-          <p:nvPr/>
-        </p:nvSpPr>
-        <p:spPr>
-          <a:xfrm>
-            <a:off x="749808" y="4901184"/>
-            <a:ext cx="146304" cy="146304"/>
-          </a:xfrm>
-          <a:prstGeom prst="ellipse">
-            <a:avLst/>
-          </a:prstGeom>
-          <a:solidFill>
-            <a:srgbClr val="2E9E5B"/>
-          </a:solidFill>
-          <a:ln w="12700">
-            <a:solidFill>
-              <a:srgbClr val="2E9E5B"/>
-            </a:solidFill>
-            <a:prstDash val="solid"/>
-          </a:ln>
-        </p:spPr>
-      </p:sp>
-      <p:sp>
-        <p:nvSpPr>
-          <p:cNvPr id="30" name="Text 28"/>
-          <p:cNvSpPr txBox="1"/>
-          <p:nvPr/>
-        </p:nvSpPr>
-        <p:spPr>
-          <a:xfrm>
-            <a:off x="1097280" y="4846320"/>
-            <a:ext cx="4937760" cy="502920"/>
-          </a:xfrm>
-          <a:prstGeom prst="rect">
-            <a:avLst/>
-          </a:prstGeom>
-          <a:noFill/>
-          <a:ln/>
-        </p:spPr>
-        <p:txBody>
-          <a:bodyPr wrap="square" lIns="0" tIns="0" rIns="0" bIns="0" rtlCol="0" anchor="ctr"/>
-          <a:lstStyle/>
-          <a:p>
+                <a:latin typeface="Arial" pitchFamily="34" charset="0"/>
+                <a:ea typeface="Arial" pitchFamily="34" charset="-122"/>
+                <a:cs typeface="Arial" pitchFamily="34" charset="-120"/>
+              </a:rPr>
+              <a:t>Выход на рынок — через школы: </a:t>
+            </a:r>
             <a:pPr indent="0" marL="0">
               <a:lnSpc>
-                <a:spcPct val="115000"/>
+                <a:spcPct val="120000"/>
               </a:lnSpc>
               <a:buNone/>
             </a:pPr>
             <a:r>
-              <a:rPr lang="en-US" sz="1250" b="1" dirty="0">
-                <a:solidFill>
-                  <a:srgbClr val="16242A"/>
-                </a:solidFill>
-                <a:latin typeface="Arial" pitchFamily="34" charset="0"/>
-                <a:ea typeface="Arial" pitchFamily="34" charset="-122"/>
-                <a:cs typeface="Arial" pitchFamily="34" charset="-120"/>
-              </a:rPr>
-              <a:t>5 100 ₽ в неделю  </a:t>
-            </a:r>
-            <a:pPr indent="0" marL="0">
-              <a:lnSpc>
-                <a:spcPct val="115000"/>
-              </a:lnSpc>
-              <a:buNone/>
-            </a:pPr>
-            <a:r>
-              <a:rPr lang="en-US" sz="1150" dirty="0">
+              <a:rPr lang="en-US" sz="1400" dirty="0">
                 <a:solidFill>
                   <a:srgbClr val="5A7078"/>
                 </a:solidFill>
@@ -10659,408 +11058,9 @@
                 <a:ea typeface="Arial" pitchFamily="34" charset="-122"/>
                 <a:cs typeface="Arial" pitchFamily="34" charset="-120"/>
               </a:rPr>
-              <a:t>тратят родители девятиклассника в России на дополнительные занятия — около $250 в месяц (Superjob, 2026)</a:t>
-            </a:r>
-            <a:endParaRPr lang="en-US" sz="1250" dirty="0"/>
-          </a:p>
-        </p:txBody>
-      </p:sp>
-      <p:sp>
-        <p:nvSpPr>
-          <p:cNvPr id="31" name="Shape 29"/>
-          <p:cNvSpPr/>
-          <p:nvPr/>
-        </p:nvSpPr>
-        <p:spPr>
-          <a:xfrm>
-            <a:off x="749808" y="5468112"/>
-            <a:ext cx="146304" cy="146304"/>
-          </a:xfrm>
-          <a:prstGeom prst="ellipse">
-            <a:avLst/>
-          </a:prstGeom>
-          <a:solidFill>
-            <a:srgbClr val="2E9E5B"/>
-          </a:solidFill>
-          <a:ln w="12700">
-            <a:solidFill>
-              <a:srgbClr val="2E9E5B"/>
-            </a:solidFill>
-            <a:prstDash val="solid"/>
-          </a:ln>
-        </p:spPr>
-      </p:sp>
-      <p:sp>
-        <p:nvSpPr>
-          <p:cNvPr id="32" name="Text 30"/>
-          <p:cNvSpPr txBox="1"/>
-          <p:nvPr/>
-        </p:nvSpPr>
-        <p:spPr>
-          <a:xfrm>
-            <a:off x="1097280" y="5413248"/>
-            <a:ext cx="4937760" cy="502920"/>
-          </a:xfrm>
-          <a:prstGeom prst="rect">
-            <a:avLst/>
-          </a:prstGeom>
-          <a:noFill/>
-          <a:ln/>
-        </p:spPr>
-        <p:txBody>
-          <a:bodyPr wrap="square" lIns="0" tIns="0" rIns="0" bIns="0" rtlCol="0" anchor="ctr"/>
-          <a:lstStyle/>
-          <a:p>
-            <a:pPr indent="0" marL="0">
-              <a:lnSpc>
-                <a:spcPct val="115000"/>
-              </a:lnSpc>
-              <a:buNone/>
-            </a:pPr>
-            <a:r>
-              <a:rPr lang="en-US" sz="1250" b="1" dirty="0">
-                <a:solidFill>
-                  <a:srgbClr val="16242A"/>
-                </a:solidFill>
-                <a:latin typeface="Arial" pitchFamily="34" charset="0"/>
-                <a:ea typeface="Arial" pitchFamily="34" charset="-122"/>
-                <a:cs typeface="Arial" pitchFamily="34" charset="-120"/>
-              </a:rPr>
-              <a:t>Наши $6 в месяц  </a:t>
-            </a:r>
-            <a:pPr indent="0" marL="0">
-              <a:lnSpc>
-                <a:spcPct val="115000"/>
-              </a:lnSpc>
-              <a:buNone/>
-            </a:pPr>
-            <a:r>
-              <a:rPr lang="en-US" sz="1150" dirty="0">
-                <a:solidFill>
-                  <a:srgbClr val="5A7078"/>
-                </a:solidFill>
-                <a:latin typeface="Arial" pitchFamily="34" charset="0"/>
-                <a:ea typeface="Arial" pitchFamily="34" charset="-122"/>
-                <a:cs typeface="Arial" pitchFamily="34" charset="-120"/>
-              </a:rPr>
-              <a:t>это примерно 2 % от того, что семья платит и так. Каждая вторая семья платит репетиторам — против 27 % в 2020-м</a:t>
-            </a:r>
-            <a:endParaRPr lang="en-US" sz="1250" dirty="0"/>
-          </a:p>
-        </p:txBody>
-      </p:sp>
-      <p:sp>
-        <p:nvSpPr>
-          <p:cNvPr id="33" name="Text 31"/>
-          <p:cNvSpPr txBox="1"/>
-          <p:nvPr/>
-        </p:nvSpPr>
-        <p:spPr>
-          <a:xfrm>
-            <a:off x="6492240" y="4480560"/>
-            <a:ext cx="5029200" cy="292608"/>
-          </a:xfrm>
-          <a:prstGeom prst="rect">
-            <a:avLst/>
-          </a:prstGeom>
-          <a:noFill/>
-          <a:ln/>
-        </p:spPr>
-        <p:txBody>
-          <a:bodyPr wrap="square" lIns="0" tIns="0" rIns="0" bIns="0" rtlCol="0" anchor="ctr"/>
-          <a:lstStyle/>
-          <a:p>
-            <a:pPr indent="0" marL="0">
-              <a:buNone/>
-            </a:pPr>
-            <a:r>
-              <a:rPr lang="en-US" sz="1700" b="1" dirty="0">
-                <a:solidFill>
-                  <a:srgbClr val="16242A"/>
-                </a:solidFill>
-                <a:latin typeface="Cambria" pitchFamily="34" charset="0"/>
-                <a:ea typeface="Cambria" pitchFamily="34" charset="-122"/>
-                <a:cs typeface="Cambria" pitchFamily="34" charset="-120"/>
-              </a:rPr>
-              <a:t>Объём рынка — наш расчёт</a:t>
-            </a:r>
-            <a:endParaRPr lang="en-US" sz="1700" dirty="0"/>
-          </a:p>
-        </p:txBody>
-      </p:sp>
-      <p:sp>
-        <p:nvSpPr>
-          <p:cNvPr id="34" name="Shape 32"/>
-          <p:cNvSpPr/>
-          <p:nvPr/>
-        </p:nvSpPr>
-        <p:spPr>
-          <a:xfrm>
-            <a:off x="6556248" y="4882896"/>
-            <a:ext cx="146304" cy="146304"/>
-          </a:xfrm>
-          <a:prstGeom prst="ellipse">
-            <a:avLst/>
-          </a:prstGeom>
-          <a:solidFill>
-            <a:srgbClr val="2B6BE4"/>
-          </a:solidFill>
-          <a:ln w="12700">
-            <a:solidFill>
-              <a:srgbClr val="2B6BE4"/>
-            </a:solidFill>
-            <a:prstDash val="solid"/>
-          </a:ln>
-        </p:spPr>
-      </p:sp>
-      <p:sp>
-        <p:nvSpPr>
-          <p:cNvPr id="35" name="Text 33"/>
-          <p:cNvSpPr txBox="1"/>
-          <p:nvPr/>
-        </p:nvSpPr>
-        <p:spPr>
-          <a:xfrm>
-            <a:off x="6903720" y="4846320"/>
-            <a:ext cx="4617720" cy="365760"/>
-          </a:xfrm>
-          <a:prstGeom prst="rect">
-            <a:avLst/>
-          </a:prstGeom>
-          <a:noFill/>
-          <a:ln/>
-        </p:spPr>
-        <p:txBody>
-          <a:bodyPr wrap="square" lIns="0" tIns="0" rIns="0" bIns="0" rtlCol="0" anchor="ctr"/>
-          <a:lstStyle/>
-          <a:p>
-            <a:pPr indent="0" marL="0">
-              <a:buNone/>
-            </a:pPr>
-            <a:r>
-              <a:rPr lang="en-US" sz="1250" b="1" dirty="0">
-                <a:solidFill>
-                  <a:srgbClr val="16242A"/>
-                </a:solidFill>
-                <a:latin typeface="Arial" pitchFamily="34" charset="0"/>
-                <a:ea typeface="Arial" pitchFamily="34" charset="-122"/>
-                <a:cs typeface="Arial" pitchFamily="34" charset="-120"/>
-              </a:rPr>
-              <a:t>TAM  $395 млн  </a:t>
-            </a:r>
-            <a:pPr indent="0" marL="0">
-              <a:buNone/>
-            </a:pPr>
-            <a:r>
-              <a:rPr lang="en-US" sz="1150" dirty="0">
-                <a:solidFill>
-                  <a:srgbClr val="5A7078"/>
-                </a:solidFill>
-                <a:latin typeface="Arial" pitchFamily="34" charset="0"/>
-                <a:ea typeface="Arial" pitchFamily="34" charset="-122"/>
-                <a:cs typeface="Arial" pitchFamily="34" charset="-120"/>
-              </a:rPr>
-              <a:t>8,1 млн учеников 9–11 классов трёх стран × $49 в год</a:t>
-            </a:r>
-            <a:endParaRPr lang="en-US" sz="1250" dirty="0"/>
-          </a:p>
-        </p:txBody>
-      </p:sp>
-      <p:sp>
-        <p:nvSpPr>
-          <p:cNvPr id="36" name="Shape 34"/>
-          <p:cNvSpPr/>
-          <p:nvPr/>
-        </p:nvSpPr>
-        <p:spPr>
-          <a:xfrm>
-            <a:off x="6556248" y="5285232"/>
-            <a:ext cx="146304" cy="146304"/>
-          </a:xfrm>
-          <a:prstGeom prst="ellipse">
-            <a:avLst/>
-          </a:prstGeom>
-          <a:solidFill>
-            <a:srgbClr val="2B6BE4"/>
-          </a:solidFill>
-          <a:ln w="12700">
-            <a:solidFill>
-              <a:srgbClr val="2B6BE4"/>
-            </a:solidFill>
-            <a:prstDash val="solid"/>
-          </a:ln>
-        </p:spPr>
-      </p:sp>
-      <p:sp>
-        <p:nvSpPr>
-          <p:cNvPr id="37" name="Text 35"/>
-          <p:cNvSpPr txBox="1"/>
-          <p:nvPr/>
-        </p:nvSpPr>
-        <p:spPr>
-          <a:xfrm>
-            <a:off x="6903720" y="5248656"/>
-            <a:ext cx="4617720" cy="365760"/>
-          </a:xfrm>
-          <a:prstGeom prst="rect">
-            <a:avLst/>
-          </a:prstGeom>
-          <a:noFill/>
-          <a:ln/>
-        </p:spPr>
-        <p:txBody>
-          <a:bodyPr wrap="square" lIns="0" tIns="0" rIns="0" bIns="0" rtlCol="0" anchor="ctr"/>
-          <a:lstStyle/>
-          <a:p>
-            <a:pPr indent="0" marL="0">
-              <a:buNone/>
-            </a:pPr>
-            <a:r>
-              <a:rPr lang="en-US" sz="1250" b="1" dirty="0">
-                <a:solidFill>
-                  <a:srgbClr val="16242A"/>
-                </a:solidFill>
-                <a:latin typeface="Arial" pitchFamily="34" charset="0"/>
-                <a:ea typeface="Arial" pitchFamily="34" charset="-122"/>
-                <a:cs typeface="Arial" pitchFamily="34" charset="-120"/>
-              </a:rPr>
-              <a:t>SAM  $160 млн  </a:t>
-            </a:r>
-            <a:pPr indent="0" marL="0">
-              <a:buNone/>
-            </a:pPr>
-            <a:r>
-              <a:rPr lang="en-US" sz="1150" dirty="0">
-                <a:solidFill>
-                  <a:srgbClr val="5A7078"/>
-                </a:solidFill>
-                <a:latin typeface="Arial" pitchFamily="34" charset="0"/>
-                <a:ea typeface="Arial" pitchFamily="34" charset="-122"/>
-                <a:cs typeface="Arial" pitchFamily="34" charset="-120"/>
-              </a:rPr>
-              <a:t>40 % семей — те, кто уже платит за дополнительное образование</a:t>
-            </a:r>
-            <a:endParaRPr lang="en-US" sz="1250" dirty="0"/>
-          </a:p>
-        </p:txBody>
-      </p:sp>
-      <p:sp>
-        <p:nvSpPr>
-          <p:cNvPr id="38" name="Shape 36"/>
-          <p:cNvSpPr/>
-          <p:nvPr/>
-        </p:nvSpPr>
-        <p:spPr>
-          <a:xfrm>
-            <a:off x="6556248" y="5687568"/>
-            <a:ext cx="146304" cy="146304"/>
-          </a:xfrm>
-          <a:prstGeom prst="ellipse">
-            <a:avLst/>
-          </a:prstGeom>
-          <a:solidFill>
-            <a:srgbClr val="2B6BE4"/>
-          </a:solidFill>
-          <a:ln w="12700">
-            <a:solidFill>
-              <a:srgbClr val="2B6BE4"/>
-            </a:solidFill>
-            <a:prstDash val="solid"/>
-          </a:ln>
-        </p:spPr>
-      </p:sp>
-      <p:sp>
-        <p:nvSpPr>
-          <p:cNvPr id="39" name="Text 37"/>
-          <p:cNvSpPr txBox="1"/>
-          <p:nvPr/>
-        </p:nvSpPr>
-        <p:spPr>
-          <a:xfrm>
-            <a:off x="6903720" y="5650992"/>
-            <a:ext cx="4617720" cy="365760"/>
-          </a:xfrm>
-          <a:prstGeom prst="rect">
-            <a:avLst/>
-          </a:prstGeom>
-          <a:noFill/>
-          <a:ln/>
-        </p:spPr>
-        <p:txBody>
-          <a:bodyPr wrap="square" lIns="0" tIns="0" rIns="0" bIns="0" rtlCol="0" anchor="ctr"/>
-          <a:lstStyle/>
-          <a:p>
-            <a:pPr indent="0" marL="0">
-              <a:buNone/>
-            </a:pPr>
-            <a:r>
-              <a:rPr lang="en-US" sz="1250" b="1" dirty="0">
-                <a:solidFill>
-                  <a:srgbClr val="16242A"/>
-                </a:solidFill>
-                <a:latin typeface="Arial" pitchFamily="34" charset="0"/>
-                <a:ea typeface="Arial" pitchFamily="34" charset="-122"/>
-                <a:cs typeface="Arial" pitchFamily="34" charset="-120"/>
-              </a:rPr>
-              <a:t>SOM  $1,6 млн  </a:t>
-            </a:r>
-            <a:pPr indent="0" marL="0">
-              <a:buNone/>
-            </a:pPr>
-            <a:r>
-              <a:rPr lang="en-US" sz="1150" dirty="0">
-                <a:solidFill>
-                  <a:srgbClr val="5A7078"/>
-                </a:solidFill>
-                <a:latin typeface="Arial" pitchFamily="34" charset="0"/>
-                <a:ea typeface="Arial" pitchFamily="34" charset="-122"/>
-                <a:cs typeface="Arial" pitchFamily="34" charset="-120"/>
-              </a:rPr>
-              <a:t>1 % SAM к третьему году плюс школьные лицензии</a:t>
-            </a:r>
-            <a:endParaRPr lang="en-US" sz="1250" dirty="0"/>
-          </a:p>
-        </p:txBody>
-      </p:sp>
-      <p:sp>
-        <p:nvSpPr>
-          <p:cNvPr id="40" name="Text 38"/>
-          <p:cNvSpPr txBox="1"/>
-          <p:nvPr/>
-        </p:nvSpPr>
-        <p:spPr>
-          <a:xfrm>
-            <a:off x="685800" y="6144768"/>
-            <a:ext cx="10835640" cy="457200"/>
-          </a:xfrm>
-          <a:prstGeom prst="rect">
-            <a:avLst/>
-          </a:prstGeom>
-          <a:noFill/>
-          <a:ln/>
-        </p:spPr>
-        <p:txBody>
-          <a:bodyPr wrap="square" lIns="0" tIns="0" rIns="0" bIns="0" rtlCol="0" anchor="ctr"/>
-          <a:lstStyle/>
-          <a:p>
-            <a:pPr indent="0" marL="0">
-              <a:lnSpc>
-                <a:spcPct val="110000"/>
-              </a:lnSpc>
-              <a:buNone/>
-            </a:pPr>
-            <a:r>
-              <a:rPr lang="en-US" sz="950" dirty="0">
-                <a:solidFill>
-                  <a:srgbClr val="5A7078"/>
-                </a:solidFill>
-                <a:latin typeface="Arial" pitchFamily="34" charset="0"/>
-                <a:ea typeface="Arial" pitchFamily="34" charset="-122"/>
-                <a:cs typeface="Arial" pitchFamily="34" charset="-120"/>
-              </a:rPr>
-              <a:t>Данные по школам и ученикам — 2025/26 учебный год. Рыночные показатели — последние опубликованные, год указан у каждой цифры. Источники: Рособрнадзор и «Интерфакс» (ОГЭ-2026), Минпросвещения РФ и РК, Госкомстат Узбекистана, Smart Ranking (EdTech-2025), МЦРИАП, Superjob (опрос 3000 родителей, 2026), курс ЦБ РФ 86,9 ₽/$ на 04.09.2026. $49 — российская цена, для Казахстана и Узбекистана её нужно адаптировать, поэтому TAM — верхняя граница.</a:t>
-            </a:r>
-            <a:endParaRPr lang="en-US" sz="950" dirty="0"/>
+              <a:t>один договор даёт класс активных учеников, а их родители — естественная база для подписки. Цены — гипотезы: проверяем интервью с родителями и пилотом в школе.</a:t>
+            </a:r>
+            <a:endParaRPr lang="en-US" sz="1400" dirty="0"/>
           </a:p>
         </p:txBody>
       </p:sp>

--- a/deck/Career-Navigator.pptx
+++ b/deck/Career-Navigator.pptx
@@ -16,9 +16,10 @@
     <p:sldId id="264" r:id="rId10"/>
     <p:sldId id="265" r:id="rId11"/>
     <p:sldId id="266" r:id="rId12"/>
+    <p:sldId id="267" r:id="rId13"/>
   </p:sldIdLst>
   <p:notesMasterIdLst>
-    <p:notesMasterId r:id="rId13"/>
+    <p:notesMasterId r:id="rId14"/>
   </p:notesMasterIdLst>
   <p:sldSz cx="12192000" cy="6858000"/>
   <p:notesSz cx="6858000" cy="12192000"/>
@@ -600,7 +601,7 @@
           <a:p>
             <a:r>
               <a:rPr lang="en-US" dirty="0"/>
-              <a:t>Здесь переходим к живой демонстрации. План: заполнить за Даню — карта от AI — открыть линию — сделать шаг — показать, как карта изменилась.</a:t>
+              <a:t>Главное здесь: одна карта стоит треть цента, потому что модель вызывается один раз, а всю дальнейшую жизнь карты пересчитывает код. Четырёх платящих родителей достаточно, чтобы покрыть все сервисы. Операционный ноль с командой — около двух с половиной тысяч долларов в месяц, это 417 подписок или 30 школ. И мы честно разделяем: тарифы посчитаны, зарплаты оценены.</a:t>
             </a:r>
             <a:endParaRPr lang="en-US" dirty="0"/>
           </a:p>
@@ -688,7 +689,7 @@
           <a:p>
             <a:r>
               <a:rPr lang="en-US" dirty="0"/>
-              <a:t>Финал: возвращаемся к формулировке кейса. И приглашаем жюри открыть ссылку и собрать карту на себя.</a:t>
+              <a:t>Здесь переходим к живой демонстрации. План: заполнить за Даню — карта от AI — открыть линию — сделать шаг — показать, как карта изменилась.</a:t>
             </a:r>
             <a:endParaRPr lang="en-US" dirty="0"/>
           </a:p>
@@ -712,6 +713,94 @@
             <a:fld id="{F7021451-1387-4CA6-816F-3879F97B5CBC}" type="slidenum">
               <a:rPr lang="en-US"/>
               <a:t>11</a:t>
+            </a:fld>
+            <a:endParaRPr lang="en-US"/>
+          </a:p>
+        </p:txBody>
+      </p:sp>
+    </p:spTree>
+    <p:extLst>
+      <p:ext uri="{BB962C8B-B14F-4D97-AF65-F5344CB8AC3E}">
+        <p14:creationId xmlns:p14="http://schemas.microsoft.com/office/powerpoint/2010/main" val="1024086991"/>
+      </p:ext>
+    </p:extLst>
+  </p:cSld>
+  <p:clrMapOvr>
+    <a:masterClrMapping/>
+  </p:clrMapOvr>
+</p:notes>
+</file>
+
+<file path=ppt/notesSlides/notesSlide12.xml><?xml version="1.0" encoding="utf-8"?>
+<p:notes xmlns:a="http://schemas.openxmlformats.org/drawingml/2006/main" xmlns:r="http://schemas.openxmlformats.org/officeDocument/2006/relationships" xmlns:p="http://schemas.openxmlformats.org/presentationml/2006/main">
+  <p:cSld>
+    <p:spTree>
+      <p:nvGrpSpPr>
+        <p:cNvPr id="1" name=""/>
+        <p:cNvGrpSpPr/>
+        <p:nvPr/>
+      </p:nvGrpSpPr>
+      <p:grpSpPr>
+        <a:xfrm>
+          <a:off x="0" y="0"/>
+          <a:ext cx="0" cy="0"/>
+          <a:chOff x="0" y="0"/>
+          <a:chExt cx="0" cy="0"/>
+        </a:xfrm>
+      </p:grpSpPr>
+      <p:sp>
+        <p:nvSpPr>
+          <p:cNvPr id="2" name="Slide Image Placeholder 1"/>
+          <p:cNvSpPr>
+            <a:spLocks noGrp="1" noRot="1" noChangeAspect="1"/>
+          </p:cNvSpPr>
+          <p:nvPr>
+            <p:ph type="sldImg"/>
+          </p:nvPr>
+        </p:nvSpPr>
+        <p:spPr/>
+      </p:sp>
+      <p:sp>
+        <p:nvSpPr>
+          <p:cNvPr id="3" name="Notes Placeholder 2"/>
+          <p:cNvSpPr>
+            <a:spLocks noGrp="1"/>
+          </p:cNvSpPr>
+          <p:nvPr>
+            <p:ph type="body" idx="1"/>
+          </p:nvPr>
+        </p:nvSpPr>
+        <p:spPr/>
+        <p:txBody>
+          <a:bodyPr/>
+          <a:lstStyle/>
+          <a:p>
+            <a:r>
+              <a:rPr lang="en-US" dirty="0"/>
+              <a:t>Финал: возвращаемся к формулировке кейса. И приглашаем жюри открыть ссылку и собрать карту на себя.</a:t>
+            </a:r>
+            <a:endParaRPr lang="en-US" dirty="0"/>
+          </a:p>
+        </p:txBody>
+      </p:sp>
+      <p:sp>
+        <p:nvSpPr>
+          <p:cNvPr id="4" name="Slide Number Placeholder 3"/>
+          <p:cNvSpPr>
+            <a:spLocks noGrp="1"/>
+          </p:cNvSpPr>
+          <p:nvPr>
+            <p:ph type="sldNum" sz="quarter" idx="10"/>
+          </p:nvPr>
+        </p:nvSpPr>
+        <p:spPr/>
+        <p:txBody>
+          <a:bodyPr/>
+          <a:lstStyle/>
+          <a:p>
+            <a:fld id="{F7021451-1387-4CA6-816F-3879F97B5CBC}" type="slidenum">
+              <a:rPr lang="en-US"/>
+              <a:t>12</a:t>
             </a:fld>
             <a:endParaRPr lang="en-US"/>
           </a:p>
@@ -2216,6 +2305,1039 @@
 <file path=ppt/slides/slide10.xml><?xml version="1.0" encoding="utf-8"?>
 <p:sld xmlns:a="http://schemas.openxmlformats.org/drawingml/2006/main" xmlns:r="http://schemas.openxmlformats.org/officeDocument/2006/relationships" xmlns:p="http://schemas.openxmlformats.org/presentationml/2006/main">
   <p:cSld name="Slide 10">
+    <p:spTree>
+      <p:nvGrpSpPr>
+        <p:cNvPr id="1" name=""/>
+        <p:cNvGrpSpPr/>
+        <p:nvPr/>
+      </p:nvGrpSpPr>
+      <p:grpSpPr>
+        <a:xfrm>
+          <a:off x="0" y="0"/>
+          <a:ext cx="0" cy="0"/>
+          <a:chOff x="0" y="0"/>
+          <a:chExt cx="0" cy="0"/>
+        </a:xfrm>
+      </p:grpSpPr>
+      <p:sp>
+        <p:nvSpPr>
+          <p:cNvPr id="2" name="Text 0"/>
+          <p:cNvSpPr txBox="1"/>
+          <p:nvPr/>
+        </p:nvSpPr>
+        <p:spPr>
+          <a:xfrm>
+            <a:off x="685800" y="457200"/>
+            <a:ext cx="10881360" cy="731520"/>
+          </a:xfrm>
+          <a:prstGeom prst="rect">
+            <a:avLst/>
+          </a:prstGeom>
+          <a:noFill/>
+          <a:ln/>
+        </p:spPr>
+        <p:txBody>
+          <a:bodyPr wrap="square" lIns="0" tIns="0" rIns="0" bIns="0" rtlCol="0" anchor="t"/>
+          <a:lstStyle/>
+          <a:p>
+            <a:pPr indent="0" marL="0">
+              <a:buNone/>
+            </a:pPr>
+            <a:r>
+              <a:rPr lang="en-US" sz="3300" b="1" dirty="0">
+                <a:solidFill>
+                  <a:srgbClr val="16242A"/>
+                </a:solidFill>
+                <a:latin typeface="Cambria" pitchFamily="34" charset="0"/>
+                <a:ea typeface="Cambria" pitchFamily="34" charset="-122"/>
+                <a:cs typeface="Cambria" pitchFamily="34" charset="-120"/>
+              </a:rPr>
+              <a:t>Сколько нужно на старт и когда выходим в ноль</a:t>
+            </a:r>
+            <a:endParaRPr lang="en-US" sz="3300" dirty="0"/>
+          </a:p>
+        </p:txBody>
+      </p:sp>
+      <p:sp>
+        <p:nvSpPr>
+          <p:cNvPr id="3" name="Text 1"/>
+          <p:cNvSpPr txBox="1"/>
+          <p:nvPr/>
+        </p:nvSpPr>
+        <p:spPr>
+          <a:xfrm>
+            <a:off x="685800" y="1207008"/>
+            <a:ext cx="10058400" cy="365760"/>
+          </a:xfrm>
+          <a:prstGeom prst="rect">
+            <a:avLst/>
+          </a:prstGeom>
+          <a:noFill/>
+          <a:ln/>
+        </p:spPr>
+        <p:txBody>
+          <a:bodyPr wrap="square" lIns="0" tIns="0" rIns="0" bIns="0" rtlCol="0" anchor="ctr"/>
+          <a:lstStyle/>
+          <a:p>
+            <a:pPr indent="0" marL="0">
+              <a:buNone/>
+            </a:pPr>
+            <a:r>
+              <a:rPr lang="en-US" sz="1500" dirty="0">
+                <a:solidFill>
+                  <a:srgbClr val="5A7078"/>
+                </a:solidFill>
+                <a:latin typeface="Arial" pitchFamily="34" charset="0"/>
+                <a:ea typeface="Arial" pitchFamily="34" charset="-122"/>
+                <a:cs typeface="Arial" pitchFamily="34" charset="-120"/>
+              </a:rPr>
+              <a:t>Себестоимость посчитана по реальным тарифам Google и Cloudflare. Зарплаты — оценка, и мы это помечаем.</a:t>
+            </a:r>
+            <a:endParaRPr lang="en-US" sz="1500" dirty="0"/>
+          </a:p>
+        </p:txBody>
+      </p:sp>
+      <p:sp>
+        <p:nvSpPr>
+          <p:cNvPr id="4" name="Shape 2"/>
+          <p:cNvSpPr/>
+          <p:nvPr/>
+        </p:nvSpPr>
+        <p:spPr>
+          <a:xfrm>
+            <a:off x="685800" y="1691640"/>
+            <a:ext cx="3383280" cy="1280160"/>
+          </a:xfrm>
+          <a:prstGeom prst="roundRect">
+            <a:avLst>
+              <a:gd name="adj" fmla="val 5714"/>
+            </a:avLst>
+          </a:prstGeom>
+          <a:solidFill>
+            <a:srgbClr val="F0F5F6"/>
+          </a:solidFill>
+          <a:ln w="12700">
+            <a:solidFill>
+              <a:srgbClr val="F0F5F6"/>
+            </a:solidFill>
+            <a:prstDash val="solid"/>
+          </a:ln>
+        </p:spPr>
+      </p:sp>
+      <p:sp>
+        <p:nvSpPr>
+          <p:cNvPr id="5" name="Text 3"/>
+          <p:cNvSpPr txBox="1"/>
+          <p:nvPr/>
+        </p:nvSpPr>
+        <p:spPr>
+          <a:xfrm>
+            <a:off x="1005840" y="1828800"/>
+            <a:ext cx="2743200" cy="411480"/>
+          </a:xfrm>
+          <a:prstGeom prst="rect">
+            <a:avLst/>
+          </a:prstGeom>
+          <a:noFill/>
+          <a:ln/>
+        </p:spPr>
+        <p:txBody>
+          <a:bodyPr wrap="square" lIns="0" tIns="0" rIns="0" bIns="0" rtlCol="0" anchor="ctr"/>
+          <a:lstStyle/>
+          <a:p>
+            <a:pPr indent="0" marL="0">
+              <a:buNone/>
+            </a:pPr>
+            <a:r>
+              <a:rPr lang="en-US" sz="2500" b="1" dirty="0">
+                <a:solidFill>
+                  <a:srgbClr val="0B5D6E"/>
+                </a:solidFill>
+                <a:latin typeface="Cambria" pitchFamily="34" charset="0"/>
+                <a:ea typeface="Cambria" pitchFamily="34" charset="-122"/>
+                <a:cs typeface="Cambria" pitchFamily="34" charset="-120"/>
+              </a:rPr>
+              <a:t>$0,003</a:t>
+            </a:r>
+            <a:endParaRPr lang="en-US" sz="2500" dirty="0"/>
+          </a:p>
+        </p:txBody>
+      </p:sp>
+      <p:sp>
+        <p:nvSpPr>
+          <p:cNvPr id="6" name="Text 4"/>
+          <p:cNvSpPr txBox="1"/>
+          <p:nvPr/>
+        </p:nvSpPr>
+        <p:spPr>
+          <a:xfrm>
+            <a:off x="1005840" y="2267712"/>
+            <a:ext cx="2743200" cy="640080"/>
+          </a:xfrm>
+          <a:prstGeom prst="rect">
+            <a:avLst/>
+          </a:prstGeom>
+          <a:noFill/>
+          <a:ln/>
+        </p:spPr>
+        <p:txBody>
+          <a:bodyPr wrap="square" lIns="0" tIns="0" rIns="0" bIns="0" rtlCol="0" anchor="ctr"/>
+          <a:lstStyle/>
+          <a:p>
+            <a:pPr indent="0" marL="0">
+              <a:lnSpc>
+                <a:spcPct val="115000"/>
+              </a:lnSpc>
+              <a:buNone/>
+            </a:pPr>
+            <a:r>
+              <a:rPr lang="en-US" sz="1100" dirty="0">
+                <a:solidFill>
+                  <a:srgbClr val="16242A"/>
+                </a:solidFill>
+                <a:latin typeface="Arial" pitchFamily="34" charset="0"/>
+                <a:ea typeface="Arial" pitchFamily="34" charset="-122"/>
+                <a:cs typeface="Arial" pitchFamily="34" charset="-120"/>
+              </a:rPr>
+              <a:t>стоит одна карта от AI: 3 300 токенов на входе, 1 300 на выходе по тарифу Gemini 3.1 Flash Lite</a:t>
+            </a:r>
+            <a:endParaRPr lang="en-US" sz="1100" dirty="0"/>
+          </a:p>
+        </p:txBody>
+      </p:sp>
+      <p:sp>
+        <p:nvSpPr>
+          <p:cNvPr id="7" name="Shape 5"/>
+          <p:cNvSpPr/>
+          <p:nvPr/>
+        </p:nvSpPr>
+        <p:spPr>
+          <a:xfrm>
+            <a:off x="4480560" y="1691640"/>
+            <a:ext cx="3383280" cy="1280160"/>
+          </a:xfrm>
+          <a:prstGeom prst="roundRect">
+            <a:avLst>
+              <a:gd name="adj" fmla="val 5714"/>
+            </a:avLst>
+          </a:prstGeom>
+          <a:solidFill>
+            <a:srgbClr val="F0F5F6"/>
+          </a:solidFill>
+          <a:ln w="12700">
+            <a:solidFill>
+              <a:srgbClr val="F0F5F6"/>
+            </a:solidFill>
+            <a:prstDash val="solid"/>
+          </a:ln>
+        </p:spPr>
+      </p:sp>
+      <p:sp>
+        <p:nvSpPr>
+          <p:cNvPr id="8" name="Text 6"/>
+          <p:cNvSpPr txBox="1"/>
+          <p:nvPr/>
+        </p:nvSpPr>
+        <p:spPr>
+          <a:xfrm>
+            <a:off x="4800600" y="1828800"/>
+            <a:ext cx="2743200" cy="411480"/>
+          </a:xfrm>
+          <a:prstGeom prst="rect">
+            <a:avLst/>
+          </a:prstGeom>
+          <a:noFill/>
+          <a:ln/>
+        </p:spPr>
+        <p:txBody>
+          <a:bodyPr wrap="square" lIns="0" tIns="0" rIns="0" bIns="0" rtlCol="0" anchor="ctr"/>
+          <a:lstStyle/>
+          <a:p>
+            <a:pPr indent="0" marL="0">
+              <a:buNone/>
+            </a:pPr>
+            <a:r>
+              <a:rPr lang="en-US" sz="2500" b="1" dirty="0">
+                <a:solidFill>
+                  <a:srgbClr val="0B5D6E"/>
+                </a:solidFill>
+                <a:latin typeface="Cambria" pitchFamily="34" charset="0"/>
+                <a:ea typeface="Cambria" pitchFamily="34" charset="-122"/>
+                <a:cs typeface="Cambria" pitchFamily="34" charset="-120"/>
+              </a:rPr>
+              <a:t>$5 / мес</a:t>
+            </a:r>
+            <a:endParaRPr lang="en-US" sz="2500" dirty="0"/>
+          </a:p>
+        </p:txBody>
+      </p:sp>
+      <p:sp>
+        <p:nvSpPr>
+          <p:cNvPr id="9" name="Text 7"/>
+          <p:cNvSpPr txBox="1"/>
+          <p:nvPr/>
+        </p:nvSpPr>
+        <p:spPr>
+          <a:xfrm>
+            <a:off x="4800600" y="2267712"/>
+            <a:ext cx="2743200" cy="640080"/>
+          </a:xfrm>
+          <a:prstGeom prst="rect">
+            <a:avLst/>
+          </a:prstGeom>
+          <a:noFill/>
+          <a:ln/>
+        </p:spPr>
+        <p:txBody>
+          <a:bodyPr wrap="square" lIns="0" tIns="0" rIns="0" bIns="0" rtlCol="0" anchor="ctr"/>
+          <a:lstStyle/>
+          <a:p>
+            <a:pPr indent="0" marL="0">
+              <a:lnSpc>
+                <a:spcPct val="115000"/>
+              </a:lnSpc>
+              <a:buNone/>
+            </a:pPr>
+            <a:r>
+              <a:rPr lang="en-US" sz="1100" dirty="0">
+                <a:solidFill>
+                  <a:srgbClr val="16242A"/>
+                </a:solidFill>
+                <a:latin typeface="Arial" pitchFamily="34" charset="0"/>
+                <a:ea typeface="Arial" pitchFamily="34" charset="-122"/>
+                <a:cs typeface="Arial" pitchFamily="34" charset="-120"/>
+              </a:rPr>
+              <a:t>Cloudflare Workers — 10 млн запросов. Этого хватает на десятки тысяч учеников</a:t>
+            </a:r>
+            <a:endParaRPr lang="en-US" sz="1100" dirty="0"/>
+          </a:p>
+        </p:txBody>
+      </p:sp>
+      <p:sp>
+        <p:nvSpPr>
+          <p:cNvPr id="10" name="Shape 8"/>
+          <p:cNvSpPr/>
+          <p:nvPr/>
+        </p:nvSpPr>
+        <p:spPr>
+          <a:xfrm>
+            <a:off x="8275320" y="1691640"/>
+            <a:ext cx="3383280" cy="1280160"/>
+          </a:xfrm>
+          <a:prstGeom prst="roundRect">
+            <a:avLst>
+              <a:gd name="adj" fmla="val 5714"/>
+            </a:avLst>
+          </a:prstGeom>
+          <a:solidFill>
+            <a:srgbClr val="F0F5F6"/>
+          </a:solidFill>
+          <a:ln w="12700">
+            <a:solidFill>
+              <a:srgbClr val="F0F5F6"/>
+            </a:solidFill>
+            <a:prstDash val="solid"/>
+          </a:ln>
+        </p:spPr>
+      </p:sp>
+      <p:sp>
+        <p:nvSpPr>
+          <p:cNvPr id="11" name="Text 9"/>
+          <p:cNvSpPr txBox="1"/>
+          <p:nvPr/>
+        </p:nvSpPr>
+        <p:spPr>
+          <a:xfrm>
+            <a:off x="8595360" y="1828800"/>
+            <a:ext cx="2743200" cy="411480"/>
+          </a:xfrm>
+          <a:prstGeom prst="rect">
+            <a:avLst/>
+          </a:prstGeom>
+          <a:noFill/>
+          <a:ln/>
+        </p:spPr>
+        <p:txBody>
+          <a:bodyPr wrap="square" lIns="0" tIns="0" rIns="0" bIns="0" rtlCol="0" anchor="ctr"/>
+          <a:lstStyle/>
+          <a:p>
+            <a:pPr indent="0" marL="0">
+              <a:buNone/>
+            </a:pPr>
+            <a:r>
+              <a:rPr lang="en-US" sz="2500" b="1" dirty="0">
+                <a:solidFill>
+                  <a:srgbClr val="0B5D6E"/>
+                </a:solidFill>
+                <a:latin typeface="Cambria" pitchFamily="34" charset="0"/>
+                <a:ea typeface="Cambria" pitchFamily="34" charset="-122"/>
+                <a:cs typeface="Cambria" pitchFamily="34" charset="-120"/>
+              </a:rPr>
+              <a:t>≈ $20 / мес</a:t>
+            </a:r>
+            <a:endParaRPr lang="en-US" sz="2500" dirty="0"/>
+          </a:p>
+        </p:txBody>
+      </p:sp>
+      <p:sp>
+        <p:nvSpPr>
+          <p:cNvPr id="12" name="Text 10"/>
+          <p:cNvSpPr txBox="1"/>
+          <p:nvPr/>
+        </p:nvSpPr>
+        <p:spPr>
+          <a:xfrm>
+            <a:off x="8595360" y="2267712"/>
+            <a:ext cx="2743200" cy="640080"/>
+          </a:xfrm>
+          <a:prstGeom prst="rect">
+            <a:avLst/>
+          </a:prstGeom>
+          <a:noFill/>
+          <a:ln/>
+        </p:spPr>
+        <p:txBody>
+          <a:bodyPr wrap="square" lIns="0" tIns="0" rIns="0" bIns="0" rtlCol="0" anchor="ctr"/>
+          <a:lstStyle/>
+          <a:p>
+            <a:pPr indent="0" marL="0">
+              <a:lnSpc>
+                <a:spcPct val="115000"/>
+              </a:lnSpc>
+              <a:buNone/>
+            </a:pPr>
+            <a:r>
+              <a:rPr lang="en-US" sz="1100" dirty="0">
+                <a:solidFill>
+                  <a:srgbClr val="16242A"/>
+                </a:solidFill>
+                <a:latin typeface="Arial" pitchFamily="34" charset="0"/>
+                <a:ea typeface="Arial" pitchFamily="34" charset="-122"/>
+                <a:cs typeface="Arial" pitchFamily="34" charset="-120"/>
+              </a:rPr>
+              <a:t>всё вместе на 1 000 активных учеников: сервер, карты, домен</a:t>
+            </a:r>
+            <a:endParaRPr lang="en-US" sz="1100" dirty="0"/>
+          </a:p>
+        </p:txBody>
+      </p:sp>
+      <p:sp>
+        <p:nvSpPr>
+          <p:cNvPr id="13" name="Text 11"/>
+          <p:cNvSpPr txBox="1"/>
+          <p:nvPr/>
+        </p:nvSpPr>
+        <p:spPr>
+          <a:xfrm>
+            <a:off x="685800" y="3200400"/>
+            <a:ext cx="5394960" cy="292608"/>
+          </a:xfrm>
+          <a:prstGeom prst="rect">
+            <a:avLst/>
+          </a:prstGeom>
+          <a:noFill/>
+          <a:ln/>
+        </p:spPr>
+        <p:txBody>
+          <a:bodyPr wrap="square" lIns="0" tIns="0" rIns="0" bIns="0" rtlCol="0" anchor="ctr"/>
+          <a:lstStyle/>
+          <a:p>
+            <a:pPr indent="0" marL="0">
+              <a:buNone/>
+            </a:pPr>
+            <a:r>
+              <a:rPr lang="en-US" sz="1700" b="1" dirty="0">
+                <a:solidFill>
+                  <a:srgbClr val="16242A"/>
+                </a:solidFill>
+                <a:latin typeface="Cambria" pitchFamily="34" charset="0"/>
+                <a:ea typeface="Cambria" pitchFamily="34" charset="-122"/>
+                <a:cs typeface="Cambria" pitchFamily="34" charset="-120"/>
+              </a:rPr>
+              <a:t>Сколько нужно на старт</a:t>
+            </a:r>
+            <a:endParaRPr lang="en-US" sz="1700" dirty="0"/>
+          </a:p>
+        </p:txBody>
+      </p:sp>
+      <p:sp>
+        <p:nvSpPr>
+          <p:cNvPr id="14" name="Shape 12"/>
+          <p:cNvSpPr/>
+          <p:nvPr/>
+        </p:nvSpPr>
+        <p:spPr>
+          <a:xfrm>
+            <a:off x="749808" y="3621024"/>
+            <a:ext cx="146304" cy="146304"/>
+          </a:xfrm>
+          <a:prstGeom prst="ellipse">
+            <a:avLst/>
+          </a:prstGeom>
+          <a:solidFill>
+            <a:srgbClr val="E08A2E"/>
+          </a:solidFill>
+          <a:ln w="12700">
+            <a:solidFill>
+              <a:srgbClr val="E08A2E"/>
+            </a:solidFill>
+            <a:prstDash val="solid"/>
+          </a:ln>
+        </p:spPr>
+      </p:sp>
+      <p:sp>
+        <p:nvSpPr>
+          <p:cNvPr id="15" name="Text 13"/>
+          <p:cNvSpPr txBox="1"/>
+          <p:nvPr/>
+        </p:nvSpPr>
+        <p:spPr>
+          <a:xfrm>
+            <a:off x="1097280" y="3566160"/>
+            <a:ext cx="4937760" cy="502920"/>
+          </a:xfrm>
+          <a:prstGeom prst="rect">
+            <a:avLst/>
+          </a:prstGeom>
+          <a:noFill/>
+          <a:ln/>
+        </p:spPr>
+        <p:txBody>
+          <a:bodyPr wrap="square" lIns="0" tIns="0" rIns="0" bIns="0" rtlCol="0" anchor="ctr"/>
+          <a:lstStyle/>
+          <a:p>
+            <a:pPr indent="0" marL="0">
+              <a:lnSpc>
+                <a:spcPct val="115000"/>
+              </a:lnSpc>
+              <a:buNone/>
+            </a:pPr>
+            <a:r>
+              <a:rPr lang="en-US" sz="1250" b="1" dirty="0">
+                <a:solidFill>
+                  <a:srgbClr val="16242A"/>
+                </a:solidFill>
+                <a:latin typeface="Arial" pitchFamily="34" charset="0"/>
+                <a:ea typeface="Arial" pitchFamily="34" charset="-122"/>
+                <a:cs typeface="Arial" pitchFamily="34" charset="-120"/>
+              </a:rPr>
+              <a:t>$500 — до пилота в школе  </a:t>
+            </a:r>
+            <a:pPr indent="0" marL="0">
+              <a:lnSpc>
+                <a:spcPct val="115000"/>
+              </a:lnSpc>
+              <a:buNone/>
+            </a:pPr>
+            <a:r>
+              <a:rPr lang="en-US" sz="1150" dirty="0">
+                <a:solidFill>
+                  <a:srgbClr val="5A7078"/>
+                </a:solidFill>
+                <a:latin typeface="Arial" pitchFamily="34" charset="0"/>
+                <a:ea typeface="Arial" pitchFamily="34" charset="-122"/>
+                <a:cs typeface="Arial" pitchFamily="34" charset="-120"/>
+              </a:rPr>
+              <a:t>три месяца: сервисы, домен, юридические документы и согласия родителей. Команда работает за долю</a:t>
+            </a:r>
+            <a:endParaRPr lang="en-US" sz="1250" dirty="0"/>
+          </a:p>
+        </p:txBody>
+      </p:sp>
+      <p:sp>
+        <p:nvSpPr>
+          <p:cNvPr id="16" name="Shape 14"/>
+          <p:cNvSpPr/>
+          <p:nvPr/>
+        </p:nvSpPr>
+        <p:spPr>
+          <a:xfrm>
+            <a:off x="749808" y="4187952"/>
+            <a:ext cx="146304" cy="146304"/>
+          </a:xfrm>
+          <a:prstGeom prst="ellipse">
+            <a:avLst/>
+          </a:prstGeom>
+          <a:solidFill>
+            <a:srgbClr val="E08A2E"/>
+          </a:solidFill>
+          <a:ln w="12700">
+            <a:solidFill>
+              <a:srgbClr val="E08A2E"/>
+            </a:solidFill>
+            <a:prstDash val="solid"/>
+          </a:ln>
+        </p:spPr>
+      </p:sp>
+      <p:sp>
+        <p:nvSpPr>
+          <p:cNvPr id="17" name="Text 15"/>
+          <p:cNvSpPr txBox="1"/>
+          <p:nvPr/>
+        </p:nvSpPr>
+        <p:spPr>
+          <a:xfrm>
+            <a:off x="1097280" y="4133088"/>
+            <a:ext cx="4937760" cy="502920"/>
+          </a:xfrm>
+          <a:prstGeom prst="rect">
+            <a:avLst/>
+          </a:prstGeom>
+          <a:noFill/>
+          <a:ln/>
+        </p:spPr>
+        <p:txBody>
+          <a:bodyPr wrap="square" lIns="0" tIns="0" rIns="0" bIns="0" rtlCol="0" anchor="ctr"/>
+          <a:lstStyle/>
+          <a:p>
+            <a:pPr indent="0" marL="0">
+              <a:lnSpc>
+                <a:spcPct val="115000"/>
+              </a:lnSpc>
+              <a:buNone/>
+            </a:pPr>
+            <a:r>
+              <a:rPr lang="en-US" sz="1250" b="1" dirty="0">
+                <a:solidFill>
+                  <a:srgbClr val="16242A"/>
+                </a:solidFill>
+                <a:latin typeface="Arial" pitchFamily="34" charset="0"/>
+                <a:ea typeface="Arial" pitchFamily="34" charset="-122"/>
+                <a:cs typeface="Arial" pitchFamily="34" charset="-120"/>
+              </a:rPr>
+              <a:t>$9 000–15 000 — runway на полгода  </a:t>
+            </a:r>
+            <a:pPr indent="0" marL="0">
+              <a:lnSpc>
+                <a:spcPct val="115000"/>
+              </a:lnSpc>
+              <a:buNone/>
+            </a:pPr>
+            <a:r>
+              <a:rPr lang="en-US" sz="1150" dirty="0">
+                <a:solidFill>
+                  <a:srgbClr val="5A7078"/>
+                </a:solidFill>
+                <a:latin typeface="Arial" pitchFamily="34" charset="0"/>
+                <a:ea typeface="Arial" pitchFamily="34" charset="-122"/>
+                <a:cs typeface="Arial" pitchFamily="34" charset="-120"/>
+              </a:rPr>
+              <a:t>три человека, справочник на 200 профессий с требованиями вузов, пилоты в первых школах</a:t>
+            </a:r>
+            <a:endParaRPr lang="en-US" sz="1250" dirty="0"/>
+          </a:p>
+        </p:txBody>
+      </p:sp>
+      <p:sp>
+        <p:nvSpPr>
+          <p:cNvPr id="18" name="Text 16"/>
+          <p:cNvSpPr txBox="1"/>
+          <p:nvPr/>
+        </p:nvSpPr>
+        <p:spPr>
+          <a:xfrm>
+            <a:off x="6492240" y="3200400"/>
+            <a:ext cx="5029200" cy="292608"/>
+          </a:xfrm>
+          <a:prstGeom prst="rect">
+            <a:avLst/>
+          </a:prstGeom>
+          <a:noFill/>
+          <a:ln/>
+        </p:spPr>
+        <p:txBody>
+          <a:bodyPr wrap="square" lIns="0" tIns="0" rIns="0" bIns="0" rtlCol="0" anchor="ctr"/>
+          <a:lstStyle/>
+          <a:p>
+            <a:pPr indent="0" marL="0">
+              <a:buNone/>
+            </a:pPr>
+            <a:r>
+              <a:rPr lang="en-US" sz="1700" b="1" dirty="0">
+                <a:solidFill>
+                  <a:srgbClr val="16242A"/>
+                </a:solidFill>
+                <a:latin typeface="Cambria" pitchFamily="34" charset="0"/>
+                <a:ea typeface="Cambria" pitchFamily="34" charset="-122"/>
+                <a:cs typeface="Cambria" pitchFamily="34" charset="-120"/>
+              </a:rPr>
+              <a:t>Когда выходим в ноль</a:t>
+            </a:r>
+            <a:endParaRPr lang="en-US" sz="1700" dirty="0"/>
+          </a:p>
+        </p:txBody>
+      </p:sp>
+      <p:sp>
+        <p:nvSpPr>
+          <p:cNvPr id="19" name="Shape 17"/>
+          <p:cNvSpPr/>
+          <p:nvPr/>
+        </p:nvSpPr>
+        <p:spPr>
+          <a:xfrm>
+            <a:off x="6556248" y="3621024"/>
+            <a:ext cx="146304" cy="146304"/>
+          </a:xfrm>
+          <a:prstGeom prst="ellipse">
+            <a:avLst/>
+          </a:prstGeom>
+          <a:solidFill>
+            <a:srgbClr val="2E9E5B"/>
+          </a:solidFill>
+          <a:ln w="12700">
+            <a:solidFill>
+              <a:srgbClr val="2E9E5B"/>
+            </a:solidFill>
+            <a:prstDash val="solid"/>
+          </a:ln>
+        </p:spPr>
+      </p:sp>
+      <p:sp>
+        <p:nvSpPr>
+          <p:cNvPr id="20" name="Text 18"/>
+          <p:cNvSpPr txBox="1"/>
+          <p:nvPr/>
+        </p:nvSpPr>
+        <p:spPr>
+          <a:xfrm>
+            <a:off x="6903720" y="3566160"/>
+            <a:ext cx="4617720" cy="475488"/>
+          </a:xfrm>
+          <a:prstGeom prst="rect">
+            <a:avLst/>
+          </a:prstGeom>
+          <a:noFill/>
+          <a:ln/>
+        </p:spPr>
+        <p:txBody>
+          <a:bodyPr wrap="square" lIns="0" tIns="0" rIns="0" bIns="0" rtlCol="0" anchor="ctr"/>
+          <a:lstStyle/>
+          <a:p>
+            <a:pPr indent="0" marL="0">
+              <a:lnSpc>
+                <a:spcPct val="115000"/>
+              </a:lnSpc>
+              <a:buNone/>
+            </a:pPr>
+            <a:r>
+              <a:rPr lang="en-US" sz="1250" b="1" dirty="0">
+                <a:solidFill>
+                  <a:srgbClr val="16242A"/>
+                </a:solidFill>
+                <a:latin typeface="Arial" pitchFamily="34" charset="0"/>
+                <a:ea typeface="Arial" pitchFamily="34" charset="-122"/>
+                <a:cs typeface="Arial" pitchFamily="34" charset="-120"/>
+              </a:rPr>
+              <a:t>4 подписки  </a:t>
+            </a:r>
+            <a:pPr indent="0" marL="0">
+              <a:lnSpc>
+                <a:spcPct val="115000"/>
+              </a:lnSpc>
+              <a:buNone/>
+            </a:pPr>
+            <a:r>
+              <a:rPr lang="en-US" sz="1150" dirty="0">
+                <a:solidFill>
+                  <a:srgbClr val="5A7078"/>
+                </a:solidFill>
+                <a:latin typeface="Arial" pitchFamily="34" charset="0"/>
+                <a:ea typeface="Arial" pitchFamily="34" charset="-122"/>
+                <a:cs typeface="Arial" pitchFamily="34" charset="-120"/>
+              </a:rPr>
+              <a:t>покрывают все сервисы. Технически продукт окупает себя почти сразу</a:t>
+            </a:r>
+            <a:endParaRPr lang="en-US" sz="1250" dirty="0"/>
+          </a:p>
+        </p:txBody>
+      </p:sp>
+      <p:sp>
+        <p:nvSpPr>
+          <p:cNvPr id="21" name="Shape 19"/>
+          <p:cNvSpPr/>
+          <p:nvPr/>
+        </p:nvSpPr>
+        <p:spPr>
+          <a:xfrm>
+            <a:off x="6556248" y="4151376"/>
+            <a:ext cx="146304" cy="146304"/>
+          </a:xfrm>
+          <a:prstGeom prst="ellipse">
+            <a:avLst/>
+          </a:prstGeom>
+          <a:solidFill>
+            <a:srgbClr val="2E9E5B"/>
+          </a:solidFill>
+          <a:ln w="12700">
+            <a:solidFill>
+              <a:srgbClr val="2E9E5B"/>
+            </a:solidFill>
+            <a:prstDash val="solid"/>
+          </a:ln>
+        </p:spPr>
+      </p:sp>
+      <p:sp>
+        <p:nvSpPr>
+          <p:cNvPr id="22" name="Text 20"/>
+          <p:cNvSpPr txBox="1"/>
+          <p:nvPr/>
+        </p:nvSpPr>
+        <p:spPr>
+          <a:xfrm>
+            <a:off x="6903720" y="4096512"/>
+            <a:ext cx="4617720" cy="475488"/>
+          </a:xfrm>
+          <a:prstGeom prst="rect">
+            <a:avLst/>
+          </a:prstGeom>
+          <a:noFill/>
+          <a:ln/>
+        </p:spPr>
+        <p:txBody>
+          <a:bodyPr wrap="square" lIns="0" tIns="0" rIns="0" bIns="0" rtlCol="0" anchor="ctr"/>
+          <a:lstStyle/>
+          <a:p>
+            <a:pPr indent="0" marL="0">
+              <a:lnSpc>
+                <a:spcPct val="115000"/>
+              </a:lnSpc>
+              <a:buNone/>
+            </a:pPr>
+            <a:r>
+              <a:rPr lang="en-US" sz="1250" b="1" dirty="0">
+                <a:solidFill>
+                  <a:srgbClr val="16242A"/>
+                </a:solidFill>
+                <a:latin typeface="Arial" pitchFamily="34" charset="0"/>
+                <a:ea typeface="Arial" pitchFamily="34" charset="-122"/>
+                <a:cs typeface="Arial" pitchFamily="34" charset="-120"/>
+              </a:rPr>
+              <a:t>≈ $2 500 в месяц  </a:t>
+            </a:r>
+            <a:pPr indent="0" marL="0">
+              <a:lnSpc>
+                <a:spcPct val="115000"/>
+              </a:lnSpc>
+              <a:buNone/>
+            </a:pPr>
+            <a:r>
+              <a:rPr lang="en-US" sz="1150" dirty="0">
+                <a:solidFill>
+                  <a:srgbClr val="5A7078"/>
+                </a:solidFill>
+                <a:latin typeface="Arial" pitchFamily="34" charset="0"/>
+                <a:ea typeface="Arial" pitchFamily="34" charset="-122"/>
+                <a:cs typeface="Arial" pitchFamily="34" charset="-120"/>
+              </a:rPr>
+              <a:t>операционные расходы, когда команда из трёх человек на зарплате</a:t>
+            </a:r>
+            <a:endParaRPr lang="en-US" sz="1250" dirty="0"/>
+          </a:p>
+        </p:txBody>
+      </p:sp>
+      <p:sp>
+        <p:nvSpPr>
+          <p:cNvPr id="23" name="Shape 21"/>
+          <p:cNvSpPr/>
+          <p:nvPr/>
+        </p:nvSpPr>
+        <p:spPr>
+          <a:xfrm>
+            <a:off x="6556248" y="4681728"/>
+            <a:ext cx="146304" cy="146304"/>
+          </a:xfrm>
+          <a:prstGeom prst="ellipse">
+            <a:avLst/>
+          </a:prstGeom>
+          <a:solidFill>
+            <a:srgbClr val="2E9E5B"/>
+          </a:solidFill>
+          <a:ln w="12700">
+            <a:solidFill>
+              <a:srgbClr val="2E9E5B"/>
+            </a:solidFill>
+            <a:prstDash val="solid"/>
+          </a:ln>
+        </p:spPr>
+      </p:sp>
+      <p:sp>
+        <p:nvSpPr>
+          <p:cNvPr id="24" name="Text 22"/>
+          <p:cNvSpPr txBox="1"/>
+          <p:nvPr/>
+        </p:nvSpPr>
+        <p:spPr>
+          <a:xfrm>
+            <a:off x="6903720" y="4626864"/>
+            <a:ext cx="4617720" cy="475488"/>
+          </a:xfrm>
+          <a:prstGeom prst="rect">
+            <a:avLst/>
+          </a:prstGeom>
+          <a:noFill/>
+          <a:ln/>
+        </p:spPr>
+        <p:txBody>
+          <a:bodyPr wrap="square" lIns="0" tIns="0" rIns="0" bIns="0" rtlCol="0" anchor="ctr"/>
+          <a:lstStyle/>
+          <a:p>
+            <a:pPr indent="0" marL="0">
+              <a:lnSpc>
+                <a:spcPct val="115000"/>
+              </a:lnSpc>
+              <a:buNone/>
+            </a:pPr>
+            <a:r>
+              <a:rPr lang="en-US" sz="1250" b="1" dirty="0">
+                <a:solidFill>
+                  <a:srgbClr val="16242A"/>
+                </a:solidFill>
+                <a:latin typeface="Arial" pitchFamily="34" charset="0"/>
+                <a:ea typeface="Arial" pitchFamily="34" charset="-122"/>
+                <a:cs typeface="Arial" pitchFamily="34" charset="-120"/>
+              </a:rPr>
+              <a:t>417 подписок или 120 классов  </a:t>
+            </a:r>
+            <a:pPr indent="0" marL="0">
+              <a:lnSpc>
+                <a:spcPct val="115000"/>
+              </a:lnSpc>
+              <a:buNone/>
+            </a:pPr>
+            <a:r>
+              <a:rPr lang="en-US" sz="1150" dirty="0">
+                <a:solidFill>
+                  <a:srgbClr val="5A7078"/>
+                </a:solidFill>
+                <a:latin typeface="Arial" pitchFamily="34" charset="0"/>
+                <a:ea typeface="Arial" pitchFamily="34" charset="-122"/>
+                <a:cs typeface="Arial" pitchFamily="34" charset="-120"/>
+              </a:rPr>
+              <a:t>это и есть точка ноль. Смешанный сценарий: 30 школ плюс 105 родителей</a:t>
+            </a:r>
+            <a:endParaRPr lang="en-US" sz="1250" dirty="0"/>
+          </a:p>
+        </p:txBody>
+      </p:sp>
+      <p:sp>
+        <p:nvSpPr>
+          <p:cNvPr id="25" name="Shape 23"/>
+          <p:cNvSpPr/>
+          <p:nvPr/>
+        </p:nvSpPr>
+        <p:spPr>
+          <a:xfrm>
+            <a:off x="685800" y="5257800"/>
+            <a:ext cx="10835640" cy="594360"/>
+          </a:xfrm>
+          <a:prstGeom prst="roundRect">
+            <a:avLst>
+              <a:gd name="adj" fmla="val 12308"/>
+            </a:avLst>
+          </a:prstGeom>
+          <a:solidFill>
+            <a:srgbClr val="0B5D6E"/>
+          </a:solidFill>
+          <a:ln w="12700">
+            <a:solidFill>
+              <a:srgbClr val="0B5D6E"/>
+            </a:solidFill>
+            <a:prstDash val="solid"/>
+          </a:ln>
+        </p:spPr>
+      </p:sp>
+      <p:sp>
+        <p:nvSpPr>
+          <p:cNvPr id="26" name="Text 24"/>
+          <p:cNvSpPr txBox="1"/>
+          <p:nvPr/>
+        </p:nvSpPr>
+        <p:spPr>
+          <a:xfrm>
+            <a:off x="1005840" y="5376672"/>
+            <a:ext cx="10195560" cy="365760"/>
+          </a:xfrm>
+          <a:prstGeom prst="rect">
+            <a:avLst/>
+          </a:prstGeom>
+          <a:noFill/>
+          <a:ln/>
+        </p:spPr>
+        <p:txBody>
+          <a:bodyPr wrap="square" lIns="0" tIns="0" rIns="0" bIns="0" rtlCol="0" anchor="ctr"/>
+          <a:lstStyle/>
+          <a:p>
+            <a:pPr indent="0" marL="0">
+              <a:buNone/>
+            </a:pPr>
+            <a:r>
+              <a:rPr lang="en-US" sz="1300" b="1" dirty="0">
+                <a:solidFill>
+                  <a:srgbClr val="FFFFFF"/>
+                </a:solidFill>
+                <a:latin typeface="Arial" pitchFamily="34" charset="0"/>
+                <a:ea typeface="Arial" pitchFamily="34" charset="-122"/>
+                <a:cs typeface="Arial" pitchFamily="34" charset="-120"/>
+              </a:rPr>
+              <a:t>Карта строится один раз, а все события пересчитывает код, а не модель. Поэтому себестоимость почти не растёт с использованием — при подписке в $6 это разница между продуктом и чат-ботом.</a:t>
+            </a:r>
+            <a:endParaRPr lang="en-US" sz="1300" dirty="0"/>
+          </a:p>
+        </p:txBody>
+      </p:sp>
+      <p:sp>
+        <p:nvSpPr>
+          <p:cNvPr id="27" name="Text 25"/>
+          <p:cNvSpPr txBox="1"/>
+          <p:nvPr/>
+        </p:nvSpPr>
+        <p:spPr>
+          <a:xfrm>
+            <a:off x="685800" y="5989320"/>
+            <a:ext cx="10835640" cy="411480"/>
+          </a:xfrm>
+          <a:prstGeom prst="rect">
+            <a:avLst/>
+          </a:prstGeom>
+          <a:noFill/>
+          <a:ln/>
+        </p:spPr>
+        <p:txBody>
+          <a:bodyPr wrap="square" lIns="0" tIns="0" rIns="0" bIns="0" rtlCol="0" anchor="ctr"/>
+          <a:lstStyle/>
+          <a:p>
+            <a:pPr indent="0" marL="0">
+              <a:lnSpc>
+                <a:spcPct val="110000"/>
+              </a:lnSpc>
+              <a:buNone/>
+            </a:pPr>
+            <a:r>
+              <a:rPr lang="en-US" sz="950" dirty="0">
+                <a:solidFill>
+                  <a:srgbClr val="5A7078"/>
+                </a:solidFill>
+                <a:latin typeface="Arial" pitchFamily="34" charset="0"/>
+                <a:ea typeface="Arial" pitchFamily="34" charset="-122"/>
+                <a:cs typeface="Arial" pitchFamily="34" charset="-120"/>
+              </a:rPr>
+              <a:t>Тарифы на сентябрь 2026: Gemini 3.1 Flash Lite — $0,25 за млн входных и $1,50 за млн выходных токенов; Cloudflare Workers Paid — $5 в месяц за 10 млн запросов. Расход токенов измерен на реальном запросе. Зарплаты и объём работ до пилота — наша оценка, а не расчёт по тарифу.</a:t>
+            </a:r>
+            <a:endParaRPr lang="en-US" sz="950" dirty="0"/>
+          </a:p>
+        </p:txBody>
+      </p:sp>
+    </p:spTree>
+  </p:cSld>
+  <p:clrMapOvr>
+    <a:masterClrMapping/>
+  </p:clrMapOvr>
+</p:sld>
+</file>
+
+<file path=ppt/slides/slide11.xml><?xml version="1.0" encoding="utf-8"?>
+<p:sld xmlns:a="http://schemas.openxmlformats.org/drawingml/2006/main" xmlns:r="http://schemas.openxmlformats.org/officeDocument/2006/relationships" xmlns:p="http://schemas.openxmlformats.org/presentationml/2006/main">
+  <p:cSld name="Slide 11">
     <p:bg>
       <p:bgPr>
         <a:solidFill>
@@ -3082,9 +4204,9 @@
 </p:sld>
 </file>
 
-<file path=ppt/slides/slide11.xml><?xml version="1.0" encoding="utf-8"?>
+<file path=ppt/slides/slide12.xml><?xml version="1.0" encoding="utf-8"?>
 <p:sld xmlns:a="http://schemas.openxmlformats.org/drawingml/2006/main" xmlns:r="http://schemas.openxmlformats.org/officeDocument/2006/relationships" xmlns:p="http://schemas.openxmlformats.org/presentationml/2006/main">
-  <p:cSld name="Slide 11">
+  <p:cSld name="Slide 12">
     <p:bg>
       <p:bgPr>
         <a:solidFill>

--- a/deck/Career-Navigator.pptx
+++ b/deck/Career-Navigator.pptx
@@ -601,7 +601,7 @@
           <a:p>
             <a:r>
               <a:rPr lang="en-US" dirty="0"/>
-              <a:t>Главное здесь: одна карта стоит треть цента, потому что модель вызывается один раз, а всю дальнейшую жизнь карты пересчитывает код. Четырёх платящих родителей достаточно, чтобы покрыть все сервисы. Операционный ноль с командой — около двух с половиной тысяч долларов в месяц, это 417 подписок или 30 школ. И мы честно разделяем: тарифы посчитаны, зарплаты оценены.</a:t>
+              <a:t>Главное здесь: одна карта стоит треть цента, потому что модель вызывается один раз, а всю дальнейшую жизнь карты пересчитывает код. Двух платящих родителей достаточно, чтобы покрыть все сервисы на тысячу учеников. Операционный ноль с командой — около двух с половиной тысяч долларов в месяц, это 417 подписок или 30 школ. И мы честно разделяем: тарифы посчитаны, зарплаты оценены.</a:t>
             </a:r>
             <a:endParaRPr lang="en-US" dirty="0"/>
           </a:p>
@@ -2457,7 +2457,7 @@
                 <a:ea typeface="Cambria" pitchFamily="34" charset="-122"/>
                 <a:cs typeface="Cambria" pitchFamily="34" charset="-120"/>
               </a:rPr>
-              <a:t>$0,003</a:t>
+              <a:t>$0,0034</a:t>
             </a:r>
             <a:endParaRPr lang="en-US" sz="2500" dirty="0"/>
           </a:p>
@@ -2499,7 +2499,7 @@
                 <a:ea typeface="Arial" pitchFamily="34" charset="-122"/>
                 <a:cs typeface="Arial" pitchFamily="34" charset="-120"/>
               </a:rPr>
-              <a:t>стоит одна карта от AI: 3 300 токенов на входе, 1 300 на выходе по тарифу Gemini 3.1 Flash Lite</a:t>
+              <a:t>стоит одна карта: 1 900 токенов на входе и 2 000 на выходе — счётчики самого Google, а не наша оценка</a:t>
             </a:r>
             <a:endParaRPr lang="en-US" sz="1100" dirty="0"/>
           </a:p>
@@ -2673,7 +2673,7 @@
                 <a:ea typeface="Cambria" pitchFamily="34" charset="-122"/>
                 <a:cs typeface="Cambria" pitchFamily="34" charset="-120"/>
               </a:rPr>
-              <a:t>≈ $20 / мес</a:t>
+              <a:t>≈ $7 / мес</a:t>
             </a:r>
             <a:endParaRPr lang="en-US" sz="2500" dirty="0"/>
           </a:p>
@@ -2715,7 +2715,7 @@
                 <a:ea typeface="Arial" pitchFamily="34" charset="-122"/>
                 <a:cs typeface="Arial" pitchFamily="34" charset="-120"/>
               </a:rPr>
-              <a:t>всё вместе на 1 000 активных учеников: сервер, карты, домен</a:t>
+              <a:t>всё вместе на 1 000 активных учеников: сервер, три тысячи карт в год и домен</a:t>
             </a:r>
             <a:endParaRPr lang="en-US" sz="1100" dirty="0"/>
           </a:p>
@@ -3028,7 +3028,7 @@
                 <a:ea typeface="Arial" pitchFamily="34" charset="-122"/>
                 <a:cs typeface="Arial" pitchFamily="34" charset="-120"/>
               </a:rPr>
-              <a:t>4 подписки  </a:t>
+              <a:t>2 подписки  </a:t>
             </a:r>
             <a:pPr indent="0" marL="0">
               <a:lnSpc>
@@ -3045,7 +3045,7 @@
                 <a:ea typeface="Arial" pitchFamily="34" charset="-122"/>
                 <a:cs typeface="Arial" pitchFamily="34" charset="-120"/>
               </a:rPr>
-              <a:t>покрывают все сервисы. Технически продукт окупает себя почти сразу</a:t>
+              <a:t>покрывают все сервисы на тысячу учеников. Технически продукт окупает себя почти сразу</a:t>
             </a:r>
             <a:endParaRPr lang="en-US" sz="1250" dirty="0"/>
           </a:p>
@@ -3321,7 +3321,7 @@
                 <a:ea typeface="Arial" pitchFamily="34" charset="-122"/>
                 <a:cs typeface="Arial" pitchFamily="34" charset="-120"/>
               </a:rPr>
-              <a:t>Тарифы на сентябрь 2026: Gemini 3.1 Flash Lite — $0,25 за млн входных и $1,50 за млн выходных токенов; Cloudflare Workers Paid — $5 в месяц за 10 млн запросов. Расход токенов измерен на реальном запросе. Зарплаты и объём работ до пилота — наша оценка, а не расчёт по тарифу.</a:t>
+              <a:t>Тарифы на сентябрь 2026: Gemini 3.1 Flash Lite — $0,25 за млн входных и $1,50 за млн выходных токенов; Cloudflare Workers Paid — $5 в месяц за 10 млн запросов. Расход токенов приходит от Google в каждом ответе и виден в логах — среднее по трём прогонам подряд. Зарплаты и объём работ до пилота — наша оценка, а не расчёт по тарифу.</a:t>
             </a:r>
             <a:endParaRPr lang="en-US" sz="950" dirty="0"/>
           </a:p>
